--- a/01-Project-management/presentation/KnowledgeDistillation.pptx
+++ b/01-Project-management/presentation/KnowledgeDistillation.pptx
@@ -15,18 +15,18 @@
     <p:sldId id="335" r:id="rId6"/>
     <p:sldId id="336" r:id="rId7"/>
     <p:sldId id="339" r:id="rId8"/>
-    <p:sldId id="328" r:id="rId9"/>
+    <p:sldId id="329" r:id="rId9"/>
     <p:sldId id="337" r:id="rId10"/>
-    <p:sldId id="325" r:id="rId11"/>
-    <p:sldId id="338" r:id="rId12"/>
-    <p:sldId id="340" r:id="rId13"/>
-    <p:sldId id="341" r:id="rId14"/>
-    <p:sldId id="329" r:id="rId15"/>
-    <p:sldId id="330" r:id="rId16"/>
-    <p:sldId id="342" r:id="rId17"/>
-    <p:sldId id="324" r:id="rId18"/>
-    <p:sldId id="327" r:id="rId19"/>
-    <p:sldId id="343" r:id="rId20"/>
+    <p:sldId id="338" r:id="rId11"/>
+    <p:sldId id="340" r:id="rId12"/>
+    <p:sldId id="341" r:id="rId13"/>
+    <p:sldId id="325" r:id="rId14"/>
+    <p:sldId id="342" r:id="rId15"/>
+    <p:sldId id="324" r:id="rId16"/>
+    <p:sldId id="327" r:id="rId17"/>
+    <p:sldId id="330" r:id="rId18"/>
+    <p:sldId id="343" r:id="rId19"/>
+    <p:sldId id="344" r:id="rId20"/>
     <p:sldId id="321" r:id="rId21"/>
   </p:sldIdLst>
   <p:sldSz cx="12192000" cy="6858000"/>
@@ -8230,6 +8230,44 @@
           </a:extLst>
         </p:spPr>
       </p:pic>
+      <p:sp>
+        <p:nvSpPr>
+          <p:cNvPr id="12" name="TextBox 11">
+            <a:extLst>
+              <a:ext uri="{FF2B5EF4-FFF2-40B4-BE49-F238E27FC236}">
+                <a16:creationId xmlns:a16="http://schemas.microsoft.com/office/drawing/2014/main" id="{2F2DC6B0-70D3-520A-2B97-E0488135ADF4}"/>
+              </a:ext>
+            </a:extLst>
+          </p:cNvPr>
+          <p:cNvSpPr txBox="1"/>
+          <p:nvPr/>
+        </p:nvSpPr>
+        <p:spPr>
+          <a:xfrm>
+            <a:off x="3755898" y="5707031"/>
+            <a:ext cx="6121908" cy="261610"/>
+          </a:xfrm>
+          <a:prstGeom prst="rect">
+            <a:avLst/>
+          </a:prstGeom>
+          <a:noFill/>
+        </p:spPr>
+        <p:txBody>
+          <a:bodyPr wrap="square">
+            <a:spAutoFit/>
+          </a:bodyPr>
+          <a:lstStyle/>
+          <a:p>
+            <a:r>
+              <a:rPr lang="en-US" sz="1100" dirty="0">
+                <a:hlinkClick r:id="rId4"/>
+              </a:rPr>
+              <a:t>https://github.com/RajeshRamadas/yolov8-model-optimization/tree/main</a:t>
+            </a:r>
+            <a:endParaRPr lang="en-US" sz="1100" dirty="0"/>
+          </a:p>
+        </p:txBody>
+      </p:sp>
     </p:spTree>
     <p:extLst>
       <p:ext uri="{BB962C8B-B14F-4D97-AF65-F5344CB8AC3E}">
@@ -8262,10 +8300,10 @@
       </p:grpSpPr>
       <p:sp>
         <p:nvSpPr>
-          <p:cNvPr id="44" name="Rectangle 43">
-            <a:extLst>
-              <a:ext uri="{FF2B5EF4-FFF2-40B4-BE49-F238E27FC236}">
-                <a16:creationId xmlns:a16="http://schemas.microsoft.com/office/drawing/2014/main" id="{5E9A70F6-1482-9247-F5D3-3B797B755EFE}"/>
+          <p:cNvPr id="18" name="Rectangle 17">
+            <a:extLst>
+              <a:ext uri="{FF2B5EF4-FFF2-40B4-BE49-F238E27FC236}">
+                <a16:creationId xmlns:a16="http://schemas.microsoft.com/office/drawing/2014/main" id="{21CBE364-C2CF-AA17-A0BC-6239F6075473}"/>
               </a:ext>
             </a:extLst>
           </p:cNvPr>
@@ -8274,8 +8312,8 @@
         </p:nvSpPr>
         <p:spPr>
           <a:xfrm>
-            <a:off x="7019626" y="2385476"/>
-            <a:ext cx="4462290" cy="1656994"/>
+            <a:off x="5280660" y="1998711"/>
+            <a:ext cx="5925312" cy="2666109"/>
           </a:xfrm>
           <a:prstGeom prst="rect">
             <a:avLst/>
@@ -8301,17 +8339,540 @@
           <a:bodyPr rtlCol="0" anchor="ctr"/>
           <a:lstStyle/>
           <a:p>
+            <a:r>
+              <a:rPr lang="en-US" sz="1000" b="1" dirty="0">
+                <a:solidFill>
+                  <a:schemeClr val="bg1"/>
+                </a:solidFill>
+                <a:highlight>
+                  <a:srgbClr val="000000"/>
+                </a:highlight>
+                <a:latin typeface="Courier New" panose="02070309020205020404" pitchFamily="49" charset="0"/>
+              </a:rPr>
+              <a:t># Teacher distribution (rich knowledge) </a:t>
+            </a:r>
+          </a:p>
+          <a:p>
+            <a:r>
+              <a:rPr lang="en-US" sz="1000" b="1" dirty="0">
+                <a:solidFill>
+                  <a:schemeClr val="bg1"/>
+                </a:solidFill>
+                <a:highlight>
+                  <a:srgbClr val="000000"/>
+                </a:highlight>
+                <a:latin typeface="Courier New" panose="02070309020205020404" pitchFamily="49" charset="0"/>
+              </a:rPr>
+              <a:t>Teacher = [car=0.6, truck=0.3, bus=0.1] # "Mostly car, some truck features" </a:t>
+            </a:r>
+          </a:p>
+          <a:p>
+            <a:endParaRPr lang="en-US" sz="1000" b="1" dirty="0">
+              <a:solidFill>
+                <a:schemeClr val="bg1"/>
+              </a:solidFill>
+              <a:highlight>
+                <a:srgbClr val="000000"/>
+              </a:highlight>
+              <a:latin typeface="Courier New" panose="02070309020205020404" pitchFamily="49" charset="0"/>
+            </a:endParaRPr>
+          </a:p>
+          <a:p>
+            <a:r>
+              <a:rPr lang="en-US" sz="1000" b="1" dirty="0">
+                <a:solidFill>
+                  <a:schemeClr val="bg1"/>
+                </a:solidFill>
+                <a:highlight>
+                  <a:srgbClr val="000000"/>
+                </a:highlight>
+                <a:latin typeface="Courier New" panose="02070309020205020404" pitchFamily="49" charset="0"/>
+              </a:rPr>
+              <a:t># Student distribution (learning) </a:t>
+            </a:r>
+          </a:p>
+          <a:p>
+            <a:r>
+              <a:rPr lang="en-US" sz="1000" b="1" dirty="0">
+                <a:solidFill>
+                  <a:schemeClr val="bg1"/>
+                </a:solidFill>
+                <a:highlight>
+                  <a:srgbClr val="000000"/>
+                </a:highlight>
+                <a:latin typeface="Courier New" panose="02070309020205020404" pitchFamily="49" charset="0"/>
+              </a:rPr>
+              <a:t>Student = [car=0.7, truck=0.2, bus=0.1] </a:t>
+            </a:r>
+          </a:p>
+          <a:p>
+            <a:endParaRPr lang="en-US" sz="1000" b="1" dirty="0">
+              <a:solidFill>
+                <a:schemeClr val="bg1"/>
+              </a:solidFill>
+              <a:highlight>
+                <a:srgbClr val="000000"/>
+              </a:highlight>
+              <a:latin typeface="Courier New" panose="02070309020205020404" pitchFamily="49" charset="0"/>
+            </a:endParaRPr>
+          </a:p>
+          <a:p>
+            <a:r>
+              <a:rPr lang="en-US" sz="1000" b="1" dirty="0">
+                <a:solidFill>
+                  <a:schemeClr val="bg1"/>
+                </a:solidFill>
+                <a:highlight>
+                  <a:srgbClr val="000000"/>
+                </a:highlight>
+                <a:latin typeface="Courier New" panose="02070309020205020404" pitchFamily="49" charset="0"/>
+              </a:rPr>
+              <a:t># "Definitely car" </a:t>
+            </a:r>
+          </a:p>
+          <a:p>
+            <a:r>
+              <a:rPr lang="en-US" sz="1000" b="1" dirty="0">
+                <a:solidFill>
+                  <a:schemeClr val="bg1"/>
+                </a:solidFill>
+                <a:highlight>
+                  <a:srgbClr val="000000"/>
+                </a:highlight>
+                <a:latin typeface="Courier New" panose="02070309020205020404" pitchFamily="49" charset="0"/>
+              </a:rPr>
+              <a:t># KL divergence measures how well student matches teacher's wisdom </a:t>
+            </a:r>
+          </a:p>
+          <a:p>
+            <a:r>
+              <a:rPr lang="en-US" sz="1000" b="1" dirty="0" err="1">
+                <a:solidFill>
+                  <a:schemeClr val="bg1"/>
+                </a:solidFill>
+                <a:highlight>
+                  <a:srgbClr val="000000"/>
+                </a:highlight>
+                <a:latin typeface="Courier New" panose="02070309020205020404" pitchFamily="49" charset="0"/>
+              </a:rPr>
+              <a:t>KL_loss</a:t>
+            </a:r>
+            <a:r>
+              <a:rPr lang="en-US" sz="1000" b="1" dirty="0">
+                <a:solidFill>
+                  <a:schemeClr val="bg1"/>
+                </a:solidFill>
+                <a:highlight>
+                  <a:srgbClr val="000000"/>
+                </a:highlight>
+                <a:latin typeface="Courier New" panose="02070309020205020404" pitchFamily="49" charset="0"/>
+              </a:rPr>
+              <a:t> = KL(Teacher || Student)</a:t>
+            </a:r>
+          </a:p>
+          <a:p>
             <a:pPr algn="ctr"/>
-            <a:endParaRPr lang="en-US"/>
-          </a:p>
-        </p:txBody>
-      </p:sp>
-      <p:sp>
-        <p:nvSpPr>
-          <p:cNvPr id="33" name="Rectangle 32">
-            <a:extLst>
-              <a:ext uri="{FF2B5EF4-FFF2-40B4-BE49-F238E27FC236}">
-                <a16:creationId xmlns:a16="http://schemas.microsoft.com/office/drawing/2014/main" id="{F4AF5AB6-DECD-602C-827C-E6873DB45E8C}"/>
+            <a:endParaRPr lang="en-US" sz="1000" b="1" dirty="0">
+              <a:solidFill>
+                <a:schemeClr val="bg1"/>
+              </a:solidFill>
+              <a:highlight>
+                <a:srgbClr val="000000"/>
+              </a:highlight>
+              <a:latin typeface="Courier New" panose="02070309020205020404" pitchFamily="49" charset="0"/>
+            </a:endParaRPr>
+          </a:p>
+          <a:p>
+            <a:r>
+              <a:rPr lang="en-US" sz="1000" b="1" dirty="0">
+                <a:solidFill>
+                  <a:schemeClr val="bg1"/>
+                </a:solidFill>
+                <a:highlight>
+                  <a:srgbClr val="000000"/>
+                </a:highlight>
+                <a:latin typeface="Courier New" panose="02070309020205020404" pitchFamily="49" charset="0"/>
+              </a:rPr>
+              <a:t># Perfect knowledge transfer: KL(Teacher || Student) = 0 </a:t>
+            </a:r>
+          </a:p>
+          <a:p>
+            <a:r>
+              <a:rPr lang="en-US" sz="1000" b="1" dirty="0">
+                <a:solidFill>
+                  <a:schemeClr val="bg1"/>
+                </a:solidFill>
+                <a:highlight>
+                  <a:srgbClr val="000000"/>
+                </a:highlight>
+                <a:latin typeface="Courier New" panose="02070309020205020404" pitchFamily="49" charset="0"/>
+              </a:rPr>
+              <a:t># Student exactly matches teacher </a:t>
+            </a:r>
+          </a:p>
+          <a:p>
+            <a:r>
+              <a:rPr lang="en-US" sz="1000" b="1" dirty="0">
+                <a:solidFill>
+                  <a:schemeClr val="bg1"/>
+                </a:solidFill>
+                <a:highlight>
+                  <a:srgbClr val="000000"/>
+                </a:highlight>
+                <a:latin typeface="Courier New" panose="02070309020205020404" pitchFamily="49" charset="0"/>
+              </a:rPr>
+              <a:t># Poor knowledge transfer: KL(Teacher || Student) = high value </a:t>
+            </a:r>
+          </a:p>
+          <a:p>
+            <a:r>
+              <a:rPr lang="en-US" sz="1000" b="1" dirty="0">
+                <a:solidFill>
+                  <a:schemeClr val="bg1"/>
+                </a:solidFill>
+                <a:highlight>
+                  <a:srgbClr val="000000"/>
+                </a:highlight>
+                <a:latin typeface="Courier New" panose="02070309020205020404" pitchFamily="49" charset="0"/>
+              </a:rPr>
+              <a:t># Student very different from teacher</a:t>
+            </a:r>
+          </a:p>
+        </p:txBody>
+      </p:sp>
+      <p:sp>
+        <p:nvSpPr>
+          <p:cNvPr id="4" name="Footer Placeholder 3">
+            <a:extLst>
+              <a:ext uri="{FF2B5EF4-FFF2-40B4-BE49-F238E27FC236}">
+                <a16:creationId xmlns:a16="http://schemas.microsoft.com/office/drawing/2014/main" id="{B8027B5C-B1A1-0376-4174-FFF61C554492}"/>
+              </a:ext>
+            </a:extLst>
+          </p:cNvPr>
+          <p:cNvSpPr>
+            <a:spLocks noGrp="1"/>
+          </p:cNvSpPr>
+          <p:nvPr>
+            <p:ph type="ftr" sz="quarter" idx="11"/>
+          </p:nvPr>
+        </p:nvSpPr>
+        <p:spPr>
+          <a:xfrm>
+            <a:off x="1028700" y="6356350"/>
+            <a:ext cx="6210300" cy="365125"/>
+          </a:xfrm>
+        </p:spPr>
+        <p:txBody>
+          <a:bodyPr>
+            <a:normAutofit/>
+          </a:bodyPr>
+          <a:lstStyle/>
+          <a:p>
+            <a:pPr algn="r">
+              <a:lnSpc>
+                <a:spcPct val="90000"/>
+              </a:lnSpc>
+              <a:spcAft>
+                <a:spcPts val="504"/>
+              </a:spcAft>
+            </a:pPr>
+            <a:r>
+              <a:rPr lang="en-US" sz="900" dirty="0">
+                <a:solidFill>
+                  <a:schemeClr val="tx1">
+                    <a:alpha val="80000"/>
+                  </a:schemeClr>
+                </a:solidFill>
+              </a:rPr>
+              <a:t>International University Of Applied Sciences</a:t>
+            </a:r>
+          </a:p>
+        </p:txBody>
+      </p:sp>
+      <p:sp>
+        <p:nvSpPr>
+          <p:cNvPr id="3" name="Date Placeholder 2">
+            <a:extLst>
+              <a:ext uri="{FF2B5EF4-FFF2-40B4-BE49-F238E27FC236}">
+                <a16:creationId xmlns:a16="http://schemas.microsoft.com/office/drawing/2014/main" id="{8B0DD3C9-E5D2-AE60-3AFE-8A43297A9FBC}"/>
+              </a:ext>
+            </a:extLst>
+          </p:cNvPr>
+          <p:cNvSpPr>
+            <a:spLocks noGrp="1"/>
+          </p:cNvSpPr>
+          <p:nvPr>
+            <p:ph type="dt" sz="half" idx="10"/>
+          </p:nvPr>
+        </p:nvSpPr>
+        <p:spPr>
+          <a:xfrm>
+            <a:off x="292608" y="6356349"/>
+            <a:ext cx="3085338" cy="365125"/>
+          </a:xfrm>
+        </p:spPr>
+        <p:txBody>
+          <a:bodyPr>
+            <a:normAutofit/>
+          </a:bodyPr>
+          <a:lstStyle/>
+          <a:p>
+            <a:pPr algn="r">
+              <a:lnSpc>
+                <a:spcPct val="90000"/>
+              </a:lnSpc>
+              <a:spcAft>
+                <a:spcPts val="504"/>
+              </a:spcAft>
+            </a:pPr>
+            <a:r>
+              <a:rPr lang="en-US" sz="900" dirty="0">
+                <a:solidFill>
+                  <a:schemeClr val="tx1">
+                    <a:alpha val="80000"/>
+                  </a:schemeClr>
+                </a:solidFill>
+              </a:rPr>
+              <a:t>Knowledge Distillation &amp; Neural Architecture Search</a:t>
+            </a:r>
+          </a:p>
+        </p:txBody>
+      </p:sp>
+      <p:sp>
+        <p:nvSpPr>
+          <p:cNvPr id="5" name="Slide Number Placeholder 4">
+            <a:extLst>
+              <a:ext uri="{FF2B5EF4-FFF2-40B4-BE49-F238E27FC236}">
+                <a16:creationId xmlns:a16="http://schemas.microsoft.com/office/drawing/2014/main" id="{80A790D5-177D-B6A2-0E90-81EF4FE37C9F}"/>
+              </a:ext>
+            </a:extLst>
+          </p:cNvPr>
+          <p:cNvSpPr>
+            <a:spLocks noGrp="1"/>
+          </p:cNvSpPr>
+          <p:nvPr>
+            <p:ph type="sldNum" sz="quarter" idx="12"/>
+          </p:nvPr>
+        </p:nvSpPr>
+        <p:spPr>
+          <a:xfrm>
+            <a:off x="11034184" y="6356350"/>
+            <a:ext cx="514349" cy="365125"/>
+          </a:xfrm>
+        </p:spPr>
+        <p:txBody>
+          <a:bodyPr>
+            <a:normAutofit/>
+          </a:bodyPr>
+          <a:lstStyle/>
+          <a:p>
+            <a:pPr>
+              <a:spcAft>
+                <a:spcPts val="600"/>
+              </a:spcAft>
+            </a:pPr>
+            <a:fld id="{C98AED0B-3B00-448B-836B-316F7AA19B4B}" type="slidenum">
+              <a:rPr lang="en-US">
+                <a:solidFill>
+                  <a:schemeClr val="tx1">
+                    <a:alpha val="80000"/>
+                  </a:schemeClr>
+                </a:solidFill>
+              </a:rPr>
+              <a:pPr>
+                <a:spcAft>
+                  <a:spcPts val="600"/>
+                </a:spcAft>
+              </a:pPr>
+              <a:t>10</a:t>
+            </a:fld>
+            <a:endParaRPr lang="en-US">
+              <a:solidFill>
+                <a:schemeClr val="tx1">
+                  <a:alpha val="80000"/>
+                </a:schemeClr>
+              </a:solidFill>
+            </a:endParaRPr>
+          </a:p>
+        </p:txBody>
+      </p:sp>
+      <p:sp>
+        <p:nvSpPr>
+          <p:cNvPr id="8" name="Title 1">
+            <a:extLst>
+              <a:ext uri="{FF2B5EF4-FFF2-40B4-BE49-F238E27FC236}">
+                <a16:creationId xmlns:a16="http://schemas.microsoft.com/office/drawing/2014/main" id="{58FF4C60-14F0-104E-A6FA-3FCA6169A054}"/>
+              </a:ext>
+            </a:extLst>
+          </p:cNvPr>
+          <p:cNvSpPr txBox="1">
+            <a:spLocks/>
+          </p:cNvSpPr>
+          <p:nvPr/>
+        </p:nvSpPr>
+        <p:spPr>
+          <a:xfrm>
+            <a:off x="838200" y="365126"/>
+            <a:ext cx="10515600" cy="638922"/>
+          </a:xfrm>
+          <a:prstGeom prst="rect">
+            <a:avLst/>
+          </a:prstGeom>
+        </p:spPr>
+        <p:txBody>
+          <a:bodyPr vert="horz" lIns="91440" tIns="45720" rIns="91440" bIns="45720" rtlCol="0" anchor="ctr">
+            <a:normAutofit fontScale="97500"/>
+          </a:bodyPr>
+          <a:lstStyle>
+            <a:lvl1pPr algn="l" defTabSz="914400" rtl="0" eaLnBrk="1" latinLnBrk="0" hangingPunct="1">
+              <a:lnSpc>
+                <a:spcPct val="90000"/>
+              </a:lnSpc>
+              <a:spcBef>
+                <a:spcPct val="0"/>
+              </a:spcBef>
+              <a:buNone/>
+              <a:defRPr sz="4400" kern="1200">
+                <a:solidFill>
+                  <a:schemeClr val="tx1"/>
+                </a:solidFill>
+                <a:latin typeface="+mj-lt"/>
+                <a:ea typeface="+mj-ea"/>
+                <a:cs typeface="+mj-cs"/>
+              </a:defRPr>
+            </a:lvl1pPr>
+          </a:lstStyle>
+          <a:p>
+            <a:r>
+              <a:rPr lang="en-US" sz="3600" b="1" dirty="0">
+                <a:solidFill>
+                  <a:srgbClr val="1E40AF"/>
+                </a:solidFill>
+                <a:latin typeface="-apple-system"/>
+              </a:rPr>
+              <a:t>Knowledge Distillation : KL Divergence Formula </a:t>
+            </a:r>
+          </a:p>
+        </p:txBody>
+      </p:sp>
+      <p:pic>
+        <p:nvPicPr>
+          <p:cNvPr id="9" name="Graphic 8" descr="Head with gears with solid fill">
+            <a:extLst>
+              <a:ext uri="{FF2B5EF4-FFF2-40B4-BE49-F238E27FC236}">
+                <a16:creationId xmlns:a16="http://schemas.microsoft.com/office/drawing/2014/main" id="{711BF609-4E06-C625-E21F-8F7A0F3EEDF2}"/>
+              </a:ext>
+            </a:extLst>
+          </p:cNvPr>
+          <p:cNvPicPr>
+            <a:picLocks noChangeAspect="1"/>
+          </p:cNvPicPr>
+          <p:nvPr/>
+        </p:nvPicPr>
+        <p:blipFill>
+          <a:blip r:embed="rId2">
+            <a:extLst>
+              <a:ext uri="{96DAC541-7B7A-43D3-8B79-37D633B846F1}">
+                <asvg:svgBlip xmlns:asvg="http://schemas.microsoft.com/office/drawing/2016/SVG/main" r:embed="rId3"/>
+              </a:ext>
+            </a:extLst>
+          </a:blip>
+          <a:stretch>
+            <a:fillRect/>
+          </a:stretch>
+        </p:blipFill>
+        <p:spPr>
+          <a:xfrm>
+            <a:off x="461877" y="365125"/>
+            <a:ext cx="483696" cy="483696"/>
+          </a:xfrm>
+          <a:prstGeom prst="rect">
+            <a:avLst/>
+          </a:prstGeom>
+        </p:spPr>
+      </p:pic>
+      <p:sp>
+        <p:nvSpPr>
+          <p:cNvPr id="7" name="TextBox 6">
+            <a:extLst>
+              <a:ext uri="{FF2B5EF4-FFF2-40B4-BE49-F238E27FC236}">
+                <a16:creationId xmlns:a16="http://schemas.microsoft.com/office/drawing/2014/main" id="{D94BFA86-F18C-8E61-FA87-22913DCFF684}"/>
+              </a:ext>
+            </a:extLst>
+          </p:cNvPr>
+          <p:cNvSpPr txBox="1"/>
+          <p:nvPr/>
+        </p:nvSpPr>
+        <p:spPr>
+          <a:xfrm>
+            <a:off x="838200" y="1219855"/>
+            <a:ext cx="6944868" cy="646331"/>
+          </a:xfrm>
+          <a:prstGeom prst="rect">
+            <a:avLst/>
+          </a:prstGeom>
+          <a:noFill/>
+        </p:spPr>
+        <p:txBody>
+          <a:bodyPr wrap="square">
+            <a:spAutoFit/>
+          </a:bodyPr>
+          <a:lstStyle/>
+          <a:p>
+            <a:r>
+              <a:rPr lang="en-US" dirty="0"/>
+              <a:t>KL divergence measures </a:t>
+            </a:r>
+            <a:r>
+              <a:rPr lang="en-US" b="1" dirty="0"/>
+              <a:t>how different two probability distributions are</a:t>
+            </a:r>
+            <a:r>
+              <a:rPr lang="en-US" dirty="0"/>
+              <a:t> - it's like a "distance" between distributions</a:t>
+            </a:r>
+          </a:p>
+        </p:txBody>
+      </p:sp>
+      <p:sp>
+        <p:nvSpPr>
+          <p:cNvPr id="21" name="Title 20">
+            <a:extLst>
+              <a:ext uri="{FF2B5EF4-FFF2-40B4-BE49-F238E27FC236}">
+                <a16:creationId xmlns:a16="http://schemas.microsoft.com/office/drawing/2014/main" id="{4E0E06D5-ADF4-70A9-DFE2-02E9DB53441F}"/>
+              </a:ext>
+            </a:extLst>
+          </p:cNvPr>
+          <p:cNvSpPr>
+            <a:spLocks noGrp="1"/>
+          </p:cNvSpPr>
+          <p:nvPr>
+            <p:ph type="title"/>
+          </p:nvPr>
+        </p:nvSpPr>
+        <p:spPr>
+          <a:xfrm>
+            <a:off x="461877" y="1370015"/>
+            <a:ext cx="10515600" cy="1325563"/>
+          </a:xfrm>
+        </p:spPr>
+        <p:txBody>
+          <a:bodyPr/>
+          <a:lstStyle/>
+          <a:p>
+            <a:r>
+              <a:rPr lang="en-US" dirty="0"/>
+              <a:t>    </a:t>
+            </a:r>
+          </a:p>
+        </p:txBody>
+      </p:sp>
+      <p:sp>
+        <p:nvSpPr>
+          <p:cNvPr id="25" name="Rectangle 24">
+            <a:extLst>
+              <a:ext uri="{FF2B5EF4-FFF2-40B4-BE49-F238E27FC236}">
+                <a16:creationId xmlns:a16="http://schemas.microsoft.com/office/drawing/2014/main" id="{1234AE3B-EF78-1C5D-3FCE-9070671EB29A}"/>
               </a:ext>
             </a:extLst>
           </p:cNvPr>
@@ -8320,8 +8881,8 @@
         </p:nvSpPr>
         <p:spPr>
           <a:xfrm>
-            <a:off x="793930" y="3503962"/>
-            <a:ext cx="5687142" cy="1496625"/>
+            <a:off x="1916049" y="2642401"/>
+            <a:ext cx="2923794" cy="1203865"/>
           </a:xfrm>
           <a:prstGeom prst="rect">
             <a:avLst/>
@@ -8347,1332 +8908,55 @@
           <a:bodyPr rtlCol="0" anchor="ctr"/>
           <a:lstStyle/>
           <a:p>
-            <a:pPr algn="ctr"/>
-            <a:endParaRPr lang="en-US"/>
-          </a:p>
-        </p:txBody>
-      </p:sp>
-      <p:sp>
-        <p:nvSpPr>
-          <p:cNvPr id="17" name="Rectangle 16">
-            <a:extLst>
-              <a:ext uri="{FF2B5EF4-FFF2-40B4-BE49-F238E27FC236}">
-                <a16:creationId xmlns:a16="http://schemas.microsoft.com/office/drawing/2014/main" id="{C7C6C28E-52AA-D35D-626E-3801DC0ED358}"/>
-              </a:ext>
-            </a:extLst>
-          </p:cNvPr>
-          <p:cNvSpPr/>
-          <p:nvPr/>
-        </p:nvSpPr>
-        <p:spPr>
-          <a:xfrm>
-            <a:off x="897718" y="2135993"/>
-            <a:ext cx="3469010" cy="293450"/>
-          </a:xfrm>
-          <a:prstGeom prst="rect">
-            <a:avLst/>
-          </a:prstGeom>
-        </p:spPr>
-        <p:style>
-          <a:lnRef idx="2">
-            <a:schemeClr val="dk1">
-              <a:shade val="15000"/>
-            </a:schemeClr>
-          </a:lnRef>
-          <a:fillRef idx="1">
-            <a:schemeClr val="dk1"/>
-          </a:fillRef>
-          <a:effectRef idx="0">
-            <a:schemeClr val="dk1"/>
-          </a:effectRef>
-          <a:fontRef idx="minor">
-            <a:schemeClr val="lt1"/>
-          </a:fontRef>
-        </p:style>
-        <p:txBody>
-          <a:bodyPr rtlCol="0" anchor="ctr"/>
-          <a:lstStyle/>
-          <a:p>
-            <a:pPr algn="ctr"/>
-            <a:endParaRPr lang="en-US"/>
-          </a:p>
-        </p:txBody>
-      </p:sp>
-      <p:sp>
-        <p:nvSpPr>
-          <p:cNvPr id="15" name="Rectangle 14">
-            <a:extLst>
-              <a:ext uri="{FF2B5EF4-FFF2-40B4-BE49-F238E27FC236}">
-                <a16:creationId xmlns:a16="http://schemas.microsoft.com/office/drawing/2014/main" id="{3A55CC96-2CB8-9476-1AB2-8399B7570162}"/>
-              </a:ext>
-            </a:extLst>
-          </p:cNvPr>
-          <p:cNvSpPr/>
-          <p:nvPr/>
-        </p:nvSpPr>
-        <p:spPr>
-          <a:xfrm>
-            <a:off x="435208" y="1408177"/>
-            <a:ext cx="6193178" cy="3721608"/>
-          </a:xfrm>
-          <a:prstGeom prst="rect">
-            <a:avLst/>
-          </a:prstGeom>
-        </p:spPr>
-        <p:style>
-          <a:lnRef idx="2">
-            <a:schemeClr val="dk1">
-              <a:shade val="15000"/>
-            </a:schemeClr>
-          </a:lnRef>
-          <a:fillRef idx="1">
-            <a:schemeClr val="dk1"/>
-          </a:fillRef>
-          <a:effectRef idx="0">
-            <a:schemeClr val="dk1"/>
-          </a:effectRef>
-          <a:fontRef idx="minor">
-            <a:schemeClr val="lt1"/>
-          </a:fontRef>
-        </p:style>
-        <p:txBody>
-          <a:bodyPr rtlCol="0" anchor="ctr"/>
-          <a:lstStyle/>
-          <a:p>
-            <a:pPr algn="ctr"/>
-            <a:endParaRPr lang="en-US"/>
-          </a:p>
-        </p:txBody>
-      </p:sp>
-      <p:sp>
-        <p:nvSpPr>
-          <p:cNvPr id="4" name="Footer Placeholder 3">
-            <a:extLst>
-              <a:ext uri="{FF2B5EF4-FFF2-40B4-BE49-F238E27FC236}">
-                <a16:creationId xmlns:a16="http://schemas.microsoft.com/office/drawing/2014/main" id="{B8027B5C-B1A1-0376-4174-FFF61C554492}"/>
-              </a:ext>
-            </a:extLst>
-          </p:cNvPr>
-          <p:cNvSpPr>
-            <a:spLocks noGrp="1"/>
-          </p:cNvSpPr>
-          <p:nvPr>
-            <p:ph type="ftr" sz="quarter" idx="11"/>
-          </p:nvPr>
-        </p:nvSpPr>
-        <p:spPr>
-          <a:xfrm>
-            <a:off x="1028700" y="6356350"/>
-            <a:ext cx="6210300" cy="365125"/>
-          </a:xfrm>
-        </p:spPr>
-        <p:txBody>
-          <a:bodyPr>
-            <a:normAutofit/>
-          </a:bodyPr>
-          <a:lstStyle/>
-          <a:p>
-            <a:pPr algn="r">
-              <a:lnSpc>
-                <a:spcPct val="90000"/>
-              </a:lnSpc>
-              <a:spcAft>
-                <a:spcPts val="504"/>
-              </a:spcAft>
-            </a:pPr>
-            <a:r>
-              <a:rPr lang="en-US" sz="900" dirty="0">
-                <a:solidFill>
-                  <a:schemeClr val="tx1">
-                    <a:alpha val="80000"/>
-                  </a:schemeClr>
-                </a:solidFill>
-              </a:rPr>
-              <a:t>International University Of Applied Sciences</a:t>
-            </a:r>
-          </a:p>
-        </p:txBody>
-      </p:sp>
-      <p:sp>
-        <p:nvSpPr>
-          <p:cNvPr id="3" name="Date Placeholder 2">
-            <a:extLst>
-              <a:ext uri="{FF2B5EF4-FFF2-40B4-BE49-F238E27FC236}">
-                <a16:creationId xmlns:a16="http://schemas.microsoft.com/office/drawing/2014/main" id="{8B0DD3C9-E5D2-AE60-3AFE-8A43297A9FBC}"/>
-              </a:ext>
-            </a:extLst>
-          </p:cNvPr>
-          <p:cNvSpPr>
-            <a:spLocks noGrp="1"/>
-          </p:cNvSpPr>
-          <p:nvPr>
-            <p:ph type="dt" sz="half" idx="10"/>
-          </p:nvPr>
-        </p:nvSpPr>
-        <p:spPr>
-          <a:xfrm>
-            <a:off x="292608" y="6356349"/>
-            <a:ext cx="3085338" cy="365125"/>
-          </a:xfrm>
-        </p:spPr>
-        <p:txBody>
-          <a:bodyPr>
-            <a:normAutofit/>
-          </a:bodyPr>
-          <a:lstStyle/>
-          <a:p>
-            <a:pPr algn="r">
-              <a:lnSpc>
-                <a:spcPct val="90000"/>
-              </a:lnSpc>
-              <a:spcAft>
-                <a:spcPts val="504"/>
-              </a:spcAft>
-            </a:pPr>
-            <a:r>
-              <a:rPr lang="en-US" sz="900" dirty="0">
-                <a:solidFill>
-                  <a:schemeClr val="tx1">
-                    <a:alpha val="80000"/>
-                  </a:schemeClr>
-                </a:solidFill>
-              </a:rPr>
-              <a:t>Knowledge Distillation &amp; Neural Architecture Search</a:t>
-            </a:r>
-          </a:p>
-        </p:txBody>
-      </p:sp>
-      <p:sp>
-        <p:nvSpPr>
-          <p:cNvPr id="5" name="Slide Number Placeholder 4">
-            <a:extLst>
-              <a:ext uri="{FF2B5EF4-FFF2-40B4-BE49-F238E27FC236}">
-                <a16:creationId xmlns:a16="http://schemas.microsoft.com/office/drawing/2014/main" id="{80A790D5-177D-B6A2-0E90-81EF4FE37C9F}"/>
-              </a:ext>
-            </a:extLst>
-          </p:cNvPr>
-          <p:cNvSpPr>
-            <a:spLocks noGrp="1"/>
-          </p:cNvSpPr>
-          <p:nvPr>
-            <p:ph type="sldNum" sz="quarter" idx="12"/>
-          </p:nvPr>
-        </p:nvSpPr>
-        <p:spPr>
-          <a:xfrm>
-            <a:off x="11034184" y="6356350"/>
-            <a:ext cx="514349" cy="365125"/>
-          </a:xfrm>
-        </p:spPr>
-        <p:txBody>
-          <a:bodyPr>
-            <a:normAutofit/>
-          </a:bodyPr>
-          <a:lstStyle/>
-          <a:p>
-            <a:pPr>
-              <a:spcAft>
-                <a:spcPts val="600"/>
-              </a:spcAft>
-            </a:pPr>
-            <a:fld id="{C98AED0B-3B00-448B-836B-316F7AA19B4B}" type="slidenum">
-              <a:rPr lang="en-US">
-                <a:solidFill>
-                  <a:schemeClr val="tx1">
-                    <a:alpha val="80000"/>
-                  </a:schemeClr>
-                </a:solidFill>
-              </a:rPr>
-              <a:pPr>
-                <a:spcAft>
-                  <a:spcPts val="600"/>
-                </a:spcAft>
-              </a:pPr>
-              <a:t>10</a:t>
-            </a:fld>
-            <a:endParaRPr lang="en-US">
-              <a:solidFill>
-                <a:schemeClr val="tx1">
-                  <a:alpha val="80000"/>
-                </a:schemeClr>
-              </a:solidFill>
-            </a:endParaRPr>
-          </a:p>
-        </p:txBody>
-      </p:sp>
-      <p:sp>
-        <p:nvSpPr>
-          <p:cNvPr id="8" name="Title 1">
-            <a:extLst>
-              <a:ext uri="{FF2B5EF4-FFF2-40B4-BE49-F238E27FC236}">
-                <a16:creationId xmlns:a16="http://schemas.microsoft.com/office/drawing/2014/main" id="{58FF4C60-14F0-104E-A6FA-3FCA6169A054}"/>
-              </a:ext>
-            </a:extLst>
-          </p:cNvPr>
-          <p:cNvSpPr txBox="1">
-            <a:spLocks/>
-          </p:cNvSpPr>
-          <p:nvPr/>
-        </p:nvSpPr>
-        <p:spPr>
-          <a:xfrm>
-            <a:off x="838200" y="365126"/>
-            <a:ext cx="10515600" cy="638922"/>
-          </a:xfrm>
-          <a:prstGeom prst="rect">
-            <a:avLst/>
-          </a:prstGeom>
-        </p:spPr>
-        <p:txBody>
-          <a:bodyPr vert="horz" lIns="91440" tIns="45720" rIns="91440" bIns="45720" rtlCol="0" anchor="ctr">
-            <a:normAutofit fontScale="97500"/>
-          </a:bodyPr>
-          <a:lstStyle>
-            <a:lvl1pPr algn="l" defTabSz="914400" rtl="0" eaLnBrk="1" latinLnBrk="0" hangingPunct="1">
-              <a:lnSpc>
-                <a:spcPct val="90000"/>
-              </a:lnSpc>
-              <a:spcBef>
-                <a:spcPct val="0"/>
-              </a:spcBef>
-              <a:buNone/>
-              <a:defRPr sz="4400" kern="1200">
-                <a:solidFill>
-                  <a:schemeClr val="tx1"/>
-                </a:solidFill>
-                <a:latin typeface="+mj-lt"/>
-                <a:ea typeface="+mj-ea"/>
-                <a:cs typeface="+mj-cs"/>
-              </a:defRPr>
-            </a:lvl1pPr>
-          </a:lstStyle>
-          <a:p>
-            <a:r>
-              <a:rPr lang="en-US" sz="3600" b="1" dirty="0">
-                <a:solidFill>
-                  <a:srgbClr val="1E40AF"/>
-                </a:solidFill>
-                <a:latin typeface="-apple-system"/>
-              </a:rPr>
-              <a:t>Knowledge Distillation : Temperature </a:t>
-            </a:r>
-          </a:p>
-        </p:txBody>
-      </p:sp>
-      <p:pic>
-        <p:nvPicPr>
-          <p:cNvPr id="9" name="Graphic 8" descr="Head with gears with solid fill">
-            <a:extLst>
-              <a:ext uri="{FF2B5EF4-FFF2-40B4-BE49-F238E27FC236}">
-                <a16:creationId xmlns:a16="http://schemas.microsoft.com/office/drawing/2014/main" id="{711BF609-4E06-C625-E21F-8F7A0F3EEDF2}"/>
-              </a:ext>
-            </a:extLst>
-          </p:cNvPr>
-          <p:cNvPicPr>
-            <a:picLocks noChangeAspect="1"/>
-          </p:cNvPicPr>
-          <p:nvPr/>
-        </p:nvPicPr>
-        <p:blipFill>
-          <a:blip r:embed="rId2">
-            <a:extLst>
-              <a:ext uri="{96DAC541-7B7A-43D3-8B79-37D633B846F1}">
-                <asvg:svgBlip xmlns:asvg="http://schemas.microsoft.com/office/drawing/2016/SVG/main" r:embed="rId3"/>
-              </a:ext>
-            </a:extLst>
-          </a:blip>
-          <a:stretch>
-            <a:fillRect/>
-          </a:stretch>
-        </p:blipFill>
-        <p:spPr>
-          <a:xfrm>
-            <a:off x="461877" y="365125"/>
-            <a:ext cx="483696" cy="483696"/>
-          </a:xfrm>
-          <a:prstGeom prst="rect">
-            <a:avLst/>
-          </a:prstGeom>
-        </p:spPr>
-      </p:pic>
-      <p:sp>
-        <p:nvSpPr>
-          <p:cNvPr id="6" name="TextBox 5">
-            <a:extLst>
-              <a:ext uri="{FF2B5EF4-FFF2-40B4-BE49-F238E27FC236}">
-                <a16:creationId xmlns:a16="http://schemas.microsoft.com/office/drawing/2014/main" id="{02B19AC5-181F-D4CF-F091-02D25836203F}"/>
-              </a:ext>
-            </a:extLst>
-          </p:cNvPr>
-          <p:cNvSpPr txBox="1"/>
-          <p:nvPr/>
-        </p:nvSpPr>
-        <p:spPr>
-          <a:xfrm>
-            <a:off x="461877" y="1873745"/>
-            <a:ext cx="6096000" cy="553998"/>
-          </a:xfrm>
-          <a:prstGeom prst="rect">
-            <a:avLst/>
-          </a:prstGeom>
-          <a:noFill/>
-        </p:spPr>
-        <p:txBody>
-          <a:bodyPr wrap="square">
-            <a:spAutoFit/>
-          </a:bodyPr>
-          <a:lstStyle/>
-          <a:p>
-            <a:pPr marL="342900" indent="-342900">
-              <a:buAutoNum type="arabicPeriod"/>
-            </a:pPr>
-            <a:r>
-              <a:rPr lang="en-US" sz="1200" dirty="0">
-                <a:solidFill>
-                  <a:schemeClr val="bg1"/>
-                </a:solidFill>
-              </a:rPr>
-              <a:t>Teacher Raw Logits (before </a:t>
-            </a:r>
-            <a:r>
-              <a:rPr lang="en-US" sz="1200" dirty="0" err="1">
-                <a:solidFill>
-                  <a:schemeClr val="bg1"/>
-                </a:solidFill>
-              </a:rPr>
-              <a:t>softmax</a:t>
-            </a:r>
-            <a:r>
-              <a:rPr lang="en-US" sz="1200" dirty="0">
-                <a:solidFill>
-                  <a:schemeClr val="bg1"/>
-                </a:solidFill>
-              </a:rPr>
-              <a:t>):</a:t>
-            </a:r>
-          </a:p>
-          <a:p>
-            <a:r>
-              <a:rPr lang="en-US" b="1" dirty="0">
-                <a:solidFill>
-                  <a:schemeClr val="bg1"/>
-                </a:solidFill>
-                <a:latin typeface="Courier New" panose="02070309020205020404" pitchFamily="49" charset="0"/>
-              </a:rPr>
-              <a:t>        </a:t>
-            </a:r>
-          </a:p>
-        </p:txBody>
-      </p:sp>
-      <p:sp>
-        <p:nvSpPr>
-          <p:cNvPr id="10" name="TextBox 9">
-            <a:extLst>
-              <a:ext uri="{FF2B5EF4-FFF2-40B4-BE49-F238E27FC236}">
-                <a16:creationId xmlns:a16="http://schemas.microsoft.com/office/drawing/2014/main" id="{7B9EA3C4-BFC2-2E33-DD68-B5A0965CD597}"/>
-              </a:ext>
-            </a:extLst>
-          </p:cNvPr>
-          <p:cNvSpPr txBox="1"/>
-          <p:nvPr/>
-        </p:nvSpPr>
-        <p:spPr>
-          <a:xfrm>
-            <a:off x="818073" y="2165430"/>
-            <a:ext cx="4988367" cy="246221"/>
-          </a:xfrm>
-          <a:prstGeom prst="rect">
-            <a:avLst/>
-          </a:prstGeom>
-          <a:noFill/>
-        </p:spPr>
-        <p:txBody>
-          <a:bodyPr wrap="square">
-            <a:spAutoFit/>
-          </a:bodyPr>
-          <a:lstStyle/>
-          <a:p>
-            <a:r>
-              <a:rPr lang="en-US" sz="1000" b="1" dirty="0" err="1">
-                <a:solidFill>
-                  <a:schemeClr val="bg1"/>
-                </a:solidFill>
-                <a:highlight>
-                  <a:srgbClr val="000000"/>
-                </a:highlight>
-                <a:latin typeface="Courier New" panose="02070309020205020404" pitchFamily="49" charset="0"/>
-              </a:rPr>
-              <a:t>t_cls</a:t>
-            </a:r>
-            <a:r>
-              <a:rPr lang="en-US" sz="1000" b="1" dirty="0">
-                <a:solidFill>
-                  <a:schemeClr val="bg1"/>
-                </a:solidFill>
-                <a:highlight>
-                  <a:srgbClr val="000000"/>
-                </a:highlight>
-                <a:latin typeface="Courier New" panose="02070309020205020404" pitchFamily="49" charset="0"/>
-              </a:rPr>
-              <a:t> = [4.0, 2.5, 1.0] # [Car, Truck, Bus]</a:t>
-            </a:r>
-            <a:endParaRPr lang="en-US" sz="1000" dirty="0">
-              <a:solidFill>
-                <a:schemeClr val="bg1"/>
-              </a:solidFill>
-              <a:highlight>
-                <a:srgbClr val="000000"/>
-              </a:highlight>
-            </a:endParaRPr>
-          </a:p>
-        </p:txBody>
-      </p:sp>
-      <p:sp>
-        <p:nvSpPr>
-          <p:cNvPr id="13" name="TextBox 12">
-            <a:extLst>
-              <a:ext uri="{FF2B5EF4-FFF2-40B4-BE49-F238E27FC236}">
-                <a16:creationId xmlns:a16="http://schemas.microsoft.com/office/drawing/2014/main" id="{618B7DAE-99C8-162E-1F6D-6039284990ED}"/>
-              </a:ext>
-            </a:extLst>
-          </p:cNvPr>
-          <p:cNvSpPr txBox="1"/>
-          <p:nvPr/>
-        </p:nvSpPr>
-        <p:spPr>
-          <a:xfrm>
-            <a:off x="775758" y="2706484"/>
-            <a:ext cx="4544100" cy="553998"/>
-          </a:xfrm>
-          <a:prstGeom prst="rect">
-            <a:avLst/>
-          </a:prstGeom>
-          <a:noFill/>
-        </p:spPr>
-        <p:txBody>
-          <a:bodyPr wrap="square">
-            <a:spAutoFit/>
-          </a:bodyPr>
-          <a:lstStyle/>
-          <a:p>
-            <a:r>
-              <a:rPr lang="fr-FR" sz="1000" b="1" dirty="0" err="1">
-                <a:solidFill>
-                  <a:schemeClr val="bg1"/>
-                </a:solidFill>
-                <a:highlight>
-                  <a:srgbClr val="000000"/>
-                </a:highlight>
-                <a:latin typeface="Courier New" panose="02070309020205020404" pitchFamily="49" charset="0"/>
-              </a:rPr>
-              <a:t>t_cls_scaled</a:t>
-            </a:r>
-            <a:r>
-              <a:rPr lang="fr-FR" sz="1000" b="1" dirty="0">
-                <a:solidFill>
-                  <a:schemeClr val="bg1"/>
-                </a:solidFill>
-                <a:highlight>
-                  <a:srgbClr val="000000"/>
-                </a:highlight>
-                <a:latin typeface="Courier New" panose="02070309020205020404" pitchFamily="49" charset="0"/>
-              </a:rPr>
-              <a:t> = </a:t>
-            </a:r>
-            <a:r>
-              <a:rPr lang="fr-FR" sz="1000" b="1" dirty="0" err="1">
-                <a:solidFill>
-                  <a:schemeClr val="bg1"/>
-                </a:solidFill>
-                <a:highlight>
-                  <a:srgbClr val="000000"/>
-                </a:highlight>
-                <a:latin typeface="Courier New" panose="02070309020205020404" pitchFamily="49" charset="0"/>
-              </a:rPr>
-              <a:t>t_cls</a:t>
-            </a:r>
-            <a:r>
-              <a:rPr lang="fr-FR" sz="1000" b="1" dirty="0">
-                <a:solidFill>
-                  <a:schemeClr val="bg1"/>
-                </a:solidFill>
-                <a:highlight>
-                  <a:srgbClr val="000000"/>
-                </a:highlight>
-                <a:latin typeface="Courier New" panose="02070309020205020404" pitchFamily="49" charset="0"/>
-              </a:rPr>
-              <a:t> / </a:t>
-            </a:r>
-            <a:r>
-              <a:rPr lang="fr-FR" sz="1000" b="1" dirty="0" err="1">
-                <a:solidFill>
-                  <a:schemeClr val="bg1"/>
-                </a:solidFill>
-                <a:highlight>
-                  <a:srgbClr val="000000"/>
-                </a:highlight>
-                <a:latin typeface="Courier New" panose="02070309020205020404" pitchFamily="49" charset="0"/>
-              </a:rPr>
-              <a:t>self.temperature</a:t>
-            </a:r>
-            <a:r>
-              <a:rPr lang="fr-FR" sz="1000" b="1" dirty="0">
-                <a:solidFill>
-                  <a:schemeClr val="bg1"/>
-                </a:solidFill>
-                <a:highlight>
-                  <a:srgbClr val="000000"/>
-                </a:highlight>
-                <a:latin typeface="Courier New" panose="02070309020205020404" pitchFamily="49" charset="0"/>
-              </a:rPr>
-              <a:t> # T = 2.0 </a:t>
-            </a:r>
-          </a:p>
-          <a:p>
-            <a:r>
-              <a:rPr lang="fr-FR" sz="1000" b="1" dirty="0" err="1">
-                <a:solidFill>
-                  <a:schemeClr val="bg1"/>
-                </a:solidFill>
-                <a:highlight>
-                  <a:srgbClr val="000000"/>
-                </a:highlight>
-                <a:latin typeface="Courier New" panose="02070309020205020404" pitchFamily="49" charset="0"/>
-              </a:rPr>
-              <a:t>t_cls_scaled</a:t>
-            </a:r>
-            <a:r>
-              <a:rPr lang="fr-FR" sz="1000" b="1" dirty="0">
-                <a:solidFill>
-                  <a:schemeClr val="bg1"/>
-                </a:solidFill>
-                <a:highlight>
-                  <a:srgbClr val="000000"/>
-                </a:highlight>
-                <a:latin typeface="Courier New" panose="02070309020205020404" pitchFamily="49" charset="0"/>
-              </a:rPr>
-              <a:t> = [4.0/2.0, 2.5/2.0, 1.0/2.0] </a:t>
-            </a:r>
-          </a:p>
-          <a:p>
-            <a:r>
-              <a:rPr lang="fr-FR" sz="1000" b="1" dirty="0" err="1">
-                <a:solidFill>
-                  <a:schemeClr val="bg1"/>
-                </a:solidFill>
-                <a:highlight>
-                  <a:srgbClr val="000000"/>
-                </a:highlight>
-                <a:latin typeface="Courier New" panose="02070309020205020404" pitchFamily="49" charset="0"/>
-              </a:rPr>
-              <a:t>t_cls_scaled</a:t>
-            </a:r>
-            <a:r>
-              <a:rPr lang="fr-FR" sz="1000" b="1" dirty="0">
-                <a:solidFill>
-                  <a:schemeClr val="bg1"/>
-                </a:solidFill>
-                <a:highlight>
-                  <a:srgbClr val="000000"/>
-                </a:highlight>
-                <a:latin typeface="Courier New" panose="02070309020205020404" pitchFamily="49" charset="0"/>
-              </a:rPr>
-              <a:t> = [2.0, 1.25, 0.5]</a:t>
-            </a:r>
-            <a:endParaRPr lang="en-US" sz="1000" b="1" dirty="0">
-              <a:solidFill>
-                <a:schemeClr val="bg1"/>
-              </a:solidFill>
-              <a:highlight>
-                <a:srgbClr val="000000"/>
-              </a:highlight>
-              <a:latin typeface="Courier New" panose="02070309020205020404" pitchFamily="49" charset="0"/>
-            </a:endParaRPr>
-          </a:p>
-        </p:txBody>
-      </p:sp>
-      <p:sp>
-        <p:nvSpPr>
-          <p:cNvPr id="20" name="TextBox 19">
-            <a:extLst>
-              <a:ext uri="{FF2B5EF4-FFF2-40B4-BE49-F238E27FC236}">
-                <a16:creationId xmlns:a16="http://schemas.microsoft.com/office/drawing/2014/main" id="{ECCBC002-08D7-81D3-DAE0-74A584D4D475}"/>
-              </a:ext>
-            </a:extLst>
-          </p:cNvPr>
-          <p:cNvSpPr txBox="1"/>
-          <p:nvPr/>
-        </p:nvSpPr>
-        <p:spPr>
-          <a:xfrm>
-            <a:off x="462639" y="2417651"/>
-            <a:ext cx="6094476" cy="276999"/>
-          </a:xfrm>
-          <a:prstGeom prst="rect">
-            <a:avLst/>
-          </a:prstGeom>
-          <a:noFill/>
-        </p:spPr>
-        <p:txBody>
-          <a:bodyPr wrap="square">
-            <a:spAutoFit/>
-          </a:bodyPr>
-          <a:lstStyle/>
-          <a:p>
-            <a:r>
-              <a:rPr lang="en-US" sz="1200" dirty="0">
-                <a:solidFill>
-                  <a:schemeClr val="bg1"/>
-                </a:solidFill>
-              </a:rPr>
-              <a:t>2. Apply Temperature Scaling:</a:t>
-            </a:r>
-            <a:endParaRPr lang="en-US" dirty="0">
-              <a:solidFill>
-                <a:schemeClr val="bg1"/>
-              </a:solidFill>
-            </a:endParaRPr>
-          </a:p>
-        </p:txBody>
-      </p:sp>
-      <p:sp>
-        <p:nvSpPr>
-          <p:cNvPr id="23" name="TextBox 22">
-            <a:extLst>
-              <a:ext uri="{FF2B5EF4-FFF2-40B4-BE49-F238E27FC236}">
-                <a16:creationId xmlns:a16="http://schemas.microsoft.com/office/drawing/2014/main" id="{F2798392-6239-68CF-6EA0-A68AF42FB5FD}"/>
-              </a:ext>
-            </a:extLst>
-          </p:cNvPr>
-          <p:cNvSpPr txBox="1"/>
-          <p:nvPr/>
-        </p:nvSpPr>
-        <p:spPr>
-          <a:xfrm>
-            <a:off x="490071" y="3249524"/>
-            <a:ext cx="6094476" cy="276999"/>
-          </a:xfrm>
-          <a:prstGeom prst="rect">
-            <a:avLst/>
-          </a:prstGeom>
-          <a:noFill/>
-        </p:spPr>
-        <p:txBody>
-          <a:bodyPr wrap="square">
-            <a:spAutoFit/>
-          </a:bodyPr>
-          <a:lstStyle/>
-          <a:p>
-            <a:r>
-              <a:rPr lang="en-US" sz="1200" dirty="0">
-                <a:solidFill>
-                  <a:schemeClr val="bg1"/>
-                </a:solidFill>
-              </a:rPr>
-              <a:t>3. Compute Temperature-Scaled </a:t>
-            </a:r>
-            <a:r>
-              <a:rPr lang="en-US" sz="1200" dirty="0" err="1">
-                <a:solidFill>
-                  <a:schemeClr val="bg1"/>
-                </a:solidFill>
-              </a:rPr>
-              <a:t>Softmax</a:t>
-            </a:r>
-            <a:r>
-              <a:rPr lang="en-US" sz="1200" dirty="0">
-                <a:solidFill>
-                  <a:schemeClr val="bg1"/>
-                </a:solidFill>
-              </a:rPr>
-              <a:t>:</a:t>
-            </a:r>
-          </a:p>
-        </p:txBody>
-      </p:sp>
-      <p:sp>
-        <p:nvSpPr>
-          <p:cNvPr id="29" name="TextBox 28">
-            <a:extLst>
-              <a:ext uri="{FF2B5EF4-FFF2-40B4-BE49-F238E27FC236}">
-                <a16:creationId xmlns:a16="http://schemas.microsoft.com/office/drawing/2014/main" id="{0C408079-FDE1-6EED-F4E4-B16DFC908646}"/>
-              </a:ext>
-            </a:extLst>
-          </p:cNvPr>
-          <p:cNvSpPr txBox="1"/>
-          <p:nvPr/>
-        </p:nvSpPr>
-        <p:spPr>
-          <a:xfrm>
-            <a:off x="786852" y="3497962"/>
-            <a:ext cx="5650524" cy="1169551"/>
-          </a:xfrm>
-          <a:prstGeom prst="rect">
-            <a:avLst/>
-          </a:prstGeom>
-          <a:noFill/>
-        </p:spPr>
-        <p:txBody>
-          <a:bodyPr wrap="square">
-            <a:spAutoFit/>
-          </a:bodyPr>
-          <a:lstStyle/>
-          <a:p>
-            <a:r>
-              <a:rPr lang="en-US" sz="1000" b="1" dirty="0">
-                <a:solidFill>
-                  <a:schemeClr val="bg1"/>
-                </a:solidFill>
-                <a:highlight>
-                  <a:srgbClr val="000000"/>
-                </a:highlight>
-                <a:latin typeface="Courier New" panose="02070309020205020404" pitchFamily="49" charset="0"/>
-              </a:rPr>
-              <a:t># Calculate exponentials </a:t>
-            </a:r>
-          </a:p>
-          <a:p>
-            <a:r>
-              <a:rPr lang="en-US" sz="1000" b="1" dirty="0" err="1">
-                <a:solidFill>
-                  <a:schemeClr val="bg1"/>
-                </a:solidFill>
-                <a:highlight>
-                  <a:srgbClr val="000000"/>
-                </a:highlight>
-                <a:latin typeface="Courier New" panose="02070309020205020404" pitchFamily="49" charset="0"/>
-              </a:rPr>
-              <a:t>exp_values</a:t>
-            </a:r>
-            <a:r>
-              <a:rPr lang="en-US" sz="1000" b="1" dirty="0">
-                <a:solidFill>
-                  <a:schemeClr val="bg1"/>
-                </a:solidFill>
-                <a:highlight>
-                  <a:srgbClr val="000000"/>
-                </a:highlight>
-                <a:latin typeface="Courier New" panose="02070309020205020404" pitchFamily="49" charset="0"/>
-              </a:rPr>
-              <a:t> = [exp(2.0), exp(1.25), exp(0.5)] </a:t>
-            </a:r>
-          </a:p>
-          <a:p>
-            <a:r>
-              <a:rPr lang="en-US" sz="1000" b="1" dirty="0" err="1">
-                <a:solidFill>
-                  <a:schemeClr val="bg1"/>
-                </a:solidFill>
-                <a:highlight>
-                  <a:srgbClr val="000000"/>
-                </a:highlight>
-                <a:latin typeface="Courier New" panose="02070309020205020404" pitchFamily="49" charset="0"/>
-              </a:rPr>
-              <a:t>exp_values</a:t>
-            </a:r>
-            <a:r>
-              <a:rPr lang="en-US" sz="1000" b="1" dirty="0">
-                <a:solidFill>
-                  <a:schemeClr val="bg1"/>
-                </a:solidFill>
-                <a:highlight>
-                  <a:srgbClr val="000000"/>
-                </a:highlight>
-                <a:latin typeface="Courier New" panose="02070309020205020404" pitchFamily="49" charset="0"/>
-              </a:rPr>
-              <a:t> = [7.39, 3.49, 1.65] # Sum all exponentials </a:t>
-            </a:r>
-          </a:p>
-          <a:p>
-            <a:r>
-              <a:rPr lang="en-US" sz="1000" b="1" dirty="0" err="1">
-                <a:solidFill>
-                  <a:schemeClr val="bg1"/>
-                </a:solidFill>
-                <a:highlight>
-                  <a:srgbClr val="000000"/>
-                </a:highlight>
-                <a:latin typeface="Courier New" panose="02070309020205020404" pitchFamily="49" charset="0"/>
-              </a:rPr>
-              <a:t>sum_exp</a:t>
-            </a:r>
-            <a:r>
-              <a:rPr lang="en-US" sz="1000" b="1" dirty="0">
-                <a:solidFill>
-                  <a:schemeClr val="bg1"/>
-                </a:solidFill>
-                <a:highlight>
-                  <a:srgbClr val="000000"/>
-                </a:highlight>
-                <a:latin typeface="Courier New" panose="02070309020205020404" pitchFamily="49" charset="0"/>
-              </a:rPr>
-              <a:t> = 7.39 + 3.49 + 1.65 = 12.53 # Calculate </a:t>
-            </a:r>
-            <a:r>
-              <a:rPr lang="en-US" sz="1000" b="1" dirty="0" err="1">
-                <a:solidFill>
-                  <a:schemeClr val="bg1"/>
-                </a:solidFill>
-                <a:highlight>
-                  <a:srgbClr val="000000"/>
-                </a:highlight>
-                <a:latin typeface="Courier New" panose="02070309020205020404" pitchFamily="49" charset="0"/>
-              </a:rPr>
-              <a:t>softmax</a:t>
-            </a:r>
-            <a:r>
-              <a:rPr lang="en-US" sz="1000" b="1" dirty="0">
-                <a:solidFill>
-                  <a:schemeClr val="bg1"/>
-                </a:solidFill>
-                <a:highlight>
-                  <a:srgbClr val="000000"/>
-                </a:highlight>
-                <a:latin typeface="Courier New" panose="02070309020205020404" pitchFamily="49" charset="0"/>
-              </a:rPr>
-              <a:t> probabilities </a:t>
-            </a:r>
-          </a:p>
-          <a:p>
-            <a:r>
-              <a:rPr lang="en-US" sz="1000" b="1" dirty="0" err="1">
-                <a:solidFill>
-                  <a:schemeClr val="bg1"/>
-                </a:solidFill>
-                <a:highlight>
-                  <a:srgbClr val="000000"/>
-                </a:highlight>
-                <a:latin typeface="Courier New" panose="02070309020205020404" pitchFamily="49" charset="0"/>
-              </a:rPr>
-              <a:t>q_car</a:t>
-            </a:r>
-            <a:r>
-              <a:rPr lang="en-US" sz="1000" b="1" dirty="0">
-                <a:solidFill>
-                  <a:schemeClr val="bg1"/>
-                </a:solidFill>
-                <a:highlight>
-                  <a:srgbClr val="000000"/>
-                </a:highlight>
-                <a:latin typeface="Courier New" panose="02070309020205020404" pitchFamily="49" charset="0"/>
-              </a:rPr>
-              <a:t> = 7.39 / 12.53 = 0.59 </a:t>
-            </a:r>
-          </a:p>
-          <a:p>
-            <a:r>
-              <a:rPr lang="en-US" sz="1000" b="1" dirty="0" err="1">
-                <a:solidFill>
-                  <a:schemeClr val="bg1"/>
-                </a:solidFill>
-                <a:highlight>
-                  <a:srgbClr val="000000"/>
-                </a:highlight>
-                <a:latin typeface="Courier New" panose="02070309020205020404" pitchFamily="49" charset="0"/>
-              </a:rPr>
-              <a:t>q_truck</a:t>
-            </a:r>
-            <a:r>
-              <a:rPr lang="en-US" sz="1000" b="1" dirty="0">
-                <a:solidFill>
-                  <a:schemeClr val="bg1"/>
-                </a:solidFill>
-                <a:highlight>
-                  <a:srgbClr val="000000"/>
-                </a:highlight>
-                <a:latin typeface="Courier New" panose="02070309020205020404" pitchFamily="49" charset="0"/>
-              </a:rPr>
-              <a:t> = 3.49 / 12.53 = 0.28 </a:t>
-            </a:r>
-          </a:p>
-          <a:p>
-            <a:r>
-              <a:rPr lang="en-US" sz="1000" b="1" dirty="0" err="1">
-                <a:solidFill>
-                  <a:schemeClr val="bg1"/>
-                </a:solidFill>
-                <a:highlight>
-                  <a:srgbClr val="000000"/>
-                </a:highlight>
-                <a:latin typeface="Courier New" panose="02070309020205020404" pitchFamily="49" charset="0"/>
-              </a:rPr>
-              <a:t>q_bus</a:t>
-            </a:r>
-            <a:r>
-              <a:rPr lang="en-US" sz="1000" b="1" dirty="0">
-                <a:solidFill>
-                  <a:schemeClr val="bg1"/>
-                </a:solidFill>
-                <a:highlight>
-                  <a:srgbClr val="000000"/>
-                </a:highlight>
-                <a:latin typeface="Courier New" panose="02070309020205020404" pitchFamily="49" charset="0"/>
-              </a:rPr>
-              <a:t> = 1.65 / 12.53 = 0.13</a:t>
-            </a:r>
-          </a:p>
-        </p:txBody>
-      </p:sp>
-      <p:sp>
-        <p:nvSpPr>
-          <p:cNvPr id="37" name="TextBox 36">
-            <a:extLst>
-              <a:ext uri="{FF2B5EF4-FFF2-40B4-BE49-F238E27FC236}">
-                <a16:creationId xmlns:a16="http://schemas.microsoft.com/office/drawing/2014/main" id="{6818C3EE-0953-4936-5F27-10D414BD9953}"/>
-              </a:ext>
-            </a:extLst>
-          </p:cNvPr>
-          <p:cNvSpPr txBox="1"/>
-          <p:nvPr/>
-        </p:nvSpPr>
-        <p:spPr>
-          <a:xfrm>
-            <a:off x="786852" y="4521841"/>
-            <a:ext cx="6094476" cy="400110"/>
-          </a:xfrm>
-          <a:prstGeom prst="rect">
-            <a:avLst/>
-          </a:prstGeom>
-          <a:noFill/>
-        </p:spPr>
-        <p:txBody>
-          <a:bodyPr wrap="square">
-            <a:spAutoFit/>
-          </a:bodyPr>
-          <a:lstStyle/>
-          <a:p>
-            <a:endParaRPr lang="en-US" sz="1000" b="1" dirty="0">
-              <a:solidFill>
-                <a:schemeClr val="bg1"/>
-              </a:solidFill>
-              <a:highlight>
-                <a:srgbClr val="000000"/>
-              </a:highlight>
-              <a:latin typeface="Courier New" panose="02070309020205020404" pitchFamily="49" charset="0"/>
-            </a:endParaRPr>
-          </a:p>
-          <a:p>
-            <a:r>
-              <a:rPr lang="en-US" sz="1000" b="1" dirty="0">
-                <a:solidFill>
-                  <a:schemeClr val="bg1"/>
-                </a:solidFill>
-                <a:highlight>
-                  <a:srgbClr val="000000"/>
-                </a:highlight>
-                <a:latin typeface="Courier New" panose="02070309020205020404" pitchFamily="49" charset="0"/>
-              </a:rPr>
-              <a:t>probabilities = [0.59, 0.28, 0.13] # Much softer!  </a:t>
-            </a:r>
-          </a:p>
-        </p:txBody>
-      </p:sp>
-      <p:sp>
-        <p:nvSpPr>
-          <p:cNvPr id="40" name="TextBox 39">
-            <a:extLst>
-              <a:ext uri="{FF2B5EF4-FFF2-40B4-BE49-F238E27FC236}">
-                <a16:creationId xmlns:a16="http://schemas.microsoft.com/office/drawing/2014/main" id="{15078F42-48E5-DB67-3FA3-DF9D4AC8503B}"/>
-              </a:ext>
-            </a:extLst>
-          </p:cNvPr>
-          <p:cNvSpPr txBox="1"/>
-          <p:nvPr/>
-        </p:nvSpPr>
-        <p:spPr>
-          <a:xfrm>
-            <a:off x="1835277" y="1510551"/>
-            <a:ext cx="4150729" cy="276999"/>
-          </a:xfrm>
-          <a:prstGeom prst="rect">
-            <a:avLst/>
-          </a:prstGeom>
-          <a:noFill/>
-        </p:spPr>
-        <p:txBody>
-          <a:bodyPr wrap="square">
-            <a:spAutoFit/>
-          </a:bodyPr>
-          <a:lstStyle/>
-          <a:p>
-            <a:r>
-              <a:rPr lang="en-US" sz="1200" b="1" dirty="0">
-                <a:solidFill>
-                  <a:schemeClr val="bg1"/>
-                </a:solidFill>
-              </a:rPr>
-              <a:t>Temperature (T=2, Standard </a:t>
-            </a:r>
-            <a:r>
-              <a:rPr lang="en-US" sz="1200" b="1" dirty="0" err="1">
-                <a:solidFill>
-                  <a:schemeClr val="bg1"/>
-                </a:solidFill>
-              </a:rPr>
-              <a:t>Softmax</a:t>
-            </a:r>
-            <a:r>
-              <a:rPr lang="en-US" sz="1200" b="1" dirty="0">
-                <a:solidFill>
-                  <a:schemeClr val="bg1"/>
-                </a:solidFill>
-              </a:rPr>
-              <a:t>):</a:t>
-            </a:r>
-          </a:p>
-        </p:txBody>
-      </p:sp>
-      <p:sp>
-        <p:nvSpPr>
-          <p:cNvPr id="41" name="TextBox 40">
-            <a:extLst>
-              <a:ext uri="{FF2B5EF4-FFF2-40B4-BE49-F238E27FC236}">
-                <a16:creationId xmlns:a16="http://schemas.microsoft.com/office/drawing/2014/main" id="{95BB3DA6-206F-85C8-0714-2E240FCF3CD5}"/>
-              </a:ext>
-            </a:extLst>
-          </p:cNvPr>
-          <p:cNvSpPr txBox="1"/>
-          <p:nvPr/>
-        </p:nvSpPr>
-        <p:spPr>
-          <a:xfrm>
-            <a:off x="7019626" y="2523975"/>
-            <a:ext cx="3321673" cy="276999"/>
-          </a:xfrm>
-          <a:prstGeom prst="rect">
-            <a:avLst/>
-          </a:prstGeom>
-          <a:noFill/>
-        </p:spPr>
-        <p:txBody>
-          <a:bodyPr wrap="square">
-            <a:spAutoFit/>
-          </a:bodyPr>
-          <a:lstStyle/>
-          <a:p>
-            <a:r>
-              <a:rPr lang="en-US" sz="1200" b="1" dirty="0">
-                <a:solidFill>
-                  <a:schemeClr val="bg1"/>
-                </a:solidFill>
-              </a:rPr>
-              <a:t>Without Temperature (T=1, Standard </a:t>
-            </a:r>
-            <a:r>
-              <a:rPr lang="en-US" sz="1200" b="1" dirty="0" err="1">
-                <a:solidFill>
-                  <a:schemeClr val="bg1"/>
-                </a:solidFill>
-              </a:rPr>
-              <a:t>Softmax</a:t>
-            </a:r>
-            <a:r>
-              <a:rPr lang="en-US" sz="1200" b="1" dirty="0">
-                <a:solidFill>
-                  <a:schemeClr val="bg1"/>
-                </a:solidFill>
-              </a:rPr>
-              <a:t>):</a:t>
-            </a:r>
-          </a:p>
-        </p:txBody>
-      </p:sp>
-      <p:sp>
-        <p:nvSpPr>
-          <p:cNvPr id="43" name="TextBox 42">
-            <a:extLst>
-              <a:ext uri="{FF2B5EF4-FFF2-40B4-BE49-F238E27FC236}">
-                <a16:creationId xmlns:a16="http://schemas.microsoft.com/office/drawing/2014/main" id="{C0D3EF59-AAD2-FBE7-D7C4-CE11516E374D}"/>
-              </a:ext>
-            </a:extLst>
-          </p:cNvPr>
-          <p:cNvSpPr txBox="1"/>
-          <p:nvPr/>
-        </p:nvSpPr>
-        <p:spPr>
-          <a:xfrm>
-            <a:off x="7088692" y="2882819"/>
-            <a:ext cx="4393224" cy="1015663"/>
-          </a:xfrm>
-          <a:prstGeom prst="rect">
-            <a:avLst/>
-          </a:prstGeom>
-          <a:noFill/>
-        </p:spPr>
-        <p:txBody>
-          <a:bodyPr wrap="square">
-            <a:spAutoFit/>
-          </a:bodyPr>
-          <a:lstStyle/>
-          <a:p>
-            <a:r>
-              <a:rPr lang="en-US" sz="1000" b="1" dirty="0">
-                <a:solidFill>
-                  <a:schemeClr val="bg1"/>
-                </a:solidFill>
-                <a:highlight>
-                  <a:srgbClr val="000000"/>
-                </a:highlight>
-                <a:latin typeface="Courier New" panose="02070309020205020404" pitchFamily="49" charset="0"/>
-              </a:rPr>
-              <a:t># Raw logits: [4.0, 2.5, 1.0] </a:t>
-            </a:r>
-          </a:p>
-          <a:p>
-            <a:r>
-              <a:rPr lang="en-US" sz="1000" b="1" dirty="0" err="1">
-                <a:solidFill>
-                  <a:schemeClr val="bg1"/>
-                </a:solidFill>
-                <a:highlight>
-                  <a:srgbClr val="000000"/>
-                </a:highlight>
-                <a:latin typeface="Courier New" panose="02070309020205020404" pitchFamily="49" charset="0"/>
-              </a:rPr>
-              <a:t>exp_values</a:t>
-            </a:r>
-            <a:r>
-              <a:rPr lang="en-US" sz="1000" b="1" dirty="0">
-                <a:solidFill>
-                  <a:schemeClr val="bg1"/>
-                </a:solidFill>
-                <a:highlight>
-                  <a:srgbClr val="000000"/>
-                </a:highlight>
-                <a:latin typeface="Courier New" panose="02070309020205020404" pitchFamily="49" charset="0"/>
-              </a:rPr>
-              <a:t> = [exp(4.0), exp(2.5), exp(1.0)] </a:t>
-            </a:r>
-          </a:p>
-          <a:p>
-            <a:r>
-              <a:rPr lang="en-US" sz="1000" b="1" dirty="0" err="1">
-                <a:solidFill>
-                  <a:schemeClr val="bg1"/>
-                </a:solidFill>
-                <a:highlight>
-                  <a:srgbClr val="000000"/>
-                </a:highlight>
-                <a:latin typeface="Courier New" panose="02070309020205020404" pitchFamily="49" charset="0"/>
-              </a:rPr>
-              <a:t>exp_values</a:t>
-            </a:r>
-            <a:r>
-              <a:rPr lang="en-US" sz="1000" b="1" dirty="0">
-                <a:solidFill>
-                  <a:schemeClr val="bg1"/>
-                </a:solidFill>
-                <a:highlight>
-                  <a:srgbClr val="000000"/>
-                </a:highlight>
-                <a:latin typeface="Courier New" panose="02070309020205020404" pitchFamily="49" charset="0"/>
-              </a:rPr>
-              <a:t> = [54.6, 12.2, 2.7] </a:t>
-            </a:r>
-          </a:p>
-          <a:p>
-            <a:r>
-              <a:rPr lang="en-US" sz="1000" b="1" dirty="0" err="1">
-                <a:solidFill>
-                  <a:schemeClr val="bg1"/>
-                </a:solidFill>
-                <a:highlight>
-                  <a:srgbClr val="000000"/>
-                </a:highlight>
-                <a:latin typeface="Courier New" panose="02070309020205020404" pitchFamily="49" charset="0"/>
-              </a:rPr>
-              <a:t>sum_exp</a:t>
-            </a:r>
-            <a:r>
-              <a:rPr lang="en-US" sz="1000" b="1" dirty="0">
-                <a:solidFill>
-                  <a:schemeClr val="bg1"/>
-                </a:solidFill>
-                <a:highlight>
-                  <a:srgbClr val="000000"/>
-                </a:highlight>
-                <a:latin typeface="Courier New" panose="02070309020205020404" pitchFamily="49" charset="0"/>
-              </a:rPr>
-              <a:t> = 69.5 # Standard </a:t>
-            </a:r>
-            <a:r>
-              <a:rPr lang="en-US" sz="1000" b="1" dirty="0" err="1">
-                <a:solidFill>
-                  <a:schemeClr val="bg1"/>
-                </a:solidFill>
-                <a:highlight>
-                  <a:srgbClr val="000000"/>
-                </a:highlight>
-                <a:latin typeface="Courier New" panose="02070309020205020404" pitchFamily="49" charset="0"/>
-              </a:rPr>
-              <a:t>softmax</a:t>
-            </a:r>
-            <a:r>
-              <a:rPr lang="en-US" sz="1000" b="1" dirty="0">
-                <a:solidFill>
-                  <a:schemeClr val="bg1"/>
-                </a:solidFill>
-                <a:highlight>
-                  <a:srgbClr val="000000"/>
-                </a:highlight>
-                <a:latin typeface="Courier New" panose="02070309020205020404" pitchFamily="49" charset="0"/>
-              </a:rPr>
-              <a:t> </a:t>
-            </a:r>
-          </a:p>
-          <a:p>
-            <a:r>
-              <a:rPr lang="en-US" sz="1000" b="1" dirty="0">
-                <a:solidFill>
-                  <a:schemeClr val="bg1"/>
-                </a:solidFill>
-                <a:highlight>
-                  <a:srgbClr val="000000"/>
-                </a:highlight>
-                <a:latin typeface="Courier New" panose="02070309020205020404" pitchFamily="49" charset="0"/>
-              </a:rPr>
-              <a:t>probabilities = [54.6/69.5, 12.2/69.5, 2.7/69.5] probabilities = [0.79, 0.17, 0.04]</a:t>
-            </a:r>
-          </a:p>
-        </p:txBody>
-      </p:sp>
-      <p:sp>
-        <p:nvSpPr>
-          <p:cNvPr id="47" name="Title 46">
-            <a:extLst>
-              <a:ext uri="{FF2B5EF4-FFF2-40B4-BE49-F238E27FC236}">
-                <a16:creationId xmlns:a16="http://schemas.microsoft.com/office/drawing/2014/main" id="{AE01B750-F29F-F15D-3711-E76AA8535122}"/>
-              </a:ext>
-            </a:extLst>
-          </p:cNvPr>
-          <p:cNvSpPr>
-            <a:spLocks noGrp="1"/>
-          </p:cNvSpPr>
-          <p:nvPr>
-            <p:ph type="title"/>
-          </p:nvPr>
-        </p:nvSpPr>
-        <p:spPr>
-          <a:xfrm>
-            <a:off x="3377946" y="2698619"/>
-            <a:ext cx="10515600" cy="1325563"/>
-          </a:xfrm>
-        </p:spPr>
-        <p:txBody>
-          <a:bodyPr/>
-          <a:lstStyle/>
-          <a:p>
-            <a:r>
-              <a:rPr lang="en-US" dirty="0"/>
-              <a:t>   </a:t>
-            </a:r>
+            <a:r>
+              <a:rPr lang="en-US" sz="1000" dirty="0"/>
+              <a:t>KL(P||Q) = </a:t>
+            </a:r>
+            <a:r>
+              <a:rPr lang="el-GR" sz="1000" dirty="0"/>
+              <a:t>Σ </a:t>
+            </a:r>
+            <a:r>
+              <a:rPr lang="en-US" sz="1000" dirty="0"/>
+              <a:t>P(x) × log(P(x)/Q(x))</a:t>
+            </a:r>
+          </a:p>
+          <a:p>
+            <a:endParaRPr lang="en-US" sz="1000" dirty="0"/>
+          </a:p>
+          <a:p>
+            <a:r>
+              <a:rPr lang="en-US" sz="1000" dirty="0"/>
+              <a:t>P = target distribution (teacher probabilities)</a:t>
+            </a:r>
+          </a:p>
+          <a:p>
+            <a:r>
+              <a:rPr lang="en-US" sz="1000" dirty="0"/>
+              <a:t>Q = predicted distribution (student probabilities)</a:t>
+            </a:r>
+          </a:p>
+          <a:p>
+            <a:r>
+              <a:rPr lang="en-US" sz="1000" dirty="0"/>
+              <a:t>x = each possible outcome/class</a:t>
+            </a:r>
+          </a:p>
+          <a:p>
+            <a:r>
+              <a:rPr lang="en-US" sz="1000" dirty="0"/>
+              <a:t>Σ = sum over all classes</a:t>
+            </a:r>
+          </a:p>
+          <a:p>
+            <a:endParaRPr lang="en-US" sz="1000" dirty="0"/>
           </a:p>
         </p:txBody>
       </p:sp>
     </p:spTree>
     <p:extLst>
       <p:ext uri="{BB962C8B-B14F-4D97-AF65-F5344CB8AC3E}">
-        <p14:creationId xmlns:p14="http://schemas.microsoft.com/office/powerpoint/2010/main" val="3212880036"/>
+        <p14:creationId xmlns:p14="http://schemas.microsoft.com/office/powerpoint/2010/main" val="1308369633"/>
       </p:ext>
     </p:extLst>
   </p:cSld>
@@ -9701,10 +8985,294 @@
       </p:grpSpPr>
       <p:sp>
         <p:nvSpPr>
-          <p:cNvPr id="18" name="Rectangle 17">
-            <a:extLst>
-              <a:ext uri="{FF2B5EF4-FFF2-40B4-BE49-F238E27FC236}">
-                <a16:creationId xmlns:a16="http://schemas.microsoft.com/office/drawing/2014/main" id="{21CBE364-C2CF-AA17-A0BC-6239F6075473}"/>
+          <p:cNvPr id="4" name="Footer Placeholder 3">
+            <a:extLst>
+              <a:ext uri="{FF2B5EF4-FFF2-40B4-BE49-F238E27FC236}">
+                <a16:creationId xmlns:a16="http://schemas.microsoft.com/office/drawing/2014/main" id="{B8027B5C-B1A1-0376-4174-FFF61C554492}"/>
+              </a:ext>
+            </a:extLst>
+          </p:cNvPr>
+          <p:cNvSpPr>
+            <a:spLocks noGrp="1"/>
+          </p:cNvSpPr>
+          <p:nvPr>
+            <p:ph type="ftr" sz="quarter" idx="11"/>
+          </p:nvPr>
+        </p:nvSpPr>
+        <p:spPr>
+          <a:xfrm>
+            <a:off x="1028700" y="6356350"/>
+            <a:ext cx="6210300" cy="365125"/>
+          </a:xfrm>
+        </p:spPr>
+        <p:txBody>
+          <a:bodyPr>
+            <a:normAutofit/>
+          </a:bodyPr>
+          <a:lstStyle/>
+          <a:p>
+            <a:pPr algn="r">
+              <a:lnSpc>
+                <a:spcPct val="90000"/>
+              </a:lnSpc>
+              <a:spcAft>
+                <a:spcPts val="504"/>
+              </a:spcAft>
+            </a:pPr>
+            <a:r>
+              <a:rPr lang="en-US" sz="900" dirty="0">
+                <a:solidFill>
+                  <a:schemeClr val="tx1">
+                    <a:alpha val="80000"/>
+                  </a:schemeClr>
+                </a:solidFill>
+              </a:rPr>
+              <a:t>International University Of Applied Sciences</a:t>
+            </a:r>
+          </a:p>
+        </p:txBody>
+      </p:sp>
+      <p:sp>
+        <p:nvSpPr>
+          <p:cNvPr id="3" name="Date Placeholder 2">
+            <a:extLst>
+              <a:ext uri="{FF2B5EF4-FFF2-40B4-BE49-F238E27FC236}">
+                <a16:creationId xmlns:a16="http://schemas.microsoft.com/office/drawing/2014/main" id="{8B0DD3C9-E5D2-AE60-3AFE-8A43297A9FBC}"/>
+              </a:ext>
+            </a:extLst>
+          </p:cNvPr>
+          <p:cNvSpPr>
+            <a:spLocks noGrp="1"/>
+          </p:cNvSpPr>
+          <p:nvPr>
+            <p:ph type="dt" sz="half" idx="10"/>
+          </p:nvPr>
+        </p:nvSpPr>
+        <p:spPr>
+          <a:xfrm>
+            <a:off x="292608" y="6356349"/>
+            <a:ext cx="3085338" cy="365125"/>
+          </a:xfrm>
+        </p:spPr>
+        <p:txBody>
+          <a:bodyPr>
+            <a:normAutofit/>
+          </a:bodyPr>
+          <a:lstStyle/>
+          <a:p>
+            <a:pPr algn="r">
+              <a:lnSpc>
+                <a:spcPct val="90000"/>
+              </a:lnSpc>
+              <a:spcAft>
+                <a:spcPts val="504"/>
+              </a:spcAft>
+            </a:pPr>
+            <a:r>
+              <a:rPr lang="en-US" sz="900" dirty="0">
+                <a:solidFill>
+                  <a:schemeClr val="tx1">
+                    <a:alpha val="80000"/>
+                  </a:schemeClr>
+                </a:solidFill>
+              </a:rPr>
+              <a:t>Knowledge Distillation &amp; Neural Architecture Search</a:t>
+            </a:r>
+          </a:p>
+        </p:txBody>
+      </p:sp>
+      <p:sp>
+        <p:nvSpPr>
+          <p:cNvPr id="5" name="Slide Number Placeholder 4">
+            <a:extLst>
+              <a:ext uri="{FF2B5EF4-FFF2-40B4-BE49-F238E27FC236}">
+                <a16:creationId xmlns:a16="http://schemas.microsoft.com/office/drawing/2014/main" id="{80A790D5-177D-B6A2-0E90-81EF4FE37C9F}"/>
+              </a:ext>
+            </a:extLst>
+          </p:cNvPr>
+          <p:cNvSpPr>
+            <a:spLocks noGrp="1"/>
+          </p:cNvSpPr>
+          <p:nvPr>
+            <p:ph type="sldNum" sz="quarter" idx="12"/>
+          </p:nvPr>
+        </p:nvSpPr>
+        <p:spPr>
+          <a:xfrm>
+            <a:off x="11034184" y="6356350"/>
+            <a:ext cx="514349" cy="365125"/>
+          </a:xfrm>
+        </p:spPr>
+        <p:txBody>
+          <a:bodyPr>
+            <a:normAutofit/>
+          </a:bodyPr>
+          <a:lstStyle/>
+          <a:p>
+            <a:pPr>
+              <a:spcAft>
+                <a:spcPts val="600"/>
+              </a:spcAft>
+            </a:pPr>
+            <a:fld id="{C98AED0B-3B00-448B-836B-316F7AA19B4B}" type="slidenum">
+              <a:rPr lang="en-US">
+                <a:solidFill>
+                  <a:schemeClr val="tx1">
+                    <a:alpha val="80000"/>
+                  </a:schemeClr>
+                </a:solidFill>
+              </a:rPr>
+              <a:pPr>
+                <a:spcAft>
+                  <a:spcPts val="600"/>
+                </a:spcAft>
+              </a:pPr>
+              <a:t>11</a:t>
+            </a:fld>
+            <a:endParaRPr lang="en-US">
+              <a:solidFill>
+                <a:schemeClr val="tx1">
+                  <a:alpha val="80000"/>
+                </a:schemeClr>
+              </a:solidFill>
+            </a:endParaRPr>
+          </a:p>
+        </p:txBody>
+      </p:sp>
+      <p:sp>
+        <p:nvSpPr>
+          <p:cNvPr id="8" name="Title 1">
+            <a:extLst>
+              <a:ext uri="{FF2B5EF4-FFF2-40B4-BE49-F238E27FC236}">
+                <a16:creationId xmlns:a16="http://schemas.microsoft.com/office/drawing/2014/main" id="{58FF4C60-14F0-104E-A6FA-3FCA6169A054}"/>
+              </a:ext>
+            </a:extLst>
+          </p:cNvPr>
+          <p:cNvSpPr txBox="1">
+            <a:spLocks/>
+          </p:cNvSpPr>
+          <p:nvPr/>
+        </p:nvSpPr>
+        <p:spPr>
+          <a:xfrm>
+            <a:off x="838200" y="365126"/>
+            <a:ext cx="10515600" cy="638922"/>
+          </a:xfrm>
+          <a:prstGeom prst="rect">
+            <a:avLst/>
+          </a:prstGeom>
+        </p:spPr>
+        <p:txBody>
+          <a:bodyPr vert="horz" lIns="91440" tIns="45720" rIns="91440" bIns="45720" rtlCol="0" anchor="ctr">
+            <a:normAutofit fontScale="97500"/>
+          </a:bodyPr>
+          <a:lstStyle>
+            <a:lvl1pPr algn="l" defTabSz="914400" rtl="0" eaLnBrk="1" latinLnBrk="0" hangingPunct="1">
+              <a:lnSpc>
+                <a:spcPct val="90000"/>
+              </a:lnSpc>
+              <a:spcBef>
+                <a:spcPct val="0"/>
+              </a:spcBef>
+              <a:buNone/>
+              <a:defRPr sz="4400" kern="1200">
+                <a:solidFill>
+                  <a:schemeClr val="tx1"/>
+                </a:solidFill>
+                <a:latin typeface="+mj-lt"/>
+                <a:ea typeface="+mj-ea"/>
+                <a:cs typeface="+mj-cs"/>
+              </a:defRPr>
+            </a:lvl1pPr>
+          </a:lstStyle>
+          <a:p>
+            <a:r>
+              <a:rPr lang="en-US" sz="3600" b="1" dirty="0">
+                <a:solidFill>
+                  <a:srgbClr val="1E40AF"/>
+                </a:solidFill>
+                <a:latin typeface="-apple-system"/>
+              </a:rPr>
+              <a:t>Knowledge Distillation : KL Divergence Calculation  </a:t>
+            </a:r>
+          </a:p>
+        </p:txBody>
+      </p:sp>
+      <p:pic>
+        <p:nvPicPr>
+          <p:cNvPr id="9" name="Graphic 8" descr="Head with gears with solid fill">
+            <a:extLst>
+              <a:ext uri="{FF2B5EF4-FFF2-40B4-BE49-F238E27FC236}">
+                <a16:creationId xmlns:a16="http://schemas.microsoft.com/office/drawing/2014/main" id="{711BF609-4E06-C625-E21F-8F7A0F3EEDF2}"/>
+              </a:ext>
+            </a:extLst>
+          </p:cNvPr>
+          <p:cNvPicPr>
+            <a:picLocks noChangeAspect="1"/>
+          </p:cNvPicPr>
+          <p:nvPr/>
+        </p:nvPicPr>
+        <p:blipFill>
+          <a:blip r:embed="rId2">
+            <a:extLst>
+              <a:ext uri="{96DAC541-7B7A-43D3-8B79-37D633B846F1}">
+                <asvg:svgBlip xmlns:asvg="http://schemas.microsoft.com/office/drawing/2016/SVG/main" r:embed="rId3"/>
+              </a:ext>
+            </a:extLst>
+          </a:blip>
+          <a:stretch>
+            <a:fillRect/>
+          </a:stretch>
+        </p:blipFill>
+        <p:spPr>
+          <a:xfrm>
+            <a:off x="461877" y="365125"/>
+            <a:ext cx="483696" cy="483696"/>
+          </a:xfrm>
+          <a:prstGeom prst="rect">
+            <a:avLst/>
+          </a:prstGeom>
+        </p:spPr>
+      </p:pic>
+      <p:sp>
+        <p:nvSpPr>
+          <p:cNvPr id="21" name="Title 20">
+            <a:extLst>
+              <a:ext uri="{FF2B5EF4-FFF2-40B4-BE49-F238E27FC236}">
+                <a16:creationId xmlns:a16="http://schemas.microsoft.com/office/drawing/2014/main" id="{4E0E06D5-ADF4-70A9-DFE2-02E9DB53441F}"/>
+              </a:ext>
+            </a:extLst>
+          </p:cNvPr>
+          <p:cNvSpPr>
+            <a:spLocks noGrp="1"/>
+          </p:cNvSpPr>
+          <p:nvPr>
+            <p:ph type="title"/>
+          </p:nvPr>
+        </p:nvSpPr>
+        <p:spPr>
+          <a:xfrm>
+            <a:off x="461877" y="1370015"/>
+            <a:ext cx="10515600" cy="1325563"/>
+          </a:xfrm>
+        </p:spPr>
+        <p:txBody>
+          <a:bodyPr/>
+          <a:lstStyle/>
+          <a:p>
+            <a:r>
+              <a:rPr lang="en-US" dirty="0"/>
+              <a:t>    </a:t>
+            </a:r>
+          </a:p>
+        </p:txBody>
+      </p:sp>
+      <p:sp>
+        <p:nvSpPr>
+          <p:cNvPr id="2" name="Rectangle 1">
+            <a:extLst>
+              <a:ext uri="{FF2B5EF4-FFF2-40B4-BE49-F238E27FC236}">
+                <a16:creationId xmlns:a16="http://schemas.microsoft.com/office/drawing/2014/main" id="{E9917320-FB89-800E-52DA-6DE65BC393A1}"/>
               </a:ext>
             </a:extLst>
           </p:cNvPr>
@@ -9713,8 +9281,8 @@
         </p:nvSpPr>
         <p:spPr>
           <a:xfrm>
-            <a:off x="5280660" y="1998711"/>
-            <a:ext cx="5925312" cy="2666109"/>
+            <a:off x="638451" y="1790449"/>
+            <a:ext cx="5204565" cy="3494783"/>
           </a:xfrm>
           <a:prstGeom prst="rect">
             <a:avLst/>
@@ -9741,34 +9309,36 @@
           <a:lstStyle/>
           <a:p>
             <a:r>
-              <a:rPr lang="en-US" sz="1000" b="1" dirty="0">
-                <a:solidFill>
-                  <a:schemeClr val="bg1"/>
-                </a:solidFill>
-                <a:highlight>
-                  <a:srgbClr val="000000"/>
-                </a:highlight>
-                <a:latin typeface="Courier New" panose="02070309020205020404" pitchFamily="49" charset="0"/>
-              </a:rPr>
-              <a:t># Teacher distribution (rich knowledge) </a:t>
-            </a:r>
-          </a:p>
-          <a:p>
-            <a:r>
-              <a:rPr lang="en-US" sz="1000" b="1" dirty="0">
-                <a:solidFill>
-                  <a:schemeClr val="bg1"/>
-                </a:solidFill>
-                <a:highlight>
-                  <a:srgbClr val="000000"/>
-                </a:highlight>
-                <a:latin typeface="Courier New" panose="02070309020205020404" pitchFamily="49" charset="0"/>
-              </a:rPr>
-              <a:t>Teacher = [car=0.6, truck=0.3, bus=0.1] # "Mostly car, some truck features" </a:t>
-            </a:r>
-          </a:p>
-          <a:p>
-            <a:endParaRPr lang="en-US" sz="1000" b="1" dirty="0">
+              <a:rPr lang="en-US" sz="1000" i="1" dirty="0">
+                <a:solidFill>
+                  <a:schemeClr val="bg1"/>
+                </a:solidFill>
+                <a:effectLst/>
+              </a:rPr>
+              <a:t># Teacher scaled: [2.5/2, 4.0/2, 1.2/2] = [1.25, 2.0, 0.6]</a:t>
+            </a:r>
+            <a:r>
+              <a:rPr lang="en-US" sz="1000" dirty="0">
+                <a:solidFill>
+                  <a:schemeClr val="bg1"/>
+                </a:solidFill>
+              </a:rPr>
+              <a:t> </a:t>
+            </a:r>
+          </a:p>
+          <a:p>
+            <a:r>
+              <a:rPr lang="en-US" sz="1000" i="1" dirty="0">
+                <a:solidFill>
+                  <a:schemeClr val="bg1"/>
+                </a:solidFill>
+                <a:effectLst/>
+              </a:rPr>
+              <a:t># Student scaled: [1.8/2, 3.2/2, 0.9/2] = [0.9, 1.6, 0.45]</a:t>
+            </a:r>
+          </a:p>
+          <a:p>
+            <a:endParaRPr lang="en-US" sz="1000" b="1" i="1" dirty="0">
               <a:solidFill>
                 <a:schemeClr val="bg1"/>
               </a:solidFill>
@@ -9780,500 +9350,241 @@
           </a:p>
           <a:p>
             <a:r>
-              <a:rPr lang="en-US" sz="1000" b="1" dirty="0">
-                <a:solidFill>
-                  <a:schemeClr val="bg1"/>
-                </a:solidFill>
-                <a:highlight>
-                  <a:srgbClr val="000000"/>
-                </a:highlight>
-                <a:latin typeface="Courier New" panose="02070309020205020404" pitchFamily="49" charset="0"/>
-              </a:rPr>
-              <a:t># Student distribution (learning) </a:t>
-            </a:r>
-          </a:p>
-          <a:p>
-            <a:r>
-              <a:rPr lang="en-US" sz="1000" b="1" dirty="0">
-                <a:solidFill>
-                  <a:schemeClr val="bg1"/>
-                </a:solidFill>
-                <a:highlight>
-                  <a:srgbClr val="000000"/>
-                </a:highlight>
-                <a:latin typeface="Courier New" panose="02070309020205020404" pitchFamily="49" charset="0"/>
-              </a:rPr>
-              <a:t>Student = [car=0.7, truck=0.2, bus=0.1] </a:t>
-            </a:r>
-          </a:p>
-          <a:p>
-            <a:endParaRPr lang="en-US" sz="1000" b="1" dirty="0">
+              <a:rPr lang="en-US" sz="1000" i="1" dirty="0">
+                <a:solidFill>
+                  <a:schemeClr val="bg1"/>
+                </a:solidFill>
+                <a:effectLst/>
+              </a:rPr>
+              <a:t># Teacher exponentials:</a:t>
+            </a:r>
+            <a:r>
+              <a:rPr lang="en-US" sz="1000" dirty="0">
+                <a:solidFill>
+                  <a:schemeClr val="bg1"/>
+                </a:solidFill>
+              </a:rPr>
+              <a:t> </a:t>
+            </a:r>
+          </a:p>
+          <a:p>
+            <a:r>
+              <a:rPr lang="en-US" sz="1000" i="1" dirty="0" err="1">
+                <a:solidFill>
+                  <a:schemeClr val="bg1"/>
+                </a:solidFill>
+              </a:rPr>
+              <a:t>exp_t</a:t>
+            </a:r>
+            <a:r>
+              <a:rPr lang="en-US" sz="1000" i="1" dirty="0">
+                <a:solidFill>
+                  <a:schemeClr val="bg1"/>
+                </a:solidFill>
+              </a:rPr>
+              <a:t> = [exp(1.25), exp(2.0), exp(0.6)] = [3.49, 7.39, 1.82] </a:t>
+            </a:r>
+          </a:p>
+          <a:p>
+            <a:r>
+              <a:rPr lang="en-US" sz="1000" i="1" dirty="0" err="1">
+                <a:solidFill>
+                  <a:schemeClr val="bg1"/>
+                </a:solidFill>
+              </a:rPr>
+              <a:t>sum_t</a:t>
+            </a:r>
+            <a:r>
+              <a:rPr lang="en-US" sz="1000" i="1" dirty="0">
+                <a:solidFill>
+                  <a:schemeClr val="bg1"/>
+                </a:solidFill>
+              </a:rPr>
+              <a:t> = 3.49 + 7.39 + 1.82 = 12.70 </a:t>
+            </a:r>
+          </a:p>
+          <a:p>
+            <a:r>
+              <a:rPr lang="en-US" sz="1000" i="1" dirty="0">
+                <a:solidFill>
+                  <a:schemeClr val="bg1"/>
+                </a:solidFill>
+              </a:rPr>
+              <a:t># Teacher probabilities (P): </a:t>
+            </a:r>
+          </a:p>
+          <a:p>
+            <a:r>
+              <a:rPr lang="en-US" sz="1000" i="1" dirty="0">
+                <a:solidFill>
+                  <a:schemeClr val="bg1"/>
+                </a:solidFill>
+              </a:rPr>
+              <a:t>P = [3.49/12.70, 7.39/12.70, 1.82/12.70] = [0.275, 0.582, 0.143]</a:t>
+            </a:r>
+          </a:p>
+          <a:p>
+            <a:endParaRPr lang="en-US" sz="1000" i="1" dirty="0">
               <a:solidFill>
                 <a:schemeClr val="bg1"/>
               </a:solidFill>
-              <a:highlight>
-                <a:srgbClr val="000000"/>
-              </a:highlight>
-              <a:latin typeface="Courier New" panose="02070309020205020404" pitchFamily="49" charset="0"/>
             </a:endParaRPr>
           </a:p>
           <a:p>
             <a:r>
-              <a:rPr lang="en-US" sz="1000" b="1" dirty="0">
-                <a:solidFill>
-                  <a:schemeClr val="bg1"/>
-                </a:solidFill>
-                <a:highlight>
-                  <a:srgbClr val="000000"/>
-                </a:highlight>
-                <a:latin typeface="Courier New" panose="02070309020205020404" pitchFamily="49" charset="0"/>
-              </a:rPr>
-              <a:t># "Definitely car" </a:t>
-            </a:r>
-          </a:p>
-          <a:p>
-            <a:r>
-              <a:rPr lang="en-US" sz="1000" b="1" dirty="0">
-                <a:solidFill>
-                  <a:schemeClr val="bg1"/>
-                </a:solidFill>
-                <a:highlight>
-                  <a:srgbClr val="000000"/>
-                </a:highlight>
-                <a:latin typeface="Courier New" panose="02070309020205020404" pitchFamily="49" charset="0"/>
-              </a:rPr>
-              <a:t># KL divergence measures how well student matches teacher's wisdom </a:t>
-            </a:r>
-          </a:p>
-          <a:p>
-            <a:r>
-              <a:rPr lang="en-US" sz="1000" b="1" dirty="0" err="1">
-                <a:solidFill>
-                  <a:schemeClr val="bg1"/>
-                </a:solidFill>
-                <a:highlight>
-                  <a:srgbClr val="000000"/>
-                </a:highlight>
-                <a:latin typeface="Courier New" panose="02070309020205020404" pitchFamily="49" charset="0"/>
-              </a:rPr>
-              <a:t>KL_loss</a:t>
-            </a:r>
-            <a:r>
-              <a:rPr lang="en-US" sz="1000" b="1" dirty="0">
-                <a:solidFill>
-                  <a:schemeClr val="bg1"/>
-                </a:solidFill>
-                <a:highlight>
-                  <a:srgbClr val="000000"/>
-                </a:highlight>
-                <a:latin typeface="Courier New" panose="02070309020205020404" pitchFamily="49" charset="0"/>
-              </a:rPr>
-              <a:t> = KL(Teacher || Student)</a:t>
-            </a:r>
-          </a:p>
-          <a:p>
-            <a:pPr algn="ctr"/>
-            <a:endParaRPr lang="en-US" sz="1000" b="1" dirty="0">
+              <a:rPr lang="en-US" sz="1000" i="1" dirty="0">
+                <a:solidFill>
+                  <a:schemeClr val="bg1"/>
+                </a:solidFill>
+              </a:rPr>
+              <a:t># Student exponentials: </a:t>
+            </a:r>
+          </a:p>
+          <a:p>
+            <a:r>
+              <a:rPr lang="en-US" sz="1000" i="1" dirty="0" err="1">
+                <a:solidFill>
+                  <a:schemeClr val="bg1"/>
+                </a:solidFill>
+              </a:rPr>
+              <a:t>exp_s</a:t>
+            </a:r>
+            <a:r>
+              <a:rPr lang="en-US" sz="1000" i="1" dirty="0">
+                <a:solidFill>
+                  <a:schemeClr val="bg1"/>
+                </a:solidFill>
+              </a:rPr>
+              <a:t> = [exp(0.9), exp(1.6), exp(0.45)] = [2.46, 4.95, 1.57] </a:t>
+            </a:r>
+          </a:p>
+          <a:p>
+            <a:r>
+              <a:rPr lang="en-US" sz="1000" i="1" dirty="0" err="1">
+                <a:solidFill>
+                  <a:schemeClr val="bg1"/>
+                </a:solidFill>
+              </a:rPr>
+              <a:t>sum_s</a:t>
+            </a:r>
+            <a:r>
+              <a:rPr lang="en-US" sz="1000" i="1" dirty="0">
+                <a:solidFill>
+                  <a:schemeClr val="bg1"/>
+                </a:solidFill>
+              </a:rPr>
+              <a:t> = 2.46 + 4.95 + 1.57 = 8.98 </a:t>
+            </a:r>
+          </a:p>
+          <a:p>
+            <a:endParaRPr lang="en-US" sz="1000" i="1" dirty="0">
               <a:solidFill>
                 <a:schemeClr val="bg1"/>
               </a:solidFill>
-              <a:highlight>
-                <a:srgbClr val="000000"/>
-              </a:highlight>
-              <a:latin typeface="Courier New" panose="02070309020205020404" pitchFamily="49" charset="0"/>
             </a:endParaRPr>
           </a:p>
           <a:p>
             <a:r>
-              <a:rPr lang="en-US" sz="1000" b="1" dirty="0">
-                <a:solidFill>
-                  <a:schemeClr val="bg1"/>
-                </a:solidFill>
-                <a:highlight>
-                  <a:srgbClr val="000000"/>
-                </a:highlight>
-                <a:latin typeface="Courier New" panose="02070309020205020404" pitchFamily="49" charset="0"/>
-              </a:rPr>
-              <a:t># Perfect knowledge transfer: KL(Teacher || Student) = 0 </a:t>
-            </a:r>
-          </a:p>
-          <a:p>
-            <a:r>
-              <a:rPr lang="en-US" sz="1000" b="1" dirty="0">
-                <a:solidFill>
-                  <a:schemeClr val="bg1"/>
-                </a:solidFill>
-                <a:highlight>
-                  <a:srgbClr val="000000"/>
-                </a:highlight>
-                <a:latin typeface="Courier New" panose="02070309020205020404" pitchFamily="49" charset="0"/>
-              </a:rPr>
-              <a:t># Student exactly matches teacher </a:t>
-            </a:r>
-          </a:p>
-          <a:p>
-            <a:r>
-              <a:rPr lang="en-US" sz="1000" b="1" dirty="0">
-                <a:solidFill>
-                  <a:schemeClr val="bg1"/>
-                </a:solidFill>
-                <a:highlight>
-                  <a:srgbClr val="000000"/>
-                </a:highlight>
-                <a:latin typeface="Courier New" panose="02070309020205020404" pitchFamily="49" charset="0"/>
-              </a:rPr>
-              <a:t># Poor knowledge transfer: KL(Teacher || Student) = high value </a:t>
-            </a:r>
-          </a:p>
-          <a:p>
-            <a:r>
-              <a:rPr lang="en-US" sz="1000" b="1" dirty="0">
-                <a:solidFill>
-                  <a:schemeClr val="bg1"/>
-                </a:solidFill>
-                <a:highlight>
-                  <a:srgbClr val="000000"/>
-                </a:highlight>
-                <a:latin typeface="Courier New" panose="02070309020205020404" pitchFamily="49" charset="0"/>
-              </a:rPr>
-              <a:t># Student very different from teacher</a:t>
-            </a:r>
-          </a:p>
-        </p:txBody>
-      </p:sp>
-      <p:sp>
-        <p:nvSpPr>
-          <p:cNvPr id="4" name="Footer Placeholder 3">
-            <a:extLst>
-              <a:ext uri="{FF2B5EF4-FFF2-40B4-BE49-F238E27FC236}">
-                <a16:creationId xmlns:a16="http://schemas.microsoft.com/office/drawing/2014/main" id="{B8027B5C-B1A1-0376-4174-FFF61C554492}"/>
-              </a:ext>
-            </a:extLst>
-          </p:cNvPr>
-          <p:cNvSpPr>
-            <a:spLocks noGrp="1"/>
-          </p:cNvSpPr>
-          <p:nvPr>
-            <p:ph type="ftr" sz="quarter" idx="11"/>
-          </p:nvPr>
-        </p:nvSpPr>
-        <p:spPr>
-          <a:xfrm>
-            <a:off x="1028700" y="6356350"/>
-            <a:ext cx="6210300" cy="365125"/>
-          </a:xfrm>
-        </p:spPr>
-        <p:txBody>
-          <a:bodyPr>
-            <a:normAutofit/>
-          </a:bodyPr>
-          <a:lstStyle/>
-          <a:p>
-            <a:pPr algn="r">
-              <a:lnSpc>
-                <a:spcPct val="90000"/>
-              </a:lnSpc>
-              <a:spcAft>
-                <a:spcPts val="504"/>
-              </a:spcAft>
-            </a:pPr>
-            <a:r>
-              <a:rPr lang="en-US" sz="900" dirty="0">
-                <a:solidFill>
-                  <a:schemeClr val="tx1">
-                    <a:alpha val="80000"/>
-                  </a:schemeClr>
-                </a:solidFill>
-              </a:rPr>
-              <a:t>International University Of Applied Sciences</a:t>
-            </a:r>
-          </a:p>
-        </p:txBody>
-      </p:sp>
-      <p:sp>
-        <p:nvSpPr>
-          <p:cNvPr id="3" name="Date Placeholder 2">
-            <a:extLst>
-              <a:ext uri="{FF2B5EF4-FFF2-40B4-BE49-F238E27FC236}">
-                <a16:creationId xmlns:a16="http://schemas.microsoft.com/office/drawing/2014/main" id="{8B0DD3C9-E5D2-AE60-3AFE-8A43297A9FBC}"/>
-              </a:ext>
-            </a:extLst>
-          </p:cNvPr>
-          <p:cNvSpPr>
-            <a:spLocks noGrp="1"/>
-          </p:cNvSpPr>
-          <p:nvPr>
-            <p:ph type="dt" sz="half" idx="10"/>
-          </p:nvPr>
-        </p:nvSpPr>
-        <p:spPr>
-          <a:xfrm>
-            <a:off x="292608" y="6356349"/>
-            <a:ext cx="3085338" cy="365125"/>
-          </a:xfrm>
-        </p:spPr>
-        <p:txBody>
-          <a:bodyPr>
-            <a:normAutofit/>
-          </a:bodyPr>
-          <a:lstStyle/>
-          <a:p>
-            <a:pPr algn="r">
-              <a:lnSpc>
-                <a:spcPct val="90000"/>
-              </a:lnSpc>
-              <a:spcAft>
-                <a:spcPts val="504"/>
-              </a:spcAft>
-            </a:pPr>
-            <a:r>
-              <a:rPr lang="en-US" sz="900" dirty="0">
-                <a:solidFill>
-                  <a:schemeClr val="tx1">
-                    <a:alpha val="80000"/>
-                  </a:schemeClr>
-                </a:solidFill>
-              </a:rPr>
-              <a:t>Knowledge Distillation &amp; Neural Architecture Search</a:t>
-            </a:r>
-          </a:p>
-        </p:txBody>
-      </p:sp>
-      <p:sp>
-        <p:nvSpPr>
-          <p:cNvPr id="5" name="Slide Number Placeholder 4">
-            <a:extLst>
-              <a:ext uri="{FF2B5EF4-FFF2-40B4-BE49-F238E27FC236}">
-                <a16:creationId xmlns:a16="http://schemas.microsoft.com/office/drawing/2014/main" id="{80A790D5-177D-B6A2-0E90-81EF4FE37C9F}"/>
-              </a:ext>
-            </a:extLst>
-          </p:cNvPr>
-          <p:cNvSpPr>
-            <a:spLocks noGrp="1"/>
-          </p:cNvSpPr>
-          <p:nvPr>
-            <p:ph type="sldNum" sz="quarter" idx="12"/>
-          </p:nvPr>
-        </p:nvSpPr>
-        <p:spPr>
-          <a:xfrm>
-            <a:off x="11034184" y="6356350"/>
-            <a:ext cx="514349" cy="365125"/>
-          </a:xfrm>
-        </p:spPr>
-        <p:txBody>
-          <a:bodyPr>
-            <a:normAutofit/>
-          </a:bodyPr>
-          <a:lstStyle/>
-          <a:p>
-            <a:pPr>
-              <a:spcAft>
-                <a:spcPts val="600"/>
-              </a:spcAft>
-            </a:pPr>
-            <a:fld id="{C98AED0B-3B00-448B-836B-316F7AA19B4B}" type="slidenum">
-              <a:rPr lang="en-US">
-                <a:solidFill>
-                  <a:schemeClr val="tx1">
-                    <a:alpha val="80000"/>
-                  </a:schemeClr>
-                </a:solidFill>
-              </a:rPr>
-              <a:pPr>
-                <a:spcAft>
-                  <a:spcPts val="600"/>
-                </a:spcAft>
-              </a:pPr>
-              <a:t>11</a:t>
-            </a:fld>
-            <a:endParaRPr lang="en-US">
+              <a:rPr lang="en-US" sz="1000" i="1" dirty="0">
+                <a:solidFill>
+                  <a:schemeClr val="bg1"/>
+                </a:solidFill>
+              </a:rPr>
+              <a:t># Student </a:t>
+            </a:r>
+            <a:r>
+              <a:rPr lang="en-US" sz="1000" i="1" dirty="0" err="1">
+                <a:solidFill>
+                  <a:schemeClr val="bg1"/>
+                </a:solidFill>
+              </a:rPr>
+              <a:t>log_softmax</a:t>
+            </a:r>
+            <a:r>
+              <a:rPr lang="en-US" sz="1000" i="1" dirty="0">
+                <a:solidFill>
+                  <a:schemeClr val="bg1"/>
+                </a:solidFill>
+              </a:rPr>
+              <a:t> (input): </a:t>
+            </a:r>
+          </a:p>
+          <a:p>
+            <a:r>
+              <a:rPr lang="en-US" sz="1000" i="1" dirty="0" err="1">
+                <a:solidFill>
+                  <a:schemeClr val="bg1"/>
+                </a:solidFill>
+              </a:rPr>
+              <a:t>log_softmax</a:t>
+            </a:r>
+            <a:r>
+              <a:rPr lang="en-US" sz="1000" i="1" dirty="0">
+                <a:solidFill>
+                  <a:schemeClr val="bg1"/>
+                </a:solidFill>
+              </a:rPr>
+              <a:t> = [0.9 - log(8.98), 1.6 - log(8.98), 0.45 - log(8.98)] </a:t>
+            </a:r>
+          </a:p>
+          <a:p>
+            <a:r>
+              <a:rPr lang="en-US" sz="1000" i="1" dirty="0" err="1">
+                <a:solidFill>
+                  <a:schemeClr val="bg1"/>
+                </a:solidFill>
+              </a:rPr>
+              <a:t>log_softmax</a:t>
+            </a:r>
+            <a:r>
+              <a:rPr lang="en-US" sz="1000" i="1" dirty="0">
+                <a:solidFill>
+                  <a:schemeClr val="bg1"/>
+                </a:solidFill>
+              </a:rPr>
+              <a:t> = [0.9 - 2.195, 1.6 - 2.195, 0.45 - 2.195] </a:t>
+            </a:r>
+          </a:p>
+          <a:p>
+            <a:r>
+              <a:rPr lang="en-US" sz="1000" i="1" dirty="0" err="1">
+                <a:solidFill>
+                  <a:schemeClr val="bg1"/>
+                </a:solidFill>
+              </a:rPr>
+              <a:t>log_softmax</a:t>
+            </a:r>
+            <a:r>
+              <a:rPr lang="en-US" sz="1000" i="1" dirty="0">
+                <a:solidFill>
+                  <a:schemeClr val="bg1"/>
+                </a:solidFill>
+              </a:rPr>
+              <a:t> = [-1.295, -0.595, -1.745]</a:t>
+            </a:r>
+          </a:p>
+          <a:p>
+            <a:endParaRPr lang="en-US" sz="1000" i="1" dirty="0">
               <a:solidFill>
-                <a:schemeClr val="tx1">
-                  <a:alpha val="80000"/>
-                </a:schemeClr>
+                <a:schemeClr val="bg1"/>
               </a:solidFill>
             </a:endParaRPr>
           </a:p>
-        </p:txBody>
-      </p:sp>
-      <p:sp>
-        <p:nvSpPr>
-          <p:cNvPr id="8" name="Title 1">
-            <a:extLst>
-              <a:ext uri="{FF2B5EF4-FFF2-40B4-BE49-F238E27FC236}">
-                <a16:creationId xmlns:a16="http://schemas.microsoft.com/office/drawing/2014/main" id="{58FF4C60-14F0-104E-A6FA-3FCA6169A054}"/>
-              </a:ext>
-            </a:extLst>
-          </p:cNvPr>
-          <p:cNvSpPr txBox="1">
-            <a:spLocks/>
-          </p:cNvSpPr>
-          <p:nvPr/>
-        </p:nvSpPr>
-        <p:spPr>
-          <a:xfrm>
-            <a:off x="838200" y="365126"/>
-            <a:ext cx="10515600" cy="638922"/>
-          </a:xfrm>
-          <a:prstGeom prst="rect">
-            <a:avLst/>
-          </a:prstGeom>
-        </p:spPr>
-        <p:txBody>
-          <a:bodyPr vert="horz" lIns="91440" tIns="45720" rIns="91440" bIns="45720" rtlCol="0" anchor="ctr">
-            <a:normAutofit fontScale="97500"/>
-          </a:bodyPr>
-          <a:lstStyle>
-            <a:lvl1pPr algn="l" defTabSz="914400" rtl="0" eaLnBrk="1" latinLnBrk="0" hangingPunct="1">
-              <a:lnSpc>
-                <a:spcPct val="90000"/>
-              </a:lnSpc>
-              <a:spcBef>
-                <a:spcPct val="0"/>
-              </a:spcBef>
-              <a:buNone/>
-              <a:defRPr sz="4400" kern="1200">
-                <a:solidFill>
-                  <a:schemeClr val="tx1"/>
-                </a:solidFill>
-                <a:latin typeface="+mj-lt"/>
-                <a:ea typeface="+mj-ea"/>
-                <a:cs typeface="+mj-cs"/>
-              </a:defRPr>
-            </a:lvl1pPr>
-          </a:lstStyle>
-          <a:p>
-            <a:r>
-              <a:rPr lang="en-US" sz="3600" b="1" dirty="0">
-                <a:solidFill>
-                  <a:srgbClr val="1E40AF"/>
-                </a:solidFill>
-                <a:latin typeface="-apple-system"/>
-              </a:rPr>
-              <a:t>Knowledge Distillation : KL Divergence Formula </a:t>
-            </a:r>
-          </a:p>
-        </p:txBody>
-      </p:sp>
-      <p:pic>
-        <p:nvPicPr>
-          <p:cNvPr id="9" name="Graphic 8" descr="Head with gears with solid fill">
-            <a:extLst>
-              <a:ext uri="{FF2B5EF4-FFF2-40B4-BE49-F238E27FC236}">
-                <a16:creationId xmlns:a16="http://schemas.microsoft.com/office/drawing/2014/main" id="{711BF609-4E06-C625-E21F-8F7A0F3EEDF2}"/>
-              </a:ext>
-            </a:extLst>
-          </p:cNvPr>
-          <p:cNvPicPr>
-            <a:picLocks noChangeAspect="1"/>
-          </p:cNvPicPr>
-          <p:nvPr/>
-        </p:nvPicPr>
-        <p:blipFill>
-          <a:blip r:embed="rId2">
-            <a:extLst>
-              <a:ext uri="{96DAC541-7B7A-43D3-8B79-37D633B846F1}">
-                <asvg:svgBlip xmlns:asvg="http://schemas.microsoft.com/office/drawing/2016/SVG/main" r:embed="rId3"/>
-              </a:ext>
-            </a:extLst>
-          </a:blip>
-          <a:stretch>
-            <a:fillRect/>
-          </a:stretch>
-        </p:blipFill>
-        <p:spPr>
-          <a:xfrm>
-            <a:off x="461877" y="365125"/>
-            <a:ext cx="483696" cy="483696"/>
-          </a:xfrm>
-          <a:prstGeom prst="rect">
-            <a:avLst/>
-          </a:prstGeom>
-        </p:spPr>
-      </p:pic>
-      <p:sp>
-        <p:nvSpPr>
-          <p:cNvPr id="7" name="TextBox 6">
-            <a:extLst>
-              <a:ext uri="{FF2B5EF4-FFF2-40B4-BE49-F238E27FC236}">
-                <a16:creationId xmlns:a16="http://schemas.microsoft.com/office/drawing/2014/main" id="{D94BFA86-F18C-8E61-FA87-22913DCFF684}"/>
-              </a:ext>
-            </a:extLst>
-          </p:cNvPr>
-          <p:cNvSpPr txBox="1"/>
-          <p:nvPr/>
-        </p:nvSpPr>
-        <p:spPr>
-          <a:xfrm>
-            <a:off x="838200" y="1219855"/>
-            <a:ext cx="6944868" cy="646331"/>
-          </a:xfrm>
-          <a:prstGeom prst="rect">
-            <a:avLst/>
-          </a:prstGeom>
-          <a:noFill/>
-        </p:spPr>
-        <p:txBody>
-          <a:bodyPr wrap="square">
-            <a:spAutoFit/>
-          </a:bodyPr>
-          <a:lstStyle/>
-          <a:p>
-            <a:r>
-              <a:rPr lang="en-US" dirty="0"/>
-              <a:t>KL divergence measures </a:t>
-            </a:r>
-            <a:r>
-              <a:rPr lang="en-US" b="1" dirty="0"/>
-              <a:t>how different two probability distributions are</a:t>
-            </a:r>
-            <a:r>
-              <a:rPr lang="en-US" dirty="0"/>
-              <a:t> - it's like a "distance" between distributions</a:t>
-            </a:r>
-          </a:p>
-        </p:txBody>
-      </p:sp>
-      <p:sp>
-        <p:nvSpPr>
-          <p:cNvPr id="21" name="Title 20">
-            <a:extLst>
-              <a:ext uri="{FF2B5EF4-FFF2-40B4-BE49-F238E27FC236}">
-                <a16:creationId xmlns:a16="http://schemas.microsoft.com/office/drawing/2014/main" id="{4E0E06D5-ADF4-70A9-DFE2-02E9DB53441F}"/>
-              </a:ext>
-            </a:extLst>
-          </p:cNvPr>
-          <p:cNvSpPr>
-            <a:spLocks noGrp="1"/>
-          </p:cNvSpPr>
-          <p:nvPr>
-            <p:ph type="title"/>
-          </p:nvPr>
-        </p:nvSpPr>
-        <p:spPr>
-          <a:xfrm>
-            <a:off x="461877" y="1370015"/>
-            <a:ext cx="10515600" cy="1325563"/>
-          </a:xfrm>
-        </p:spPr>
-        <p:txBody>
-          <a:bodyPr/>
-          <a:lstStyle/>
-          <a:p>
-            <a:r>
-              <a:rPr lang="en-US" dirty="0"/>
-              <a:t>    </a:t>
-            </a:r>
-          </a:p>
-        </p:txBody>
-      </p:sp>
-      <p:sp>
-        <p:nvSpPr>
-          <p:cNvPr id="25" name="Rectangle 24">
-            <a:extLst>
-              <a:ext uri="{FF2B5EF4-FFF2-40B4-BE49-F238E27FC236}">
-                <a16:creationId xmlns:a16="http://schemas.microsoft.com/office/drawing/2014/main" id="{1234AE3B-EF78-1C5D-3FCE-9070671EB29A}"/>
+          <a:p>
+            <a:endParaRPr lang="en-US" sz="1000" i="1" dirty="0">
+              <a:solidFill>
+                <a:schemeClr val="bg1"/>
+              </a:solidFill>
+            </a:endParaRPr>
+          </a:p>
+        </p:txBody>
+      </p:sp>
+      <p:sp>
+        <p:nvSpPr>
+          <p:cNvPr id="6" name="Rectangle 5">
+            <a:extLst>
+              <a:ext uri="{FF2B5EF4-FFF2-40B4-BE49-F238E27FC236}">
+                <a16:creationId xmlns:a16="http://schemas.microsoft.com/office/drawing/2014/main" id="{626FCD9A-FB33-B5FB-2852-CD0207D766B4}"/>
               </a:ext>
             </a:extLst>
           </p:cNvPr>
@@ -10282,8 +9593,8 @@
         </p:nvSpPr>
         <p:spPr>
           <a:xfrm>
-            <a:off x="1916049" y="2642401"/>
-            <a:ext cx="2923794" cy="1203865"/>
+            <a:off x="6019590" y="1790449"/>
+            <a:ext cx="5204565" cy="3494783"/>
           </a:xfrm>
           <a:prstGeom prst="rect">
             <a:avLst/>
@@ -10310,54 +9621,1499 @@
           <a:lstStyle/>
           <a:p>
             <a:r>
-              <a:rPr lang="en-US" sz="1000" dirty="0"/>
-              <a:t>KL(P||Q) = </a:t>
-            </a:r>
-            <a:r>
-              <a:rPr lang="el-GR" sz="1000" dirty="0"/>
+              <a:rPr lang="en-US" sz="1000" i="1" dirty="0">
+                <a:solidFill>
+                  <a:schemeClr val="bg1"/>
+                </a:solidFill>
+                <a:effectLst/>
+              </a:rPr>
+              <a:t># </a:t>
+            </a:r>
+            <a:r>
+              <a:rPr lang="en-US" sz="1000" i="1" dirty="0" err="1">
+                <a:solidFill>
+                  <a:schemeClr val="bg1"/>
+                </a:solidFill>
+                <a:effectLst/>
+              </a:rPr>
+              <a:t>PyTorch</a:t>
+            </a:r>
+            <a:r>
+              <a:rPr lang="en-US" sz="1000" i="1" dirty="0">
+                <a:solidFill>
+                  <a:schemeClr val="bg1"/>
+                </a:solidFill>
+                <a:effectLst/>
+              </a:rPr>
+              <a:t> formula: KL = </a:t>
+            </a:r>
+            <a:r>
+              <a:rPr lang="el-GR" sz="1000" i="1" dirty="0">
+                <a:solidFill>
+                  <a:schemeClr val="bg1"/>
+                </a:solidFill>
+                <a:effectLst/>
+              </a:rPr>
               <a:t>Σ </a:t>
             </a:r>
             <a:r>
-              <a:rPr lang="en-US" sz="1000" dirty="0"/>
-              <a:t>P(x) × log(P(x)/Q(x))</a:t>
-            </a:r>
-          </a:p>
-          <a:p>
-            <a:endParaRPr lang="en-US" sz="1000" dirty="0"/>
-          </a:p>
-          <a:p>
-            <a:r>
-              <a:rPr lang="en-US" sz="1000" dirty="0"/>
-              <a:t>P = target distribution (teacher probabilities)</a:t>
-            </a:r>
-          </a:p>
-          <a:p>
-            <a:r>
-              <a:rPr lang="en-US" sz="1000" dirty="0"/>
-              <a:t>Q = predicted distribution (student probabilities)</a:t>
-            </a:r>
-          </a:p>
-          <a:p>
-            <a:r>
-              <a:rPr lang="en-US" sz="1000" dirty="0"/>
-              <a:t>x = each possible outcome/class</a:t>
-            </a:r>
-          </a:p>
-          <a:p>
-            <a:r>
-              <a:rPr lang="en-US" sz="1000" dirty="0"/>
-              <a:t>Σ = sum over all classes</a:t>
-            </a:r>
-          </a:p>
-          <a:p>
-            <a:endParaRPr lang="en-US" sz="1000" dirty="0"/>
-          </a:p>
-        </p:txBody>
-      </p:sp>
+              <a:rPr lang="en-US" sz="1000" i="1" dirty="0">
+                <a:solidFill>
+                  <a:schemeClr val="bg1"/>
+                </a:solidFill>
+                <a:effectLst/>
+              </a:rPr>
+              <a:t>target(x) × [log(target(x)) - input(x)]</a:t>
+            </a:r>
+            <a:r>
+              <a:rPr lang="en-US" sz="1000" dirty="0">
+                <a:solidFill>
+                  <a:schemeClr val="bg1"/>
+                </a:solidFill>
+              </a:rPr>
+              <a:t> </a:t>
+            </a:r>
+            <a:r>
+              <a:rPr lang="en-US" sz="1000" i="1" dirty="0">
+                <a:solidFill>
+                  <a:schemeClr val="bg1"/>
+                </a:solidFill>
+                <a:effectLst/>
+              </a:rPr>
+              <a:t># For Car class:</a:t>
+            </a:r>
+          </a:p>
+          <a:p>
+            <a:r>
+              <a:rPr lang="en-US" sz="1000" dirty="0">
+                <a:solidFill>
+                  <a:schemeClr val="bg1"/>
+                </a:solidFill>
+              </a:rPr>
+              <a:t> </a:t>
+            </a:r>
+          </a:p>
+          <a:p>
+            <a:r>
+              <a:rPr lang="en-US" sz="1000" dirty="0" err="1">
+                <a:solidFill>
+                  <a:schemeClr val="bg1"/>
+                </a:solidFill>
+              </a:rPr>
+              <a:t>kl_car</a:t>
+            </a:r>
+            <a:r>
+              <a:rPr lang="en-US" sz="1000" dirty="0">
+                <a:solidFill>
+                  <a:schemeClr val="bg1"/>
+                </a:solidFill>
+              </a:rPr>
+              <a:t>     </a:t>
+            </a:r>
+            <a:r>
+              <a:rPr lang="en-US" sz="1000" dirty="0">
+                <a:solidFill>
+                  <a:schemeClr val="bg1"/>
+                </a:solidFill>
+                <a:effectLst/>
+              </a:rPr>
+              <a:t>=</a:t>
+            </a:r>
+            <a:r>
+              <a:rPr lang="en-US" sz="1000" dirty="0">
+                <a:solidFill>
+                  <a:schemeClr val="bg1"/>
+                </a:solidFill>
+              </a:rPr>
+              <a:t> </a:t>
+            </a:r>
+            <a:r>
+              <a:rPr lang="en-US" sz="1000" dirty="0">
+                <a:solidFill>
+                  <a:schemeClr val="bg1"/>
+                </a:solidFill>
+                <a:effectLst/>
+              </a:rPr>
+              <a:t>0.275</a:t>
+            </a:r>
+            <a:r>
+              <a:rPr lang="en-US" sz="1000" dirty="0">
+                <a:solidFill>
+                  <a:schemeClr val="bg1"/>
+                </a:solidFill>
+              </a:rPr>
+              <a:t> × </a:t>
+            </a:r>
+            <a:r>
+              <a:rPr lang="en-US" sz="1000" dirty="0">
+                <a:solidFill>
+                  <a:schemeClr val="bg1"/>
+                </a:solidFill>
+                <a:effectLst/>
+              </a:rPr>
+              <a:t>[</a:t>
+            </a:r>
+            <a:r>
+              <a:rPr lang="en-US" sz="1000" dirty="0">
+                <a:solidFill>
+                  <a:schemeClr val="bg1"/>
+                </a:solidFill>
+              </a:rPr>
+              <a:t>log</a:t>
+            </a:r>
+            <a:r>
+              <a:rPr lang="en-US" sz="1000" dirty="0">
+                <a:solidFill>
+                  <a:schemeClr val="bg1"/>
+                </a:solidFill>
+                <a:effectLst/>
+              </a:rPr>
+              <a:t>(0.275)</a:t>
+            </a:r>
+            <a:r>
+              <a:rPr lang="en-US" sz="1000" dirty="0">
+                <a:solidFill>
+                  <a:schemeClr val="bg1"/>
+                </a:solidFill>
+              </a:rPr>
+              <a:t> </a:t>
+            </a:r>
+            <a:r>
+              <a:rPr lang="en-US" sz="1000" dirty="0">
+                <a:solidFill>
+                  <a:schemeClr val="bg1"/>
+                </a:solidFill>
+                <a:effectLst/>
+              </a:rPr>
+              <a:t>-</a:t>
+            </a:r>
+            <a:r>
+              <a:rPr lang="en-US" sz="1000" dirty="0">
+                <a:solidFill>
+                  <a:schemeClr val="bg1"/>
+                </a:solidFill>
+              </a:rPr>
+              <a:t> </a:t>
+            </a:r>
+            <a:r>
+              <a:rPr lang="en-US" sz="1000" dirty="0">
+                <a:solidFill>
+                  <a:schemeClr val="bg1"/>
+                </a:solidFill>
+                <a:effectLst/>
+              </a:rPr>
+              <a:t>(-1.295)]</a:t>
+            </a:r>
+            <a:r>
+              <a:rPr lang="en-US" sz="1000" dirty="0">
+                <a:solidFill>
+                  <a:schemeClr val="bg1"/>
+                </a:solidFill>
+              </a:rPr>
+              <a:t> </a:t>
+            </a:r>
+          </a:p>
+          <a:p>
+            <a:pPr lvl="1"/>
+            <a:r>
+              <a:rPr lang="en-US" sz="1000" dirty="0">
+                <a:solidFill>
+                  <a:schemeClr val="bg1"/>
+                </a:solidFill>
+                <a:effectLst/>
+              </a:rPr>
+              <a:t>=</a:t>
+            </a:r>
+            <a:r>
+              <a:rPr lang="en-US" sz="1000" dirty="0">
+                <a:solidFill>
+                  <a:schemeClr val="bg1"/>
+                </a:solidFill>
+              </a:rPr>
+              <a:t> </a:t>
+            </a:r>
+            <a:r>
+              <a:rPr lang="en-US" sz="1000" dirty="0">
+                <a:solidFill>
+                  <a:schemeClr val="bg1"/>
+                </a:solidFill>
+                <a:effectLst/>
+              </a:rPr>
+              <a:t>0.275</a:t>
+            </a:r>
+            <a:r>
+              <a:rPr lang="en-US" sz="1000" dirty="0">
+                <a:solidFill>
+                  <a:schemeClr val="bg1"/>
+                </a:solidFill>
+              </a:rPr>
+              <a:t> × </a:t>
+            </a:r>
+            <a:r>
+              <a:rPr lang="en-US" sz="1000" dirty="0">
+                <a:solidFill>
+                  <a:schemeClr val="bg1"/>
+                </a:solidFill>
+                <a:effectLst/>
+              </a:rPr>
+              <a:t>[-1.291</a:t>
+            </a:r>
+            <a:r>
+              <a:rPr lang="en-US" sz="1000" dirty="0">
+                <a:solidFill>
+                  <a:schemeClr val="bg1"/>
+                </a:solidFill>
+              </a:rPr>
+              <a:t> </a:t>
+            </a:r>
+            <a:r>
+              <a:rPr lang="en-US" sz="1000" dirty="0">
+                <a:solidFill>
+                  <a:schemeClr val="bg1"/>
+                </a:solidFill>
+                <a:effectLst/>
+              </a:rPr>
+              <a:t>-</a:t>
+            </a:r>
+            <a:r>
+              <a:rPr lang="en-US" sz="1000" dirty="0">
+                <a:solidFill>
+                  <a:schemeClr val="bg1"/>
+                </a:solidFill>
+              </a:rPr>
+              <a:t> </a:t>
+            </a:r>
+            <a:r>
+              <a:rPr lang="en-US" sz="1000" dirty="0">
+                <a:solidFill>
+                  <a:schemeClr val="bg1"/>
+                </a:solidFill>
+                <a:effectLst/>
+              </a:rPr>
+              <a:t>(-1.295)]</a:t>
+            </a:r>
+            <a:r>
+              <a:rPr lang="en-US" sz="1000" dirty="0">
+                <a:solidFill>
+                  <a:schemeClr val="bg1"/>
+                </a:solidFill>
+              </a:rPr>
+              <a:t> </a:t>
+            </a:r>
+          </a:p>
+          <a:p>
+            <a:pPr lvl="1"/>
+            <a:r>
+              <a:rPr lang="en-US" sz="1000" dirty="0">
+                <a:solidFill>
+                  <a:schemeClr val="bg1"/>
+                </a:solidFill>
+                <a:effectLst/>
+              </a:rPr>
+              <a:t>=</a:t>
+            </a:r>
+            <a:r>
+              <a:rPr lang="en-US" sz="1000" dirty="0">
+                <a:solidFill>
+                  <a:schemeClr val="bg1"/>
+                </a:solidFill>
+              </a:rPr>
+              <a:t> </a:t>
+            </a:r>
+            <a:r>
+              <a:rPr lang="en-US" sz="1000" dirty="0">
+                <a:solidFill>
+                  <a:schemeClr val="bg1"/>
+                </a:solidFill>
+                <a:effectLst/>
+              </a:rPr>
+              <a:t>0.275</a:t>
+            </a:r>
+            <a:r>
+              <a:rPr lang="en-US" sz="1000" dirty="0">
+                <a:solidFill>
+                  <a:schemeClr val="bg1"/>
+                </a:solidFill>
+              </a:rPr>
+              <a:t> × </a:t>
+            </a:r>
+            <a:r>
+              <a:rPr lang="en-US" sz="1000" dirty="0">
+                <a:solidFill>
+                  <a:schemeClr val="bg1"/>
+                </a:solidFill>
+                <a:effectLst/>
+              </a:rPr>
+              <a:t>[-1.291</a:t>
+            </a:r>
+            <a:r>
+              <a:rPr lang="en-US" sz="1000" dirty="0">
+                <a:solidFill>
+                  <a:schemeClr val="bg1"/>
+                </a:solidFill>
+              </a:rPr>
+              <a:t> </a:t>
+            </a:r>
+            <a:r>
+              <a:rPr lang="en-US" sz="1000" dirty="0">
+                <a:solidFill>
+                  <a:schemeClr val="bg1"/>
+                </a:solidFill>
+                <a:effectLst/>
+              </a:rPr>
+              <a:t>+</a:t>
+            </a:r>
+            <a:r>
+              <a:rPr lang="en-US" sz="1000" dirty="0">
+                <a:solidFill>
+                  <a:schemeClr val="bg1"/>
+                </a:solidFill>
+              </a:rPr>
+              <a:t> </a:t>
+            </a:r>
+            <a:r>
+              <a:rPr lang="en-US" sz="1000" dirty="0">
+                <a:solidFill>
+                  <a:schemeClr val="bg1"/>
+                </a:solidFill>
+                <a:effectLst/>
+              </a:rPr>
+              <a:t>1.295]</a:t>
+            </a:r>
+            <a:r>
+              <a:rPr lang="en-US" sz="1000" dirty="0">
+                <a:solidFill>
+                  <a:schemeClr val="bg1"/>
+                </a:solidFill>
+              </a:rPr>
+              <a:t> </a:t>
+            </a:r>
+          </a:p>
+          <a:p>
+            <a:pPr lvl="1"/>
+            <a:r>
+              <a:rPr lang="en-US" sz="1000" dirty="0">
+                <a:solidFill>
+                  <a:schemeClr val="bg1"/>
+                </a:solidFill>
+                <a:effectLst/>
+              </a:rPr>
+              <a:t>=</a:t>
+            </a:r>
+            <a:r>
+              <a:rPr lang="en-US" sz="1000" dirty="0">
+                <a:solidFill>
+                  <a:schemeClr val="bg1"/>
+                </a:solidFill>
+              </a:rPr>
+              <a:t> </a:t>
+            </a:r>
+            <a:r>
+              <a:rPr lang="en-US" sz="1000" dirty="0">
+                <a:solidFill>
+                  <a:schemeClr val="bg1"/>
+                </a:solidFill>
+                <a:effectLst/>
+              </a:rPr>
+              <a:t>0.275</a:t>
+            </a:r>
+            <a:r>
+              <a:rPr lang="en-US" sz="1000" dirty="0">
+                <a:solidFill>
+                  <a:schemeClr val="bg1"/>
+                </a:solidFill>
+              </a:rPr>
+              <a:t> × </a:t>
+            </a:r>
+            <a:r>
+              <a:rPr lang="en-US" sz="1000" dirty="0">
+                <a:solidFill>
+                  <a:schemeClr val="bg1"/>
+                </a:solidFill>
+                <a:effectLst/>
+              </a:rPr>
+              <a:t>0.004</a:t>
+            </a:r>
+            <a:r>
+              <a:rPr lang="en-US" sz="1000" dirty="0">
+                <a:solidFill>
+                  <a:schemeClr val="bg1"/>
+                </a:solidFill>
+              </a:rPr>
+              <a:t> </a:t>
+            </a:r>
+            <a:r>
+              <a:rPr lang="en-US" sz="1000" dirty="0">
+                <a:solidFill>
+                  <a:schemeClr val="bg1"/>
+                </a:solidFill>
+                <a:effectLst/>
+              </a:rPr>
+              <a:t>=</a:t>
+            </a:r>
+            <a:r>
+              <a:rPr lang="en-US" sz="1000" dirty="0">
+                <a:solidFill>
+                  <a:schemeClr val="bg1"/>
+                </a:solidFill>
+              </a:rPr>
+              <a:t> </a:t>
+            </a:r>
+            <a:r>
+              <a:rPr lang="en-US" sz="1000" dirty="0">
+                <a:solidFill>
+                  <a:schemeClr val="bg1"/>
+                </a:solidFill>
+                <a:effectLst/>
+              </a:rPr>
+              <a:t>0.0011</a:t>
+            </a:r>
+          </a:p>
+          <a:p>
+            <a:pPr lvl="1"/>
+            <a:r>
+              <a:rPr lang="en-US" sz="1000" dirty="0">
+                <a:solidFill>
+                  <a:schemeClr val="bg1"/>
+                </a:solidFill>
+              </a:rPr>
+              <a:t># For Truck class:</a:t>
+            </a:r>
+            <a:endParaRPr lang="en-US" sz="1000" i="1" dirty="0">
+              <a:solidFill>
+                <a:schemeClr val="bg1"/>
+              </a:solidFill>
+            </a:endParaRPr>
+          </a:p>
+          <a:p>
+            <a:r>
+              <a:rPr lang="en-US" sz="1000" dirty="0" err="1">
+                <a:solidFill>
+                  <a:schemeClr val="bg1"/>
+                </a:solidFill>
+              </a:rPr>
+              <a:t>kl_truck</a:t>
+            </a:r>
+            <a:r>
+              <a:rPr lang="en-US" sz="1000" dirty="0">
+                <a:solidFill>
+                  <a:schemeClr val="bg1"/>
+                </a:solidFill>
+              </a:rPr>
+              <a:t> </a:t>
+            </a:r>
+            <a:r>
+              <a:rPr lang="en-US" sz="1000" dirty="0">
+                <a:solidFill>
+                  <a:schemeClr val="bg1"/>
+                </a:solidFill>
+                <a:effectLst/>
+              </a:rPr>
+              <a:t>=</a:t>
+            </a:r>
+            <a:r>
+              <a:rPr lang="en-US" sz="1000" dirty="0">
+                <a:solidFill>
+                  <a:schemeClr val="bg1"/>
+                </a:solidFill>
+              </a:rPr>
+              <a:t> </a:t>
+            </a:r>
+            <a:r>
+              <a:rPr lang="en-US" sz="1000" dirty="0">
+                <a:solidFill>
+                  <a:schemeClr val="bg1"/>
+                </a:solidFill>
+                <a:effectLst/>
+              </a:rPr>
+              <a:t>0.582</a:t>
+            </a:r>
+            <a:r>
+              <a:rPr lang="en-US" sz="1000" dirty="0">
+                <a:solidFill>
+                  <a:schemeClr val="bg1"/>
+                </a:solidFill>
+              </a:rPr>
+              <a:t> × </a:t>
+            </a:r>
+            <a:r>
+              <a:rPr lang="en-US" sz="1000" dirty="0">
+                <a:solidFill>
+                  <a:schemeClr val="bg1"/>
+                </a:solidFill>
+                <a:effectLst/>
+              </a:rPr>
+              <a:t>[</a:t>
+            </a:r>
+            <a:r>
+              <a:rPr lang="en-US" sz="1000" dirty="0">
+                <a:solidFill>
+                  <a:schemeClr val="bg1"/>
+                </a:solidFill>
+              </a:rPr>
+              <a:t>log</a:t>
+            </a:r>
+            <a:r>
+              <a:rPr lang="en-US" sz="1000" dirty="0">
+                <a:solidFill>
+                  <a:schemeClr val="bg1"/>
+                </a:solidFill>
+                <a:effectLst/>
+              </a:rPr>
+              <a:t>(0.582)</a:t>
+            </a:r>
+            <a:r>
+              <a:rPr lang="en-US" sz="1000" dirty="0">
+                <a:solidFill>
+                  <a:schemeClr val="bg1"/>
+                </a:solidFill>
+              </a:rPr>
+              <a:t> </a:t>
+            </a:r>
+            <a:r>
+              <a:rPr lang="en-US" sz="1000" dirty="0">
+                <a:solidFill>
+                  <a:schemeClr val="bg1"/>
+                </a:solidFill>
+                <a:effectLst/>
+              </a:rPr>
+              <a:t>-</a:t>
+            </a:r>
+            <a:r>
+              <a:rPr lang="en-US" sz="1000" dirty="0">
+                <a:solidFill>
+                  <a:schemeClr val="bg1"/>
+                </a:solidFill>
+              </a:rPr>
+              <a:t> </a:t>
+            </a:r>
+            <a:r>
+              <a:rPr lang="en-US" sz="1000" dirty="0">
+                <a:solidFill>
+                  <a:schemeClr val="bg1"/>
+                </a:solidFill>
+                <a:effectLst/>
+              </a:rPr>
+              <a:t>(-0.595)]</a:t>
+            </a:r>
+            <a:r>
+              <a:rPr lang="en-US" sz="1000" dirty="0">
+                <a:solidFill>
+                  <a:schemeClr val="bg1"/>
+                </a:solidFill>
+              </a:rPr>
+              <a:t> </a:t>
+            </a:r>
+          </a:p>
+          <a:p>
+            <a:pPr lvl="1"/>
+            <a:r>
+              <a:rPr lang="en-US" sz="1000" dirty="0">
+                <a:solidFill>
+                  <a:schemeClr val="bg1"/>
+                </a:solidFill>
+                <a:effectLst/>
+              </a:rPr>
+              <a:t>=</a:t>
+            </a:r>
+            <a:r>
+              <a:rPr lang="en-US" sz="1000" dirty="0">
+                <a:solidFill>
+                  <a:schemeClr val="bg1"/>
+                </a:solidFill>
+              </a:rPr>
+              <a:t> </a:t>
+            </a:r>
+            <a:r>
+              <a:rPr lang="en-US" sz="1000" dirty="0">
+                <a:solidFill>
+                  <a:schemeClr val="bg1"/>
+                </a:solidFill>
+                <a:effectLst/>
+              </a:rPr>
+              <a:t>0.582</a:t>
+            </a:r>
+            <a:r>
+              <a:rPr lang="en-US" sz="1000" dirty="0">
+                <a:solidFill>
+                  <a:schemeClr val="bg1"/>
+                </a:solidFill>
+              </a:rPr>
+              <a:t> × </a:t>
+            </a:r>
+            <a:r>
+              <a:rPr lang="en-US" sz="1000" dirty="0">
+                <a:solidFill>
+                  <a:schemeClr val="bg1"/>
+                </a:solidFill>
+                <a:effectLst/>
+              </a:rPr>
+              <a:t>[-0.541</a:t>
+            </a:r>
+            <a:r>
+              <a:rPr lang="en-US" sz="1000" dirty="0">
+                <a:solidFill>
+                  <a:schemeClr val="bg1"/>
+                </a:solidFill>
+              </a:rPr>
+              <a:t> </a:t>
+            </a:r>
+            <a:r>
+              <a:rPr lang="en-US" sz="1000" dirty="0">
+                <a:solidFill>
+                  <a:schemeClr val="bg1"/>
+                </a:solidFill>
+                <a:effectLst/>
+              </a:rPr>
+              <a:t>-</a:t>
+            </a:r>
+            <a:r>
+              <a:rPr lang="en-US" sz="1000" dirty="0">
+                <a:solidFill>
+                  <a:schemeClr val="bg1"/>
+                </a:solidFill>
+              </a:rPr>
+              <a:t> </a:t>
+            </a:r>
+            <a:r>
+              <a:rPr lang="en-US" sz="1000" dirty="0">
+                <a:solidFill>
+                  <a:schemeClr val="bg1"/>
+                </a:solidFill>
+                <a:effectLst/>
+              </a:rPr>
+              <a:t>(-0.595)]</a:t>
+            </a:r>
+            <a:r>
+              <a:rPr lang="en-US" sz="1000" dirty="0">
+                <a:solidFill>
+                  <a:schemeClr val="bg1"/>
+                </a:solidFill>
+              </a:rPr>
+              <a:t> </a:t>
+            </a:r>
+          </a:p>
+          <a:p>
+            <a:pPr lvl="1"/>
+            <a:r>
+              <a:rPr lang="en-US" sz="1000" dirty="0">
+                <a:solidFill>
+                  <a:schemeClr val="bg1"/>
+                </a:solidFill>
+                <a:effectLst/>
+              </a:rPr>
+              <a:t>=</a:t>
+            </a:r>
+            <a:r>
+              <a:rPr lang="en-US" sz="1000" dirty="0">
+                <a:solidFill>
+                  <a:schemeClr val="bg1"/>
+                </a:solidFill>
+              </a:rPr>
+              <a:t> </a:t>
+            </a:r>
+            <a:r>
+              <a:rPr lang="en-US" sz="1000" dirty="0">
+                <a:solidFill>
+                  <a:schemeClr val="bg1"/>
+                </a:solidFill>
+                <a:effectLst/>
+              </a:rPr>
+              <a:t>0.582</a:t>
+            </a:r>
+            <a:r>
+              <a:rPr lang="en-US" sz="1000" dirty="0">
+                <a:solidFill>
+                  <a:schemeClr val="bg1"/>
+                </a:solidFill>
+              </a:rPr>
+              <a:t> × </a:t>
+            </a:r>
+            <a:r>
+              <a:rPr lang="en-US" sz="1000" dirty="0">
+                <a:solidFill>
+                  <a:schemeClr val="bg1"/>
+                </a:solidFill>
+                <a:effectLst/>
+              </a:rPr>
+              <a:t>[-0.541</a:t>
+            </a:r>
+            <a:r>
+              <a:rPr lang="en-US" sz="1000" dirty="0">
+                <a:solidFill>
+                  <a:schemeClr val="bg1"/>
+                </a:solidFill>
+              </a:rPr>
+              <a:t> </a:t>
+            </a:r>
+            <a:r>
+              <a:rPr lang="en-US" sz="1000" dirty="0">
+                <a:solidFill>
+                  <a:schemeClr val="bg1"/>
+                </a:solidFill>
+                <a:effectLst/>
+              </a:rPr>
+              <a:t>+</a:t>
+            </a:r>
+            <a:r>
+              <a:rPr lang="en-US" sz="1000" dirty="0">
+                <a:solidFill>
+                  <a:schemeClr val="bg1"/>
+                </a:solidFill>
+              </a:rPr>
+              <a:t> </a:t>
+            </a:r>
+            <a:r>
+              <a:rPr lang="en-US" sz="1000" dirty="0">
+                <a:solidFill>
+                  <a:schemeClr val="bg1"/>
+                </a:solidFill>
+                <a:effectLst/>
+              </a:rPr>
+              <a:t>0.595]</a:t>
+            </a:r>
+            <a:r>
+              <a:rPr lang="en-US" sz="1000" dirty="0">
+                <a:solidFill>
+                  <a:schemeClr val="bg1"/>
+                </a:solidFill>
+              </a:rPr>
+              <a:t> </a:t>
+            </a:r>
+          </a:p>
+          <a:p>
+            <a:pPr lvl="1"/>
+            <a:r>
+              <a:rPr lang="en-US" sz="1000" dirty="0">
+                <a:solidFill>
+                  <a:schemeClr val="bg1"/>
+                </a:solidFill>
+                <a:effectLst/>
+              </a:rPr>
+              <a:t>=</a:t>
+            </a:r>
+            <a:r>
+              <a:rPr lang="en-US" sz="1000" dirty="0">
+                <a:solidFill>
+                  <a:schemeClr val="bg1"/>
+                </a:solidFill>
+              </a:rPr>
+              <a:t> </a:t>
+            </a:r>
+            <a:r>
+              <a:rPr lang="en-US" sz="1000" dirty="0">
+                <a:solidFill>
+                  <a:schemeClr val="bg1"/>
+                </a:solidFill>
+                <a:effectLst/>
+              </a:rPr>
+              <a:t>0.582</a:t>
+            </a:r>
+            <a:r>
+              <a:rPr lang="en-US" sz="1000" dirty="0">
+                <a:solidFill>
+                  <a:schemeClr val="bg1"/>
+                </a:solidFill>
+              </a:rPr>
+              <a:t> × </a:t>
+            </a:r>
+            <a:r>
+              <a:rPr lang="en-US" sz="1000" dirty="0">
+                <a:solidFill>
+                  <a:schemeClr val="bg1"/>
+                </a:solidFill>
+                <a:effectLst/>
+              </a:rPr>
+              <a:t>0.054</a:t>
+            </a:r>
+            <a:r>
+              <a:rPr lang="en-US" sz="1000" dirty="0">
+                <a:solidFill>
+                  <a:schemeClr val="bg1"/>
+                </a:solidFill>
+              </a:rPr>
+              <a:t> </a:t>
+            </a:r>
+            <a:r>
+              <a:rPr lang="en-US" sz="1000" dirty="0">
+                <a:solidFill>
+                  <a:schemeClr val="bg1"/>
+                </a:solidFill>
+                <a:effectLst/>
+              </a:rPr>
+              <a:t>=</a:t>
+            </a:r>
+            <a:r>
+              <a:rPr lang="en-US" sz="1000" dirty="0">
+                <a:solidFill>
+                  <a:schemeClr val="bg1"/>
+                </a:solidFill>
+              </a:rPr>
+              <a:t> </a:t>
+            </a:r>
+            <a:r>
+              <a:rPr lang="en-US" sz="1000" dirty="0">
+                <a:solidFill>
+                  <a:schemeClr val="bg1"/>
+                </a:solidFill>
+                <a:effectLst/>
+              </a:rPr>
+              <a:t>0.0314</a:t>
+            </a:r>
+          </a:p>
+          <a:p>
+            <a:pPr lvl="1"/>
+            <a:endParaRPr lang="en-US" sz="1000" i="1" dirty="0">
+              <a:solidFill>
+                <a:schemeClr val="bg1"/>
+              </a:solidFill>
+            </a:endParaRPr>
+          </a:p>
+          <a:p>
+            <a:pPr lvl="1"/>
+            <a:r>
+              <a:rPr lang="en-US" sz="1000" i="1" dirty="0">
+                <a:solidFill>
+                  <a:schemeClr val="bg1"/>
+                </a:solidFill>
+                <a:effectLst/>
+              </a:rPr>
+              <a:t># For Bus class:</a:t>
+            </a:r>
+            <a:r>
+              <a:rPr lang="en-US" sz="1000" dirty="0">
+                <a:solidFill>
+                  <a:schemeClr val="bg1"/>
+                </a:solidFill>
+              </a:rPr>
+              <a:t> </a:t>
+            </a:r>
+          </a:p>
+          <a:p>
+            <a:r>
+              <a:rPr lang="en-US" sz="1000" dirty="0" err="1">
+                <a:solidFill>
+                  <a:schemeClr val="bg1"/>
+                </a:solidFill>
+              </a:rPr>
+              <a:t>kl_bus</a:t>
+            </a:r>
+            <a:r>
+              <a:rPr lang="en-US" sz="1000" dirty="0">
+                <a:solidFill>
+                  <a:schemeClr val="bg1"/>
+                </a:solidFill>
+              </a:rPr>
+              <a:t>    </a:t>
+            </a:r>
+            <a:r>
+              <a:rPr lang="en-US" sz="1000" dirty="0">
+                <a:solidFill>
+                  <a:schemeClr val="bg1"/>
+                </a:solidFill>
+                <a:effectLst/>
+              </a:rPr>
+              <a:t>=</a:t>
+            </a:r>
+            <a:r>
+              <a:rPr lang="en-US" sz="1000" dirty="0">
+                <a:solidFill>
+                  <a:schemeClr val="bg1"/>
+                </a:solidFill>
+              </a:rPr>
+              <a:t> </a:t>
+            </a:r>
+            <a:r>
+              <a:rPr lang="en-US" sz="1000" dirty="0">
+                <a:solidFill>
+                  <a:schemeClr val="bg1"/>
+                </a:solidFill>
+                <a:effectLst/>
+              </a:rPr>
+              <a:t>0.143</a:t>
+            </a:r>
+            <a:r>
+              <a:rPr lang="en-US" sz="1000" dirty="0">
+                <a:solidFill>
+                  <a:schemeClr val="bg1"/>
+                </a:solidFill>
+              </a:rPr>
+              <a:t> × </a:t>
+            </a:r>
+            <a:r>
+              <a:rPr lang="en-US" sz="1000" dirty="0">
+                <a:solidFill>
+                  <a:schemeClr val="bg1"/>
+                </a:solidFill>
+                <a:effectLst/>
+              </a:rPr>
+              <a:t>[</a:t>
+            </a:r>
+            <a:r>
+              <a:rPr lang="en-US" sz="1000" dirty="0">
+                <a:solidFill>
+                  <a:schemeClr val="bg1"/>
+                </a:solidFill>
+              </a:rPr>
+              <a:t>log</a:t>
+            </a:r>
+            <a:r>
+              <a:rPr lang="en-US" sz="1000" dirty="0">
+                <a:solidFill>
+                  <a:schemeClr val="bg1"/>
+                </a:solidFill>
+                <a:effectLst/>
+              </a:rPr>
+              <a:t>(0.143)</a:t>
+            </a:r>
+            <a:r>
+              <a:rPr lang="en-US" sz="1000" dirty="0">
+                <a:solidFill>
+                  <a:schemeClr val="bg1"/>
+                </a:solidFill>
+              </a:rPr>
+              <a:t> </a:t>
+            </a:r>
+            <a:r>
+              <a:rPr lang="en-US" sz="1000" dirty="0">
+                <a:solidFill>
+                  <a:schemeClr val="bg1"/>
+                </a:solidFill>
+                <a:effectLst/>
+              </a:rPr>
+              <a:t>-</a:t>
+            </a:r>
+            <a:r>
+              <a:rPr lang="en-US" sz="1000" dirty="0">
+                <a:solidFill>
+                  <a:schemeClr val="bg1"/>
+                </a:solidFill>
+              </a:rPr>
+              <a:t> </a:t>
+            </a:r>
+            <a:r>
+              <a:rPr lang="en-US" sz="1000" dirty="0">
+                <a:solidFill>
+                  <a:schemeClr val="bg1"/>
+                </a:solidFill>
+                <a:effectLst/>
+              </a:rPr>
+              <a:t>(-1.745)]</a:t>
+            </a:r>
+            <a:r>
+              <a:rPr lang="en-US" sz="1000" dirty="0">
+                <a:solidFill>
+                  <a:schemeClr val="bg1"/>
+                </a:solidFill>
+              </a:rPr>
+              <a:t> </a:t>
+            </a:r>
+          </a:p>
+          <a:p>
+            <a:pPr lvl="1"/>
+            <a:r>
+              <a:rPr lang="en-US" sz="1000" dirty="0">
+                <a:solidFill>
+                  <a:schemeClr val="bg1"/>
+                </a:solidFill>
+                <a:effectLst/>
+              </a:rPr>
+              <a:t>=</a:t>
+            </a:r>
+            <a:r>
+              <a:rPr lang="en-US" sz="1000" dirty="0">
+                <a:solidFill>
+                  <a:schemeClr val="bg1"/>
+                </a:solidFill>
+              </a:rPr>
+              <a:t> </a:t>
+            </a:r>
+            <a:r>
+              <a:rPr lang="en-US" sz="1000" dirty="0">
+                <a:solidFill>
+                  <a:schemeClr val="bg1"/>
+                </a:solidFill>
+                <a:effectLst/>
+              </a:rPr>
+              <a:t>0.143</a:t>
+            </a:r>
+            <a:r>
+              <a:rPr lang="en-US" sz="1000" dirty="0">
+                <a:solidFill>
+                  <a:schemeClr val="bg1"/>
+                </a:solidFill>
+              </a:rPr>
+              <a:t> × </a:t>
+            </a:r>
+            <a:r>
+              <a:rPr lang="en-US" sz="1000" dirty="0">
+                <a:solidFill>
+                  <a:schemeClr val="bg1"/>
+                </a:solidFill>
+                <a:effectLst/>
+              </a:rPr>
+              <a:t>[-1.944</a:t>
+            </a:r>
+            <a:r>
+              <a:rPr lang="en-US" sz="1000" dirty="0">
+                <a:solidFill>
+                  <a:schemeClr val="bg1"/>
+                </a:solidFill>
+              </a:rPr>
+              <a:t> </a:t>
+            </a:r>
+            <a:r>
+              <a:rPr lang="en-US" sz="1000" dirty="0">
+                <a:solidFill>
+                  <a:schemeClr val="bg1"/>
+                </a:solidFill>
+                <a:effectLst/>
+              </a:rPr>
+              <a:t>-</a:t>
+            </a:r>
+            <a:r>
+              <a:rPr lang="en-US" sz="1000" dirty="0">
+                <a:solidFill>
+                  <a:schemeClr val="bg1"/>
+                </a:solidFill>
+              </a:rPr>
+              <a:t> </a:t>
+            </a:r>
+            <a:r>
+              <a:rPr lang="en-US" sz="1000" dirty="0">
+                <a:solidFill>
+                  <a:schemeClr val="bg1"/>
+                </a:solidFill>
+                <a:effectLst/>
+              </a:rPr>
+              <a:t>(-1.745)]</a:t>
+            </a:r>
+            <a:r>
+              <a:rPr lang="en-US" sz="1000" dirty="0">
+                <a:solidFill>
+                  <a:schemeClr val="bg1"/>
+                </a:solidFill>
+              </a:rPr>
+              <a:t> </a:t>
+            </a:r>
+          </a:p>
+          <a:p>
+            <a:pPr lvl="1"/>
+            <a:r>
+              <a:rPr lang="en-US" sz="1000" dirty="0">
+                <a:solidFill>
+                  <a:schemeClr val="bg1"/>
+                </a:solidFill>
+                <a:effectLst/>
+              </a:rPr>
+              <a:t>=</a:t>
+            </a:r>
+            <a:r>
+              <a:rPr lang="en-US" sz="1000" dirty="0">
+                <a:solidFill>
+                  <a:schemeClr val="bg1"/>
+                </a:solidFill>
+              </a:rPr>
+              <a:t> </a:t>
+            </a:r>
+            <a:r>
+              <a:rPr lang="en-US" sz="1000" dirty="0">
+                <a:solidFill>
+                  <a:schemeClr val="bg1"/>
+                </a:solidFill>
+                <a:effectLst/>
+              </a:rPr>
+              <a:t>0.143</a:t>
+            </a:r>
+            <a:r>
+              <a:rPr lang="en-US" sz="1000" dirty="0">
+                <a:solidFill>
+                  <a:schemeClr val="bg1"/>
+                </a:solidFill>
+              </a:rPr>
+              <a:t> × </a:t>
+            </a:r>
+            <a:r>
+              <a:rPr lang="en-US" sz="1000" dirty="0">
+                <a:solidFill>
+                  <a:schemeClr val="bg1"/>
+                </a:solidFill>
+                <a:effectLst/>
+              </a:rPr>
+              <a:t>[-1.944</a:t>
+            </a:r>
+            <a:r>
+              <a:rPr lang="en-US" sz="1000" dirty="0">
+                <a:solidFill>
+                  <a:schemeClr val="bg1"/>
+                </a:solidFill>
+              </a:rPr>
+              <a:t> </a:t>
+            </a:r>
+            <a:r>
+              <a:rPr lang="en-US" sz="1000" dirty="0">
+                <a:solidFill>
+                  <a:schemeClr val="bg1"/>
+                </a:solidFill>
+                <a:effectLst/>
+              </a:rPr>
+              <a:t>+</a:t>
+            </a:r>
+            <a:r>
+              <a:rPr lang="en-US" sz="1000" dirty="0">
+                <a:solidFill>
+                  <a:schemeClr val="bg1"/>
+                </a:solidFill>
+              </a:rPr>
+              <a:t> </a:t>
+            </a:r>
+            <a:r>
+              <a:rPr lang="en-US" sz="1000" dirty="0">
+                <a:solidFill>
+                  <a:schemeClr val="bg1"/>
+                </a:solidFill>
+                <a:effectLst/>
+              </a:rPr>
+              <a:t>1.745]</a:t>
+            </a:r>
+            <a:r>
+              <a:rPr lang="en-US" sz="1000" dirty="0">
+                <a:solidFill>
+                  <a:schemeClr val="bg1"/>
+                </a:solidFill>
+              </a:rPr>
+              <a:t> </a:t>
+            </a:r>
+          </a:p>
+          <a:p>
+            <a:pPr lvl="1"/>
+            <a:r>
+              <a:rPr lang="en-US" sz="1000" dirty="0">
+                <a:solidFill>
+                  <a:schemeClr val="bg1"/>
+                </a:solidFill>
+                <a:effectLst/>
+              </a:rPr>
+              <a:t>=</a:t>
+            </a:r>
+            <a:r>
+              <a:rPr lang="en-US" sz="1000" dirty="0">
+                <a:solidFill>
+                  <a:schemeClr val="bg1"/>
+                </a:solidFill>
+              </a:rPr>
+              <a:t> </a:t>
+            </a:r>
+            <a:r>
+              <a:rPr lang="en-US" sz="1000" dirty="0">
+                <a:solidFill>
+                  <a:schemeClr val="bg1"/>
+                </a:solidFill>
+                <a:effectLst/>
+              </a:rPr>
+              <a:t>0.143</a:t>
+            </a:r>
+            <a:r>
+              <a:rPr lang="en-US" sz="1000" dirty="0">
+                <a:solidFill>
+                  <a:schemeClr val="bg1"/>
+                </a:solidFill>
+              </a:rPr>
+              <a:t> × </a:t>
+            </a:r>
+            <a:r>
+              <a:rPr lang="en-US" sz="1000" dirty="0">
+                <a:solidFill>
+                  <a:schemeClr val="bg1"/>
+                </a:solidFill>
+                <a:effectLst/>
+              </a:rPr>
+              <a:t>(-0.199)</a:t>
+            </a:r>
+            <a:r>
+              <a:rPr lang="en-US" sz="1000" dirty="0">
+                <a:solidFill>
+                  <a:schemeClr val="bg1"/>
+                </a:solidFill>
+              </a:rPr>
+              <a:t> </a:t>
+            </a:r>
+            <a:r>
+              <a:rPr lang="en-US" sz="1000" dirty="0">
+                <a:solidFill>
+                  <a:schemeClr val="bg1"/>
+                </a:solidFill>
+                <a:effectLst/>
+              </a:rPr>
+              <a:t>=</a:t>
+            </a:r>
+            <a:r>
+              <a:rPr lang="en-US" sz="1000" dirty="0">
+                <a:solidFill>
+                  <a:schemeClr val="bg1"/>
+                </a:solidFill>
+              </a:rPr>
+              <a:t> </a:t>
+            </a:r>
+            <a:r>
+              <a:rPr lang="en-US" sz="1000" dirty="0">
+                <a:solidFill>
+                  <a:schemeClr val="bg1"/>
+                </a:solidFill>
+                <a:effectLst/>
+              </a:rPr>
+              <a:t>-0.0285</a:t>
+            </a:r>
+          </a:p>
+          <a:p>
+            <a:pPr lvl="1"/>
+            <a:endParaRPr lang="en-US" sz="1000" i="1" dirty="0">
+              <a:solidFill>
+                <a:schemeClr val="bg1"/>
+              </a:solidFill>
+              <a:effectLst/>
+            </a:endParaRPr>
+          </a:p>
+          <a:p>
+            <a:r>
+              <a:rPr lang="en-US" sz="1000" i="1" dirty="0">
+                <a:solidFill>
+                  <a:schemeClr val="bg1"/>
+                </a:solidFill>
+                <a:effectLst/>
+              </a:rPr>
+              <a:t># Total KL divergence:</a:t>
+            </a:r>
+            <a:r>
+              <a:rPr lang="en-US" sz="1000" dirty="0">
+                <a:solidFill>
+                  <a:schemeClr val="bg1"/>
+                </a:solidFill>
+              </a:rPr>
+              <a:t> </a:t>
+            </a:r>
+          </a:p>
+          <a:p>
+            <a:r>
+              <a:rPr lang="en-US" sz="1000" dirty="0">
+                <a:solidFill>
+                  <a:schemeClr val="bg1"/>
+                </a:solidFill>
+              </a:rPr>
+              <a:t>KL </a:t>
+            </a:r>
+            <a:r>
+              <a:rPr lang="en-US" sz="1000" dirty="0">
+                <a:solidFill>
+                  <a:schemeClr val="bg1"/>
+                </a:solidFill>
+                <a:effectLst/>
+              </a:rPr>
+              <a:t>=</a:t>
+            </a:r>
+            <a:r>
+              <a:rPr lang="en-US" sz="1000" dirty="0">
+                <a:solidFill>
+                  <a:schemeClr val="bg1"/>
+                </a:solidFill>
+              </a:rPr>
+              <a:t> </a:t>
+            </a:r>
+            <a:r>
+              <a:rPr lang="en-US" sz="1000" dirty="0">
+                <a:solidFill>
+                  <a:schemeClr val="bg1"/>
+                </a:solidFill>
+                <a:effectLst/>
+              </a:rPr>
+              <a:t>0.0011</a:t>
+            </a:r>
+            <a:r>
+              <a:rPr lang="en-US" sz="1000" dirty="0">
+                <a:solidFill>
+                  <a:schemeClr val="bg1"/>
+                </a:solidFill>
+              </a:rPr>
+              <a:t> </a:t>
+            </a:r>
+            <a:r>
+              <a:rPr lang="en-US" sz="1000" dirty="0">
+                <a:solidFill>
+                  <a:schemeClr val="bg1"/>
+                </a:solidFill>
+                <a:effectLst/>
+              </a:rPr>
+              <a:t>+</a:t>
+            </a:r>
+            <a:r>
+              <a:rPr lang="en-US" sz="1000" dirty="0">
+                <a:solidFill>
+                  <a:schemeClr val="bg1"/>
+                </a:solidFill>
+              </a:rPr>
+              <a:t> </a:t>
+            </a:r>
+            <a:r>
+              <a:rPr lang="en-US" sz="1000" dirty="0">
+                <a:solidFill>
+                  <a:schemeClr val="bg1"/>
+                </a:solidFill>
+                <a:effectLst/>
+              </a:rPr>
+              <a:t>0.0314</a:t>
+            </a:r>
+            <a:r>
+              <a:rPr lang="en-US" sz="1000" dirty="0">
+                <a:solidFill>
+                  <a:schemeClr val="bg1"/>
+                </a:solidFill>
+              </a:rPr>
+              <a:t> </a:t>
+            </a:r>
+            <a:r>
+              <a:rPr lang="en-US" sz="1000" dirty="0">
+                <a:solidFill>
+                  <a:schemeClr val="bg1"/>
+                </a:solidFill>
+                <a:effectLst/>
+              </a:rPr>
+              <a:t>+</a:t>
+            </a:r>
+            <a:r>
+              <a:rPr lang="en-US" sz="1000" dirty="0">
+                <a:solidFill>
+                  <a:schemeClr val="bg1"/>
+                </a:solidFill>
+              </a:rPr>
+              <a:t> </a:t>
+            </a:r>
+            <a:r>
+              <a:rPr lang="en-US" sz="1000" dirty="0">
+                <a:solidFill>
+                  <a:schemeClr val="bg1"/>
+                </a:solidFill>
+                <a:effectLst/>
+              </a:rPr>
+              <a:t>(-0.0285)</a:t>
+            </a:r>
+            <a:r>
+              <a:rPr lang="en-US" sz="1000" dirty="0">
+                <a:solidFill>
+                  <a:schemeClr val="bg1"/>
+                </a:solidFill>
+              </a:rPr>
+              <a:t> </a:t>
+            </a:r>
+            <a:r>
+              <a:rPr lang="en-US" sz="1000" dirty="0">
+                <a:solidFill>
+                  <a:schemeClr val="bg1"/>
+                </a:solidFill>
+                <a:effectLst/>
+              </a:rPr>
+              <a:t>=</a:t>
+            </a:r>
+            <a:r>
+              <a:rPr lang="en-US" sz="1000" dirty="0">
+                <a:solidFill>
+                  <a:schemeClr val="bg1"/>
+                </a:solidFill>
+              </a:rPr>
+              <a:t> </a:t>
+            </a:r>
+            <a:r>
+              <a:rPr lang="en-US" sz="1000" dirty="0">
+                <a:solidFill>
+                  <a:schemeClr val="bg1"/>
+                </a:solidFill>
+                <a:effectLst/>
+              </a:rPr>
+              <a:t>0.004</a:t>
+            </a:r>
+            <a:endParaRPr lang="en-US" sz="1000" i="1" dirty="0">
+              <a:solidFill>
+                <a:schemeClr val="bg1"/>
+              </a:solidFill>
+            </a:endParaRPr>
+          </a:p>
+        </p:txBody>
+      </p:sp>
+      <p:pic>
+        <p:nvPicPr>
+          <p:cNvPr id="10" name="Graphic 9" descr="Badge 1 with solid fill">
+            <a:extLst>
+              <a:ext uri="{FF2B5EF4-FFF2-40B4-BE49-F238E27FC236}">
+                <a16:creationId xmlns:a16="http://schemas.microsoft.com/office/drawing/2014/main" id="{E15C13EB-1FBB-5985-BCC9-6C1493DF7615}"/>
+              </a:ext>
+            </a:extLst>
+          </p:cNvPr>
+          <p:cNvPicPr>
+            <a:picLocks noChangeAspect="1"/>
+          </p:cNvPicPr>
+          <p:nvPr/>
+        </p:nvPicPr>
+        <p:blipFill>
+          <a:blip r:embed="rId4">
+            <a:extLst>
+              <a:ext uri="{96DAC541-7B7A-43D3-8B79-37D633B846F1}">
+                <asvg:svgBlip xmlns:asvg="http://schemas.microsoft.com/office/drawing/2016/SVG/main" r:embed="rId5"/>
+              </a:ext>
+            </a:extLst>
+          </a:blip>
+          <a:stretch>
+            <a:fillRect/>
+          </a:stretch>
+        </p:blipFill>
+        <p:spPr>
+          <a:xfrm>
+            <a:off x="2979122" y="5370721"/>
+            <a:ext cx="523221" cy="523221"/>
+          </a:xfrm>
+          <a:prstGeom prst="rect">
+            <a:avLst/>
+          </a:prstGeom>
+        </p:spPr>
+      </p:pic>
+      <p:pic>
+        <p:nvPicPr>
+          <p:cNvPr id="11" name="Graphic 10" descr="Badge with solid fill">
+            <a:extLst>
+              <a:ext uri="{FF2B5EF4-FFF2-40B4-BE49-F238E27FC236}">
+                <a16:creationId xmlns:a16="http://schemas.microsoft.com/office/drawing/2014/main" id="{D42EE465-F092-79A9-BC54-AA74C4D296DD}"/>
+              </a:ext>
+            </a:extLst>
+          </p:cNvPr>
+          <p:cNvPicPr>
+            <a:picLocks noChangeAspect="1"/>
+          </p:cNvPicPr>
+          <p:nvPr/>
+        </p:nvPicPr>
+        <p:blipFill>
+          <a:blip r:embed="rId6">
+            <a:extLst>
+              <a:ext uri="{96DAC541-7B7A-43D3-8B79-37D633B846F1}">
+                <asvg:svgBlip xmlns:asvg="http://schemas.microsoft.com/office/drawing/2016/SVG/main" r:embed="rId7"/>
+              </a:ext>
+            </a:extLst>
+          </a:blip>
+          <a:stretch>
+            <a:fillRect/>
+          </a:stretch>
+        </p:blipFill>
+        <p:spPr>
+          <a:xfrm>
+            <a:off x="8260940" y="5370721"/>
+            <a:ext cx="523221" cy="523221"/>
+          </a:xfrm>
+          <a:prstGeom prst="rect">
+            <a:avLst/>
+          </a:prstGeom>
+        </p:spPr>
+      </p:pic>
     </p:spTree>
     <p:extLst>
       <p:ext uri="{BB962C8B-B14F-4D97-AF65-F5344CB8AC3E}">
-        <p14:creationId xmlns:p14="http://schemas.microsoft.com/office/powerpoint/2010/main" val="1308369633"/>
+        <p14:creationId xmlns:p14="http://schemas.microsoft.com/office/powerpoint/2010/main" val="3124002406"/>
       </p:ext>
     </p:extLst>
   </p:cSld>
@@ -10386,10 +11142,10 @@
       </p:grpSpPr>
       <p:sp>
         <p:nvSpPr>
-          <p:cNvPr id="4" name="Footer Placeholder 3">
-            <a:extLst>
-              <a:ext uri="{FF2B5EF4-FFF2-40B4-BE49-F238E27FC236}">
-                <a16:creationId xmlns:a16="http://schemas.microsoft.com/office/drawing/2014/main" id="{B8027B5C-B1A1-0376-4174-FFF61C554492}"/>
+          <p:cNvPr id="2" name="Title 1">
+            <a:extLst>
+              <a:ext uri="{FF2B5EF4-FFF2-40B4-BE49-F238E27FC236}">
+                <a16:creationId xmlns:a16="http://schemas.microsoft.com/office/drawing/2014/main" id="{ED3F830A-0841-2B85-58E5-6CE63A3347BC}"/>
               </a:ext>
             </a:extLst>
           </p:cNvPr>
@@ -10397,13 +11153,13 @@
             <a:spLocks noGrp="1"/>
           </p:cNvSpPr>
           <p:nvPr>
-            <p:ph type="ftr" sz="quarter" idx="11"/>
-          </p:nvPr>
-        </p:nvSpPr>
-        <p:spPr>
-          <a:xfrm>
-            <a:off x="1028700" y="6356350"/>
-            <a:ext cx="6210300" cy="365125"/>
+            <p:ph type="title"/>
+          </p:nvPr>
+        </p:nvSpPr>
+        <p:spPr>
+          <a:xfrm>
+            <a:off x="838200" y="365126"/>
+            <a:ext cx="10515600" cy="638922"/>
           </a:xfrm>
         </p:spPr>
         <p:txBody>
@@ -10412,23 +11168,15 @@
           </a:bodyPr>
           <a:lstStyle/>
           <a:p>
-            <a:pPr algn="r">
-              <a:lnSpc>
-                <a:spcPct val="90000"/>
-              </a:lnSpc>
-              <a:spcAft>
-                <a:spcPts val="504"/>
-              </a:spcAft>
-            </a:pPr>
-            <a:r>
-              <a:rPr lang="en-US" sz="900" dirty="0">
-                <a:solidFill>
-                  <a:schemeClr val="tx1">
-                    <a:alpha val="80000"/>
-                  </a:schemeClr>
-                </a:solidFill>
-              </a:rPr>
-              <a:t>International University Of Applied Sciences</a:t>
+            <a:pPr algn="l"/>
+            <a:r>
+              <a:rPr lang="en-US" sz="3200" b="1" dirty="0">
+                <a:solidFill>
+                  <a:srgbClr val="1E40AF"/>
+                </a:solidFill>
+                <a:latin typeface="-apple-system"/>
+              </a:rPr>
+              <a:t>Knowledge Distillation Configuration</a:t>
             </a:r>
           </a:p>
         </p:txBody>
@@ -10449,162 +11197,87 @@
             <p:ph type="dt" sz="half" idx="10"/>
           </p:nvPr>
         </p:nvSpPr>
-        <p:spPr>
-          <a:xfrm>
-            <a:off x="292608" y="6356349"/>
-            <a:ext cx="3085338" cy="365125"/>
-          </a:xfrm>
-        </p:spPr>
-        <p:txBody>
-          <a:bodyPr>
-            <a:normAutofit/>
-          </a:bodyPr>
-          <a:lstStyle/>
-          <a:p>
-            <a:pPr algn="r">
-              <a:lnSpc>
-                <a:spcPct val="90000"/>
-              </a:lnSpc>
-              <a:spcAft>
-                <a:spcPts val="504"/>
-              </a:spcAft>
-            </a:pPr>
-            <a:r>
-              <a:rPr lang="en-US" sz="900" dirty="0">
-                <a:solidFill>
-                  <a:schemeClr val="tx1">
-                    <a:alpha val="80000"/>
-                  </a:schemeClr>
-                </a:solidFill>
-              </a:rPr>
-              <a:t>Knowledge Distillation &amp; Neural Architecture Search</a:t>
-            </a:r>
-          </a:p>
-        </p:txBody>
-      </p:sp>
-      <p:sp>
-        <p:nvSpPr>
-          <p:cNvPr id="5" name="Slide Number Placeholder 4">
-            <a:extLst>
-              <a:ext uri="{FF2B5EF4-FFF2-40B4-BE49-F238E27FC236}">
-                <a16:creationId xmlns:a16="http://schemas.microsoft.com/office/drawing/2014/main" id="{80A790D5-177D-B6A2-0E90-81EF4FE37C9F}"/>
-              </a:ext>
-            </a:extLst>
-          </p:cNvPr>
-          <p:cNvSpPr>
-            <a:spLocks noGrp="1"/>
-          </p:cNvSpPr>
-          <p:nvPr>
-            <p:ph type="sldNum" sz="quarter" idx="12"/>
-          </p:nvPr>
-        </p:nvSpPr>
-        <p:spPr>
-          <a:xfrm>
-            <a:off x="11034184" y="6356350"/>
-            <a:ext cx="514349" cy="365125"/>
-          </a:xfrm>
-        </p:spPr>
-        <p:txBody>
-          <a:bodyPr>
-            <a:normAutofit/>
-          </a:bodyPr>
+        <p:spPr/>
+        <p:txBody>
+          <a:bodyPr/>
           <a:lstStyle/>
           <a:p>
             <a:pPr>
               <a:spcAft>
                 <a:spcPts val="600"/>
               </a:spcAft>
+              <a:defRPr/>
             </a:pPr>
+            <a:r>
+              <a:rPr lang="en-US" dirty="0"/>
+              <a:t>Master Thesis</a:t>
+            </a:r>
+          </a:p>
+        </p:txBody>
+      </p:sp>
+      <p:sp>
+        <p:nvSpPr>
+          <p:cNvPr id="4" name="Footer Placeholder 3">
+            <a:extLst>
+              <a:ext uri="{FF2B5EF4-FFF2-40B4-BE49-F238E27FC236}">
+                <a16:creationId xmlns:a16="http://schemas.microsoft.com/office/drawing/2014/main" id="{B8027B5C-B1A1-0376-4174-FFF61C554492}"/>
+              </a:ext>
+            </a:extLst>
+          </p:cNvPr>
+          <p:cNvSpPr>
+            <a:spLocks noGrp="1"/>
+          </p:cNvSpPr>
+          <p:nvPr>
+            <p:ph type="ftr" sz="quarter" idx="11"/>
+          </p:nvPr>
+        </p:nvSpPr>
+        <p:spPr/>
+        <p:txBody>
+          <a:bodyPr/>
+          <a:lstStyle/>
+          <a:p>
+            <a:r>
+              <a:rPr lang="en-US"/>
+              <a:t>International University Of Applied Sciences</a:t>
+            </a:r>
+          </a:p>
+        </p:txBody>
+      </p:sp>
+      <p:sp>
+        <p:nvSpPr>
+          <p:cNvPr id="5" name="Slide Number Placeholder 4">
+            <a:extLst>
+              <a:ext uri="{FF2B5EF4-FFF2-40B4-BE49-F238E27FC236}">
+                <a16:creationId xmlns:a16="http://schemas.microsoft.com/office/drawing/2014/main" id="{80A790D5-177D-B6A2-0E90-81EF4FE37C9F}"/>
+              </a:ext>
+            </a:extLst>
+          </p:cNvPr>
+          <p:cNvSpPr>
+            <a:spLocks noGrp="1"/>
+          </p:cNvSpPr>
+          <p:nvPr>
+            <p:ph type="sldNum" sz="quarter" idx="12"/>
+          </p:nvPr>
+        </p:nvSpPr>
+        <p:spPr/>
+        <p:txBody>
+          <a:bodyPr/>
+          <a:lstStyle/>
+          <a:p>
             <a:fld id="{C98AED0B-3B00-448B-836B-316F7AA19B4B}" type="slidenum">
-              <a:rPr lang="en-US">
-                <a:solidFill>
-                  <a:schemeClr val="tx1">
-                    <a:alpha val="80000"/>
-                  </a:schemeClr>
-                </a:solidFill>
-              </a:rPr>
-              <a:pPr>
-                <a:spcAft>
-                  <a:spcPts val="600"/>
-                </a:spcAft>
-              </a:pPr>
+              <a:rPr lang="en-US" smtClean="0"/>
               <a:t>12</a:t>
             </a:fld>
-            <a:endParaRPr lang="en-US">
-              <a:solidFill>
-                <a:schemeClr val="tx1">
-                  <a:alpha val="80000"/>
-                </a:schemeClr>
-              </a:solidFill>
-            </a:endParaRPr>
-          </a:p>
-        </p:txBody>
-      </p:sp>
-      <p:sp>
-        <p:nvSpPr>
-          <p:cNvPr id="8" name="Title 1">
-            <a:extLst>
-              <a:ext uri="{FF2B5EF4-FFF2-40B4-BE49-F238E27FC236}">
-                <a16:creationId xmlns:a16="http://schemas.microsoft.com/office/drawing/2014/main" id="{58FF4C60-14F0-104E-A6FA-3FCA6169A054}"/>
-              </a:ext>
-            </a:extLst>
-          </p:cNvPr>
-          <p:cNvSpPr txBox="1">
-            <a:spLocks/>
-          </p:cNvSpPr>
-          <p:nvPr/>
-        </p:nvSpPr>
-        <p:spPr>
-          <a:xfrm>
-            <a:off x="838200" y="365126"/>
-            <a:ext cx="10515600" cy="638922"/>
-          </a:xfrm>
-          <a:prstGeom prst="rect">
-            <a:avLst/>
-          </a:prstGeom>
-        </p:spPr>
-        <p:txBody>
-          <a:bodyPr vert="horz" lIns="91440" tIns="45720" rIns="91440" bIns="45720" rtlCol="0" anchor="ctr">
-            <a:normAutofit fontScale="97500"/>
-          </a:bodyPr>
-          <a:lstStyle>
-            <a:lvl1pPr algn="l" defTabSz="914400" rtl="0" eaLnBrk="1" latinLnBrk="0" hangingPunct="1">
-              <a:lnSpc>
-                <a:spcPct val="90000"/>
-              </a:lnSpc>
-              <a:spcBef>
-                <a:spcPct val="0"/>
-              </a:spcBef>
-              <a:buNone/>
-              <a:defRPr sz="4400" kern="1200">
-                <a:solidFill>
-                  <a:schemeClr val="tx1"/>
-                </a:solidFill>
-                <a:latin typeface="+mj-lt"/>
-                <a:ea typeface="+mj-ea"/>
-                <a:cs typeface="+mj-cs"/>
-              </a:defRPr>
-            </a:lvl1pPr>
-          </a:lstStyle>
-          <a:p>
-            <a:r>
-              <a:rPr lang="en-US" sz="3600" b="1" dirty="0">
-                <a:solidFill>
-                  <a:srgbClr val="1E40AF"/>
-                </a:solidFill>
-                <a:latin typeface="-apple-system"/>
-              </a:rPr>
-              <a:t>Knowledge Distillation : KL Divergence Calculation  </a:t>
-            </a:r>
+            <a:endParaRPr lang="en-US"/>
           </a:p>
         </p:txBody>
       </p:sp>
       <p:pic>
         <p:nvPicPr>
-          <p:cNvPr id="9" name="Graphic 8" descr="Head with gears with solid fill">
-            <a:extLst>
-              <a:ext uri="{FF2B5EF4-FFF2-40B4-BE49-F238E27FC236}">
-                <a16:creationId xmlns:a16="http://schemas.microsoft.com/office/drawing/2014/main" id="{711BF609-4E06-C625-E21F-8F7A0F3EEDF2}"/>
+          <p:cNvPr id="9" name="Picture 8">
+            <a:extLst>
+              <a:ext uri="{FF2B5EF4-FFF2-40B4-BE49-F238E27FC236}">
+                <a16:creationId xmlns:a16="http://schemas.microsoft.com/office/drawing/2014/main" id="{D37A2DD2-E874-85DC-AB8A-09FAFF958DFD}"/>
               </a:ext>
             </a:extLst>
           </p:cNvPr>
@@ -10614,1897 +11287,15 @@
           <p:nvPr/>
         </p:nvPicPr>
         <p:blipFill>
-          <a:blip r:embed="rId2">
-            <a:extLst>
-              <a:ext uri="{96DAC541-7B7A-43D3-8B79-37D633B846F1}">
-                <asvg:svgBlip xmlns:asvg="http://schemas.microsoft.com/office/drawing/2016/SVG/main" r:embed="rId3"/>
-              </a:ext>
-            </a:extLst>
-          </a:blip>
+          <a:blip r:embed="rId2"/>
           <a:stretch>
             <a:fillRect/>
           </a:stretch>
         </p:blipFill>
         <p:spPr>
           <a:xfrm>
-            <a:off x="461877" y="365125"/>
-            <a:ext cx="483696" cy="483696"/>
-          </a:xfrm>
-          <a:prstGeom prst="rect">
-            <a:avLst/>
-          </a:prstGeom>
-        </p:spPr>
-      </p:pic>
-      <p:sp>
-        <p:nvSpPr>
-          <p:cNvPr id="21" name="Title 20">
-            <a:extLst>
-              <a:ext uri="{FF2B5EF4-FFF2-40B4-BE49-F238E27FC236}">
-                <a16:creationId xmlns:a16="http://schemas.microsoft.com/office/drawing/2014/main" id="{4E0E06D5-ADF4-70A9-DFE2-02E9DB53441F}"/>
-              </a:ext>
-            </a:extLst>
-          </p:cNvPr>
-          <p:cNvSpPr>
-            <a:spLocks noGrp="1"/>
-          </p:cNvSpPr>
-          <p:nvPr>
-            <p:ph type="title"/>
-          </p:nvPr>
-        </p:nvSpPr>
-        <p:spPr>
-          <a:xfrm>
-            <a:off x="461877" y="1370015"/>
-            <a:ext cx="10515600" cy="1325563"/>
-          </a:xfrm>
-        </p:spPr>
-        <p:txBody>
-          <a:bodyPr/>
-          <a:lstStyle/>
-          <a:p>
-            <a:r>
-              <a:rPr lang="en-US" dirty="0"/>
-              <a:t>    </a:t>
-            </a:r>
-          </a:p>
-        </p:txBody>
-      </p:sp>
-      <p:sp>
-        <p:nvSpPr>
-          <p:cNvPr id="2" name="Rectangle 1">
-            <a:extLst>
-              <a:ext uri="{FF2B5EF4-FFF2-40B4-BE49-F238E27FC236}">
-                <a16:creationId xmlns:a16="http://schemas.microsoft.com/office/drawing/2014/main" id="{E9917320-FB89-800E-52DA-6DE65BC393A1}"/>
-              </a:ext>
-            </a:extLst>
-          </p:cNvPr>
-          <p:cNvSpPr/>
-          <p:nvPr/>
-        </p:nvSpPr>
-        <p:spPr>
-          <a:xfrm>
-            <a:off x="638451" y="1790449"/>
-            <a:ext cx="5204565" cy="3494783"/>
-          </a:xfrm>
-          <a:prstGeom prst="rect">
-            <a:avLst/>
-          </a:prstGeom>
-        </p:spPr>
-        <p:style>
-          <a:lnRef idx="2">
-            <a:schemeClr val="dk1">
-              <a:shade val="15000"/>
-            </a:schemeClr>
-          </a:lnRef>
-          <a:fillRef idx="1">
-            <a:schemeClr val="dk1"/>
-          </a:fillRef>
-          <a:effectRef idx="0">
-            <a:schemeClr val="dk1"/>
-          </a:effectRef>
-          <a:fontRef idx="minor">
-            <a:schemeClr val="lt1"/>
-          </a:fontRef>
-        </p:style>
-        <p:txBody>
-          <a:bodyPr rtlCol="0" anchor="ctr"/>
-          <a:lstStyle/>
-          <a:p>
-            <a:r>
-              <a:rPr lang="en-US" sz="1000" i="1" dirty="0">
-                <a:solidFill>
-                  <a:schemeClr val="bg1"/>
-                </a:solidFill>
-                <a:effectLst/>
-              </a:rPr>
-              <a:t># Teacher scaled: [2.5/2, 4.0/2, 1.2/2] = [1.25, 2.0, 0.6]</a:t>
-            </a:r>
-            <a:r>
-              <a:rPr lang="en-US" sz="1000" dirty="0">
-                <a:solidFill>
-                  <a:schemeClr val="bg1"/>
-                </a:solidFill>
-              </a:rPr>
-              <a:t> </a:t>
-            </a:r>
-          </a:p>
-          <a:p>
-            <a:r>
-              <a:rPr lang="en-US" sz="1000" i="1" dirty="0">
-                <a:solidFill>
-                  <a:schemeClr val="bg1"/>
-                </a:solidFill>
-                <a:effectLst/>
-              </a:rPr>
-              <a:t># Student scaled: [1.8/2, 3.2/2, 0.9/2] = [0.9, 1.6, 0.45]</a:t>
-            </a:r>
-          </a:p>
-          <a:p>
-            <a:endParaRPr lang="en-US" sz="1000" b="1" i="1" dirty="0">
-              <a:solidFill>
-                <a:schemeClr val="bg1"/>
-              </a:solidFill>
-              <a:highlight>
-                <a:srgbClr val="000000"/>
-              </a:highlight>
-              <a:latin typeface="Courier New" panose="02070309020205020404" pitchFamily="49" charset="0"/>
-            </a:endParaRPr>
-          </a:p>
-          <a:p>
-            <a:r>
-              <a:rPr lang="en-US" sz="1000" i="1" dirty="0">
-                <a:solidFill>
-                  <a:schemeClr val="bg1"/>
-                </a:solidFill>
-                <a:effectLst/>
-              </a:rPr>
-              <a:t># Teacher exponentials:</a:t>
-            </a:r>
-            <a:r>
-              <a:rPr lang="en-US" sz="1000" dirty="0">
-                <a:solidFill>
-                  <a:schemeClr val="bg1"/>
-                </a:solidFill>
-              </a:rPr>
-              <a:t> </a:t>
-            </a:r>
-          </a:p>
-          <a:p>
-            <a:r>
-              <a:rPr lang="en-US" sz="1000" i="1" dirty="0" err="1">
-                <a:solidFill>
-                  <a:schemeClr val="bg1"/>
-                </a:solidFill>
-              </a:rPr>
-              <a:t>exp_t</a:t>
-            </a:r>
-            <a:r>
-              <a:rPr lang="en-US" sz="1000" i="1" dirty="0">
-                <a:solidFill>
-                  <a:schemeClr val="bg1"/>
-                </a:solidFill>
-              </a:rPr>
-              <a:t> = [exp(1.25), exp(2.0), exp(0.6)] = [3.49, 7.39, 1.82] </a:t>
-            </a:r>
-          </a:p>
-          <a:p>
-            <a:r>
-              <a:rPr lang="en-US" sz="1000" i="1" dirty="0" err="1">
-                <a:solidFill>
-                  <a:schemeClr val="bg1"/>
-                </a:solidFill>
-              </a:rPr>
-              <a:t>sum_t</a:t>
-            </a:r>
-            <a:r>
-              <a:rPr lang="en-US" sz="1000" i="1" dirty="0">
-                <a:solidFill>
-                  <a:schemeClr val="bg1"/>
-                </a:solidFill>
-              </a:rPr>
-              <a:t> = 3.49 + 7.39 + 1.82 = 12.70 </a:t>
-            </a:r>
-          </a:p>
-          <a:p>
-            <a:r>
-              <a:rPr lang="en-US" sz="1000" i="1" dirty="0">
-                <a:solidFill>
-                  <a:schemeClr val="bg1"/>
-                </a:solidFill>
-              </a:rPr>
-              <a:t># Teacher probabilities (P): </a:t>
-            </a:r>
-          </a:p>
-          <a:p>
-            <a:r>
-              <a:rPr lang="en-US" sz="1000" i="1" dirty="0">
-                <a:solidFill>
-                  <a:schemeClr val="bg1"/>
-                </a:solidFill>
-              </a:rPr>
-              <a:t>P = [3.49/12.70, 7.39/12.70, 1.82/12.70] = [0.275, 0.582, 0.143]</a:t>
-            </a:r>
-          </a:p>
-          <a:p>
-            <a:endParaRPr lang="en-US" sz="1000" i="1" dirty="0">
-              <a:solidFill>
-                <a:schemeClr val="bg1"/>
-              </a:solidFill>
-            </a:endParaRPr>
-          </a:p>
-          <a:p>
-            <a:r>
-              <a:rPr lang="en-US" sz="1000" i="1" dirty="0">
-                <a:solidFill>
-                  <a:schemeClr val="bg1"/>
-                </a:solidFill>
-              </a:rPr>
-              <a:t># Student exponentials: </a:t>
-            </a:r>
-          </a:p>
-          <a:p>
-            <a:r>
-              <a:rPr lang="en-US" sz="1000" i="1" dirty="0" err="1">
-                <a:solidFill>
-                  <a:schemeClr val="bg1"/>
-                </a:solidFill>
-              </a:rPr>
-              <a:t>exp_s</a:t>
-            </a:r>
-            <a:r>
-              <a:rPr lang="en-US" sz="1000" i="1" dirty="0">
-                <a:solidFill>
-                  <a:schemeClr val="bg1"/>
-                </a:solidFill>
-              </a:rPr>
-              <a:t> = [exp(0.9), exp(1.6), exp(0.45)] = [2.46, 4.95, 1.57] </a:t>
-            </a:r>
-          </a:p>
-          <a:p>
-            <a:r>
-              <a:rPr lang="en-US" sz="1000" i="1" dirty="0" err="1">
-                <a:solidFill>
-                  <a:schemeClr val="bg1"/>
-                </a:solidFill>
-              </a:rPr>
-              <a:t>sum_s</a:t>
-            </a:r>
-            <a:r>
-              <a:rPr lang="en-US" sz="1000" i="1" dirty="0">
-                <a:solidFill>
-                  <a:schemeClr val="bg1"/>
-                </a:solidFill>
-              </a:rPr>
-              <a:t> = 2.46 + 4.95 + 1.57 = 8.98 </a:t>
-            </a:r>
-          </a:p>
-          <a:p>
-            <a:endParaRPr lang="en-US" sz="1000" i="1" dirty="0">
-              <a:solidFill>
-                <a:schemeClr val="bg1"/>
-              </a:solidFill>
-            </a:endParaRPr>
-          </a:p>
-          <a:p>
-            <a:r>
-              <a:rPr lang="en-US" sz="1000" i="1" dirty="0">
-                <a:solidFill>
-                  <a:schemeClr val="bg1"/>
-                </a:solidFill>
-              </a:rPr>
-              <a:t># Student </a:t>
-            </a:r>
-            <a:r>
-              <a:rPr lang="en-US" sz="1000" i="1" dirty="0" err="1">
-                <a:solidFill>
-                  <a:schemeClr val="bg1"/>
-                </a:solidFill>
-              </a:rPr>
-              <a:t>log_softmax</a:t>
-            </a:r>
-            <a:r>
-              <a:rPr lang="en-US" sz="1000" i="1" dirty="0">
-                <a:solidFill>
-                  <a:schemeClr val="bg1"/>
-                </a:solidFill>
-              </a:rPr>
-              <a:t> (input): </a:t>
-            </a:r>
-          </a:p>
-          <a:p>
-            <a:r>
-              <a:rPr lang="en-US" sz="1000" i="1" dirty="0" err="1">
-                <a:solidFill>
-                  <a:schemeClr val="bg1"/>
-                </a:solidFill>
-              </a:rPr>
-              <a:t>log_softmax</a:t>
-            </a:r>
-            <a:r>
-              <a:rPr lang="en-US" sz="1000" i="1" dirty="0">
-                <a:solidFill>
-                  <a:schemeClr val="bg1"/>
-                </a:solidFill>
-              </a:rPr>
-              <a:t> = [0.9 - log(8.98), 1.6 - log(8.98), 0.45 - log(8.98)] </a:t>
-            </a:r>
-          </a:p>
-          <a:p>
-            <a:r>
-              <a:rPr lang="en-US" sz="1000" i="1" dirty="0" err="1">
-                <a:solidFill>
-                  <a:schemeClr val="bg1"/>
-                </a:solidFill>
-              </a:rPr>
-              <a:t>log_softmax</a:t>
-            </a:r>
-            <a:r>
-              <a:rPr lang="en-US" sz="1000" i="1" dirty="0">
-                <a:solidFill>
-                  <a:schemeClr val="bg1"/>
-                </a:solidFill>
-              </a:rPr>
-              <a:t> = [0.9 - 2.195, 1.6 - 2.195, 0.45 - 2.195] </a:t>
-            </a:r>
-          </a:p>
-          <a:p>
-            <a:r>
-              <a:rPr lang="en-US" sz="1000" i="1" dirty="0" err="1">
-                <a:solidFill>
-                  <a:schemeClr val="bg1"/>
-                </a:solidFill>
-              </a:rPr>
-              <a:t>log_softmax</a:t>
-            </a:r>
-            <a:r>
-              <a:rPr lang="en-US" sz="1000" i="1" dirty="0">
-                <a:solidFill>
-                  <a:schemeClr val="bg1"/>
-                </a:solidFill>
-              </a:rPr>
-              <a:t> = [-1.295, -0.595, -1.745]</a:t>
-            </a:r>
-          </a:p>
-          <a:p>
-            <a:endParaRPr lang="en-US" sz="1000" i="1" dirty="0">
-              <a:solidFill>
-                <a:schemeClr val="bg1"/>
-              </a:solidFill>
-            </a:endParaRPr>
-          </a:p>
-          <a:p>
-            <a:endParaRPr lang="en-US" sz="1000" i="1" dirty="0">
-              <a:solidFill>
-                <a:schemeClr val="bg1"/>
-              </a:solidFill>
-            </a:endParaRPr>
-          </a:p>
-        </p:txBody>
-      </p:sp>
-      <p:sp>
-        <p:nvSpPr>
-          <p:cNvPr id="6" name="Rectangle 5">
-            <a:extLst>
-              <a:ext uri="{FF2B5EF4-FFF2-40B4-BE49-F238E27FC236}">
-                <a16:creationId xmlns:a16="http://schemas.microsoft.com/office/drawing/2014/main" id="{626FCD9A-FB33-B5FB-2852-CD0207D766B4}"/>
-              </a:ext>
-            </a:extLst>
-          </p:cNvPr>
-          <p:cNvSpPr/>
-          <p:nvPr/>
-        </p:nvSpPr>
-        <p:spPr>
-          <a:xfrm>
-            <a:off x="6019590" y="1790449"/>
-            <a:ext cx="5204565" cy="3494783"/>
-          </a:xfrm>
-          <a:prstGeom prst="rect">
-            <a:avLst/>
-          </a:prstGeom>
-        </p:spPr>
-        <p:style>
-          <a:lnRef idx="2">
-            <a:schemeClr val="dk1">
-              <a:shade val="15000"/>
-            </a:schemeClr>
-          </a:lnRef>
-          <a:fillRef idx="1">
-            <a:schemeClr val="dk1"/>
-          </a:fillRef>
-          <a:effectRef idx="0">
-            <a:schemeClr val="dk1"/>
-          </a:effectRef>
-          <a:fontRef idx="minor">
-            <a:schemeClr val="lt1"/>
-          </a:fontRef>
-        </p:style>
-        <p:txBody>
-          <a:bodyPr rtlCol="0" anchor="ctr"/>
-          <a:lstStyle/>
-          <a:p>
-            <a:r>
-              <a:rPr lang="en-US" sz="1000" i="1" dirty="0">
-                <a:solidFill>
-                  <a:schemeClr val="bg1"/>
-                </a:solidFill>
-                <a:effectLst/>
-              </a:rPr>
-              <a:t># </a:t>
-            </a:r>
-            <a:r>
-              <a:rPr lang="en-US" sz="1000" i="1" dirty="0" err="1">
-                <a:solidFill>
-                  <a:schemeClr val="bg1"/>
-                </a:solidFill>
-                <a:effectLst/>
-              </a:rPr>
-              <a:t>PyTorch</a:t>
-            </a:r>
-            <a:r>
-              <a:rPr lang="en-US" sz="1000" i="1" dirty="0">
-                <a:solidFill>
-                  <a:schemeClr val="bg1"/>
-                </a:solidFill>
-                <a:effectLst/>
-              </a:rPr>
-              <a:t> formula: KL = </a:t>
-            </a:r>
-            <a:r>
-              <a:rPr lang="el-GR" sz="1000" i="1" dirty="0">
-                <a:solidFill>
-                  <a:schemeClr val="bg1"/>
-                </a:solidFill>
-                <a:effectLst/>
-              </a:rPr>
-              <a:t>Σ </a:t>
-            </a:r>
-            <a:r>
-              <a:rPr lang="en-US" sz="1000" i="1" dirty="0">
-                <a:solidFill>
-                  <a:schemeClr val="bg1"/>
-                </a:solidFill>
-                <a:effectLst/>
-              </a:rPr>
-              <a:t>target(x) × [log(target(x)) - input(x)]</a:t>
-            </a:r>
-            <a:r>
-              <a:rPr lang="en-US" sz="1000" dirty="0">
-                <a:solidFill>
-                  <a:schemeClr val="bg1"/>
-                </a:solidFill>
-              </a:rPr>
-              <a:t> </a:t>
-            </a:r>
-            <a:r>
-              <a:rPr lang="en-US" sz="1000" i="1" dirty="0">
-                <a:solidFill>
-                  <a:schemeClr val="bg1"/>
-                </a:solidFill>
-                <a:effectLst/>
-              </a:rPr>
-              <a:t># For Car class:</a:t>
-            </a:r>
-          </a:p>
-          <a:p>
-            <a:r>
-              <a:rPr lang="en-US" sz="1000" dirty="0">
-                <a:solidFill>
-                  <a:schemeClr val="bg1"/>
-                </a:solidFill>
-              </a:rPr>
-              <a:t> </a:t>
-            </a:r>
-          </a:p>
-          <a:p>
-            <a:r>
-              <a:rPr lang="en-US" sz="1000" dirty="0" err="1">
-                <a:solidFill>
-                  <a:schemeClr val="bg1"/>
-                </a:solidFill>
-              </a:rPr>
-              <a:t>kl_car</a:t>
-            </a:r>
-            <a:r>
-              <a:rPr lang="en-US" sz="1000" dirty="0">
-                <a:solidFill>
-                  <a:schemeClr val="bg1"/>
-                </a:solidFill>
-              </a:rPr>
-              <a:t>     </a:t>
-            </a:r>
-            <a:r>
-              <a:rPr lang="en-US" sz="1000" dirty="0">
-                <a:solidFill>
-                  <a:schemeClr val="bg1"/>
-                </a:solidFill>
-                <a:effectLst/>
-              </a:rPr>
-              <a:t>=</a:t>
-            </a:r>
-            <a:r>
-              <a:rPr lang="en-US" sz="1000" dirty="0">
-                <a:solidFill>
-                  <a:schemeClr val="bg1"/>
-                </a:solidFill>
-              </a:rPr>
-              <a:t> </a:t>
-            </a:r>
-            <a:r>
-              <a:rPr lang="en-US" sz="1000" dirty="0">
-                <a:solidFill>
-                  <a:schemeClr val="bg1"/>
-                </a:solidFill>
-                <a:effectLst/>
-              </a:rPr>
-              <a:t>0.275</a:t>
-            </a:r>
-            <a:r>
-              <a:rPr lang="en-US" sz="1000" dirty="0">
-                <a:solidFill>
-                  <a:schemeClr val="bg1"/>
-                </a:solidFill>
-              </a:rPr>
-              <a:t> × </a:t>
-            </a:r>
-            <a:r>
-              <a:rPr lang="en-US" sz="1000" dirty="0">
-                <a:solidFill>
-                  <a:schemeClr val="bg1"/>
-                </a:solidFill>
-                <a:effectLst/>
-              </a:rPr>
-              <a:t>[</a:t>
-            </a:r>
-            <a:r>
-              <a:rPr lang="en-US" sz="1000" dirty="0">
-                <a:solidFill>
-                  <a:schemeClr val="bg1"/>
-                </a:solidFill>
-              </a:rPr>
-              <a:t>log</a:t>
-            </a:r>
-            <a:r>
-              <a:rPr lang="en-US" sz="1000" dirty="0">
-                <a:solidFill>
-                  <a:schemeClr val="bg1"/>
-                </a:solidFill>
-                <a:effectLst/>
-              </a:rPr>
-              <a:t>(0.275)</a:t>
-            </a:r>
-            <a:r>
-              <a:rPr lang="en-US" sz="1000" dirty="0">
-                <a:solidFill>
-                  <a:schemeClr val="bg1"/>
-                </a:solidFill>
-              </a:rPr>
-              <a:t> </a:t>
-            </a:r>
-            <a:r>
-              <a:rPr lang="en-US" sz="1000" dirty="0">
-                <a:solidFill>
-                  <a:schemeClr val="bg1"/>
-                </a:solidFill>
-                <a:effectLst/>
-              </a:rPr>
-              <a:t>-</a:t>
-            </a:r>
-            <a:r>
-              <a:rPr lang="en-US" sz="1000" dirty="0">
-                <a:solidFill>
-                  <a:schemeClr val="bg1"/>
-                </a:solidFill>
-              </a:rPr>
-              <a:t> </a:t>
-            </a:r>
-            <a:r>
-              <a:rPr lang="en-US" sz="1000" dirty="0">
-                <a:solidFill>
-                  <a:schemeClr val="bg1"/>
-                </a:solidFill>
-                <a:effectLst/>
-              </a:rPr>
-              <a:t>(-1.295)]</a:t>
-            </a:r>
-            <a:r>
-              <a:rPr lang="en-US" sz="1000" dirty="0">
-                <a:solidFill>
-                  <a:schemeClr val="bg1"/>
-                </a:solidFill>
-              </a:rPr>
-              <a:t> </a:t>
-            </a:r>
-          </a:p>
-          <a:p>
-            <a:pPr lvl="1"/>
-            <a:r>
-              <a:rPr lang="en-US" sz="1000" dirty="0">
-                <a:solidFill>
-                  <a:schemeClr val="bg1"/>
-                </a:solidFill>
-                <a:effectLst/>
-              </a:rPr>
-              <a:t>=</a:t>
-            </a:r>
-            <a:r>
-              <a:rPr lang="en-US" sz="1000" dirty="0">
-                <a:solidFill>
-                  <a:schemeClr val="bg1"/>
-                </a:solidFill>
-              </a:rPr>
-              <a:t> </a:t>
-            </a:r>
-            <a:r>
-              <a:rPr lang="en-US" sz="1000" dirty="0">
-                <a:solidFill>
-                  <a:schemeClr val="bg1"/>
-                </a:solidFill>
-                <a:effectLst/>
-              </a:rPr>
-              <a:t>0.275</a:t>
-            </a:r>
-            <a:r>
-              <a:rPr lang="en-US" sz="1000" dirty="0">
-                <a:solidFill>
-                  <a:schemeClr val="bg1"/>
-                </a:solidFill>
-              </a:rPr>
-              <a:t> × </a:t>
-            </a:r>
-            <a:r>
-              <a:rPr lang="en-US" sz="1000" dirty="0">
-                <a:solidFill>
-                  <a:schemeClr val="bg1"/>
-                </a:solidFill>
-                <a:effectLst/>
-              </a:rPr>
-              <a:t>[-1.291</a:t>
-            </a:r>
-            <a:r>
-              <a:rPr lang="en-US" sz="1000" dirty="0">
-                <a:solidFill>
-                  <a:schemeClr val="bg1"/>
-                </a:solidFill>
-              </a:rPr>
-              <a:t> </a:t>
-            </a:r>
-            <a:r>
-              <a:rPr lang="en-US" sz="1000" dirty="0">
-                <a:solidFill>
-                  <a:schemeClr val="bg1"/>
-                </a:solidFill>
-                <a:effectLst/>
-              </a:rPr>
-              <a:t>-</a:t>
-            </a:r>
-            <a:r>
-              <a:rPr lang="en-US" sz="1000" dirty="0">
-                <a:solidFill>
-                  <a:schemeClr val="bg1"/>
-                </a:solidFill>
-              </a:rPr>
-              <a:t> </a:t>
-            </a:r>
-            <a:r>
-              <a:rPr lang="en-US" sz="1000" dirty="0">
-                <a:solidFill>
-                  <a:schemeClr val="bg1"/>
-                </a:solidFill>
-                <a:effectLst/>
-              </a:rPr>
-              <a:t>(-1.295)]</a:t>
-            </a:r>
-            <a:r>
-              <a:rPr lang="en-US" sz="1000" dirty="0">
-                <a:solidFill>
-                  <a:schemeClr val="bg1"/>
-                </a:solidFill>
-              </a:rPr>
-              <a:t> </a:t>
-            </a:r>
-          </a:p>
-          <a:p>
-            <a:pPr lvl="1"/>
-            <a:r>
-              <a:rPr lang="en-US" sz="1000" dirty="0">
-                <a:solidFill>
-                  <a:schemeClr val="bg1"/>
-                </a:solidFill>
-                <a:effectLst/>
-              </a:rPr>
-              <a:t>=</a:t>
-            </a:r>
-            <a:r>
-              <a:rPr lang="en-US" sz="1000" dirty="0">
-                <a:solidFill>
-                  <a:schemeClr val="bg1"/>
-                </a:solidFill>
-              </a:rPr>
-              <a:t> </a:t>
-            </a:r>
-            <a:r>
-              <a:rPr lang="en-US" sz="1000" dirty="0">
-                <a:solidFill>
-                  <a:schemeClr val="bg1"/>
-                </a:solidFill>
-                <a:effectLst/>
-              </a:rPr>
-              <a:t>0.275</a:t>
-            </a:r>
-            <a:r>
-              <a:rPr lang="en-US" sz="1000" dirty="0">
-                <a:solidFill>
-                  <a:schemeClr val="bg1"/>
-                </a:solidFill>
-              </a:rPr>
-              <a:t> × </a:t>
-            </a:r>
-            <a:r>
-              <a:rPr lang="en-US" sz="1000" dirty="0">
-                <a:solidFill>
-                  <a:schemeClr val="bg1"/>
-                </a:solidFill>
-                <a:effectLst/>
-              </a:rPr>
-              <a:t>[-1.291</a:t>
-            </a:r>
-            <a:r>
-              <a:rPr lang="en-US" sz="1000" dirty="0">
-                <a:solidFill>
-                  <a:schemeClr val="bg1"/>
-                </a:solidFill>
-              </a:rPr>
-              <a:t> </a:t>
-            </a:r>
-            <a:r>
-              <a:rPr lang="en-US" sz="1000" dirty="0">
-                <a:solidFill>
-                  <a:schemeClr val="bg1"/>
-                </a:solidFill>
-                <a:effectLst/>
-              </a:rPr>
-              <a:t>+</a:t>
-            </a:r>
-            <a:r>
-              <a:rPr lang="en-US" sz="1000" dirty="0">
-                <a:solidFill>
-                  <a:schemeClr val="bg1"/>
-                </a:solidFill>
-              </a:rPr>
-              <a:t> </a:t>
-            </a:r>
-            <a:r>
-              <a:rPr lang="en-US" sz="1000" dirty="0">
-                <a:solidFill>
-                  <a:schemeClr val="bg1"/>
-                </a:solidFill>
-                <a:effectLst/>
-              </a:rPr>
-              <a:t>1.295]</a:t>
-            </a:r>
-            <a:r>
-              <a:rPr lang="en-US" sz="1000" dirty="0">
-                <a:solidFill>
-                  <a:schemeClr val="bg1"/>
-                </a:solidFill>
-              </a:rPr>
-              <a:t> </a:t>
-            </a:r>
-          </a:p>
-          <a:p>
-            <a:pPr lvl="1"/>
-            <a:r>
-              <a:rPr lang="en-US" sz="1000" dirty="0">
-                <a:solidFill>
-                  <a:schemeClr val="bg1"/>
-                </a:solidFill>
-                <a:effectLst/>
-              </a:rPr>
-              <a:t>=</a:t>
-            </a:r>
-            <a:r>
-              <a:rPr lang="en-US" sz="1000" dirty="0">
-                <a:solidFill>
-                  <a:schemeClr val="bg1"/>
-                </a:solidFill>
-              </a:rPr>
-              <a:t> </a:t>
-            </a:r>
-            <a:r>
-              <a:rPr lang="en-US" sz="1000" dirty="0">
-                <a:solidFill>
-                  <a:schemeClr val="bg1"/>
-                </a:solidFill>
-                <a:effectLst/>
-              </a:rPr>
-              <a:t>0.275</a:t>
-            </a:r>
-            <a:r>
-              <a:rPr lang="en-US" sz="1000" dirty="0">
-                <a:solidFill>
-                  <a:schemeClr val="bg1"/>
-                </a:solidFill>
-              </a:rPr>
-              <a:t> × </a:t>
-            </a:r>
-            <a:r>
-              <a:rPr lang="en-US" sz="1000" dirty="0">
-                <a:solidFill>
-                  <a:schemeClr val="bg1"/>
-                </a:solidFill>
-                <a:effectLst/>
-              </a:rPr>
-              <a:t>0.004</a:t>
-            </a:r>
-            <a:r>
-              <a:rPr lang="en-US" sz="1000" dirty="0">
-                <a:solidFill>
-                  <a:schemeClr val="bg1"/>
-                </a:solidFill>
-              </a:rPr>
-              <a:t> </a:t>
-            </a:r>
-            <a:r>
-              <a:rPr lang="en-US" sz="1000" dirty="0">
-                <a:solidFill>
-                  <a:schemeClr val="bg1"/>
-                </a:solidFill>
-                <a:effectLst/>
-              </a:rPr>
-              <a:t>=</a:t>
-            </a:r>
-            <a:r>
-              <a:rPr lang="en-US" sz="1000" dirty="0">
-                <a:solidFill>
-                  <a:schemeClr val="bg1"/>
-                </a:solidFill>
-              </a:rPr>
-              <a:t> </a:t>
-            </a:r>
-            <a:r>
-              <a:rPr lang="en-US" sz="1000" dirty="0">
-                <a:solidFill>
-                  <a:schemeClr val="bg1"/>
-                </a:solidFill>
-                <a:effectLst/>
-              </a:rPr>
-              <a:t>0.0011</a:t>
-            </a:r>
-          </a:p>
-          <a:p>
-            <a:pPr lvl="1"/>
-            <a:r>
-              <a:rPr lang="en-US" sz="1000" dirty="0">
-                <a:solidFill>
-                  <a:schemeClr val="bg1"/>
-                </a:solidFill>
-              </a:rPr>
-              <a:t># For Truck class:</a:t>
-            </a:r>
-            <a:endParaRPr lang="en-US" sz="1000" i="1" dirty="0">
-              <a:solidFill>
-                <a:schemeClr val="bg1"/>
-              </a:solidFill>
-            </a:endParaRPr>
-          </a:p>
-          <a:p>
-            <a:r>
-              <a:rPr lang="en-US" sz="1000" dirty="0" err="1">
-                <a:solidFill>
-                  <a:schemeClr val="bg1"/>
-                </a:solidFill>
-              </a:rPr>
-              <a:t>kl_truck</a:t>
-            </a:r>
-            <a:r>
-              <a:rPr lang="en-US" sz="1000" dirty="0">
-                <a:solidFill>
-                  <a:schemeClr val="bg1"/>
-                </a:solidFill>
-              </a:rPr>
-              <a:t> </a:t>
-            </a:r>
-            <a:r>
-              <a:rPr lang="en-US" sz="1000" dirty="0">
-                <a:solidFill>
-                  <a:schemeClr val="bg1"/>
-                </a:solidFill>
-                <a:effectLst/>
-              </a:rPr>
-              <a:t>=</a:t>
-            </a:r>
-            <a:r>
-              <a:rPr lang="en-US" sz="1000" dirty="0">
-                <a:solidFill>
-                  <a:schemeClr val="bg1"/>
-                </a:solidFill>
-              </a:rPr>
-              <a:t> </a:t>
-            </a:r>
-            <a:r>
-              <a:rPr lang="en-US" sz="1000" dirty="0">
-                <a:solidFill>
-                  <a:schemeClr val="bg1"/>
-                </a:solidFill>
-                <a:effectLst/>
-              </a:rPr>
-              <a:t>0.582</a:t>
-            </a:r>
-            <a:r>
-              <a:rPr lang="en-US" sz="1000" dirty="0">
-                <a:solidFill>
-                  <a:schemeClr val="bg1"/>
-                </a:solidFill>
-              </a:rPr>
-              <a:t> × </a:t>
-            </a:r>
-            <a:r>
-              <a:rPr lang="en-US" sz="1000" dirty="0">
-                <a:solidFill>
-                  <a:schemeClr val="bg1"/>
-                </a:solidFill>
-                <a:effectLst/>
-              </a:rPr>
-              <a:t>[</a:t>
-            </a:r>
-            <a:r>
-              <a:rPr lang="en-US" sz="1000" dirty="0">
-                <a:solidFill>
-                  <a:schemeClr val="bg1"/>
-                </a:solidFill>
-              </a:rPr>
-              <a:t>log</a:t>
-            </a:r>
-            <a:r>
-              <a:rPr lang="en-US" sz="1000" dirty="0">
-                <a:solidFill>
-                  <a:schemeClr val="bg1"/>
-                </a:solidFill>
-                <a:effectLst/>
-              </a:rPr>
-              <a:t>(0.582)</a:t>
-            </a:r>
-            <a:r>
-              <a:rPr lang="en-US" sz="1000" dirty="0">
-                <a:solidFill>
-                  <a:schemeClr val="bg1"/>
-                </a:solidFill>
-              </a:rPr>
-              <a:t> </a:t>
-            </a:r>
-            <a:r>
-              <a:rPr lang="en-US" sz="1000" dirty="0">
-                <a:solidFill>
-                  <a:schemeClr val="bg1"/>
-                </a:solidFill>
-                <a:effectLst/>
-              </a:rPr>
-              <a:t>-</a:t>
-            </a:r>
-            <a:r>
-              <a:rPr lang="en-US" sz="1000" dirty="0">
-                <a:solidFill>
-                  <a:schemeClr val="bg1"/>
-                </a:solidFill>
-              </a:rPr>
-              <a:t> </a:t>
-            </a:r>
-            <a:r>
-              <a:rPr lang="en-US" sz="1000" dirty="0">
-                <a:solidFill>
-                  <a:schemeClr val="bg1"/>
-                </a:solidFill>
-                <a:effectLst/>
-              </a:rPr>
-              <a:t>(-0.595)]</a:t>
-            </a:r>
-            <a:r>
-              <a:rPr lang="en-US" sz="1000" dirty="0">
-                <a:solidFill>
-                  <a:schemeClr val="bg1"/>
-                </a:solidFill>
-              </a:rPr>
-              <a:t> </a:t>
-            </a:r>
-          </a:p>
-          <a:p>
-            <a:pPr lvl="1"/>
-            <a:r>
-              <a:rPr lang="en-US" sz="1000" dirty="0">
-                <a:solidFill>
-                  <a:schemeClr val="bg1"/>
-                </a:solidFill>
-                <a:effectLst/>
-              </a:rPr>
-              <a:t>=</a:t>
-            </a:r>
-            <a:r>
-              <a:rPr lang="en-US" sz="1000" dirty="0">
-                <a:solidFill>
-                  <a:schemeClr val="bg1"/>
-                </a:solidFill>
-              </a:rPr>
-              <a:t> </a:t>
-            </a:r>
-            <a:r>
-              <a:rPr lang="en-US" sz="1000" dirty="0">
-                <a:solidFill>
-                  <a:schemeClr val="bg1"/>
-                </a:solidFill>
-                <a:effectLst/>
-              </a:rPr>
-              <a:t>0.582</a:t>
-            </a:r>
-            <a:r>
-              <a:rPr lang="en-US" sz="1000" dirty="0">
-                <a:solidFill>
-                  <a:schemeClr val="bg1"/>
-                </a:solidFill>
-              </a:rPr>
-              <a:t> × </a:t>
-            </a:r>
-            <a:r>
-              <a:rPr lang="en-US" sz="1000" dirty="0">
-                <a:solidFill>
-                  <a:schemeClr val="bg1"/>
-                </a:solidFill>
-                <a:effectLst/>
-              </a:rPr>
-              <a:t>[-0.541</a:t>
-            </a:r>
-            <a:r>
-              <a:rPr lang="en-US" sz="1000" dirty="0">
-                <a:solidFill>
-                  <a:schemeClr val="bg1"/>
-                </a:solidFill>
-              </a:rPr>
-              <a:t> </a:t>
-            </a:r>
-            <a:r>
-              <a:rPr lang="en-US" sz="1000" dirty="0">
-                <a:solidFill>
-                  <a:schemeClr val="bg1"/>
-                </a:solidFill>
-                <a:effectLst/>
-              </a:rPr>
-              <a:t>-</a:t>
-            </a:r>
-            <a:r>
-              <a:rPr lang="en-US" sz="1000" dirty="0">
-                <a:solidFill>
-                  <a:schemeClr val="bg1"/>
-                </a:solidFill>
-              </a:rPr>
-              <a:t> </a:t>
-            </a:r>
-            <a:r>
-              <a:rPr lang="en-US" sz="1000" dirty="0">
-                <a:solidFill>
-                  <a:schemeClr val="bg1"/>
-                </a:solidFill>
-                <a:effectLst/>
-              </a:rPr>
-              <a:t>(-0.595)]</a:t>
-            </a:r>
-            <a:r>
-              <a:rPr lang="en-US" sz="1000" dirty="0">
-                <a:solidFill>
-                  <a:schemeClr val="bg1"/>
-                </a:solidFill>
-              </a:rPr>
-              <a:t> </a:t>
-            </a:r>
-          </a:p>
-          <a:p>
-            <a:pPr lvl="1"/>
-            <a:r>
-              <a:rPr lang="en-US" sz="1000" dirty="0">
-                <a:solidFill>
-                  <a:schemeClr val="bg1"/>
-                </a:solidFill>
-                <a:effectLst/>
-              </a:rPr>
-              <a:t>=</a:t>
-            </a:r>
-            <a:r>
-              <a:rPr lang="en-US" sz="1000" dirty="0">
-                <a:solidFill>
-                  <a:schemeClr val="bg1"/>
-                </a:solidFill>
-              </a:rPr>
-              <a:t> </a:t>
-            </a:r>
-            <a:r>
-              <a:rPr lang="en-US" sz="1000" dirty="0">
-                <a:solidFill>
-                  <a:schemeClr val="bg1"/>
-                </a:solidFill>
-                <a:effectLst/>
-              </a:rPr>
-              <a:t>0.582</a:t>
-            </a:r>
-            <a:r>
-              <a:rPr lang="en-US" sz="1000" dirty="0">
-                <a:solidFill>
-                  <a:schemeClr val="bg1"/>
-                </a:solidFill>
-              </a:rPr>
-              <a:t> × </a:t>
-            </a:r>
-            <a:r>
-              <a:rPr lang="en-US" sz="1000" dirty="0">
-                <a:solidFill>
-                  <a:schemeClr val="bg1"/>
-                </a:solidFill>
-                <a:effectLst/>
-              </a:rPr>
-              <a:t>[-0.541</a:t>
-            </a:r>
-            <a:r>
-              <a:rPr lang="en-US" sz="1000" dirty="0">
-                <a:solidFill>
-                  <a:schemeClr val="bg1"/>
-                </a:solidFill>
-              </a:rPr>
-              <a:t> </a:t>
-            </a:r>
-            <a:r>
-              <a:rPr lang="en-US" sz="1000" dirty="0">
-                <a:solidFill>
-                  <a:schemeClr val="bg1"/>
-                </a:solidFill>
-                <a:effectLst/>
-              </a:rPr>
-              <a:t>+</a:t>
-            </a:r>
-            <a:r>
-              <a:rPr lang="en-US" sz="1000" dirty="0">
-                <a:solidFill>
-                  <a:schemeClr val="bg1"/>
-                </a:solidFill>
-              </a:rPr>
-              <a:t> </a:t>
-            </a:r>
-            <a:r>
-              <a:rPr lang="en-US" sz="1000" dirty="0">
-                <a:solidFill>
-                  <a:schemeClr val="bg1"/>
-                </a:solidFill>
-                <a:effectLst/>
-              </a:rPr>
-              <a:t>0.595]</a:t>
-            </a:r>
-            <a:r>
-              <a:rPr lang="en-US" sz="1000" dirty="0">
-                <a:solidFill>
-                  <a:schemeClr val="bg1"/>
-                </a:solidFill>
-              </a:rPr>
-              <a:t> </a:t>
-            </a:r>
-          </a:p>
-          <a:p>
-            <a:pPr lvl="1"/>
-            <a:r>
-              <a:rPr lang="en-US" sz="1000" dirty="0">
-                <a:solidFill>
-                  <a:schemeClr val="bg1"/>
-                </a:solidFill>
-                <a:effectLst/>
-              </a:rPr>
-              <a:t>=</a:t>
-            </a:r>
-            <a:r>
-              <a:rPr lang="en-US" sz="1000" dirty="0">
-                <a:solidFill>
-                  <a:schemeClr val="bg1"/>
-                </a:solidFill>
-              </a:rPr>
-              <a:t> </a:t>
-            </a:r>
-            <a:r>
-              <a:rPr lang="en-US" sz="1000" dirty="0">
-                <a:solidFill>
-                  <a:schemeClr val="bg1"/>
-                </a:solidFill>
-                <a:effectLst/>
-              </a:rPr>
-              <a:t>0.582</a:t>
-            </a:r>
-            <a:r>
-              <a:rPr lang="en-US" sz="1000" dirty="0">
-                <a:solidFill>
-                  <a:schemeClr val="bg1"/>
-                </a:solidFill>
-              </a:rPr>
-              <a:t> × </a:t>
-            </a:r>
-            <a:r>
-              <a:rPr lang="en-US" sz="1000" dirty="0">
-                <a:solidFill>
-                  <a:schemeClr val="bg1"/>
-                </a:solidFill>
-                <a:effectLst/>
-              </a:rPr>
-              <a:t>0.054</a:t>
-            </a:r>
-            <a:r>
-              <a:rPr lang="en-US" sz="1000" dirty="0">
-                <a:solidFill>
-                  <a:schemeClr val="bg1"/>
-                </a:solidFill>
-              </a:rPr>
-              <a:t> </a:t>
-            </a:r>
-            <a:r>
-              <a:rPr lang="en-US" sz="1000" dirty="0">
-                <a:solidFill>
-                  <a:schemeClr val="bg1"/>
-                </a:solidFill>
-                <a:effectLst/>
-              </a:rPr>
-              <a:t>=</a:t>
-            </a:r>
-            <a:r>
-              <a:rPr lang="en-US" sz="1000" dirty="0">
-                <a:solidFill>
-                  <a:schemeClr val="bg1"/>
-                </a:solidFill>
-              </a:rPr>
-              <a:t> </a:t>
-            </a:r>
-            <a:r>
-              <a:rPr lang="en-US" sz="1000" dirty="0">
-                <a:solidFill>
-                  <a:schemeClr val="bg1"/>
-                </a:solidFill>
-                <a:effectLst/>
-              </a:rPr>
-              <a:t>0.0314</a:t>
-            </a:r>
-          </a:p>
-          <a:p>
-            <a:pPr lvl="1"/>
-            <a:endParaRPr lang="en-US" sz="1000" i="1" dirty="0">
-              <a:solidFill>
-                <a:schemeClr val="bg1"/>
-              </a:solidFill>
-            </a:endParaRPr>
-          </a:p>
-          <a:p>
-            <a:pPr lvl="1"/>
-            <a:r>
-              <a:rPr lang="en-US" sz="1000" i="1" dirty="0">
-                <a:solidFill>
-                  <a:schemeClr val="bg1"/>
-                </a:solidFill>
-                <a:effectLst/>
-              </a:rPr>
-              <a:t># For Bus class:</a:t>
-            </a:r>
-            <a:r>
-              <a:rPr lang="en-US" sz="1000" dirty="0">
-                <a:solidFill>
-                  <a:schemeClr val="bg1"/>
-                </a:solidFill>
-              </a:rPr>
-              <a:t> </a:t>
-            </a:r>
-          </a:p>
-          <a:p>
-            <a:r>
-              <a:rPr lang="en-US" sz="1000" dirty="0" err="1">
-                <a:solidFill>
-                  <a:schemeClr val="bg1"/>
-                </a:solidFill>
-              </a:rPr>
-              <a:t>kl_bus</a:t>
-            </a:r>
-            <a:r>
-              <a:rPr lang="en-US" sz="1000" dirty="0">
-                <a:solidFill>
-                  <a:schemeClr val="bg1"/>
-                </a:solidFill>
-              </a:rPr>
-              <a:t>    </a:t>
-            </a:r>
-            <a:r>
-              <a:rPr lang="en-US" sz="1000" dirty="0">
-                <a:solidFill>
-                  <a:schemeClr val="bg1"/>
-                </a:solidFill>
-                <a:effectLst/>
-              </a:rPr>
-              <a:t>=</a:t>
-            </a:r>
-            <a:r>
-              <a:rPr lang="en-US" sz="1000" dirty="0">
-                <a:solidFill>
-                  <a:schemeClr val="bg1"/>
-                </a:solidFill>
-              </a:rPr>
-              <a:t> </a:t>
-            </a:r>
-            <a:r>
-              <a:rPr lang="en-US" sz="1000" dirty="0">
-                <a:solidFill>
-                  <a:schemeClr val="bg1"/>
-                </a:solidFill>
-                <a:effectLst/>
-              </a:rPr>
-              <a:t>0.143</a:t>
-            </a:r>
-            <a:r>
-              <a:rPr lang="en-US" sz="1000" dirty="0">
-                <a:solidFill>
-                  <a:schemeClr val="bg1"/>
-                </a:solidFill>
-              </a:rPr>
-              <a:t> × </a:t>
-            </a:r>
-            <a:r>
-              <a:rPr lang="en-US" sz="1000" dirty="0">
-                <a:solidFill>
-                  <a:schemeClr val="bg1"/>
-                </a:solidFill>
-                <a:effectLst/>
-              </a:rPr>
-              <a:t>[</a:t>
-            </a:r>
-            <a:r>
-              <a:rPr lang="en-US" sz="1000" dirty="0">
-                <a:solidFill>
-                  <a:schemeClr val="bg1"/>
-                </a:solidFill>
-              </a:rPr>
-              <a:t>log</a:t>
-            </a:r>
-            <a:r>
-              <a:rPr lang="en-US" sz="1000" dirty="0">
-                <a:solidFill>
-                  <a:schemeClr val="bg1"/>
-                </a:solidFill>
-                <a:effectLst/>
-              </a:rPr>
-              <a:t>(0.143)</a:t>
-            </a:r>
-            <a:r>
-              <a:rPr lang="en-US" sz="1000" dirty="0">
-                <a:solidFill>
-                  <a:schemeClr val="bg1"/>
-                </a:solidFill>
-              </a:rPr>
-              <a:t> </a:t>
-            </a:r>
-            <a:r>
-              <a:rPr lang="en-US" sz="1000" dirty="0">
-                <a:solidFill>
-                  <a:schemeClr val="bg1"/>
-                </a:solidFill>
-                <a:effectLst/>
-              </a:rPr>
-              <a:t>-</a:t>
-            </a:r>
-            <a:r>
-              <a:rPr lang="en-US" sz="1000" dirty="0">
-                <a:solidFill>
-                  <a:schemeClr val="bg1"/>
-                </a:solidFill>
-              </a:rPr>
-              <a:t> </a:t>
-            </a:r>
-            <a:r>
-              <a:rPr lang="en-US" sz="1000" dirty="0">
-                <a:solidFill>
-                  <a:schemeClr val="bg1"/>
-                </a:solidFill>
-                <a:effectLst/>
-              </a:rPr>
-              <a:t>(-1.745)]</a:t>
-            </a:r>
-            <a:r>
-              <a:rPr lang="en-US" sz="1000" dirty="0">
-                <a:solidFill>
-                  <a:schemeClr val="bg1"/>
-                </a:solidFill>
-              </a:rPr>
-              <a:t> </a:t>
-            </a:r>
-          </a:p>
-          <a:p>
-            <a:pPr lvl="1"/>
-            <a:r>
-              <a:rPr lang="en-US" sz="1000" dirty="0">
-                <a:solidFill>
-                  <a:schemeClr val="bg1"/>
-                </a:solidFill>
-                <a:effectLst/>
-              </a:rPr>
-              <a:t>=</a:t>
-            </a:r>
-            <a:r>
-              <a:rPr lang="en-US" sz="1000" dirty="0">
-                <a:solidFill>
-                  <a:schemeClr val="bg1"/>
-                </a:solidFill>
-              </a:rPr>
-              <a:t> </a:t>
-            </a:r>
-            <a:r>
-              <a:rPr lang="en-US" sz="1000" dirty="0">
-                <a:solidFill>
-                  <a:schemeClr val="bg1"/>
-                </a:solidFill>
-                <a:effectLst/>
-              </a:rPr>
-              <a:t>0.143</a:t>
-            </a:r>
-            <a:r>
-              <a:rPr lang="en-US" sz="1000" dirty="0">
-                <a:solidFill>
-                  <a:schemeClr val="bg1"/>
-                </a:solidFill>
-              </a:rPr>
-              <a:t> × </a:t>
-            </a:r>
-            <a:r>
-              <a:rPr lang="en-US" sz="1000" dirty="0">
-                <a:solidFill>
-                  <a:schemeClr val="bg1"/>
-                </a:solidFill>
-                <a:effectLst/>
-              </a:rPr>
-              <a:t>[-1.944</a:t>
-            </a:r>
-            <a:r>
-              <a:rPr lang="en-US" sz="1000" dirty="0">
-                <a:solidFill>
-                  <a:schemeClr val="bg1"/>
-                </a:solidFill>
-              </a:rPr>
-              <a:t> </a:t>
-            </a:r>
-            <a:r>
-              <a:rPr lang="en-US" sz="1000" dirty="0">
-                <a:solidFill>
-                  <a:schemeClr val="bg1"/>
-                </a:solidFill>
-                <a:effectLst/>
-              </a:rPr>
-              <a:t>-</a:t>
-            </a:r>
-            <a:r>
-              <a:rPr lang="en-US" sz="1000" dirty="0">
-                <a:solidFill>
-                  <a:schemeClr val="bg1"/>
-                </a:solidFill>
-              </a:rPr>
-              <a:t> </a:t>
-            </a:r>
-            <a:r>
-              <a:rPr lang="en-US" sz="1000" dirty="0">
-                <a:solidFill>
-                  <a:schemeClr val="bg1"/>
-                </a:solidFill>
-                <a:effectLst/>
-              </a:rPr>
-              <a:t>(-1.745)]</a:t>
-            </a:r>
-            <a:r>
-              <a:rPr lang="en-US" sz="1000" dirty="0">
-                <a:solidFill>
-                  <a:schemeClr val="bg1"/>
-                </a:solidFill>
-              </a:rPr>
-              <a:t> </a:t>
-            </a:r>
-          </a:p>
-          <a:p>
-            <a:pPr lvl="1"/>
-            <a:r>
-              <a:rPr lang="en-US" sz="1000" dirty="0">
-                <a:solidFill>
-                  <a:schemeClr val="bg1"/>
-                </a:solidFill>
-                <a:effectLst/>
-              </a:rPr>
-              <a:t>=</a:t>
-            </a:r>
-            <a:r>
-              <a:rPr lang="en-US" sz="1000" dirty="0">
-                <a:solidFill>
-                  <a:schemeClr val="bg1"/>
-                </a:solidFill>
-              </a:rPr>
-              <a:t> </a:t>
-            </a:r>
-            <a:r>
-              <a:rPr lang="en-US" sz="1000" dirty="0">
-                <a:solidFill>
-                  <a:schemeClr val="bg1"/>
-                </a:solidFill>
-                <a:effectLst/>
-              </a:rPr>
-              <a:t>0.143</a:t>
-            </a:r>
-            <a:r>
-              <a:rPr lang="en-US" sz="1000" dirty="0">
-                <a:solidFill>
-                  <a:schemeClr val="bg1"/>
-                </a:solidFill>
-              </a:rPr>
-              <a:t> × </a:t>
-            </a:r>
-            <a:r>
-              <a:rPr lang="en-US" sz="1000" dirty="0">
-                <a:solidFill>
-                  <a:schemeClr val="bg1"/>
-                </a:solidFill>
-                <a:effectLst/>
-              </a:rPr>
-              <a:t>[-1.944</a:t>
-            </a:r>
-            <a:r>
-              <a:rPr lang="en-US" sz="1000" dirty="0">
-                <a:solidFill>
-                  <a:schemeClr val="bg1"/>
-                </a:solidFill>
-              </a:rPr>
-              <a:t> </a:t>
-            </a:r>
-            <a:r>
-              <a:rPr lang="en-US" sz="1000" dirty="0">
-                <a:solidFill>
-                  <a:schemeClr val="bg1"/>
-                </a:solidFill>
-                <a:effectLst/>
-              </a:rPr>
-              <a:t>+</a:t>
-            </a:r>
-            <a:r>
-              <a:rPr lang="en-US" sz="1000" dirty="0">
-                <a:solidFill>
-                  <a:schemeClr val="bg1"/>
-                </a:solidFill>
-              </a:rPr>
-              <a:t> </a:t>
-            </a:r>
-            <a:r>
-              <a:rPr lang="en-US" sz="1000" dirty="0">
-                <a:solidFill>
-                  <a:schemeClr val="bg1"/>
-                </a:solidFill>
-                <a:effectLst/>
-              </a:rPr>
-              <a:t>1.745]</a:t>
-            </a:r>
-            <a:r>
-              <a:rPr lang="en-US" sz="1000" dirty="0">
-                <a:solidFill>
-                  <a:schemeClr val="bg1"/>
-                </a:solidFill>
-              </a:rPr>
-              <a:t> </a:t>
-            </a:r>
-          </a:p>
-          <a:p>
-            <a:pPr lvl="1"/>
-            <a:r>
-              <a:rPr lang="en-US" sz="1000" dirty="0">
-                <a:solidFill>
-                  <a:schemeClr val="bg1"/>
-                </a:solidFill>
-                <a:effectLst/>
-              </a:rPr>
-              <a:t>=</a:t>
-            </a:r>
-            <a:r>
-              <a:rPr lang="en-US" sz="1000" dirty="0">
-                <a:solidFill>
-                  <a:schemeClr val="bg1"/>
-                </a:solidFill>
-              </a:rPr>
-              <a:t> </a:t>
-            </a:r>
-            <a:r>
-              <a:rPr lang="en-US" sz="1000" dirty="0">
-                <a:solidFill>
-                  <a:schemeClr val="bg1"/>
-                </a:solidFill>
-                <a:effectLst/>
-              </a:rPr>
-              <a:t>0.143</a:t>
-            </a:r>
-            <a:r>
-              <a:rPr lang="en-US" sz="1000" dirty="0">
-                <a:solidFill>
-                  <a:schemeClr val="bg1"/>
-                </a:solidFill>
-              </a:rPr>
-              <a:t> × </a:t>
-            </a:r>
-            <a:r>
-              <a:rPr lang="en-US" sz="1000" dirty="0">
-                <a:solidFill>
-                  <a:schemeClr val="bg1"/>
-                </a:solidFill>
-                <a:effectLst/>
-              </a:rPr>
-              <a:t>(-0.199)</a:t>
-            </a:r>
-            <a:r>
-              <a:rPr lang="en-US" sz="1000" dirty="0">
-                <a:solidFill>
-                  <a:schemeClr val="bg1"/>
-                </a:solidFill>
-              </a:rPr>
-              <a:t> </a:t>
-            </a:r>
-            <a:r>
-              <a:rPr lang="en-US" sz="1000" dirty="0">
-                <a:solidFill>
-                  <a:schemeClr val="bg1"/>
-                </a:solidFill>
-                <a:effectLst/>
-              </a:rPr>
-              <a:t>=</a:t>
-            </a:r>
-            <a:r>
-              <a:rPr lang="en-US" sz="1000" dirty="0">
-                <a:solidFill>
-                  <a:schemeClr val="bg1"/>
-                </a:solidFill>
-              </a:rPr>
-              <a:t> </a:t>
-            </a:r>
-            <a:r>
-              <a:rPr lang="en-US" sz="1000" dirty="0">
-                <a:solidFill>
-                  <a:schemeClr val="bg1"/>
-                </a:solidFill>
-                <a:effectLst/>
-              </a:rPr>
-              <a:t>-0.0285</a:t>
-            </a:r>
-          </a:p>
-          <a:p>
-            <a:pPr lvl="1"/>
-            <a:endParaRPr lang="en-US" sz="1000" i="1" dirty="0">
-              <a:solidFill>
-                <a:schemeClr val="bg1"/>
-              </a:solidFill>
-              <a:effectLst/>
-            </a:endParaRPr>
-          </a:p>
-          <a:p>
-            <a:r>
-              <a:rPr lang="en-US" sz="1000" i="1" dirty="0">
-                <a:solidFill>
-                  <a:schemeClr val="bg1"/>
-                </a:solidFill>
-                <a:effectLst/>
-              </a:rPr>
-              <a:t># Total KL divergence:</a:t>
-            </a:r>
-            <a:r>
-              <a:rPr lang="en-US" sz="1000" dirty="0">
-                <a:solidFill>
-                  <a:schemeClr val="bg1"/>
-                </a:solidFill>
-              </a:rPr>
-              <a:t> </a:t>
-            </a:r>
-          </a:p>
-          <a:p>
-            <a:r>
-              <a:rPr lang="en-US" sz="1000" dirty="0">
-                <a:solidFill>
-                  <a:schemeClr val="bg1"/>
-                </a:solidFill>
-              </a:rPr>
-              <a:t>KL </a:t>
-            </a:r>
-            <a:r>
-              <a:rPr lang="en-US" sz="1000" dirty="0">
-                <a:solidFill>
-                  <a:schemeClr val="bg1"/>
-                </a:solidFill>
-                <a:effectLst/>
-              </a:rPr>
-              <a:t>=</a:t>
-            </a:r>
-            <a:r>
-              <a:rPr lang="en-US" sz="1000" dirty="0">
-                <a:solidFill>
-                  <a:schemeClr val="bg1"/>
-                </a:solidFill>
-              </a:rPr>
-              <a:t> </a:t>
-            </a:r>
-            <a:r>
-              <a:rPr lang="en-US" sz="1000" dirty="0">
-                <a:solidFill>
-                  <a:schemeClr val="bg1"/>
-                </a:solidFill>
-                <a:effectLst/>
-              </a:rPr>
-              <a:t>0.0011</a:t>
-            </a:r>
-            <a:r>
-              <a:rPr lang="en-US" sz="1000" dirty="0">
-                <a:solidFill>
-                  <a:schemeClr val="bg1"/>
-                </a:solidFill>
-              </a:rPr>
-              <a:t> </a:t>
-            </a:r>
-            <a:r>
-              <a:rPr lang="en-US" sz="1000" dirty="0">
-                <a:solidFill>
-                  <a:schemeClr val="bg1"/>
-                </a:solidFill>
-                <a:effectLst/>
-              </a:rPr>
-              <a:t>+</a:t>
-            </a:r>
-            <a:r>
-              <a:rPr lang="en-US" sz="1000" dirty="0">
-                <a:solidFill>
-                  <a:schemeClr val="bg1"/>
-                </a:solidFill>
-              </a:rPr>
-              <a:t> </a:t>
-            </a:r>
-            <a:r>
-              <a:rPr lang="en-US" sz="1000" dirty="0">
-                <a:solidFill>
-                  <a:schemeClr val="bg1"/>
-                </a:solidFill>
-                <a:effectLst/>
-              </a:rPr>
-              <a:t>0.0314</a:t>
-            </a:r>
-            <a:r>
-              <a:rPr lang="en-US" sz="1000" dirty="0">
-                <a:solidFill>
-                  <a:schemeClr val="bg1"/>
-                </a:solidFill>
-              </a:rPr>
-              <a:t> </a:t>
-            </a:r>
-            <a:r>
-              <a:rPr lang="en-US" sz="1000" dirty="0">
-                <a:solidFill>
-                  <a:schemeClr val="bg1"/>
-                </a:solidFill>
-                <a:effectLst/>
-              </a:rPr>
-              <a:t>+</a:t>
-            </a:r>
-            <a:r>
-              <a:rPr lang="en-US" sz="1000" dirty="0">
-                <a:solidFill>
-                  <a:schemeClr val="bg1"/>
-                </a:solidFill>
-              </a:rPr>
-              <a:t> </a:t>
-            </a:r>
-            <a:r>
-              <a:rPr lang="en-US" sz="1000" dirty="0">
-                <a:solidFill>
-                  <a:schemeClr val="bg1"/>
-                </a:solidFill>
-                <a:effectLst/>
-              </a:rPr>
-              <a:t>(-0.0285)</a:t>
-            </a:r>
-            <a:r>
-              <a:rPr lang="en-US" sz="1000" dirty="0">
-                <a:solidFill>
-                  <a:schemeClr val="bg1"/>
-                </a:solidFill>
-              </a:rPr>
-              <a:t> </a:t>
-            </a:r>
-            <a:r>
-              <a:rPr lang="en-US" sz="1000" dirty="0">
-                <a:solidFill>
-                  <a:schemeClr val="bg1"/>
-                </a:solidFill>
-                <a:effectLst/>
-              </a:rPr>
-              <a:t>=</a:t>
-            </a:r>
-            <a:r>
-              <a:rPr lang="en-US" sz="1000" dirty="0">
-                <a:solidFill>
-                  <a:schemeClr val="bg1"/>
-                </a:solidFill>
-              </a:rPr>
-              <a:t> </a:t>
-            </a:r>
-            <a:r>
-              <a:rPr lang="en-US" sz="1000" dirty="0">
-                <a:solidFill>
-                  <a:schemeClr val="bg1"/>
-                </a:solidFill>
-                <a:effectLst/>
-              </a:rPr>
-              <a:t>0.004</a:t>
-            </a:r>
-            <a:endParaRPr lang="en-US" sz="1000" i="1" dirty="0">
-              <a:solidFill>
-                <a:schemeClr val="bg1"/>
-              </a:solidFill>
-            </a:endParaRPr>
-          </a:p>
-        </p:txBody>
-      </p:sp>
-      <p:pic>
-        <p:nvPicPr>
-          <p:cNvPr id="10" name="Graphic 9" descr="Badge 1 with solid fill">
-            <a:extLst>
-              <a:ext uri="{FF2B5EF4-FFF2-40B4-BE49-F238E27FC236}">
-                <a16:creationId xmlns:a16="http://schemas.microsoft.com/office/drawing/2014/main" id="{E15C13EB-1FBB-5985-BCC9-6C1493DF7615}"/>
-              </a:ext>
-            </a:extLst>
-          </p:cNvPr>
-          <p:cNvPicPr>
-            <a:picLocks noChangeAspect="1"/>
-          </p:cNvPicPr>
-          <p:nvPr/>
-        </p:nvPicPr>
-        <p:blipFill>
-          <a:blip r:embed="rId4">
-            <a:extLst>
-              <a:ext uri="{96DAC541-7B7A-43D3-8B79-37D633B846F1}">
-                <asvg:svgBlip xmlns:asvg="http://schemas.microsoft.com/office/drawing/2016/SVG/main" r:embed="rId5"/>
-              </a:ext>
-            </a:extLst>
-          </a:blip>
-          <a:stretch>
-            <a:fillRect/>
-          </a:stretch>
-        </p:blipFill>
-        <p:spPr>
-          <a:xfrm>
-            <a:off x="2979122" y="5370721"/>
-            <a:ext cx="523221" cy="523221"/>
-          </a:xfrm>
-          <a:prstGeom prst="rect">
-            <a:avLst/>
-          </a:prstGeom>
-        </p:spPr>
-      </p:pic>
-      <p:pic>
-        <p:nvPicPr>
-          <p:cNvPr id="11" name="Graphic 10" descr="Badge with solid fill">
-            <a:extLst>
-              <a:ext uri="{FF2B5EF4-FFF2-40B4-BE49-F238E27FC236}">
-                <a16:creationId xmlns:a16="http://schemas.microsoft.com/office/drawing/2014/main" id="{D42EE465-F092-79A9-BC54-AA74C4D296DD}"/>
-              </a:ext>
-            </a:extLst>
-          </p:cNvPr>
-          <p:cNvPicPr>
-            <a:picLocks noChangeAspect="1"/>
-          </p:cNvPicPr>
-          <p:nvPr/>
-        </p:nvPicPr>
-        <p:blipFill>
-          <a:blip r:embed="rId6">
-            <a:extLst>
-              <a:ext uri="{96DAC541-7B7A-43D3-8B79-37D633B846F1}">
-                <asvg:svgBlip xmlns:asvg="http://schemas.microsoft.com/office/drawing/2016/SVG/main" r:embed="rId7"/>
-              </a:ext>
-            </a:extLst>
-          </a:blip>
-          <a:stretch>
-            <a:fillRect/>
-          </a:stretch>
-        </p:blipFill>
-        <p:spPr>
-          <a:xfrm>
-            <a:off x="8260940" y="5370721"/>
-            <a:ext cx="523221" cy="523221"/>
+            <a:off x="2380086" y="2053207"/>
+            <a:ext cx="7186558" cy="2316422"/>
           </a:xfrm>
           <a:prstGeom prst="rect">
             <a:avLst/>
@@ -12514,7 +11305,7 @@
     </p:spTree>
     <p:extLst>
       <p:ext uri="{BB962C8B-B14F-4D97-AF65-F5344CB8AC3E}">
-        <p14:creationId xmlns:p14="http://schemas.microsoft.com/office/powerpoint/2010/main" val="3124002406"/>
+        <p14:creationId xmlns:p14="http://schemas.microsoft.com/office/powerpoint/2010/main" val="1042953147"/>
       </p:ext>
     </p:extLst>
   </p:cSld>
@@ -12543,10 +11334,10 @@
       </p:grpSpPr>
       <p:sp>
         <p:nvSpPr>
-          <p:cNvPr id="2" name="Title 1">
-            <a:extLst>
-              <a:ext uri="{FF2B5EF4-FFF2-40B4-BE49-F238E27FC236}">
-                <a16:creationId xmlns:a16="http://schemas.microsoft.com/office/drawing/2014/main" id="{ED3F830A-0841-2B85-58E5-6CE63A3347BC}"/>
+          <p:cNvPr id="4" name="Footer Placeholder 3">
+            <a:extLst>
+              <a:ext uri="{FF2B5EF4-FFF2-40B4-BE49-F238E27FC236}">
+                <a16:creationId xmlns:a16="http://schemas.microsoft.com/office/drawing/2014/main" id="{B8027B5C-B1A1-0376-4174-FFF61C554492}"/>
               </a:ext>
             </a:extLst>
           </p:cNvPr>
@@ -12554,13 +11345,13 @@
             <a:spLocks noGrp="1"/>
           </p:cNvSpPr>
           <p:nvPr>
-            <p:ph type="title"/>
-          </p:nvPr>
-        </p:nvSpPr>
-        <p:spPr>
-          <a:xfrm>
-            <a:off x="838200" y="365126"/>
-            <a:ext cx="10515600" cy="638922"/>
+            <p:ph type="ftr" sz="quarter" idx="11"/>
+          </p:nvPr>
+        </p:nvSpPr>
+        <p:spPr>
+          <a:xfrm>
+            <a:off x="1028700" y="6356350"/>
+            <a:ext cx="6210300" cy="365125"/>
           </a:xfrm>
         </p:spPr>
         <p:txBody>
@@ -12569,15 +11360,23 @@
           </a:bodyPr>
           <a:lstStyle/>
           <a:p>
-            <a:pPr algn="l"/>
-            <a:r>
-              <a:rPr lang="en-US" sz="3200" b="1" dirty="0">
-                <a:solidFill>
-                  <a:srgbClr val="1E40AF"/>
-                </a:solidFill>
-                <a:latin typeface="-apple-system"/>
-              </a:rPr>
-              <a:t>YoloV8n Config</a:t>
+            <a:pPr algn="r">
+              <a:lnSpc>
+                <a:spcPct val="90000"/>
+              </a:lnSpc>
+              <a:spcAft>
+                <a:spcPts val="504"/>
+              </a:spcAft>
+            </a:pPr>
+            <a:r>
+              <a:rPr lang="en-US" sz="900" dirty="0">
+                <a:solidFill>
+                  <a:schemeClr val="tx1">
+                    <a:alpha val="80000"/>
+                  </a:schemeClr>
+                </a:solidFill>
+              </a:rPr>
+              <a:t>International University Of Applied Sciences</a:t>
             </a:r>
           </a:p>
         </p:txBody>
@@ -12598,30 +11397,162 @@
             <p:ph type="dt" sz="half" idx="10"/>
           </p:nvPr>
         </p:nvSpPr>
-        <p:spPr/>
-        <p:txBody>
-          <a:bodyPr/>
+        <p:spPr>
+          <a:xfrm>
+            <a:off x="292608" y="6356349"/>
+            <a:ext cx="3085338" cy="365125"/>
+          </a:xfrm>
+        </p:spPr>
+        <p:txBody>
+          <a:bodyPr>
+            <a:normAutofit/>
+          </a:bodyPr>
+          <a:lstStyle/>
+          <a:p>
+            <a:pPr algn="r">
+              <a:lnSpc>
+                <a:spcPct val="90000"/>
+              </a:lnSpc>
+              <a:spcAft>
+                <a:spcPts val="504"/>
+              </a:spcAft>
+            </a:pPr>
+            <a:r>
+              <a:rPr lang="en-US" sz="900" dirty="0">
+                <a:solidFill>
+                  <a:schemeClr val="tx1">
+                    <a:alpha val="80000"/>
+                  </a:schemeClr>
+                </a:solidFill>
+              </a:rPr>
+              <a:t>Knowledge Distillation &amp; Neural Architecture Search</a:t>
+            </a:r>
+          </a:p>
+        </p:txBody>
+      </p:sp>
+      <p:sp>
+        <p:nvSpPr>
+          <p:cNvPr id="5" name="Slide Number Placeholder 4">
+            <a:extLst>
+              <a:ext uri="{FF2B5EF4-FFF2-40B4-BE49-F238E27FC236}">
+                <a16:creationId xmlns:a16="http://schemas.microsoft.com/office/drawing/2014/main" id="{80A790D5-177D-B6A2-0E90-81EF4FE37C9F}"/>
+              </a:ext>
+            </a:extLst>
+          </p:cNvPr>
+          <p:cNvSpPr>
+            <a:spLocks noGrp="1"/>
+          </p:cNvSpPr>
+          <p:nvPr>
+            <p:ph type="sldNum" sz="quarter" idx="12"/>
+          </p:nvPr>
+        </p:nvSpPr>
+        <p:spPr>
+          <a:xfrm>
+            <a:off x="11034184" y="6356350"/>
+            <a:ext cx="514349" cy="365125"/>
+          </a:xfrm>
+        </p:spPr>
+        <p:txBody>
+          <a:bodyPr>
+            <a:normAutofit/>
+          </a:bodyPr>
           <a:lstStyle/>
           <a:p>
             <a:pPr>
               <a:spcAft>
                 <a:spcPts val="600"/>
               </a:spcAft>
-              <a:defRPr/>
             </a:pPr>
-            <a:r>
-              <a:rPr lang="en-US" dirty="0"/>
-              <a:t>Master Thesis</a:t>
-            </a:r>
-          </a:p>
-        </p:txBody>
-      </p:sp>
-      <p:sp>
-        <p:nvSpPr>
-          <p:cNvPr id="4" name="Footer Placeholder 3">
-            <a:extLst>
-              <a:ext uri="{FF2B5EF4-FFF2-40B4-BE49-F238E27FC236}">
-                <a16:creationId xmlns:a16="http://schemas.microsoft.com/office/drawing/2014/main" id="{B8027B5C-B1A1-0376-4174-FFF61C554492}"/>
+            <a:fld id="{C98AED0B-3B00-448B-836B-316F7AA19B4B}" type="slidenum">
+              <a:rPr lang="en-US">
+                <a:solidFill>
+                  <a:schemeClr val="tx1">
+                    <a:alpha val="80000"/>
+                  </a:schemeClr>
+                </a:solidFill>
+              </a:rPr>
+              <a:pPr>
+                <a:spcAft>
+                  <a:spcPts val="600"/>
+                </a:spcAft>
+              </a:pPr>
+              <a:t>13</a:t>
+            </a:fld>
+            <a:endParaRPr lang="en-US">
+              <a:solidFill>
+                <a:schemeClr val="tx1">
+                  <a:alpha val="80000"/>
+                </a:schemeClr>
+              </a:solidFill>
+            </a:endParaRPr>
+          </a:p>
+        </p:txBody>
+      </p:sp>
+      <p:sp>
+        <p:nvSpPr>
+          <p:cNvPr id="8" name="Title 1">
+            <a:extLst>
+              <a:ext uri="{FF2B5EF4-FFF2-40B4-BE49-F238E27FC236}">
+                <a16:creationId xmlns:a16="http://schemas.microsoft.com/office/drawing/2014/main" id="{58FF4C60-14F0-104E-A6FA-3FCA6169A054}"/>
+              </a:ext>
+            </a:extLst>
+          </p:cNvPr>
+          <p:cNvSpPr txBox="1">
+            <a:spLocks/>
+          </p:cNvSpPr>
+          <p:nvPr/>
+        </p:nvSpPr>
+        <p:spPr>
+          <a:xfrm>
+            <a:off x="908227" y="340258"/>
+            <a:ext cx="10515600" cy="638922"/>
+          </a:xfrm>
+          <a:prstGeom prst="rect">
+            <a:avLst/>
+          </a:prstGeom>
+        </p:spPr>
+        <p:txBody>
+          <a:bodyPr vert="horz" lIns="91440" tIns="45720" rIns="91440" bIns="45720" rtlCol="0" anchor="ctr">
+            <a:normAutofit fontScale="97500"/>
+          </a:bodyPr>
+          <a:lstStyle>
+            <a:lvl1pPr algn="l" defTabSz="914400" rtl="0" eaLnBrk="1" latinLnBrk="0" hangingPunct="1">
+              <a:lnSpc>
+                <a:spcPct val="90000"/>
+              </a:lnSpc>
+              <a:spcBef>
+                <a:spcPct val="0"/>
+              </a:spcBef>
+              <a:buNone/>
+              <a:defRPr sz="4400" kern="1200">
+                <a:solidFill>
+                  <a:schemeClr val="tx1"/>
+                </a:solidFill>
+                <a:latin typeface="+mj-lt"/>
+                <a:ea typeface="+mj-ea"/>
+                <a:cs typeface="+mj-cs"/>
+              </a:defRPr>
+            </a:lvl1pPr>
+          </a:lstStyle>
+          <a:p>
+            <a:r>
+              <a:rPr lang="en-US" sz="3600" b="1" dirty="0">
+                <a:solidFill>
+                  <a:srgbClr val="1E40AF"/>
+                </a:solidFill>
+                <a:latin typeface="-apple-system"/>
+              </a:rPr>
+              <a:t>Jenkins Pipeline Implementation</a:t>
+            </a:r>
+          </a:p>
+        </p:txBody>
+      </p:sp>
+      <p:sp>
+        <p:nvSpPr>
+          <p:cNvPr id="22" name="Title 21">
+            <a:extLst>
+              <a:ext uri="{FF2B5EF4-FFF2-40B4-BE49-F238E27FC236}">
+                <a16:creationId xmlns:a16="http://schemas.microsoft.com/office/drawing/2014/main" id="{02BADA62-F628-D63A-FBEE-7108FE1D89B3}"/>
               </a:ext>
             </a:extLst>
           </p:cNvPr>
@@ -12629,56 +11560,32 @@
             <a:spLocks noGrp="1"/>
           </p:cNvSpPr>
           <p:nvPr>
-            <p:ph type="ftr" sz="quarter" idx="11"/>
-          </p:nvPr>
-        </p:nvSpPr>
-        <p:spPr/>
+            <p:ph type="title"/>
+          </p:nvPr>
+        </p:nvSpPr>
+        <p:spPr>
+          <a:xfrm>
+            <a:off x="1336964" y="307303"/>
+            <a:ext cx="10515600" cy="1325563"/>
+          </a:xfrm>
+        </p:spPr>
         <p:txBody>
           <a:bodyPr/>
           <a:lstStyle/>
           <a:p>
             <a:r>
-              <a:rPr lang="en-US"/>
-              <a:t>International University Of Applied Sciences</a:t>
-            </a:r>
-          </a:p>
-        </p:txBody>
-      </p:sp>
-      <p:sp>
-        <p:nvSpPr>
-          <p:cNvPr id="5" name="Slide Number Placeholder 4">
-            <a:extLst>
-              <a:ext uri="{FF2B5EF4-FFF2-40B4-BE49-F238E27FC236}">
-                <a16:creationId xmlns:a16="http://schemas.microsoft.com/office/drawing/2014/main" id="{80A790D5-177D-B6A2-0E90-81EF4FE37C9F}"/>
-              </a:ext>
-            </a:extLst>
-          </p:cNvPr>
-          <p:cNvSpPr>
-            <a:spLocks noGrp="1"/>
-          </p:cNvSpPr>
-          <p:nvPr>
-            <p:ph type="sldNum" sz="quarter" idx="12"/>
-          </p:nvPr>
-        </p:nvSpPr>
-        <p:spPr/>
-        <p:txBody>
-          <a:bodyPr/>
-          <a:lstStyle/>
-          <a:p>
-            <a:fld id="{C98AED0B-3B00-448B-836B-316F7AA19B4B}" type="slidenum">
-              <a:rPr lang="en-US" smtClean="0"/>
-              <a:t>13</a:t>
-            </a:fld>
-            <a:endParaRPr lang="en-US"/>
+              <a:rPr lang="en-US" dirty="0"/>
+              <a:t>   </a:t>
+            </a:r>
           </a:p>
         </p:txBody>
       </p:sp>
       <p:pic>
         <p:nvPicPr>
-          <p:cNvPr id="10" name="Picture 9">
-            <a:extLst>
-              <a:ext uri="{FF2B5EF4-FFF2-40B4-BE49-F238E27FC236}">
-                <a16:creationId xmlns:a16="http://schemas.microsoft.com/office/drawing/2014/main" id="{95470B50-4742-57EA-E337-7EF457A72127}"/>
+          <p:cNvPr id="6" name="Graphic 5" descr="Arrow circle with solid fill">
+            <a:extLst>
+              <a:ext uri="{FF2B5EF4-FFF2-40B4-BE49-F238E27FC236}">
+                <a16:creationId xmlns:a16="http://schemas.microsoft.com/office/drawing/2014/main" id="{EEFCE6DC-E426-6B6D-643A-73E911372597}"/>
               </a:ext>
             </a:extLst>
           </p:cNvPr>
@@ -12688,15 +11595,51 @@
           <p:nvPr/>
         </p:nvPicPr>
         <p:blipFill>
-          <a:blip r:embed="rId2"/>
+          <a:blip r:embed="rId2">
+            <a:extLst>
+              <a:ext uri="{96DAC541-7B7A-43D3-8B79-37D633B846F1}">
+                <asvg:svgBlip xmlns:asvg="http://schemas.microsoft.com/office/drawing/2016/SVG/main" r:embed="rId3"/>
+              </a:ext>
+            </a:extLst>
+          </a:blip>
           <a:stretch>
             <a:fillRect/>
           </a:stretch>
         </p:blipFill>
         <p:spPr>
           <a:xfrm>
-            <a:off x="1063102" y="1004048"/>
-            <a:ext cx="5512083" cy="4997707"/>
+            <a:off x="389777" y="331161"/>
+            <a:ext cx="638923" cy="638923"/>
+          </a:xfrm>
+          <a:prstGeom prst="rect">
+            <a:avLst/>
+          </a:prstGeom>
+        </p:spPr>
+      </p:pic>
+      <p:pic>
+        <p:nvPicPr>
+          <p:cNvPr id="13" name="Picture 12">
+            <a:extLst>
+              <a:ext uri="{FF2B5EF4-FFF2-40B4-BE49-F238E27FC236}">
+                <a16:creationId xmlns:a16="http://schemas.microsoft.com/office/drawing/2014/main" id="{0983DC0E-BD56-6F04-34C6-F46184A9ACDD}"/>
+              </a:ext>
+            </a:extLst>
+          </p:cNvPr>
+          <p:cNvPicPr>
+            <a:picLocks noChangeAspect="1"/>
+          </p:cNvPicPr>
+          <p:nvPr/>
+        </p:nvPicPr>
+        <p:blipFill>
+          <a:blip r:embed="rId4"/>
+          <a:stretch>
+            <a:fillRect/>
+          </a:stretch>
+        </p:blipFill>
+        <p:spPr>
+          <a:xfrm>
+            <a:off x="2106084" y="1641963"/>
+            <a:ext cx="7615805" cy="3789255"/>
           </a:xfrm>
           <a:prstGeom prst="rect">
             <a:avLst/>
@@ -12706,7 +11649,7 @@
     </p:spTree>
     <p:extLst>
       <p:ext uri="{BB962C8B-B14F-4D97-AF65-F5344CB8AC3E}">
-        <p14:creationId xmlns:p14="http://schemas.microsoft.com/office/powerpoint/2010/main" val="1254977674"/>
+        <p14:creationId xmlns:p14="http://schemas.microsoft.com/office/powerpoint/2010/main" val="3437084897"/>
       </p:ext>
     </p:extLst>
   </p:cSld>
@@ -12761,7 +11704,6 @@
           </a:bodyPr>
           <a:lstStyle/>
           <a:p>
-            <a:pPr algn="ctr"/>
             <a:r>
               <a:rPr lang="en-US" sz="3200" b="1" dirty="0">
                 <a:solidFill>
@@ -12769,7 +11711,7 @@
                 </a:solidFill>
                 <a:latin typeface="-apple-system"/>
               </a:rPr>
-              <a:t>Knowledge Distillation Performance Comparison</a:t>
+              <a:t>MLOps Architecture</a:t>
             </a:r>
           </a:p>
         </p:txBody>
@@ -12867,10 +11809,10 @@
       </p:sp>
       <p:pic>
         <p:nvPicPr>
-          <p:cNvPr id="8" name="Picture 7">
-            <a:extLst>
-              <a:ext uri="{FF2B5EF4-FFF2-40B4-BE49-F238E27FC236}">
-                <a16:creationId xmlns:a16="http://schemas.microsoft.com/office/drawing/2014/main" id="{9DED50B0-36FD-6A28-AC69-694AFAD2A95D}"/>
+          <p:cNvPr id="7" name="Picture 6">
+            <a:extLst>
+              <a:ext uri="{FF2B5EF4-FFF2-40B4-BE49-F238E27FC236}">
+                <a16:creationId xmlns:a16="http://schemas.microsoft.com/office/drawing/2014/main" id="{554DBDB9-A6C8-A747-A704-71D09AFBE212}"/>
               </a:ext>
             </a:extLst>
           </p:cNvPr>
@@ -12887,98 +11829,8 @@
         </p:blipFill>
         <p:spPr>
           <a:xfrm>
-            <a:off x="1726482" y="1294105"/>
-            <a:ext cx="8153819" cy="977950"/>
-          </a:xfrm>
-          <a:prstGeom prst="rect">
-            <a:avLst/>
-          </a:prstGeom>
-        </p:spPr>
-      </p:pic>
-      <p:pic>
-        <p:nvPicPr>
-          <p:cNvPr id="10" name="Picture 9">
-            <a:extLst>
-              <a:ext uri="{FF2B5EF4-FFF2-40B4-BE49-F238E27FC236}">
-                <a16:creationId xmlns:a16="http://schemas.microsoft.com/office/drawing/2014/main" id="{9ECDFC44-8C3B-32E0-454F-8397C61F8075}"/>
-              </a:ext>
-            </a:extLst>
-          </p:cNvPr>
-          <p:cNvPicPr>
-            <a:picLocks noChangeAspect="1"/>
-          </p:cNvPicPr>
-          <p:nvPr/>
-        </p:nvPicPr>
-        <p:blipFill>
-          <a:blip r:embed="rId3"/>
-          <a:stretch>
-            <a:fillRect/>
-          </a:stretch>
-        </p:blipFill>
-        <p:spPr>
-          <a:xfrm>
-            <a:off x="1726482" y="2562112"/>
-            <a:ext cx="4026107" cy="1511378"/>
-          </a:xfrm>
-          <a:prstGeom prst="rect">
-            <a:avLst/>
-          </a:prstGeom>
-        </p:spPr>
-      </p:pic>
-      <p:pic>
-        <p:nvPicPr>
-          <p:cNvPr id="12" name="Picture 11">
-            <a:extLst>
-              <a:ext uri="{FF2B5EF4-FFF2-40B4-BE49-F238E27FC236}">
-                <a16:creationId xmlns:a16="http://schemas.microsoft.com/office/drawing/2014/main" id="{398ACBFD-6F0A-0398-246E-C9E2E68AA48D}"/>
-              </a:ext>
-            </a:extLst>
-          </p:cNvPr>
-          <p:cNvPicPr>
-            <a:picLocks noChangeAspect="1"/>
-          </p:cNvPicPr>
-          <p:nvPr/>
-        </p:nvPicPr>
-        <p:blipFill>
-          <a:blip r:embed="rId4"/>
-          <a:stretch>
-            <a:fillRect/>
-          </a:stretch>
-        </p:blipFill>
-        <p:spPr>
-          <a:xfrm>
-            <a:off x="1751883" y="4357333"/>
-            <a:ext cx="4000706" cy="1206562"/>
-          </a:xfrm>
-          <a:prstGeom prst="rect">
-            <a:avLst/>
-          </a:prstGeom>
-        </p:spPr>
-      </p:pic>
-      <p:pic>
-        <p:nvPicPr>
-          <p:cNvPr id="14" name="Picture 13">
-            <a:extLst>
-              <a:ext uri="{FF2B5EF4-FFF2-40B4-BE49-F238E27FC236}">
-                <a16:creationId xmlns:a16="http://schemas.microsoft.com/office/drawing/2014/main" id="{696A1DA9-9D3C-5780-CF5C-F060BAB66DB2}"/>
-              </a:ext>
-            </a:extLst>
-          </p:cNvPr>
-          <p:cNvPicPr>
-            <a:picLocks noChangeAspect="1"/>
-          </p:cNvPicPr>
-          <p:nvPr/>
-        </p:nvPicPr>
-        <p:blipFill>
-          <a:blip r:embed="rId5"/>
-          <a:stretch>
-            <a:fillRect/>
-          </a:stretch>
-        </p:blipFill>
-        <p:spPr>
-          <a:xfrm>
-            <a:off x="6186195" y="2970230"/>
-            <a:ext cx="3778898" cy="2258995"/>
+            <a:off x="1775882" y="1247663"/>
+            <a:ext cx="8274475" cy="4362674"/>
           </a:xfrm>
           <a:prstGeom prst="rect">
             <a:avLst/>
@@ -12988,7 +11840,7 @@
     </p:spTree>
     <p:extLst>
       <p:ext uri="{BB962C8B-B14F-4D97-AF65-F5344CB8AC3E}">
-        <p14:creationId xmlns:p14="http://schemas.microsoft.com/office/powerpoint/2010/main" val="955341926"/>
+        <p14:creationId xmlns:p14="http://schemas.microsoft.com/office/powerpoint/2010/main" val="1796874577"/>
       </p:ext>
     </p:extLst>
   </p:cSld>
@@ -13017,10 +11869,10 @@
       </p:grpSpPr>
       <p:sp>
         <p:nvSpPr>
-          <p:cNvPr id="4" name="Footer Placeholder 3">
-            <a:extLst>
-              <a:ext uri="{FF2B5EF4-FFF2-40B4-BE49-F238E27FC236}">
-                <a16:creationId xmlns:a16="http://schemas.microsoft.com/office/drawing/2014/main" id="{B8027B5C-B1A1-0376-4174-FFF61C554492}"/>
+          <p:cNvPr id="2" name="Title 1">
+            <a:extLst>
+              <a:ext uri="{FF2B5EF4-FFF2-40B4-BE49-F238E27FC236}">
+                <a16:creationId xmlns:a16="http://schemas.microsoft.com/office/drawing/2014/main" id="{ED3F830A-0841-2B85-58E5-6CE63A3347BC}"/>
               </a:ext>
             </a:extLst>
           </p:cNvPr>
@@ -13028,13 +11880,13 @@
             <a:spLocks noGrp="1"/>
           </p:cNvSpPr>
           <p:nvPr>
-            <p:ph type="ftr" sz="quarter" idx="11"/>
-          </p:nvPr>
-        </p:nvSpPr>
-        <p:spPr>
-          <a:xfrm>
-            <a:off x="1028700" y="6356350"/>
-            <a:ext cx="6210300" cy="365125"/>
+            <p:ph type="title"/>
+          </p:nvPr>
+        </p:nvSpPr>
+        <p:spPr>
+          <a:xfrm>
+            <a:off x="838200" y="365126"/>
+            <a:ext cx="10515600" cy="638922"/>
           </a:xfrm>
         </p:spPr>
         <p:txBody>
@@ -13043,23 +11895,15 @@
           </a:bodyPr>
           <a:lstStyle/>
           <a:p>
-            <a:pPr algn="r">
-              <a:lnSpc>
-                <a:spcPct val="90000"/>
-              </a:lnSpc>
-              <a:spcAft>
-                <a:spcPts val="504"/>
-              </a:spcAft>
-            </a:pPr>
-            <a:r>
-              <a:rPr lang="en-US" sz="900" dirty="0">
-                <a:solidFill>
-                  <a:schemeClr val="tx1">
-                    <a:alpha val="80000"/>
-                  </a:schemeClr>
-                </a:solidFill>
-              </a:rPr>
-              <a:t>International University Of Applied Sciences</a:t>
+            <a:pPr algn="l"/>
+            <a:r>
+              <a:rPr lang="en-US" sz="3200" b="1" dirty="0">
+                <a:solidFill>
+                  <a:srgbClr val="1E40AF"/>
+                </a:solidFill>
+                <a:latin typeface="-apple-system"/>
+              </a:rPr>
+              <a:t>Dataset Validation &amp; Augmentation</a:t>
             </a:r>
           </a:p>
         </p:txBody>
@@ -13080,195 +11924,87 @@
             <p:ph type="dt" sz="half" idx="10"/>
           </p:nvPr>
         </p:nvSpPr>
-        <p:spPr>
-          <a:xfrm>
-            <a:off x="292608" y="6356349"/>
-            <a:ext cx="3085338" cy="365125"/>
-          </a:xfrm>
-        </p:spPr>
-        <p:txBody>
-          <a:bodyPr>
-            <a:normAutofit/>
-          </a:bodyPr>
-          <a:lstStyle/>
-          <a:p>
-            <a:pPr algn="r">
-              <a:lnSpc>
-                <a:spcPct val="90000"/>
-              </a:lnSpc>
-              <a:spcAft>
-                <a:spcPts val="504"/>
-              </a:spcAft>
-            </a:pPr>
-            <a:r>
-              <a:rPr lang="en-US" sz="900" dirty="0">
-                <a:solidFill>
-                  <a:schemeClr val="tx1">
-                    <a:alpha val="80000"/>
-                  </a:schemeClr>
-                </a:solidFill>
-              </a:rPr>
-              <a:t>Knowledge Distillation &amp; Neural Architecture Search</a:t>
-            </a:r>
-          </a:p>
-        </p:txBody>
-      </p:sp>
-      <p:sp>
-        <p:nvSpPr>
-          <p:cNvPr id="5" name="Slide Number Placeholder 4">
-            <a:extLst>
-              <a:ext uri="{FF2B5EF4-FFF2-40B4-BE49-F238E27FC236}">
-                <a16:creationId xmlns:a16="http://schemas.microsoft.com/office/drawing/2014/main" id="{80A790D5-177D-B6A2-0E90-81EF4FE37C9F}"/>
-              </a:ext>
-            </a:extLst>
-          </p:cNvPr>
-          <p:cNvSpPr>
-            <a:spLocks noGrp="1"/>
-          </p:cNvSpPr>
-          <p:nvPr>
-            <p:ph type="sldNum" sz="quarter" idx="12"/>
-          </p:nvPr>
-        </p:nvSpPr>
-        <p:spPr>
-          <a:xfrm>
-            <a:off x="11034184" y="6356350"/>
-            <a:ext cx="514349" cy="365125"/>
-          </a:xfrm>
-        </p:spPr>
-        <p:txBody>
-          <a:bodyPr>
-            <a:normAutofit/>
-          </a:bodyPr>
+        <p:spPr/>
+        <p:txBody>
+          <a:bodyPr/>
           <a:lstStyle/>
           <a:p>
             <a:pPr>
               <a:spcAft>
                 <a:spcPts val="600"/>
               </a:spcAft>
+              <a:defRPr/>
             </a:pPr>
+            <a:r>
+              <a:rPr lang="en-US" dirty="0"/>
+              <a:t>Master Thesis</a:t>
+            </a:r>
+          </a:p>
+        </p:txBody>
+      </p:sp>
+      <p:sp>
+        <p:nvSpPr>
+          <p:cNvPr id="4" name="Footer Placeholder 3">
+            <a:extLst>
+              <a:ext uri="{FF2B5EF4-FFF2-40B4-BE49-F238E27FC236}">
+                <a16:creationId xmlns:a16="http://schemas.microsoft.com/office/drawing/2014/main" id="{B8027B5C-B1A1-0376-4174-FFF61C554492}"/>
+              </a:ext>
+            </a:extLst>
+          </p:cNvPr>
+          <p:cNvSpPr>
+            <a:spLocks noGrp="1"/>
+          </p:cNvSpPr>
+          <p:nvPr>
+            <p:ph type="ftr" sz="quarter" idx="11"/>
+          </p:nvPr>
+        </p:nvSpPr>
+        <p:spPr/>
+        <p:txBody>
+          <a:bodyPr/>
+          <a:lstStyle/>
+          <a:p>
+            <a:r>
+              <a:rPr lang="en-US"/>
+              <a:t>International University Of Applied Sciences</a:t>
+            </a:r>
+          </a:p>
+        </p:txBody>
+      </p:sp>
+      <p:sp>
+        <p:nvSpPr>
+          <p:cNvPr id="5" name="Slide Number Placeholder 4">
+            <a:extLst>
+              <a:ext uri="{FF2B5EF4-FFF2-40B4-BE49-F238E27FC236}">
+                <a16:creationId xmlns:a16="http://schemas.microsoft.com/office/drawing/2014/main" id="{80A790D5-177D-B6A2-0E90-81EF4FE37C9F}"/>
+              </a:ext>
+            </a:extLst>
+          </p:cNvPr>
+          <p:cNvSpPr>
+            <a:spLocks noGrp="1"/>
+          </p:cNvSpPr>
+          <p:nvPr>
+            <p:ph type="sldNum" sz="quarter" idx="12"/>
+          </p:nvPr>
+        </p:nvSpPr>
+        <p:spPr/>
+        <p:txBody>
+          <a:bodyPr/>
+          <a:lstStyle/>
+          <a:p>
             <a:fld id="{C98AED0B-3B00-448B-836B-316F7AA19B4B}" type="slidenum">
-              <a:rPr lang="en-US">
-                <a:solidFill>
-                  <a:schemeClr val="tx1">
-                    <a:alpha val="80000"/>
-                  </a:schemeClr>
-                </a:solidFill>
-              </a:rPr>
-              <a:pPr>
-                <a:spcAft>
-                  <a:spcPts val="600"/>
-                </a:spcAft>
-              </a:pPr>
+              <a:rPr lang="en-US" smtClean="0"/>
               <a:t>15</a:t>
             </a:fld>
-            <a:endParaRPr lang="en-US">
-              <a:solidFill>
-                <a:schemeClr val="tx1">
-                  <a:alpha val="80000"/>
-                </a:schemeClr>
-              </a:solidFill>
-            </a:endParaRPr>
-          </a:p>
-        </p:txBody>
-      </p:sp>
-      <p:sp>
-        <p:nvSpPr>
-          <p:cNvPr id="8" name="Title 1">
-            <a:extLst>
-              <a:ext uri="{FF2B5EF4-FFF2-40B4-BE49-F238E27FC236}">
-                <a16:creationId xmlns:a16="http://schemas.microsoft.com/office/drawing/2014/main" id="{58FF4C60-14F0-104E-A6FA-3FCA6169A054}"/>
-              </a:ext>
-            </a:extLst>
-          </p:cNvPr>
-          <p:cNvSpPr txBox="1">
-            <a:spLocks/>
-          </p:cNvSpPr>
-          <p:nvPr/>
-        </p:nvSpPr>
-        <p:spPr>
-          <a:xfrm>
-            <a:off x="908227" y="340258"/>
-            <a:ext cx="10515600" cy="638922"/>
-          </a:xfrm>
-          <a:prstGeom prst="rect">
-            <a:avLst/>
-          </a:prstGeom>
-        </p:spPr>
-        <p:txBody>
-          <a:bodyPr vert="horz" lIns="91440" tIns="45720" rIns="91440" bIns="45720" rtlCol="0" anchor="ctr">
-            <a:normAutofit fontScale="97500"/>
-          </a:bodyPr>
-          <a:lstStyle>
-            <a:lvl1pPr algn="l" defTabSz="914400" rtl="0" eaLnBrk="1" latinLnBrk="0" hangingPunct="1">
-              <a:lnSpc>
-                <a:spcPct val="90000"/>
-              </a:lnSpc>
-              <a:spcBef>
-                <a:spcPct val="0"/>
-              </a:spcBef>
-              <a:buNone/>
-              <a:defRPr sz="4400" kern="1200">
-                <a:solidFill>
-                  <a:schemeClr val="tx1"/>
-                </a:solidFill>
-                <a:latin typeface="+mj-lt"/>
-                <a:ea typeface="+mj-ea"/>
-                <a:cs typeface="+mj-cs"/>
-              </a:defRPr>
-            </a:lvl1pPr>
-          </a:lstStyle>
-          <a:p>
-            <a:r>
-              <a:rPr lang="en-US" sz="3600" b="1" dirty="0">
-                <a:solidFill>
-                  <a:srgbClr val="1E40AF"/>
-                </a:solidFill>
-                <a:latin typeface="-apple-system"/>
-              </a:rPr>
-              <a:t>Jenkins Pipeline Implementation</a:t>
-            </a:r>
-          </a:p>
-        </p:txBody>
-      </p:sp>
-      <p:sp>
-        <p:nvSpPr>
-          <p:cNvPr id="22" name="Title 21">
-            <a:extLst>
-              <a:ext uri="{FF2B5EF4-FFF2-40B4-BE49-F238E27FC236}">
-                <a16:creationId xmlns:a16="http://schemas.microsoft.com/office/drawing/2014/main" id="{02BADA62-F628-D63A-FBEE-7108FE1D89B3}"/>
-              </a:ext>
-            </a:extLst>
-          </p:cNvPr>
-          <p:cNvSpPr>
-            <a:spLocks noGrp="1"/>
-          </p:cNvSpPr>
-          <p:nvPr>
-            <p:ph type="title"/>
-          </p:nvPr>
-        </p:nvSpPr>
-        <p:spPr>
-          <a:xfrm>
-            <a:off x="1336964" y="307303"/>
-            <a:ext cx="10515600" cy="1325563"/>
-          </a:xfrm>
-        </p:spPr>
-        <p:txBody>
-          <a:bodyPr/>
-          <a:lstStyle/>
-          <a:p>
-            <a:r>
-              <a:rPr lang="en-US" dirty="0"/>
-              <a:t>   </a:t>
-            </a:r>
+            <a:endParaRPr lang="en-US"/>
           </a:p>
         </p:txBody>
       </p:sp>
       <p:pic>
         <p:nvPicPr>
-          <p:cNvPr id="6" name="Graphic 5" descr="Arrow circle with solid fill">
-            <a:extLst>
-              <a:ext uri="{FF2B5EF4-FFF2-40B4-BE49-F238E27FC236}">
-                <a16:creationId xmlns:a16="http://schemas.microsoft.com/office/drawing/2014/main" id="{EEFCE6DC-E426-6B6D-643A-73E911372597}"/>
+          <p:cNvPr id="7" name="Picture 6">
+            <a:extLst>
+              <a:ext uri="{FF2B5EF4-FFF2-40B4-BE49-F238E27FC236}">
+                <a16:creationId xmlns:a16="http://schemas.microsoft.com/office/drawing/2014/main" id="{6487EDB7-E4EE-A211-3D4A-640860549869}"/>
               </a:ext>
             </a:extLst>
           </p:cNvPr>
@@ -13278,51 +12014,15 @@
           <p:nvPr/>
         </p:nvPicPr>
         <p:blipFill>
-          <a:blip r:embed="rId2">
-            <a:extLst>
-              <a:ext uri="{96DAC541-7B7A-43D3-8B79-37D633B846F1}">
-                <asvg:svgBlip xmlns:asvg="http://schemas.microsoft.com/office/drawing/2016/SVG/main" r:embed="rId3"/>
-              </a:ext>
-            </a:extLst>
-          </a:blip>
+          <a:blip r:embed="rId2"/>
           <a:stretch>
             <a:fillRect/>
           </a:stretch>
         </p:blipFill>
         <p:spPr>
           <a:xfrm>
-            <a:off x="389777" y="331161"/>
-            <a:ext cx="638923" cy="638923"/>
-          </a:xfrm>
-          <a:prstGeom prst="rect">
-            <a:avLst/>
-          </a:prstGeom>
-        </p:spPr>
-      </p:pic>
-      <p:pic>
-        <p:nvPicPr>
-          <p:cNvPr id="13" name="Picture 12">
-            <a:extLst>
-              <a:ext uri="{FF2B5EF4-FFF2-40B4-BE49-F238E27FC236}">
-                <a16:creationId xmlns:a16="http://schemas.microsoft.com/office/drawing/2014/main" id="{0983DC0E-BD56-6F04-34C6-F46184A9ACDD}"/>
-              </a:ext>
-            </a:extLst>
-          </p:cNvPr>
-          <p:cNvPicPr>
-            <a:picLocks noChangeAspect="1"/>
-          </p:cNvPicPr>
-          <p:nvPr/>
-        </p:nvPicPr>
-        <p:blipFill>
-          <a:blip r:embed="rId4"/>
-          <a:stretch>
-            <a:fillRect/>
-          </a:stretch>
-        </p:blipFill>
-        <p:spPr>
-          <a:xfrm>
-            <a:off x="2106084" y="1641963"/>
-            <a:ext cx="7615805" cy="3789255"/>
+            <a:off x="838200" y="1325284"/>
+            <a:ext cx="10015670" cy="4207432"/>
           </a:xfrm>
           <a:prstGeom prst="rect">
             <a:avLst/>
@@ -13332,7 +12032,7 @@
     </p:spTree>
     <p:extLst>
       <p:ext uri="{BB962C8B-B14F-4D97-AF65-F5344CB8AC3E}">
-        <p14:creationId xmlns:p14="http://schemas.microsoft.com/office/powerpoint/2010/main" val="3437084897"/>
+        <p14:creationId xmlns:p14="http://schemas.microsoft.com/office/powerpoint/2010/main" val="3490820966"/>
       </p:ext>
     </p:extLst>
   </p:cSld>
@@ -13387,6 +12087,7 @@
           </a:bodyPr>
           <a:lstStyle/>
           <a:p>
+            <a:pPr algn="ctr"/>
             <a:r>
               <a:rPr lang="en-US" sz="3200" b="1" dirty="0">
                 <a:solidFill>
@@ -13394,7 +12095,7 @@
                 </a:solidFill>
                 <a:latin typeface="-apple-system"/>
               </a:rPr>
-              <a:t>MLOps Architecture</a:t>
+              <a:t>Knowledge Distillation Performance Comparison</a:t>
             </a:r>
           </a:p>
         </p:txBody>
@@ -13492,10 +12193,10 @@
       </p:sp>
       <p:pic>
         <p:nvPicPr>
-          <p:cNvPr id="7" name="Picture 6">
-            <a:extLst>
-              <a:ext uri="{FF2B5EF4-FFF2-40B4-BE49-F238E27FC236}">
-                <a16:creationId xmlns:a16="http://schemas.microsoft.com/office/drawing/2014/main" id="{554DBDB9-A6C8-A747-A704-71D09AFBE212}"/>
+          <p:cNvPr id="8" name="Picture 7">
+            <a:extLst>
+              <a:ext uri="{FF2B5EF4-FFF2-40B4-BE49-F238E27FC236}">
+                <a16:creationId xmlns:a16="http://schemas.microsoft.com/office/drawing/2014/main" id="{9DED50B0-36FD-6A28-AC69-694AFAD2A95D}"/>
               </a:ext>
             </a:extLst>
           </p:cNvPr>
@@ -13512,8 +12213,98 @@
         </p:blipFill>
         <p:spPr>
           <a:xfrm>
-            <a:off x="1775882" y="1247663"/>
-            <a:ext cx="8274475" cy="4362674"/>
+            <a:off x="1726482" y="1294105"/>
+            <a:ext cx="8153819" cy="977950"/>
+          </a:xfrm>
+          <a:prstGeom prst="rect">
+            <a:avLst/>
+          </a:prstGeom>
+        </p:spPr>
+      </p:pic>
+      <p:pic>
+        <p:nvPicPr>
+          <p:cNvPr id="10" name="Picture 9">
+            <a:extLst>
+              <a:ext uri="{FF2B5EF4-FFF2-40B4-BE49-F238E27FC236}">
+                <a16:creationId xmlns:a16="http://schemas.microsoft.com/office/drawing/2014/main" id="{9ECDFC44-8C3B-32E0-454F-8397C61F8075}"/>
+              </a:ext>
+            </a:extLst>
+          </p:cNvPr>
+          <p:cNvPicPr>
+            <a:picLocks noChangeAspect="1"/>
+          </p:cNvPicPr>
+          <p:nvPr/>
+        </p:nvPicPr>
+        <p:blipFill>
+          <a:blip r:embed="rId3"/>
+          <a:stretch>
+            <a:fillRect/>
+          </a:stretch>
+        </p:blipFill>
+        <p:spPr>
+          <a:xfrm>
+            <a:off x="1726482" y="2562112"/>
+            <a:ext cx="4026107" cy="1511378"/>
+          </a:xfrm>
+          <a:prstGeom prst="rect">
+            <a:avLst/>
+          </a:prstGeom>
+        </p:spPr>
+      </p:pic>
+      <p:pic>
+        <p:nvPicPr>
+          <p:cNvPr id="12" name="Picture 11">
+            <a:extLst>
+              <a:ext uri="{FF2B5EF4-FFF2-40B4-BE49-F238E27FC236}">
+                <a16:creationId xmlns:a16="http://schemas.microsoft.com/office/drawing/2014/main" id="{398ACBFD-6F0A-0398-246E-C9E2E68AA48D}"/>
+              </a:ext>
+            </a:extLst>
+          </p:cNvPr>
+          <p:cNvPicPr>
+            <a:picLocks noChangeAspect="1"/>
+          </p:cNvPicPr>
+          <p:nvPr/>
+        </p:nvPicPr>
+        <p:blipFill>
+          <a:blip r:embed="rId4"/>
+          <a:stretch>
+            <a:fillRect/>
+          </a:stretch>
+        </p:blipFill>
+        <p:spPr>
+          <a:xfrm>
+            <a:off x="1751883" y="4357333"/>
+            <a:ext cx="4000706" cy="1206562"/>
+          </a:xfrm>
+          <a:prstGeom prst="rect">
+            <a:avLst/>
+          </a:prstGeom>
+        </p:spPr>
+      </p:pic>
+      <p:pic>
+        <p:nvPicPr>
+          <p:cNvPr id="14" name="Picture 13">
+            <a:extLst>
+              <a:ext uri="{FF2B5EF4-FFF2-40B4-BE49-F238E27FC236}">
+                <a16:creationId xmlns:a16="http://schemas.microsoft.com/office/drawing/2014/main" id="{696A1DA9-9D3C-5780-CF5C-F060BAB66DB2}"/>
+              </a:ext>
+            </a:extLst>
+          </p:cNvPr>
+          <p:cNvPicPr>
+            <a:picLocks noChangeAspect="1"/>
+          </p:cNvPicPr>
+          <p:nvPr/>
+        </p:nvPicPr>
+        <p:blipFill>
+          <a:blip r:embed="rId5"/>
+          <a:stretch>
+            <a:fillRect/>
+          </a:stretch>
+        </p:blipFill>
+        <p:spPr>
+          <a:xfrm>
+            <a:off x="6186195" y="2970230"/>
+            <a:ext cx="3778898" cy="2258995"/>
           </a:xfrm>
           <a:prstGeom prst="rect">
             <a:avLst/>
@@ -13523,7 +12314,7 @@
     </p:spTree>
     <p:extLst>
       <p:ext uri="{BB962C8B-B14F-4D97-AF65-F5344CB8AC3E}">
-        <p14:creationId xmlns:p14="http://schemas.microsoft.com/office/powerpoint/2010/main" val="1796874577"/>
+        <p14:creationId xmlns:p14="http://schemas.microsoft.com/office/powerpoint/2010/main" val="955341926"/>
       </p:ext>
     </p:extLst>
   </p:cSld>
@@ -13578,7 +12369,7 @@
           </a:bodyPr>
           <a:lstStyle/>
           <a:p>
-            <a:pPr algn="l"/>
+            <a:pPr algn="ctr"/>
             <a:r>
               <a:rPr lang="en-US" sz="3200" b="1" dirty="0">
                 <a:solidFill>
@@ -13586,7 +12377,7 @@
                 </a:solidFill>
                 <a:latin typeface="-apple-system"/>
               </a:rPr>
-              <a:t>Dataset Validation &amp; Augmentation</a:t>
+              <a:t>Application: Highway Vehicle Tracking  </a:t>
             </a:r>
           </a:p>
         </p:txBody>
@@ -13687,7 +12478,7 @@
           <p:cNvPr id="7" name="Picture 6">
             <a:extLst>
               <a:ext uri="{FF2B5EF4-FFF2-40B4-BE49-F238E27FC236}">
-                <a16:creationId xmlns:a16="http://schemas.microsoft.com/office/drawing/2014/main" id="{6487EDB7-E4EE-A211-3D4A-640860549869}"/>
+                <a16:creationId xmlns:a16="http://schemas.microsoft.com/office/drawing/2014/main" id="{8AA2BE19-D659-5C46-6603-ED8490AB2BA4}"/>
               </a:ext>
             </a:extLst>
           </p:cNvPr>
@@ -13704,8 +12495,8 @@
         </p:blipFill>
         <p:spPr>
           <a:xfrm>
-            <a:off x="838200" y="1325284"/>
-            <a:ext cx="10015670" cy="4207432"/>
+            <a:off x="2883964" y="1238271"/>
+            <a:ext cx="6940907" cy="4540483"/>
           </a:xfrm>
           <a:prstGeom prst="rect">
             <a:avLst/>
@@ -13715,7 +12506,7 @@
     </p:spTree>
     <p:extLst>
       <p:ext uri="{BB962C8B-B14F-4D97-AF65-F5344CB8AC3E}">
-        <p14:creationId xmlns:p14="http://schemas.microsoft.com/office/powerpoint/2010/main" val="3490820966"/>
+        <p14:creationId xmlns:p14="http://schemas.microsoft.com/office/powerpoint/2010/main" val="3536711662"/>
       </p:ext>
     </p:extLst>
   </p:cSld>
@@ -13770,7 +12561,6 @@
           </a:bodyPr>
           <a:lstStyle/>
           <a:p>
-            <a:pPr algn="ctr"/>
             <a:r>
               <a:rPr lang="en-US" sz="3200" b="1" dirty="0">
                 <a:solidFill>
@@ -13778,7 +12568,7 @@
                 </a:solidFill>
                 <a:latin typeface="-apple-system"/>
               </a:rPr>
-              <a:t>Application: Highway Vehicle Tracking  </a:t>
+              <a:t>Repository  </a:t>
             </a:r>
           </a:p>
         </p:txBody>
@@ -13874,40 +12664,114 @@
           </a:p>
         </p:txBody>
       </p:sp>
-      <p:pic>
-        <p:nvPicPr>
-          <p:cNvPr id="7" name="Picture 6">
-            <a:extLst>
-              <a:ext uri="{FF2B5EF4-FFF2-40B4-BE49-F238E27FC236}">
-                <a16:creationId xmlns:a16="http://schemas.microsoft.com/office/drawing/2014/main" id="{8AA2BE19-D659-5C46-6603-ED8490AB2BA4}"/>
-              </a:ext>
-            </a:extLst>
-          </p:cNvPr>
-          <p:cNvPicPr>
-            <a:picLocks noChangeAspect="1"/>
-          </p:cNvPicPr>
+      <p:sp>
+        <p:nvSpPr>
+          <p:cNvPr id="8" name="TextBox 7">
+            <a:extLst>
+              <a:ext uri="{FF2B5EF4-FFF2-40B4-BE49-F238E27FC236}">
+                <a16:creationId xmlns:a16="http://schemas.microsoft.com/office/drawing/2014/main" id="{15E12F00-0AAC-E395-90E7-3C30B396E75F}"/>
+              </a:ext>
+            </a:extLst>
+          </p:cNvPr>
+          <p:cNvSpPr txBox="1"/>
           <p:nvPr/>
-        </p:nvPicPr>
-        <p:blipFill>
-          <a:blip r:embed="rId2"/>
-          <a:stretch>
-            <a:fillRect/>
-          </a:stretch>
-        </p:blipFill>
-        <p:spPr>
-          <a:xfrm>
-            <a:off x="2883964" y="1238271"/>
-            <a:ext cx="6940907" cy="4540483"/>
+        </p:nvSpPr>
+        <p:spPr>
+          <a:xfrm>
+            <a:off x="838200" y="1615363"/>
+            <a:ext cx="10515600" cy="3970318"/>
           </a:xfrm>
           <a:prstGeom prst="rect">
             <a:avLst/>
           </a:prstGeom>
-        </p:spPr>
-      </p:pic>
+          <a:noFill/>
+        </p:spPr>
+        <p:txBody>
+          <a:bodyPr wrap="square">
+            <a:spAutoFit/>
+          </a:bodyPr>
+          <a:lstStyle/>
+          <a:p>
+            <a:r>
+              <a:rPr lang="en-US" dirty="0"/>
+              <a:t>Main Repository:</a:t>
+            </a:r>
+            <a:endParaRPr lang="en-US" dirty="0">
+              <a:hlinkClick r:id="rId2"/>
+            </a:endParaRPr>
+          </a:p>
+          <a:p>
+            <a:r>
+              <a:rPr lang="en-US" dirty="0">
+                <a:hlinkClick r:id="rId2"/>
+              </a:rPr>
+              <a:t>https://github.com/RajeshRamadas/yolov8-model-optimization/tree/main</a:t>
+            </a:r>
+            <a:endParaRPr lang="en-US" dirty="0"/>
+          </a:p>
+          <a:p>
+            <a:endParaRPr lang="en-US" dirty="0"/>
+          </a:p>
+          <a:p>
+            <a:r>
+              <a:rPr lang="en-US" dirty="0"/>
+              <a:t>Knowledge distillation:</a:t>
+            </a:r>
+          </a:p>
+          <a:p>
+            <a:r>
+              <a:rPr lang="en-US" dirty="0">
+                <a:hlinkClick r:id="rId3"/>
+              </a:rPr>
+              <a:t>https://github.com/RajeshRamadas/yolov8-model-optimization/tree/main/02-Implementation/knowledge_distillation</a:t>
+            </a:r>
+            <a:endParaRPr lang="en-US" dirty="0"/>
+          </a:p>
+          <a:p>
+            <a:endParaRPr lang="en-US" dirty="0"/>
+          </a:p>
+          <a:p>
+            <a:r>
+              <a:rPr lang="en-US" dirty="0"/>
+              <a:t>Application:</a:t>
+            </a:r>
+          </a:p>
+          <a:p>
+            <a:r>
+              <a:rPr lang="en-US" dirty="0">
+                <a:hlinkClick r:id="rId4"/>
+              </a:rPr>
+              <a:t>https://github.com/RajeshRamadas/highway-vehicle-tracker/tree/75d96c9aa849d52c155dc343237ff121f7ebbb99</a:t>
+            </a:r>
+            <a:endParaRPr lang="en-US" dirty="0"/>
+          </a:p>
+          <a:p>
+            <a:endParaRPr lang="en-US" dirty="0"/>
+          </a:p>
+          <a:p>
+            <a:r>
+              <a:rPr lang="en-US" dirty="0"/>
+              <a:t>Report &amp; Documentation </a:t>
+            </a:r>
+          </a:p>
+          <a:p>
+            <a:r>
+              <a:rPr lang="en-US" dirty="0">
+                <a:hlinkClick r:id="rId5"/>
+              </a:rPr>
+              <a:t>https://github.com/RajeshRamadas/yolov8-model-optimization/tree/main/01-Project-management</a:t>
+            </a:r>
+            <a:endParaRPr lang="en-US" dirty="0"/>
+          </a:p>
+          <a:p>
+            <a:endParaRPr lang="en-US" dirty="0"/>
+          </a:p>
+        </p:txBody>
+      </p:sp>
     </p:spTree>
     <p:extLst>
       <p:ext uri="{BB962C8B-B14F-4D97-AF65-F5344CB8AC3E}">
-        <p14:creationId xmlns:p14="http://schemas.microsoft.com/office/powerpoint/2010/main" val="3536711662"/>
+        <p14:creationId xmlns:p14="http://schemas.microsoft.com/office/powerpoint/2010/main" val="1295863957"/>
       </p:ext>
     </p:extLst>
   </p:cSld>
@@ -17583,7 +16447,7 @@
         </p:nvCxnSpPr>
         <p:spPr>
           <a:xfrm>
-            <a:off x="2853440" y="2756559"/>
+            <a:off x="2881981" y="2683407"/>
             <a:ext cx="5870448" cy="0"/>
           </a:xfrm>
           <a:prstGeom prst="straightConnector1">
@@ -17663,7 +16527,7 @@
         </p:blipFill>
         <p:spPr>
           <a:xfrm>
-            <a:off x="1335458" y="3056323"/>
+            <a:off x="555330" y="2936994"/>
             <a:ext cx="1943200" cy="2743341"/>
           </a:xfrm>
           <a:prstGeom prst="rect">
@@ -17693,8 +16557,8 @@
         </p:blipFill>
         <p:spPr>
           <a:xfrm>
-            <a:off x="7113422" y="3076009"/>
-            <a:ext cx="4016224" cy="2368908"/>
+            <a:off x="5818462" y="2946241"/>
+            <a:ext cx="4016224" cy="2695371"/>
           </a:xfrm>
           <a:prstGeom prst="rect">
             <a:avLst/>
@@ -17759,7 +16623,7 @@
         </p:blipFill>
         <p:spPr>
           <a:xfrm>
-            <a:off x="3446593" y="3073045"/>
+            <a:off x="2498530" y="2946242"/>
             <a:ext cx="3142743" cy="2838713"/>
           </a:xfrm>
           <a:prstGeom prst="rect">
@@ -17795,7 +16659,7 @@
         </p:blipFill>
         <p:spPr>
           <a:xfrm>
-            <a:off x="1497293" y="5872443"/>
+            <a:off x="748949" y="5863316"/>
             <a:ext cx="523221" cy="523221"/>
           </a:xfrm>
           <a:prstGeom prst="rect">
@@ -17831,7 +16695,7 @@
         </p:blipFill>
         <p:spPr>
           <a:xfrm>
-            <a:off x="5265443" y="5911758"/>
+            <a:off x="3610629" y="5848223"/>
             <a:ext cx="523221" cy="523221"/>
           </a:xfrm>
           <a:prstGeom prst="rect">
@@ -17867,8 +16731,103 @@
         </p:blipFill>
         <p:spPr>
           <a:xfrm>
-            <a:off x="8665079" y="5911758"/>
+            <a:off x="7094322" y="5863316"/>
             <a:ext cx="523222" cy="523222"/>
+          </a:xfrm>
+          <a:prstGeom prst="rect">
+            <a:avLst/>
+          </a:prstGeom>
+        </p:spPr>
+      </p:pic>
+      <p:pic>
+        <p:nvPicPr>
+          <p:cNvPr id="48" name="Picture 47">
+            <a:extLst>
+              <a:ext uri="{FF2B5EF4-FFF2-40B4-BE49-F238E27FC236}">
+                <a16:creationId xmlns:a16="http://schemas.microsoft.com/office/drawing/2014/main" id="{29FAAA6F-E043-7997-938A-95CDB471048F}"/>
+              </a:ext>
+            </a:extLst>
+          </p:cNvPr>
+          <p:cNvPicPr>
+            <a:picLocks noChangeAspect="1"/>
+          </p:cNvPicPr>
+          <p:nvPr/>
+        </p:nvPicPr>
+        <p:blipFill>
+          <a:blip r:embed="rId13"/>
+          <a:stretch>
+            <a:fillRect/>
+          </a:stretch>
+        </p:blipFill>
+        <p:spPr>
+          <a:xfrm>
+            <a:off x="9126247" y="2912194"/>
+            <a:ext cx="2241695" cy="2695372"/>
+          </a:xfrm>
+          <a:prstGeom prst="rect">
+            <a:avLst/>
+          </a:prstGeom>
+        </p:spPr>
+      </p:pic>
+      <p:pic>
+        <p:nvPicPr>
+          <p:cNvPr id="49" name="Graphic 48" descr="Badge 4 with solid fill">
+            <a:extLst>
+              <a:ext uri="{FF2B5EF4-FFF2-40B4-BE49-F238E27FC236}">
+                <a16:creationId xmlns:a16="http://schemas.microsoft.com/office/drawing/2014/main" id="{2C01279A-8E14-475B-FFDF-8ECF8D3EE720}"/>
+              </a:ext>
+            </a:extLst>
+          </p:cNvPr>
+          <p:cNvPicPr>
+            <a:picLocks noChangeAspect="1"/>
+          </p:cNvPicPr>
+          <p:nvPr/>
+        </p:nvPicPr>
+        <p:blipFill>
+          <a:blip r:embed="rId14">
+            <a:extLst>
+              <a:ext uri="{96DAC541-7B7A-43D3-8B79-37D633B846F1}">
+                <asvg:svgBlip xmlns:asvg="http://schemas.microsoft.com/office/drawing/2016/SVG/main" r:embed="rId15"/>
+              </a:ext>
+            </a:extLst>
+          </a:blip>
+          <a:stretch>
+            <a:fillRect/>
+          </a:stretch>
+        </p:blipFill>
+        <p:spPr>
+          <a:xfrm>
+            <a:off x="9834686" y="5812625"/>
+            <a:ext cx="558819" cy="558819"/>
+          </a:xfrm>
+          <a:prstGeom prst="rect">
+            <a:avLst/>
+          </a:prstGeom>
+        </p:spPr>
+      </p:pic>
+      <p:pic>
+        <p:nvPicPr>
+          <p:cNvPr id="50" name="Picture 49">
+            <a:extLst>
+              <a:ext uri="{FF2B5EF4-FFF2-40B4-BE49-F238E27FC236}">
+                <a16:creationId xmlns:a16="http://schemas.microsoft.com/office/drawing/2014/main" id="{067971E4-1E2E-0D37-67A4-6E8002185B98}"/>
+              </a:ext>
+            </a:extLst>
+          </p:cNvPr>
+          <p:cNvPicPr>
+            <a:picLocks noChangeAspect="1"/>
+          </p:cNvPicPr>
+          <p:nvPr/>
+        </p:nvPicPr>
+        <p:blipFill>
+          <a:blip r:embed="rId16"/>
+          <a:srcRect l="50299" t="36822" r="28634" b="28612"/>
+          <a:stretch/>
+        </p:blipFill>
+        <p:spPr>
+          <a:xfrm>
+            <a:off x="10659502" y="3659297"/>
+            <a:ext cx="1193061" cy="947842"/>
           </a:xfrm>
           <a:prstGeom prst="rect">
             <a:avLst/>
@@ -17933,21 +16892,16 @@
           </a:bodyPr>
           <a:lstStyle/>
           <a:p>
-            <a:r>
-              <a:rPr lang="en-US" sz="3200" b="1">
+            <a:pPr algn="l"/>
+            <a:r>
+              <a:rPr lang="en-US" sz="3200" b="1" dirty="0">
                 <a:solidFill>
                   <a:srgbClr val="1E40AF"/>
                 </a:solidFill>
                 <a:latin typeface="-apple-system"/>
               </a:rPr>
-              <a:t>Neural Architecture Search (NAS) : Best Config</a:t>
-            </a:r>
-            <a:endParaRPr lang="en-US" sz="3200" b="1" dirty="0">
-              <a:solidFill>
-                <a:srgbClr val="1E40AF"/>
-              </a:solidFill>
-              <a:latin typeface="-apple-system"/>
-            </a:endParaRPr>
+              <a:t>YoloV8n Config</a:t>
+            </a:r>
           </a:p>
         </p:txBody>
       </p:sp>
@@ -17979,10 +16933,9 @@
               <a:defRPr/>
             </a:pPr>
             <a:r>
-              <a:rPr lang="en-US"/>
+              <a:rPr lang="en-US" dirty="0"/>
               <a:t>Master Thesis</a:t>
             </a:r>
-            <a:endParaRPr lang="en-US" dirty="0"/>
           </a:p>
         </p:txBody>
       </p:sp>
@@ -18045,10 +16998,10 @@
       </p:sp>
       <p:pic>
         <p:nvPicPr>
-          <p:cNvPr id="8" name="Picture 7">
-            <a:extLst>
-              <a:ext uri="{FF2B5EF4-FFF2-40B4-BE49-F238E27FC236}">
-                <a16:creationId xmlns:a16="http://schemas.microsoft.com/office/drawing/2014/main" id="{067971E4-1E2E-0D37-67A4-6E8002185B98}"/>
+          <p:cNvPr id="10" name="Picture 9">
+            <a:extLst>
+              <a:ext uri="{FF2B5EF4-FFF2-40B4-BE49-F238E27FC236}">
+                <a16:creationId xmlns:a16="http://schemas.microsoft.com/office/drawing/2014/main" id="{95470B50-4742-57EA-E337-7EF457A72127}"/>
               </a:ext>
             </a:extLst>
           </p:cNvPr>
@@ -18059,43 +17012,14 @@
         </p:nvPicPr>
         <p:blipFill>
           <a:blip r:embed="rId2"/>
-          <a:srcRect l="50299" t="36822" r="-750" b="28612"/>
-          <a:stretch/>
-        </p:blipFill>
-        <p:spPr>
-          <a:xfrm>
-            <a:off x="5859626" y="2549763"/>
-            <a:ext cx="4190764" cy="1390261"/>
-          </a:xfrm>
-          <a:prstGeom prst="rect">
-            <a:avLst/>
-          </a:prstGeom>
-        </p:spPr>
-      </p:pic>
-      <p:pic>
-        <p:nvPicPr>
-          <p:cNvPr id="7" name="Picture 6">
-            <a:extLst>
-              <a:ext uri="{FF2B5EF4-FFF2-40B4-BE49-F238E27FC236}">
-                <a16:creationId xmlns:a16="http://schemas.microsoft.com/office/drawing/2014/main" id="{ADE8FAC9-68EB-55E9-4B3D-3BAF6EA087C8}"/>
-              </a:ext>
-            </a:extLst>
-          </p:cNvPr>
-          <p:cNvPicPr>
-            <a:picLocks noChangeAspect="1"/>
-          </p:cNvPicPr>
-          <p:nvPr/>
-        </p:nvPicPr>
-        <p:blipFill>
-          <a:blip r:embed="rId3"/>
           <a:stretch>
             <a:fillRect/>
           </a:stretch>
         </p:blipFill>
         <p:spPr>
           <a:xfrm>
-            <a:off x="2392680" y="1714279"/>
-            <a:ext cx="2667137" cy="3206915"/>
+            <a:off x="1063102" y="1004048"/>
+            <a:ext cx="5512083" cy="4997707"/>
           </a:xfrm>
           <a:prstGeom prst="rect">
             <a:avLst/>
@@ -18105,7 +17029,7 @@
     </p:spTree>
     <p:extLst>
       <p:ext uri="{BB962C8B-B14F-4D97-AF65-F5344CB8AC3E}">
-        <p14:creationId xmlns:p14="http://schemas.microsoft.com/office/powerpoint/2010/main" val="750769812"/>
+        <p14:creationId xmlns:p14="http://schemas.microsoft.com/office/powerpoint/2010/main" val="1254977674"/>
       </p:ext>
     </p:extLst>
   </p:cSld>
@@ -19279,10 +18203,194 @@
       </p:grpSpPr>
       <p:sp>
         <p:nvSpPr>
-          <p:cNvPr id="2" name="Title 1">
-            <a:extLst>
-              <a:ext uri="{FF2B5EF4-FFF2-40B4-BE49-F238E27FC236}">
-                <a16:creationId xmlns:a16="http://schemas.microsoft.com/office/drawing/2014/main" id="{ED3F830A-0841-2B85-58E5-6CE63A3347BC}"/>
+          <p:cNvPr id="44" name="Rectangle 43">
+            <a:extLst>
+              <a:ext uri="{FF2B5EF4-FFF2-40B4-BE49-F238E27FC236}">
+                <a16:creationId xmlns:a16="http://schemas.microsoft.com/office/drawing/2014/main" id="{5E9A70F6-1482-9247-F5D3-3B797B755EFE}"/>
+              </a:ext>
+            </a:extLst>
+          </p:cNvPr>
+          <p:cNvSpPr/>
+          <p:nvPr/>
+        </p:nvSpPr>
+        <p:spPr>
+          <a:xfrm>
+            <a:off x="7019626" y="2385476"/>
+            <a:ext cx="4462290" cy="1656994"/>
+          </a:xfrm>
+          <a:prstGeom prst="rect">
+            <a:avLst/>
+          </a:prstGeom>
+        </p:spPr>
+        <p:style>
+          <a:lnRef idx="2">
+            <a:schemeClr val="dk1">
+              <a:shade val="15000"/>
+            </a:schemeClr>
+          </a:lnRef>
+          <a:fillRef idx="1">
+            <a:schemeClr val="dk1"/>
+          </a:fillRef>
+          <a:effectRef idx="0">
+            <a:schemeClr val="dk1"/>
+          </a:effectRef>
+          <a:fontRef idx="minor">
+            <a:schemeClr val="lt1"/>
+          </a:fontRef>
+        </p:style>
+        <p:txBody>
+          <a:bodyPr rtlCol="0" anchor="ctr"/>
+          <a:lstStyle/>
+          <a:p>
+            <a:pPr algn="ctr"/>
+            <a:endParaRPr lang="en-US"/>
+          </a:p>
+        </p:txBody>
+      </p:sp>
+      <p:sp>
+        <p:nvSpPr>
+          <p:cNvPr id="33" name="Rectangle 32">
+            <a:extLst>
+              <a:ext uri="{FF2B5EF4-FFF2-40B4-BE49-F238E27FC236}">
+                <a16:creationId xmlns:a16="http://schemas.microsoft.com/office/drawing/2014/main" id="{F4AF5AB6-DECD-602C-827C-E6873DB45E8C}"/>
+              </a:ext>
+            </a:extLst>
+          </p:cNvPr>
+          <p:cNvSpPr/>
+          <p:nvPr/>
+        </p:nvSpPr>
+        <p:spPr>
+          <a:xfrm>
+            <a:off x="793930" y="3503962"/>
+            <a:ext cx="5687142" cy="1496625"/>
+          </a:xfrm>
+          <a:prstGeom prst="rect">
+            <a:avLst/>
+          </a:prstGeom>
+        </p:spPr>
+        <p:style>
+          <a:lnRef idx="2">
+            <a:schemeClr val="dk1">
+              <a:shade val="15000"/>
+            </a:schemeClr>
+          </a:lnRef>
+          <a:fillRef idx="1">
+            <a:schemeClr val="dk1"/>
+          </a:fillRef>
+          <a:effectRef idx="0">
+            <a:schemeClr val="dk1"/>
+          </a:effectRef>
+          <a:fontRef idx="minor">
+            <a:schemeClr val="lt1"/>
+          </a:fontRef>
+        </p:style>
+        <p:txBody>
+          <a:bodyPr rtlCol="0" anchor="ctr"/>
+          <a:lstStyle/>
+          <a:p>
+            <a:pPr algn="ctr"/>
+            <a:endParaRPr lang="en-US"/>
+          </a:p>
+        </p:txBody>
+      </p:sp>
+      <p:sp>
+        <p:nvSpPr>
+          <p:cNvPr id="17" name="Rectangle 16">
+            <a:extLst>
+              <a:ext uri="{FF2B5EF4-FFF2-40B4-BE49-F238E27FC236}">
+                <a16:creationId xmlns:a16="http://schemas.microsoft.com/office/drawing/2014/main" id="{C7C6C28E-52AA-D35D-626E-3801DC0ED358}"/>
+              </a:ext>
+            </a:extLst>
+          </p:cNvPr>
+          <p:cNvSpPr/>
+          <p:nvPr/>
+        </p:nvSpPr>
+        <p:spPr>
+          <a:xfrm>
+            <a:off x="897718" y="2135993"/>
+            <a:ext cx="3469010" cy="293450"/>
+          </a:xfrm>
+          <a:prstGeom prst="rect">
+            <a:avLst/>
+          </a:prstGeom>
+        </p:spPr>
+        <p:style>
+          <a:lnRef idx="2">
+            <a:schemeClr val="dk1">
+              <a:shade val="15000"/>
+            </a:schemeClr>
+          </a:lnRef>
+          <a:fillRef idx="1">
+            <a:schemeClr val="dk1"/>
+          </a:fillRef>
+          <a:effectRef idx="0">
+            <a:schemeClr val="dk1"/>
+          </a:effectRef>
+          <a:fontRef idx="minor">
+            <a:schemeClr val="lt1"/>
+          </a:fontRef>
+        </p:style>
+        <p:txBody>
+          <a:bodyPr rtlCol="0" anchor="ctr"/>
+          <a:lstStyle/>
+          <a:p>
+            <a:pPr algn="ctr"/>
+            <a:endParaRPr lang="en-US"/>
+          </a:p>
+        </p:txBody>
+      </p:sp>
+      <p:sp>
+        <p:nvSpPr>
+          <p:cNvPr id="15" name="Rectangle 14">
+            <a:extLst>
+              <a:ext uri="{FF2B5EF4-FFF2-40B4-BE49-F238E27FC236}">
+                <a16:creationId xmlns:a16="http://schemas.microsoft.com/office/drawing/2014/main" id="{3A55CC96-2CB8-9476-1AB2-8399B7570162}"/>
+              </a:ext>
+            </a:extLst>
+          </p:cNvPr>
+          <p:cNvSpPr/>
+          <p:nvPr/>
+        </p:nvSpPr>
+        <p:spPr>
+          <a:xfrm>
+            <a:off x="435208" y="1408177"/>
+            <a:ext cx="6193178" cy="3721608"/>
+          </a:xfrm>
+          <a:prstGeom prst="rect">
+            <a:avLst/>
+          </a:prstGeom>
+        </p:spPr>
+        <p:style>
+          <a:lnRef idx="2">
+            <a:schemeClr val="dk1">
+              <a:shade val="15000"/>
+            </a:schemeClr>
+          </a:lnRef>
+          <a:fillRef idx="1">
+            <a:schemeClr val="dk1"/>
+          </a:fillRef>
+          <a:effectRef idx="0">
+            <a:schemeClr val="dk1"/>
+          </a:effectRef>
+          <a:fontRef idx="minor">
+            <a:schemeClr val="lt1"/>
+          </a:fontRef>
+        </p:style>
+        <p:txBody>
+          <a:bodyPr rtlCol="0" anchor="ctr"/>
+          <a:lstStyle/>
+          <a:p>
+            <a:pPr algn="ctr"/>
+            <a:endParaRPr lang="en-US"/>
+          </a:p>
+        </p:txBody>
+      </p:sp>
+      <p:sp>
+        <p:nvSpPr>
+          <p:cNvPr id="4" name="Footer Placeholder 3">
+            <a:extLst>
+              <a:ext uri="{FF2B5EF4-FFF2-40B4-BE49-F238E27FC236}">
+                <a16:creationId xmlns:a16="http://schemas.microsoft.com/office/drawing/2014/main" id="{B8027B5C-B1A1-0376-4174-FFF61C554492}"/>
               </a:ext>
             </a:extLst>
           </p:cNvPr>
@@ -19290,13 +18398,13 @@
             <a:spLocks noGrp="1"/>
           </p:cNvSpPr>
           <p:nvPr>
-            <p:ph type="title"/>
-          </p:nvPr>
-        </p:nvSpPr>
-        <p:spPr>
-          <a:xfrm>
-            <a:off x="838200" y="365126"/>
-            <a:ext cx="10515600" cy="638922"/>
+            <p:ph type="ftr" sz="quarter" idx="11"/>
+          </p:nvPr>
+        </p:nvSpPr>
+        <p:spPr>
+          <a:xfrm>
+            <a:off x="1028700" y="6356350"/>
+            <a:ext cx="6210300" cy="365125"/>
           </a:xfrm>
         </p:spPr>
         <p:txBody>
@@ -19305,15 +18413,23 @@
           </a:bodyPr>
           <a:lstStyle/>
           <a:p>
-            <a:pPr algn="l"/>
-            <a:r>
-              <a:rPr lang="en-US" sz="3200" b="1" dirty="0">
-                <a:solidFill>
-                  <a:srgbClr val="1E40AF"/>
-                </a:solidFill>
-                <a:latin typeface="-apple-system"/>
-              </a:rPr>
-              <a:t>Knowledge Distillation Configuration</a:t>
+            <a:pPr algn="r">
+              <a:lnSpc>
+                <a:spcPct val="90000"/>
+              </a:lnSpc>
+              <a:spcAft>
+                <a:spcPts val="504"/>
+              </a:spcAft>
+            </a:pPr>
+            <a:r>
+              <a:rPr lang="en-US" sz="900" dirty="0">
+                <a:solidFill>
+                  <a:schemeClr val="tx1">
+                    <a:alpha val="80000"/>
+                  </a:schemeClr>
+                </a:solidFill>
+              </a:rPr>
+              <a:t>International University Of Applied Sciences</a:t>
             </a:r>
           </a:p>
         </p:txBody>
@@ -19334,87 +18450,162 @@
             <p:ph type="dt" sz="half" idx="10"/>
           </p:nvPr>
         </p:nvSpPr>
-        <p:spPr/>
-        <p:txBody>
-          <a:bodyPr/>
+        <p:spPr>
+          <a:xfrm>
+            <a:off x="292608" y="6356349"/>
+            <a:ext cx="3085338" cy="365125"/>
+          </a:xfrm>
+        </p:spPr>
+        <p:txBody>
+          <a:bodyPr>
+            <a:normAutofit/>
+          </a:bodyPr>
+          <a:lstStyle/>
+          <a:p>
+            <a:pPr algn="r">
+              <a:lnSpc>
+                <a:spcPct val="90000"/>
+              </a:lnSpc>
+              <a:spcAft>
+                <a:spcPts val="504"/>
+              </a:spcAft>
+            </a:pPr>
+            <a:r>
+              <a:rPr lang="en-US" sz="900" dirty="0">
+                <a:solidFill>
+                  <a:schemeClr val="tx1">
+                    <a:alpha val="80000"/>
+                  </a:schemeClr>
+                </a:solidFill>
+              </a:rPr>
+              <a:t>Knowledge Distillation &amp; Neural Architecture Search</a:t>
+            </a:r>
+          </a:p>
+        </p:txBody>
+      </p:sp>
+      <p:sp>
+        <p:nvSpPr>
+          <p:cNvPr id="5" name="Slide Number Placeholder 4">
+            <a:extLst>
+              <a:ext uri="{FF2B5EF4-FFF2-40B4-BE49-F238E27FC236}">
+                <a16:creationId xmlns:a16="http://schemas.microsoft.com/office/drawing/2014/main" id="{80A790D5-177D-B6A2-0E90-81EF4FE37C9F}"/>
+              </a:ext>
+            </a:extLst>
+          </p:cNvPr>
+          <p:cNvSpPr>
+            <a:spLocks noGrp="1"/>
+          </p:cNvSpPr>
+          <p:nvPr>
+            <p:ph type="sldNum" sz="quarter" idx="12"/>
+          </p:nvPr>
+        </p:nvSpPr>
+        <p:spPr>
+          <a:xfrm>
+            <a:off x="11034184" y="6356350"/>
+            <a:ext cx="514349" cy="365125"/>
+          </a:xfrm>
+        </p:spPr>
+        <p:txBody>
+          <a:bodyPr>
+            <a:normAutofit/>
+          </a:bodyPr>
           <a:lstStyle/>
           <a:p>
             <a:pPr>
               <a:spcAft>
                 <a:spcPts val="600"/>
               </a:spcAft>
-              <a:defRPr/>
             </a:pPr>
-            <a:r>
-              <a:rPr lang="en-US" dirty="0"/>
-              <a:t>Master Thesis</a:t>
-            </a:r>
-          </a:p>
-        </p:txBody>
-      </p:sp>
-      <p:sp>
-        <p:nvSpPr>
-          <p:cNvPr id="4" name="Footer Placeholder 3">
-            <a:extLst>
-              <a:ext uri="{FF2B5EF4-FFF2-40B4-BE49-F238E27FC236}">
-                <a16:creationId xmlns:a16="http://schemas.microsoft.com/office/drawing/2014/main" id="{B8027B5C-B1A1-0376-4174-FFF61C554492}"/>
-              </a:ext>
-            </a:extLst>
-          </p:cNvPr>
-          <p:cNvSpPr>
-            <a:spLocks noGrp="1"/>
-          </p:cNvSpPr>
-          <p:nvPr>
-            <p:ph type="ftr" sz="quarter" idx="11"/>
-          </p:nvPr>
-        </p:nvSpPr>
-        <p:spPr/>
-        <p:txBody>
-          <a:bodyPr/>
-          <a:lstStyle/>
-          <a:p>
-            <a:r>
-              <a:rPr lang="en-US"/>
-              <a:t>International University Of Applied Sciences</a:t>
-            </a:r>
-          </a:p>
-        </p:txBody>
-      </p:sp>
-      <p:sp>
-        <p:nvSpPr>
-          <p:cNvPr id="5" name="Slide Number Placeholder 4">
-            <a:extLst>
-              <a:ext uri="{FF2B5EF4-FFF2-40B4-BE49-F238E27FC236}">
-                <a16:creationId xmlns:a16="http://schemas.microsoft.com/office/drawing/2014/main" id="{80A790D5-177D-B6A2-0E90-81EF4FE37C9F}"/>
-              </a:ext>
-            </a:extLst>
-          </p:cNvPr>
-          <p:cNvSpPr>
-            <a:spLocks noGrp="1"/>
-          </p:cNvSpPr>
-          <p:nvPr>
-            <p:ph type="sldNum" sz="quarter" idx="12"/>
-          </p:nvPr>
-        </p:nvSpPr>
-        <p:spPr/>
-        <p:txBody>
-          <a:bodyPr/>
-          <a:lstStyle/>
-          <a:p>
             <a:fld id="{C98AED0B-3B00-448B-836B-316F7AA19B4B}" type="slidenum">
-              <a:rPr lang="en-US" smtClean="0"/>
+              <a:rPr lang="en-US">
+                <a:solidFill>
+                  <a:schemeClr val="tx1">
+                    <a:alpha val="80000"/>
+                  </a:schemeClr>
+                </a:solidFill>
+              </a:rPr>
+              <a:pPr>
+                <a:spcAft>
+                  <a:spcPts val="600"/>
+                </a:spcAft>
+              </a:pPr>
               <a:t>9</a:t>
             </a:fld>
-            <a:endParaRPr lang="en-US"/>
+            <a:endParaRPr lang="en-US">
+              <a:solidFill>
+                <a:schemeClr val="tx1">
+                  <a:alpha val="80000"/>
+                </a:schemeClr>
+              </a:solidFill>
+            </a:endParaRPr>
+          </a:p>
+        </p:txBody>
+      </p:sp>
+      <p:sp>
+        <p:nvSpPr>
+          <p:cNvPr id="8" name="Title 1">
+            <a:extLst>
+              <a:ext uri="{FF2B5EF4-FFF2-40B4-BE49-F238E27FC236}">
+                <a16:creationId xmlns:a16="http://schemas.microsoft.com/office/drawing/2014/main" id="{58FF4C60-14F0-104E-A6FA-3FCA6169A054}"/>
+              </a:ext>
+            </a:extLst>
+          </p:cNvPr>
+          <p:cNvSpPr txBox="1">
+            <a:spLocks/>
+          </p:cNvSpPr>
+          <p:nvPr/>
+        </p:nvSpPr>
+        <p:spPr>
+          <a:xfrm>
+            <a:off x="838200" y="365126"/>
+            <a:ext cx="10515600" cy="638922"/>
+          </a:xfrm>
+          <a:prstGeom prst="rect">
+            <a:avLst/>
+          </a:prstGeom>
+        </p:spPr>
+        <p:txBody>
+          <a:bodyPr vert="horz" lIns="91440" tIns="45720" rIns="91440" bIns="45720" rtlCol="0" anchor="ctr">
+            <a:normAutofit fontScale="97500"/>
+          </a:bodyPr>
+          <a:lstStyle>
+            <a:lvl1pPr algn="l" defTabSz="914400" rtl="0" eaLnBrk="1" latinLnBrk="0" hangingPunct="1">
+              <a:lnSpc>
+                <a:spcPct val="90000"/>
+              </a:lnSpc>
+              <a:spcBef>
+                <a:spcPct val="0"/>
+              </a:spcBef>
+              <a:buNone/>
+              <a:defRPr sz="4400" kern="1200">
+                <a:solidFill>
+                  <a:schemeClr val="tx1"/>
+                </a:solidFill>
+                <a:latin typeface="+mj-lt"/>
+                <a:ea typeface="+mj-ea"/>
+                <a:cs typeface="+mj-cs"/>
+              </a:defRPr>
+            </a:lvl1pPr>
+          </a:lstStyle>
+          <a:p>
+            <a:r>
+              <a:rPr lang="en-US" sz="3600" b="1" dirty="0">
+                <a:solidFill>
+                  <a:srgbClr val="1E40AF"/>
+                </a:solidFill>
+                <a:latin typeface="-apple-system"/>
+              </a:rPr>
+              <a:t>Knowledge Distillation : Temperature </a:t>
+            </a:r>
           </a:p>
         </p:txBody>
       </p:sp>
       <p:pic>
         <p:nvPicPr>
-          <p:cNvPr id="9" name="Picture 8">
-            <a:extLst>
-              <a:ext uri="{FF2B5EF4-FFF2-40B4-BE49-F238E27FC236}">
-                <a16:creationId xmlns:a16="http://schemas.microsoft.com/office/drawing/2014/main" id="{D37A2DD2-E874-85DC-AB8A-09FAFF958DFD}"/>
+          <p:cNvPr id="9" name="Graphic 8" descr="Head with gears with solid fill">
+            <a:extLst>
+              <a:ext uri="{FF2B5EF4-FFF2-40B4-BE49-F238E27FC236}">
+                <a16:creationId xmlns:a16="http://schemas.microsoft.com/office/drawing/2014/main" id="{711BF609-4E06-C625-E21F-8F7A0F3EEDF2}"/>
               </a:ext>
             </a:extLst>
           </p:cNvPr>
@@ -19424,25 +18615,1005 @@
           <p:nvPr/>
         </p:nvPicPr>
         <p:blipFill>
-          <a:blip r:embed="rId2"/>
+          <a:blip r:embed="rId2">
+            <a:extLst>
+              <a:ext uri="{96DAC541-7B7A-43D3-8B79-37D633B846F1}">
+                <asvg:svgBlip xmlns:asvg="http://schemas.microsoft.com/office/drawing/2016/SVG/main" r:embed="rId3"/>
+              </a:ext>
+            </a:extLst>
+          </a:blip>
           <a:stretch>
             <a:fillRect/>
           </a:stretch>
         </p:blipFill>
         <p:spPr>
           <a:xfrm>
-            <a:off x="2380086" y="2053207"/>
-            <a:ext cx="7186558" cy="2316422"/>
+            <a:off x="461877" y="365125"/>
+            <a:ext cx="483696" cy="483696"/>
           </a:xfrm>
           <a:prstGeom prst="rect">
             <a:avLst/>
           </a:prstGeom>
         </p:spPr>
       </p:pic>
+      <p:sp>
+        <p:nvSpPr>
+          <p:cNvPr id="6" name="TextBox 5">
+            <a:extLst>
+              <a:ext uri="{FF2B5EF4-FFF2-40B4-BE49-F238E27FC236}">
+                <a16:creationId xmlns:a16="http://schemas.microsoft.com/office/drawing/2014/main" id="{02B19AC5-181F-D4CF-F091-02D25836203F}"/>
+              </a:ext>
+            </a:extLst>
+          </p:cNvPr>
+          <p:cNvSpPr txBox="1"/>
+          <p:nvPr/>
+        </p:nvSpPr>
+        <p:spPr>
+          <a:xfrm>
+            <a:off x="461877" y="1873745"/>
+            <a:ext cx="6096000" cy="553998"/>
+          </a:xfrm>
+          <a:prstGeom prst="rect">
+            <a:avLst/>
+          </a:prstGeom>
+          <a:noFill/>
+        </p:spPr>
+        <p:txBody>
+          <a:bodyPr wrap="square">
+            <a:spAutoFit/>
+          </a:bodyPr>
+          <a:lstStyle/>
+          <a:p>
+            <a:pPr marL="342900" indent="-342900">
+              <a:buAutoNum type="arabicPeriod"/>
+            </a:pPr>
+            <a:r>
+              <a:rPr lang="en-US" sz="1200" dirty="0">
+                <a:solidFill>
+                  <a:schemeClr val="bg1"/>
+                </a:solidFill>
+              </a:rPr>
+              <a:t>Teacher Raw Logits (before </a:t>
+            </a:r>
+            <a:r>
+              <a:rPr lang="en-US" sz="1200" dirty="0" err="1">
+                <a:solidFill>
+                  <a:schemeClr val="bg1"/>
+                </a:solidFill>
+              </a:rPr>
+              <a:t>softmax</a:t>
+            </a:r>
+            <a:r>
+              <a:rPr lang="en-US" sz="1200" dirty="0">
+                <a:solidFill>
+                  <a:schemeClr val="bg1"/>
+                </a:solidFill>
+              </a:rPr>
+              <a:t>):</a:t>
+            </a:r>
+          </a:p>
+          <a:p>
+            <a:r>
+              <a:rPr lang="en-US" b="1" dirty="0">
+                <a:solidFill>
+                  <a:schemeClr val="bg1"/>
+                </a:solidFill>
+                <a:latin typeface="Courier New" panose="02070309020205020404" pitchFamily="49" charset="0"/>
+              </a:rPr>
+              <a:t>        </a:t>
+            </a:r>
+          </a:p>
+        </p:txBody>
+      </p:sp>
+      <p:sp>
+        <p:nvSpPr>
+          <p:cNvPr id="10" name="TextBox 9">
+            <a:extLst>
+              <a:ext uri="{FF2B5EF4-FFF2-40B4-BE49-F238E27FC236}">
+                <a16:creationId xmlns:a16="http://schemas.microsoft.com/office/drawing/2014/main" id="{7B9EA3C4-BFC2-2E33-DD68-B5A0965CD597}"/>
+              </a:ext>
+            </a:extLst>
+          </p:cNvPr>
+          <p:cNvSpPr txBox="1"/>
+          <p:nvPr/>
+        </p:nvSpPr>
+        <p:spPr>
+          <a:xfrm>
+            <a:off x="818073" y="2165430"/>
+            <a:ext cx="4988367" cy="246221"/>
+          </a:xfrm>
+          <a:prstGeom prst="rect">
+            <a:avLst/>
+          </a:prstGeom>
+          <a:noFill/>
+        </p:spPr>
+        <p:txBody>
+          <a:bodyPr wrap="square">
+            <a:spAutoFit/>
+          </a:bodyPr>
+          <a:lstStyle/>
+          <a:p>
+            <a:r>
+              <a:rPr lang="en-US" sz="1000" b="1" dirty="0" err="1">
+                <a:solidFill>
+                  <a:schemeClr val="bg1"/>
+                </a:solidFill>
+                <a:highlight>
+                  <a:srgbClr val="000000"/>
+                </a:highlight>
+                <a:latin typeface="Courier New" panose="02070309020205020404" pitchFamily="49" charset="0"/>
+              </a:rPr>
+              <a:t>t_cls</a:t>
+            </a:r>
+            <a:r>
+              <a:rPr lang="en-US" sz="1000" b="1" dirty="0">
+                <a:solidFill>
+                  <a:schemeClr val="bg1"/>
+                </a:solidFill>
+                <a:highlight>
+                  <a:srgbClr val="000000"/>
+                </a:highlight>
+                <a:latin typeface="Courier New" panose="02070309020205020404" pitchFamily="49" charset="0"/>
+              </a:rPr>
+              <a:t> = [4.0, 2.5, 1.0] # [Car, Truck, Bus]</a:t>
+            </a:r>
+            <a:endParaRPr lang="en-US" sz="1000" dirty="0">
+              <a:solidFill>
+                <a:schemeClr val="bg1"/>
+              </a:solidFill>
+              <a:highlight>
+                <a:srgbClr val="000000"/>
+              </a:highlight>
+            </a:endParaRPr>
+          </a:p>
+        </p:txBody>
+      </p:sp>
+      <p:sp>
+        <p:nvSpPr>
+          <p:cNvPr id="13" name="TextBox 12">
+            <a:extLst>
+              <a:ext uri="{FF2B5EF4-FFF2-40B4-BE49-F238E27FC236}">
+                <a16:creationId xmlns:a16="http://schemas.microsoft.com/office/drawing/2014/main" id="{618B7DAE-99C8-162E-1F6D-6039284990ED}"/>
+              </a:ext>
+            </a:extLst>
+          </p:cNvPr>
+          <p:cNvSpPr txBox="1"/>
+          <p:nvPr/>
+        </p:nvSpPr>
+        <p:spPr>
+          <a:xfrm>
+            <a:off x="775758" y="2706484"/>
+            <a:ext cx="4544100" cy="553998"/>
+          </a:xfrm>
+          <a:prstGeom prst="rect">
+            <a:avLst/>
+          </a:prstGeom>
+          <a:noFill/>
+        </p:spPr>
+        <p:txBody>
+          <a:bodyPr wrap="square">
+            <a:spAutoFit/>
+          </a:bodyPr>
+          <a:lstStyle/>
+          <a:p>
+            <a:r>
+              <a:rPr lang="fr-FR" sz="1000" b="1" dirty="0" err="1">
+                <a:solidFill>
+                  <a:schemeClr val="bg1"/>
+                </a:solidFill>
+                <a:highlight>
+                  <a:srgbClr val="000000"/>
+                </a:highlight>
+                <a:latin typeface="Courier New" panose="02070309020205020404" pitchFamily="49" charset="0"/>
+              </a:rPr>
+              <a:t>t_cls_scaled</a:t>
+            </a:r>
+            <a:r>
+              <a:rPr lang="fr-FR" sz="1000" b="1" dirty="0">
+                <a:solidFill>
+                  <a:schemeClr val="bg1"/>
+                </a:solidFill>
+                <a:highlight>
+                  <a:srgbClr val="000000"/>
+                </a:highlight>
+                <a:latin typeface="Courier New" panose="02070309020205020404" pitchFamily="49" charset="0"/>
+              </a:rPr>
+              <a:t> = </a:t>
+            </a:r>
+            <a:r>
+              <a:rPr lang="fr-FR" sz="1000" b="1" dirty="0" err="1">
+                <a:solidFill>
+                  <a:schemeClr val="bg1"/>
+                </a:solidFill>
+                <a:highlight>
+                  <a:srgbClr val="000000"/>
+                </a:highlight>
+                <a:latin typeface="Courier New" panose="02070309020205020404" pitchFamily="49" charset="0"/>
+              </a:rPr>
+              <a:t>t_cls</a:t>
+            </a:r>
+            <a:r>
+              <a:rPr lang="fr-FR" sz="1000" b="1" dirty="0">
+                <a:solidFill>
+                  <a:schemeClr val="bg1"/>
+                </a:solidFill>
+                <a:highlight>
+                  <a:srgbClr val="000000"/>
+                </a:highlight>
+                <a:latin typeface="Courier New" panose="02070309020205020404" pitchFamily="49" charset="0"/>
+              </a:rPr>
+              <a:t> / </a:t>
+            </a:r>
+            <a:r>
+              <a:rPr lang="fr-FR" sz="1000" b="1" dirty="0" err="1">
+                <a:solidFill>
+                  <a:schemeClr val="bg1"/>
+                </a:solidFill>
+                <a:highlight>
+                  <a:srgbClr val="000000"/>
+                </a:highlight>
+                <a:latin typeface="Courier New" panose="02070309020205020404" pitchFamily="49" charset="0"/>
+              </a:rPr>
+              <a:t>self.temperature</a:t>
+            </a:r>
+            <a:r>
+              <a:rPr lang="fr-FR" sz="1000" b="1" dirty="0">
+                <a:solidFill>
+                  <a:schemeClr val="bg1"/>
+                </a:solidFill>
+                <a:highlight>
+                  <a:srgbClr val="000000"/>
+                </a:highlight>
+                <a:latin typeface="Courier New" panose="02070309020205020404" pitchFamily="49" charset="0"/>
+              </a:rPr>
+              <a:t> # T = 2.0 </a:t>
+            </a:r>
+          </a:p>
+          <a:p>
+            <a:r>
+              <a:rPr lang="fr-FR" sz="1000" b="1" dirty="0" err="1">
+                <a:solidFill>
+                  <a:schemeClr val="bg1"/>
+                </a:solidFill>
+                <a:highlight>
+                  <a:srgbClr val="000000"/>
+                </a:highlight>
+                <a:latin typeface="Courier New" panose="02070309020205020404" pitchFamily="49" charset="0"/>
+              </a:rPr>
+              <a:t>t_cls_scaled</a:t>
+            </a:r>
+            <a:r>
+              <a:rPr lang="fr-FR" sz="1000" b="1" dirty="0">
+                <a:solidFill>
+                  <a:schemeClr val="bg1"/>
+                </a:solidFill>
+                <a:highlight>
+                  <a:srgbClr val="000000"/>
+                </a:highlight>
+                <a:latin typeface="Courier New" panose="02070309020205020404" pitchFamily="49" charset="0"/>
+              </a:rPr>
+              <a:t> = [4.0/2.0, 2.5/2.0, 1.0/2.0] </a:t>
+            </a:r>
+          </a:p>
+          <a:p>
+            <a:r>
+              <a:rPr lang="fr-FR" sz="1000" b="1" dirty="0" err="1">
+                <a:solidFill>
+                  <a:schemeClr val="bg1"/>
+                </a:solidFill>
+                <a:highlight>
+                  <a:srgbClr val="000000"/>
+                </a:highlight>
+                <a:latin typeface="Courier New" panose="02070309020205020404" pitchFamily="49" charset="0"/>
+              </a:rPr>
+              <a:t>t_cls_scaled</a:t>
+            </a:r>
+            <a:r>
+              <a:rPr lang="fr-FR" sz="1000" b="1" dirty="0">
+                <a:solidFill>
+                  <a:schemeClr val="bg1"/>
+                </a:solidFill>
+                <a:highlight>
+                  <a:srgbClr val="000000"/>
+                </a:highlight>
+                <a:latin typeface="Courier New" panose="02070309020205020404" pitchFamily="49" charset="0"/>
+              </a:rPr>
+              <a:t> = [2.0, 1.25, 0.5]</a:t>
+            </a:r>
+            <a:endParaRPr lang="en-US" sz="1000" b="1" dirty="0">
+              <a:solidFill>
+                <a:schemeClr val="bg1"/>
+              </a:solidFill>
+              <a:highlight>
+                <a:srgbClr val="000000"/>
+              </a:highlight>
+              <a:latin typeface="Courier New" panose="02070309020205020404" pitchFamily="49" charset="0"/>
+            </a:endParaRPr>
+          </a:p>
+        </p:txBody>
+      </p:sp>
+      <p:sp>
+        <p:nvSpPr>
+          <p:cNvPr id="20" name="TextBox 19">
+            <a:extLst>
+              <a:ext uri="{FF2B5EF4-FFF2-40B4-BE49-F238E27FC236}">
+                <a16:creationId xmlns:a16="http://schemas.microsoft.com/office/drawing/2014/main" id="{ECCBC002-08D7-81D3-DAE0-74A584D4D475}"/>
+              </a:ext>
+            </a:extLst>
+          </p:cNvPr>
+          <p:cNvSpPr txBox="1"/>
+          <p:nvPr/>
+        </p:nvSpPr>
+        <p:spPr>
+          <a:xfrm>
+            <a:off x="462639" y="2417651"/>
+            <a:ext cx="6094476" cy="276999"/>
+          </a:xfrm>
+          <a:prstGeom prst="rect">
+            <a:avLst/>
+          </a:prstGeom>
+          <a:noFill/>
+        </p:spPr>
+        <p:txBody>
+          <a:bodyPr wrap="square">
+            <a:spAutoFit/>
+          </a:bodyPr>
+          <a:lstStyle/>
+          <a:p>
+            <a:r>
+              <a:rPr lang="en-US" sz="1200" dirty="0">
+                <a:solidFill>
+                  <a:schemeClr val="bg1"/>
+                </a:solidFill>
+              </a:rPr>
+              <a:t>2. Apply Temperature Scaling:</a:t>
+            </a:r>
+            <a:endParaRPr lang="en-US" dirty="0">
+              <a:solidFill>
+                <a:schemeClr val="bg1"/>
+              </a:solidFill>
+            </a:endParaRPr>
+          </a:p>
+        </p:txBody>
+      </p:sp>
+      <p:sp>
+        <p:nvSpPr>
+          <p:cNvPr id="23" name="TextBox 22">
+            <a:extLst>
+              <a:ext uri="{FF2B5EF4-FFF2-40B4-BE49-F238E27FC236}">
+                <a16:creationId xmlns:a16="http://schemas.microsoft.com/office/drawing/2014/main" id="{F2798392-6239-68CF-6EA0-A68AF42FB5FD}"/>
+              </a:ext>
+            </a:extLst>
+          </p:cNvPr>
+          <p:cNvSpPr txBox="1"/>
+          <p:nvPr/>
+        </p:nvSpPr>
+        <p:spPr>
+          <a:xfrm>
+            <a:off x="490071" y="3249524"/>
+            <a:ext cx="6094476" cy="276999"/>
+          </a:xfrm>
+          <a:prstGeom prst="rect">
+            <a:avLst/>
+          </a:prstGeom>
+          <a:noFill/>
+        </p:spPr>
+        <p:txBody>
+          <a:bodyPr wrap="square">
+            <a:spAutoFit/>
+          </a:bodyPr>
+          <a:lstStyle/>
+          <a:p>
+            <a:r>
+              <a:rPr lang="en-US" sz="1200" dirty="0">
+                <a:solidFill>
+                  <a:schemeClr val="bg1"/>
+                </a:solidFill>
+              </a:rPr>
+              <a:t>3. Compute Temperature-Scaled </a:t>
+            </a:r>
+            <a:r>
+              <a:rPr lang="en-US" sz="1200" dirty="0" err="1">
+                <a:solidFill>
+                  <a:schemeClr val="bg1"/>
+                </a:solidFill>
+              </a:rPr>
+              <a:t>Softmax</a:t>
+            </a:r>
+            <a:r>
+              <a:rPr lang="en-US" sz="1200" dirty="0">
+                <a:solidFill>
+                  <a:schemeClr val="bg1"/>
+                </a:solidFill>
+              </a:rPr>
+              <a:t>:</a:t>
+            </a:r>
+          </a:p>
+        </p:txBody>
+      </p:sp>
+      <p:sp>
+        <p:nvSpPr>
+          <p:cNvPr id="29" name="TextBox 28">
+            <a:extLst>
+              <a:ext uri="{FF2B5EF4-FFF2-40B4-BE49-F238E27FC236}">
+                <a16:creationId xmlns:a16="http://schemas.microsoft.com/office/drawing/2014/main" id="{0C408079-FDE1-6EED-F4E4-B16DFC908646}"/>
+              </a:ext>
+            </a:extLst>
+          </p:cNvPr>
+          <p:cNvSpPr txBox="1"/>
+          <p:nvPr/>
+        </p:nvSpPr>
+        <p:spPr>
+          <a:xfrm>
+            <a:off x="786852" y="3497962"/>
+            <a:ext cx="5650524" cy="1169551"/>
+          </a:xfrm>
+          <a:prstGeom prst="rect">
+            <a:avLst/>
+          </a:prstGeom>
+          <a:noFill/>
+        </p:spPr>
+        <p:txBody>
+          <a:bodyPr wrap="square">
+            <a:spAutoFit/>
+          </a:bodyPr>
+          <a:lstStyle/>
+          <a:p>
+            <a:r>
+              <a:rPr lang="en-US" sz="1000" b="1" dirty="0">
+                <a:solidFill>
+                  <a:schemeClr val="bg1"/>
+                </a:solidFill>
+                <a:highlight>
+                  <a:srgbClr val="000000"/>
+                </a:highlight>
+                <a:latin typeface="Courier New" panose="02070309020205020404" pitchFamily="49" charset="0"/>
+              </a:rPr>
+              <a:t># Calculate exponentials </a:t>
+            </a:r>
+          </a:p>
+          <a:p>
+            <a:r>
+              <a:rPr lang="en-US" sz="1000" b="1" dirty="0" err="1">
+                <a:solidFill>
+                  <a:schemeClr val="bg1"/>
+                </a:solidFill>
+                <a:highlight>
+                  <a:srgbClr val="000000"/>
+                </a:highlight>
+                <a:latin typeface="Courier New" panose="02070309020205020404" pitchFamily="49" charset="0"/>
+              </a:rPr>
+              <a:t>exp_values</a:t>
+            </a:r>
+            <a:r>
+              <a:rPr lang="en-US" sz="1000" b="1" dirty="0">
+                <a:solidFill>
+                  <a:schemeClr val="bg1"/>
+                </a:solidFill>
+                <a:highlight>
+                  <a:srgbClr val="000000"/>
+                </a:highlight>
+                <a:latin typeface="Courier New" panose="02070309020205020404" pitchFamily="49" charset="0"/>
+              </a:rPr>
+              <a:t> = [exp(2.0), exp(1.25), exp(0.5)] </a:t>
+            </a:r>
+          </a:p>
+          <a:p>
+            <a:r>
+              <a:rPr lang="en-US" sz="1000" b="1" dirty="0" err="1">
+                <a:solidFill>
+                  <a:schemeClr val="bg1"/>
+                </a:solidFill>
+                <a:highlight>
+                  <a:srgbClr val="000000"/>
+                </a:highlight>
+                <a:latin typeface="Courier New" panose="02070309020205020404" pitchFamily="49" charset="0"/>
+              </a:rPr>
+              <a:t>exp_values</a:t>
+            </a:r>
+            <a:r>
+              <a:rPr lang="en-US" sz="1000" b="1" dirty="0">
+                <a:solidFill>
+                  <a:schemeClr val="bg1"/>
+                </a:solidFill>
+                <a:highlight>
+                  <a:srgbClr val="000000"/>
+                </a:highlight>
+                <a:latin typeface="Courier New" panose="02070309020205020404" pitchFamily="49" charset="0"/>
+              </a:rPr>
+              <a:t> = [7.39, 3.49, 1.65] # Sum all exponentials </a:t>
+            </a:r>
+          </a:p>
+          <a:p>
+            <a:r>
+              <a:rPr lang="en-US" sz="1000" b="1" dirty="0" err="1">
+                <a:solidFill>
+                  <a:schemeClr val="bg1"/>
+                </a:solidFill>
+                <a:highlight>
+                  <a:srgbClr val="000000"/>
+                </a:highlight>
+                <a:latin typeface="Courier New" panose="02070309020205020404" pitchFamily="49" charset="0"/>
+              </a:rPr>
+              <a:t>sum_exp</a:t>
+            </a:r>
+            <a:r>
+              <a:rPr lang="en-US" sz="1000" b="1" dirty="0">
+                <a:solidFill>
+                  <a:schemeClr val="bg1"/>
+                </a:solidFill>
+                <a:highlight>
+                  <a:srgbClr val="000000"/>
+                </a:highlight>
+                <a:latin typeface="Courier New" panose="02070309020205020404" pitchFamily="49" charset="0"/>
+              </a:rPr>
+              <a:t> = 7.39 + 3.49 + 1.65 = 12.53 # Calculate </a:t>
+            </a:r>
+            <a:r>
+              <a:rPr lang="en-US" sz="1000" b="1" dirty="0" err="1">
+                <a:solidFill>
+                  <a:schemeClr val="bg1"/>
+                </a:solidFill>
+                <a:highlight>
+                  <a:srgbClr val="000000"/>
+                </a:highlight>
+                <a:latin typeface="Courier New" panose="02070309020205020404" pitchFamily="49" charset="0"/>
+              </a:rPr>
+              <a:t>softmax</a:t>
+            </a:r>
+            <a:r>
+              <a:rPr lang="en-US" sz="1000" b="1" dirty="0">
+                <a:solidFill>
+                  <a:schemeClr val="bg1"/>
+                </a:solidFill>
+                <a:highlight>
+                  <a:srgbClr val="000000"/>
+                </a:highlight>
+                <a:latin typeface="Courier New" panose="02070309020205020404" pitchFamily="49" charset="0"/>
+              </a:rPr>
+              <a:t> probabilities </a:t>
+            </a:r>
+          </a:p>
+          <a:p>
+            <a:r>
+              <a:rPr lang="en-US" sz="1000" b="1" dirty="0" err="1">
+                <a:solidFill>
+                  <a:schemeClr val="bg1"/>
+                </a:solidFill>
+                <a:highlight>
+                  <a:srgbClr val="000000"/>
+                </a:highlight>
+                <a:latin typeface="Courier New" panose="02070309020205020404" pitchFamily="49" charset="0"/>
+              </a:rPr>
+              <a:t>q_car</a:t>
+            </a:r>
+            <a:r>
+              <a:rPr lang="en-US" sz="1000" b="1" dirty="0">
+                <a:solidFill>
+                  <a:schemeClr val="bg1"/>
+                </a:solidFill>
+                <a:highlight>
+                  <a:srgbClr val="000000"/>
+                </a:highlight>
+                <a:latin typeface="Courier New" panose="02070309020205020404" pitchFamily="49" charset="0"/>
+              </a:rPr>
+              <a:t> = 7.39 / 12.53 = 0.59 </a:t>
+            </a:r>
+          </a:p>
+          <a:p>
+            <a:r>
+              <a:rPr lang="en-US" sz="1000" b="1" dirty="0" err="1">
+                <a:solidFill>
+                  <a:schemeClr val="bg1"/>
+                </a:solidFill>
+                <a:highlight>
+                  <a:srgbClr val="000000"/>
+                </a:highlight>
+                <a:latin typeface="Courier New" panose="02070309020205020404" pitchFamily="49" charset="0"/>
+              </a:rPr>
+              <a:t>q_truck</a:t>
+            </a:r>
+            <a:r>
+              <a:rPr lang="en-US" sz="1000" b="1" dirty="0">
+                <a:solidFill>
+                  <a:schemeClr val="bg1"/>
+                </a:solidFill>
+                <a:highlight>
+                  <a:srgbClr val="000000"/>
+                </a:highlight>
+                <a:latin typeface="Courier New" panose="02070309020205020404" pitchFamily="49" charset="0"/>
+              </a:rPr>
+              <a:t> = 3.49 / 12.53 = 0.28 </a:t>
+            </a:r>
+          </a:p>
+          <a:p>
+            <a:r>
+              <a:rPr lang="en-US" sz="1000" b="1" dirty="0" err="1">
+                <a:solidFill>
+                  <a:schemeClr val="bg1"/>
+                </a:solidFill>
+                <a:highlight>
+                  <a:srgbClr val="000000"/>
+                </a:highlight>
+                <a:latin typeface="Courier New" panose="02070309020205020404" pitchFamily="49" charset="0"/>
+              </a:rPr>
+              <a:t>q_bus</a:t>
+            </a:r>
+            <a:r>
+              <a:rPr lang="en-US" sz="1000" b="1" dirty="0">
+                <a:solidFill>
+                  <a:schemeClr val="bg1"/>
+                </a:solidFill>
+                <a:highlight>
+                  <a:srgbClr val="000000"/>
+                </a:highlight>
+                <a:latin typeface="Courier New" panose="02070309020205020404" pitchFamily="49" charset="0"/>
+              </a:rPr>
+              <a:t> = 1.65 / 12.53 = 0.13</a:t>
+            </a:r>
+          </a:p>
+        </p:txBody>
+      </p:sp>
+      <p:sp>
+        <p:nvSpPr>
+          <p:cNvPr id="37" name="TextBox 36">
+            <a:extLst>
+              <a:ext uri="{FF2B5EF4-FFF2-40B4-BE49-F238E27FC236}">
+                <a16:creationId xmlns:a16="http://schemas.microsoft.com/office/drawing/2014/main" id="{6818C3EE-0953-4936-5F27-10D414BD9953}"/>
+              </a:ext>
+            </a:extLst>
+          </p:cNvPr>
+          <p:cNvSpPr txBox="1"/>
+          <p:nvPr/>
+        </p:nvSpPr>
+        <p:spPr>
+          <a:xfrm>
+            <a:off x="786852" y="4521841"/>
+            <a:ext cx="6094476" cy="400110"/>
+          </a:xfrm>
+          <a:prstGeom prst="rect">
+            <a:avLst/>
+          </a:prstGeom>
+          <a:noFill/>
+        </p:spPr>
+        <p:txBody>
+          <a:bodyPr wrap="square">
+            <a:spAutoFit/>
+          </a:bodyPr>
+          <a:lstStyle/>
+          <a:p>
+            <a:endParaRPr lang="en-US" sz="1000" b="1" dirty="0">
+              <a:solidFill>
+                <a:schemeClr val="bg1"/>
+              </a:solidFill>
+              <a:highlight>
+                <a:srgbClr val="000000"/>
+              </a:highlight>
+              <a:latin typeface="Courier New" panose="02070309020205020404" pitchFamily="49" charset="0"/>
+            </a:endParaRPr>
+          </a:p>
+          <a:p>
+            <a:r>
+              <a:rPr lang="en-US" sz="1000" b="1" dirty="0">
+                <a:solidFill>
+                  <a:schemeClr val="bg1"/>
+                </a:solidFill>
+                <a:highlight>
+                  <a:srgbClr val="000000"/>
+                </a:highlight>
+                <a:latin typeface="Courier New" panose="02070309020205020404" pitchFamily="49" charset="0"/>
+              </a:rPr>
+              <a:t>probabilities = [0.59, 0.28, 0.13] # Much softer!  </a:t>
+            </a:r>
+          </a:p>
+        </p:txBody>
+      </p:sp>
+      <p:sp>
+        <p:nvSpPr>
+          <p:cNvPr id="40" name="TextBox 39">
+            <a:extLst>
+              <a:ext uri="{FF2B5EF4-FFF2-40B4-BE49-F238E27FC236}">
+                <a16:creationId xmlns:a16="http://schemas.microsoft.com/office/drawing/2014/main" id="{15078F42-48E5-DB67-3FA3-DF9D4AC8503B}"/>
+              </a:ext>
+            </a:extLst>
+          </p:cNvPr>
+          <p:cNvSpPr txBox="1"/>
+          <p:nvPr/>
+        </p:nvSpPr>
+        <p:spPr>
+          <a:xfrm>
+            <a:off x="1835277" y="1510551"/>
+            <a:ext cx="4150729" cy="276999"/>
+          </a:xfrm>
+          <a:prstGeom prst="rect">
+            <a:avLst/>
+          </a:prstGeom>
+          <a:noFill/>
+        </p:spPr>
+        <p:txBody>
+          <a:bodyPr wrap="square">
+            <a:spAutoFit/>
+          </a:bodyPr>
+          <a:lstStyle/>
+          <a:p>
+            <a:r>
+              <a:rPr lang="en-US" sz="1200" b="1" dirty="0">
+                <a:solidFill>
+                  <a:schemeClr val="bg1"/>
+                </a:solidFill>
+              </a:rPr>
+              <a:t>Temperature (T=2, Standard </a:t>
+            </a:r>
+            <a:r>
+              <a:rPr lang="en-US" sz="1200" b="1" dirty="0" err="1">
+                <a:solidFill>
+                  <a:schemeClr val="bg1"/>
+                </a:solidFill>
+              </a:rPr>
+              <a:t>Softmax</a:t>
+            </a:r>
+            <a:r>
+              <a:rPr lang="en-US" sz="1200" b="1" dirty="0">
+                <a:solidFill>
+                  <a:schemeClr val="bg1"/>
+                </a:solidFill>
+              </a:rPr>
+              <a:t>):</a:t>
+            </a:r>
+          </a:p>
+        </p:txBody>
+      </p:sp>
+      <p:sp>
+        <p:nvSpPr>
+          <p:cNvPr id="41" name="TextBox 40">
+            <a:extLst>
+              <a:ext uri="{FF2B5EF4-FFF2-40B4-BE49-F238E27FC236}">
+                <a16:creationId xmlns:a16="http://schemas.microsoft.com/office/drawing/2014/main" id="{95BB3DA6-206F-85C8-0714-2E240FCF3CD5}"/>
+              </a:ext>
+            </a:extLst>
+          </p:cNvPr>
+          <p:cNvSpPr txBox="1"/>
+          <p:nvPr/>
+        </p:nvSpPr>
+        <p:spPr>
+          <a:xfrm>
+            <a:off x="7019626" y="2523975"/>
+            <a:ext cx="3321673" cy="276999"/>
+          </a:xfrm>
+          <a:prstGeom prst="rect">
+            <a:avLst/>
+          </a:prstGeom>
+          <a:noFill/>
+        </p:spPr>
+        <p:txBody>
+          <a:bodyPr wrap="square">
+            <a:spAutoFit/>
+          </a:bodyPr>
+          <a:lstStyle/>
+          <a:p>
+            <a:r>
+              <a:rPr lang="en-US" sz="1200" b="1" dirty="0">
+                <a:solidFill>
+                  <a:schemeClr val="bg1"/>
+                </a:solidFill>
+              </a:rPr>
+              <a:t>Without Temperature (T=1, Standard </a:t>
+            </a:r>
+            <a:r>
+              <a:rPr lang="en-US" sz="1200" b="1" dirty="0" err="1">
+                <a:solidFill>
+                  <a:schemeClr val="bg1"/>
+                </a:solidFill>
+              </a:rPr>
+              <a:t>Softmax</a:t>
+            </a:r>
+            <a:r>
+              <a:rPr lang="en-US" sz="1200" b="1" dirty="0">
+                <a:solidFill>
+                  <a:schemeClr val="bg1"/>
+                </a:solidFill>
+              </a:rPr>
+              <a:t>):</a:t>
+            </a:r>
+          </a:p>
+        </p:txBody>
+      </p:sp>
+      <p:sp>
+        <p:nvSpPr>
+          <p:cNvPr id="43" name="TextBox 42">
+            <a:extLst>
+              <a:ext uri="{FF2B5EF4-FFF2-40B4-BE49-F238E27FC236}">
+                <a16:creationId xmlns:a16="http://schemas.microsoft.com/office/drawing/2014/main" id="{C0D3EF59-AAD2-FBE7-D7C4-CE11516E374D}"/>
+              </a:ext>
+            </a:extLst>
+          </p:cNvPr>
+          <p:cNvSpPr txBox="1"/>
+          <p:nvPr/>
+        </p:nvSpPr>
+        <p:spPr>
+          <a:xfrm>
+            <a:off x="7088692" y="2882819"/>
+            <a:ext cx="4393224" cy="1015663"/>
+          </a:xfrm>
+          <a:prstGeom prst="rect">
+            <a:avLst/>
+          </a:prstGeom>
+          <a:noFill/>
+        </p:spPr>
+        <p:txBody>
+          <a:bodyPr wrap="square">
+            <a:spAutoFit/>
+          </a:bodyPr>
+          <a:lstStyle/>
+          <a:p>
+            <a:r>
+              <a:rPr lang="en-US" sz="1000" b="1" dirty="0">
+                <a:solidFill>
+                  <a:schemeClr val="bg1"/>
+                </a:solidFill>
+                <a:highlight>
+                  <a:srgbClr val="000000"/>
+                </a:highlight>
+                <a:latin typeface="Courier New" panose="02070309020205020404" pitchFamily="49" charset="0"/>
+              </a:rPr>
+              <a:t># Raw logits: [4.0, 2.5, 1.0] </a:t>
+            </a:r>
+          </a:p>
+          <a:p>
+            <a:r>
+              <a:rPr lang="en-US" sz="1000" b="1" dirty="0" err="1">
+                <a:solidFill>
+                  <a:schemeClr val="bg1"/>
+                </a:solidFill>
+                <a:highlight>
+                  <a:srgbClr val="000000"/>
+                </a:highlight>
+                <a:latin typeface="Courier New" panose="02070309020205020404" pitchFamily="49" charset="0"/>
+              </a:rPr>
+              <a:t>exp_values</a:t>
+            </a:r>
+            <a:r>
+              <a:rPr lang="en-US" sz="1000" b="1" dirty="0">
+                <a:solidFill>
+                  <a:schemeClr val="bg1"/>
+                </a:solidFill>
+                <a:highlight>
+                  <a:srgbClr val="000000"/>
+                </a:highlight>
+                <a:latin typeface="Courier New" panose="02070309020205020404" pitchFamily="49" charset="0"/>
+              </a:rPr>
+              <a:t> = [exp(4.0), exp(2.5), exp(1.0)] </a:t>
+            </a:r>
+          </a:p>
+          <a:p>
+            <a:r>
+              <a:rPr lang="en-US" sz="1000" b="1" dirty="0" err="1">
+                <a:solidFill>
+                  <a:schemeClr val="bg1"/>
+                </a:solidFill>
+                <a:highlight>
+                  <a:srgbClr val="000000"/>
+                </a:highlight>
+                <a:latin typeface="Courier New" panose="02070309020205020404" pitchFamily="49" charset="0"/>
+              </a:rPr>
+              <a:t>exp_values</a:t>
+            </a:r>
+            <a:r>
+              <a:rPr lang="en-US" sz="1000" b="1" dirty="0">
+                <a:solidFill>
+                  <a:schemeClr val="bg1"/>
+                </a:solidFill>
+                <a:highlight>
+                  <a:srgbClr val="000000"/>
+                </a:highlight>
+                <a:latin typeface="Courier New" panose="02070309020205020404" pitchFamily="49" charset="0"/>
+              </a:rPr>
+              <a:t> = [54.6, 12.2, 2.7] </a:t>
+            </a:r>
+          </a:p>
+          <a:p>
+            <a:r>
+              <a:rPr lang="en-US" sz="1000" b="1" dirty="0" err="1">
+                <a:solidFill>
+                  <a:schemeClr val="bg1"/>
+                </a:solidFill>
+                <a:highlight>
+                  <a:srgbClr val="000000"/>
+                </a:highlight>
+                <a:latin typeface="Courier New" panose="02070309020205020404" pitchFamily="49" charset="0"/>
+              </a:rPr>
+              <a:t>sum_exp</a:t>
+            </a:r>
+            <a:r>
+              <a:rPr lang="en-US" sz="1000" b="1" dirty="0">
+                <a:solidFill>
+                  <a:schemeClr val="bg1"/>
+                </a:solidFill>
+                <a:highlight>
+                  <a:srgbClr val="000000"/>
+                </a:highlight>
+                <a:latin typeface="Courier New" panose="02070309020205020404" pitchFamily="49" charset="0"/>
+              </a:rPr>
+              <a:t> = 69.5 # Standard </a:t>
+            </a:r>
+            <a:r>
+              <a:rPr lang="en-US" sz="1000" b="1" dirty="0" err="1">
+                <a:solidFill>
+                  <a:schemeClr val="bg1"/>
+                </a:solidFill>
+                <a:highlight>
+                  <a:srgbClr val="000000"/>
+                </a:highlight>
+                <a:latin typeface="Courier New" panose="02070309020205020404" pitchFamily="49" charset="0"/>
+              </a:rPr>
+              <a:t>softmax</a:t>
+            </a:r>
+            <a:r>
+              <a:rPr lang="en-US" sz="1000" b="1" dirty="0">
+                <a:solidFill>
+                  <a:schemeClr val="bg1"/>
+                </a:solidFill>
+                <a:highlight>
+                  <a:srgbClr val="000000"/>
+                </a:highlight>
+                <a:latin typeface="Courier New" panose="02070309020205020404" pitchFamily="49" charset="0"/>
+              </a:rPr>
+              <a:t> </a:t>
+            </a:r>
+          </a:p>
+          <a:p>
+            <a:r>
+              <a:rPr lang="en-US" sz="1000" b="1" dirty="0">
+                <a:solidFill>
+                  <a:schemeClr val="bg1"/>
+                </a:solidFill>
+                <a:highlight>
+                  <a:srgbClr val="000000"/>
+                </a:highlight>
+                <a:latin typeface="Courier New" panose="02070309020205020404" pitchFamily="49" charset="0"/>
+              </a:rPr>
+              <a:t>probabilities = [54.6/69.5, 12.2/69.5, 2.7/69.5] probabilities = [0.79, 0.17, 0.04]</a:t>
+            </a:r>
+          </a:p>
+        </p:txBody>
+      </p:sp>
+      <p:sp>
+        <p:nvSpPr>
+          <p:cNvPr id="47" name="Title 46">
+            <a:extLst>
+              <a:ext uri="{FF2B5EF4-FFF2-40B4-BE49-F238E27FC236}">
+                <a16:creationId xmlns:a16="http://schemas.microsoft.com/office/drawing/2014/main" id="{AE01B750-F29F-F15D-3711-E76AA8535122}"/>
+              </a:ext>
+            </a:extLst>
+          </p:cNvPr>
+          <p:cNvSpPr>
+            <a:spLocks noGrp="1"/>
+          </p:cNvSpPr>
+          <p:nvPr>
+            <p:ph type="title"/>
+          </p:nvPr>
+        </p:nvSpPr>
+        <p:spPr>
+          <a:xfrm>
+            <a:off x="3377946" y="2698619"/>
+            <a:ext cx="10515600" cy="1325563"/>
+          </a:xfrm>
+        </p:spPr>
+        <p:txBody>
+          <a:bodyPr/>
+          <a:lstStyle/>
+          <a:p>
+            <a:r>
+              <a:rPr lang="en-US" dirty="0"/>
+              <a:t>   </a:t>
+            </a:r>
+          </a:p>
+        </p:txBody>
+      </p:sp>
     </p:spTree>
     <p:extLst>
       <p:ext uri="{BB962C8B-B14F-4D97-AF65-F5344CB8AC3E}">
-        <p14:creationId xmlns:p14="http://schemas.microsoft.com/office/powerpoint/2010/main" val="1042953147"/>
+        <p14:creationId xmlns:p14="http://schemas.microsoft.com/office/powerpoint/2010/main" val="3212880036"/>
       </p:ext>
     </p:extLst>
   </p:cSld>

--- a/01-Project-management/presentation/KnowledgeDistillation.pptx
+++ b/01-Project-management/presentation/KnowledgeDistillation.pptx
@@ -11353,7 +11353,7 @@
         </p:nvSpPr>
         <p:spPr>
           <a:xfrm>
-            <a:off x="6160603" y="3248448"/>
+            <a:off x="6142315" y="3085920"/>
             <a:ext cx="2987001" cy="369332"/>
           </a:xfrm>
           <a:prstGeom prst="rect">
@@ -11437,7 +11437,7 @@
         </p:nvCxnSpPr>
         <p:spPr>
           <a:xfrm>
-            <a:off x="6088129" y="3291905"/>
+            <a:off x="6069841" y="3129377"/>
             <a:ext cx="0" cy="1338769"/>
           </a:xfrm>
           <a:prstGeom prst="line">
@@ -11478,7 +11478,7 @@
         </p:nvSpPr>
         <p:spPr>
           <a:xfrm>
-            <a:off x="6242867" y="3682007"/>
+            <a:off x="6224579" y="3519479"/>
             <a:ext cx="3609080" cy="830997"/>
           </a:xfrm>
           <a:prstGeom prst="rect">
@@ -11662,6 +11662,249 @@
                 <a:cs typeface="Segoe UI" panose="020B0502040204020203" pitchFamily="34" charset="0"/>
               </a:rPr>
               <a:t>mAP@50 improvement: From 0.43 to 0.97 with same training configuration</a:t>
+            </a:r>
+          </a:p>
+        </p:txBody>
+      </p:sp>
+      <p:sp>
+        <p:nvSpPr>
+          <p:cNvPr id="7" name="TextBox 6">
+            <a:extLst>
+              <a:ext uri="{FF2B5EF4-FFF2-40B4-BE49-F238E27FC236}">
+                <a16:creationId xmlns:a16="http://schemas.microsoft.com/office/drawing/2014/main" id="{9646C834-E85E-7368-B4E1-60EAAEF250F3}"/>
+              </a:ext>
+            </a:extLst>
+          </p:cNvPr>
+          <p:cNvSpPr txBox="1"/>
+          <p:nvPr/>
+        </p:nvSpPr>
+        <p:spPr>
+          <a:xfrm>
+            <a:off x="6160603" y="5619952"/>
+            <a:ext cx="6094476" cy="276999"/>
+          </a:xfrm>
+          <a:prstGeom prst="rect">
+            <a:avLst/>
+          </a:prstGeom>
+          <a:noFill/>
+        </p:spPr>
+        <p:txBody>
+          <a:bodyPr wrap="square">
+            <a:spAutoFit/>
+          </a:bodyPr>
+          <a:lstStyle/>
+          <a:p>
+            <a:r>
+              <a:rPr lang="en-US" sz="1200" dirty="0">
+                <a:solidFill>
+                  <a:srgbClr val="002060"/>
+                </a:solidFill>
+                <a:latin typeface="Segoe UI" panose="020B0502040204020203" pitchFamily="34" charset="0"/>
+                <a:cs typeface="Segoe UI" panose="020B0502040204020203" pitchFamily="34" charset="0"/>
+              </a:rPr>
+              <a:t>https://universe.roboflow.com/roboflow-100/vehicles-q0x2v</a:t>
+            </a:r>
+          </a:p>
+        </p:txBody>
+      </p:sp>
+      <p:cxnSp>
+        <p:nvCxnSpPr>
+          <p:cNvPr id="9" name="Straight Connector 8">
+            <a:extLst>
+              <a:ext uri="{FF2B5EF4-FFF2-40B4-BE49-F238E27FC236}">
+                <a16:creationId xmlns:a16="http://schemas.microsoft.com/office/drawing/2014/main" id="{B3C383D9-D829-90E8-F2C8-6FD98FEAA2D9}"/>
+              </a:ext>
+            </a:extLst>
+          </p:cNvPr>
+          <p:cNvCxnSpPr>
+            <a:cxnSpLocks/>
+          </p:cNvCxnSpPr>
+          <p:nvPr/>
+        </p:nvCxnSpPr>
+        <p:spPr>
+          <a:xfrm>
+            <a:off x="6075937" y="4528678"/>
+            <a:ext cx="0" cy="1338769"/>
+          </a:xfrm>
+          <a:prstGeom prst="line">
+            <a:avLst/>
+          </a:prstGeom>
+          <a:ln w="73025">
+            <a:solidFill>
+              <a:srgbClr val="002060"/>
+            </a:solidFill>
+          </a:ln>
+        </p:spPr>
+        <p:style>
+          <a:lnRef idx="1">
+            <a:schemeClr val="accent1"/>
+          </a:lnRef>
+          <a:fillRef idx="0">
+            <a:schemeClr val="accent1"/>
+          </a:fillRef>
+          <a:effectRef idx="0">
+            <a:schemeClr val="accent1"/>
+          </a:effectRef>
+          <a:fontRef idx="minor">
+            <a:schemeClr val="tx1"/>
+          </a:fontRef>
+        </p:style>
+      </p:cxnSp>
+      <p:sp>
+        <p:nvSpPr>
+          <p:cNvPr id="11" name="TextBox 10">
+            <a:extLst>
+              <a:ext uri="{FF2B5EF4-FFF2-40B4-BE49-F238E27FC236}">
+                <a16:creationId xmlns:a16="http://schemas.microsoft.com/office/drawing/2014/main" id="{E1E7FE10-9257-95CB-697B-049E10018747}"/>
+              </a:ext>
+            </a:extLst>
+          </p:cNvPr>
+          <p:cNvSpPr txBox="1"/>
+          <p:nvPr/>
+        </p:nvSpPr>
+        <p:spPr>
+          <a:xfrm>
+            <a:off x="6142315" y="4460587"/>
+            <a:ext cx="2987001" cy="369332"/>
+          </a:xfrm>
+          <a:prstGeom prst="rect">
+            <a:avLst/>
+          </a:prstGeom>
+          <a:noFill/>
+        </p:spPr>
+        <p:txBody>
+          <a:bodyPr wrap="square">
+            <a:spAutoFit/>
+          </a:bodyPr>
+          <a:lstStyle/>
+          <a:p>
+            <a:r>
+              <a:rPr lang="en-US" b="1" dirty="0">
+                <a:solidFill>
+                  <a:srgbClr val="002060"/>
+                </a:solidFill>
+              </a:rPr>
+              <a:t>Dataset</a:t>
+            </a:r>
+          </a:p>
+        </p:txBody>
+      </p:sp>
+      <p:sp>
+        <p:nvSpPr>
+          <p:cNvPr id="13" name="TextBox 12">
+            <a:extLst>
+              <a:ext uri="{FF2B5EF4-FFF2-40B4-BE49-F238E27FC236}">
+                <a16:creationId xmlns:a16="http://schemas.microsoft.com/office/drawing/2014/main" id="{F8C522B6-6F8A-E498-5668-79767350A9B1}"/>
+              </a:ext>
+            </a:extLst>
+          </p:cNvPr>
+          <p:cNvSpPr txBox="1"/>
+          <p:nvPr/>
+        </p:nvSpPr>
+        <p:spPr>
+          <a:xfrm>
+            <a:off x="6160603" y="4797648"/>
+            <a:ext cx="5781460" cy="830997"/>
+          </a:xfrm>
+          <a:prstGeom prst="rect">
+            <a:avLst/>
+          </a:prstGeom>
+          <a:noFill/>
+        </p:spPr>
+        <p:txBody>
+          <a:bodyPr wrap="square">
+            <a:spAutoFit/>
+          </a:bodyPr>
+          <a:lstStyle/>
+          <a:p>
+            <a:r>
+              <a:rPr lang="en-US" sz="1200" dirty="0">
+                <a:solidFill>
+                  <a:srgbClr val="002060"/>
+                </a:solidFill>
+                <a:latin typeface="Segoe UI" panose="020B0502040204020203" pitchFamily="34" charset="0"/>
+                <a:cs typeface="Segoe UI" panose="020B0502040204020203" pitchFamily="34" charset="0"/>
+              </a:rPr>
+              <a:t>Vehicles Computer Vision Project (</a:t>
+            </a:r>
+            <a:r>
+              <a:rPr lang="en-US" sz="1200" dirty="0" err="1">
+                <a:solidFill>
+                  <a:srgbClr val="002060"/>
+                </a:solidFill>
+                <a:latin typeface="Segoe UI" panose="020B0502040204020203" pitchFamily="34" charset="0"/>
+                <a:cs typeface="Segoe UI" panose="020B0502040204020203" pitchFamily="34" charset="0"/>
+              </a:rPr>
+              <a:t>Roboflow</a:t>
+            </a:r>
+            <a:r>
+              <a:rPr lang="en-US" sz="1200" dirty="0">
+                <a:solidFill>
+                  <a:srgbClr val="002060"/>
+                </a:solidFill>
+                <a:latin typeface="Segoe UI" panose="020B0502040204020203" pitchFamily="34" charset="0"/>
+                <a:cs typeface="Segoe UI" panose="020B0502040204020203" pitchFamily="34" charset="0"/>
+              </a:rPr>
+              <a:t> 100)</a:t>
+            </a:r>
+            <a:br>
+              <a:rPr lang="en-US" sz="1200" dirty="0">
+                <a:solidFill>
+                  <a:srgbClr val="002060"/>
+                </a:solidFill>
+                <a:latin typeface="Segoe UI" panose="020B0502040204020203" pitchFamily="34" charset="0"/>
+                <a:cs typeface="Segoe UI" panose="020B0502040204020203" pitchFamily="34" charset="0"/>
+              </a:rPr>
+            </a:br>
+            <a:r>
+              <a:rPr lang="en-US" sz="1200" dirty="0">
+                <a:solidFill>
+                  <a:srgbClr val="002060"/>
+                </a:solidFill>
+                <a:latin typeface="Segoe UI" panose="020B0502040204020203" pitchFamily="34" charset="0"/>
+                <a:cs typeface="Segoe UI" panose="020B0502040204020203" pitchFamily="34" charset="0"/>
+              </a:rPr>
+              <a:t>A public object detection dataset featuring 12 vehicle classes (e.g., car, bus, truck types). Originally created by </a:t>
+            </a:r>
+            <a:r>
+              <a:rPr lang="en-US" sz="1200" dirty="0" err="1">
+                <a:solidFill>
+                  <a:srgbClr val="002060"/>
+                </a:solidFill>
+                <a:latin typeface="Segoe UI" panose="020B0502040204020203" pitchFamily="34" charset="0"/>
+                <a:cs typeface="Segoe UI" panose="020B0502040204020203" pitchFamily="34" charset="0"/>
+              </a:rPr>
+              <a:t>Yudha</a:t>
+            </a:r>
+            <a:r>
+              <a:rPr lang="en-US" sz="1200" dirty="0">
+                <a:solidFill>
+                  <a:srgbClr val="002060"/>
+                </a:solidFill>
+                <a:latin typeface="Segoe UI" panose="020B0502040204020203" pitchFamily="34" charset="0"/>
+                <a:cs typeface="Segoe UI" panose="020B0502040204020203" pitchFamily="34" charset="0"/>
+              </a:rPr>
+              <a:t> Bhakti </a:t>
+            </a:r>
+            <a:r>
+              <a:rPr lang="en-US" sz="1200" dirty="0" err="1">
+                <a:solidFill>
+                  <a:srgbClr val="002060"/>
+                </a:solidFill>
+                <a:latin typeface="Segoe UI" panose="020B0502040204020203" pitchFamily="34" charset="0"/>
+                <a:cs typeface="Segoe UI" panose="020B0502040204020203" pitchFamily="34" charset="0"/>
+              </a:rPr>
+              <a:t>Nugraha</a:t>
+            </a:r>
+            <a:r>
+              <a:rPr lang="en-US" sz="1200" dirty="0">
+                <a:solidFill>
+                  <a:srgbClr val="002060"/>
+                </a:solidFill>
+                <a:latin typeface="Segoe UI" panose="020B0502040204020203" pitchFamily="34" charset="0"/>
+                <a:cs typeface="Segoe UI" panose="020B0502040204020203" pitchFamily="34" charset="0"/>
+              </a:rPr>
+              <a:t> and Kris, it’s part of the RF100 benchmark, sponsored by Intel to promote model generalizability</a:t>
             </a:r>
           </a:p>
         </p:txBody>
@@ -11953,7 +12196,7 @@
         </p:blipFill>
         <p:spPr>
           <a:xfrm>
-            <a:off x="1853946" y="3727338"/>
+            <a:off x="2375154" y="3663330"/>
             <a:ext cx="7145737" cy="1685919"/>
           </a:xfrm>
           <a:prstGeom prst="rect">
@@ -11977,7 +12220,7 @@
         </p:nvCxnSpPr>
         <p:spPr>
           <a:xfrm>
-            <a:off x="1609356" y="3242834"/>
+            <a:off x="2130564" y="3178826"/>
             <a:ext cx="0" cy="2170423"/>
           </a:xfrm>
           <a:prstGeom prst="line">
@@ -12018,7 +12261,7 @@
         </p:nvSpPr>
         <p:spPr>
           <a:xfrm>
-            <a:off x="1853946" y="3242834"/>
+            <a:off x="2375154" y="3178826"/>
             <a:ext cx="6096000" cy="369332"/>
           </a:xfrm>
           <a:prstGeom prst="rect">
@@ -12059,7 +12302,7 @@
         </p:nvSpPr>
         <p:spPr>
           <a:xfrm>
-            <a:off x="1798528" y="1357148"/>
+            <a:off x="2319736" y="1293140"/>
             <a:ext cx="1529392" cy="1478223"/>
           </a:xfrm>
           <a:prstGeom prst="rect">
@@ -12113,7 +12356,7 @@
         </p:nvSpPr>
         <p:spPr>
           <a:xfrm>
-            <a:off x="1940212" y="2396809"/>
+            <a:off x="2461420" y="2332801"/>
             <a:ext cx="1264806" cy="300209"/>
           </a:xfrm>
           <a:prstGeom prst="roundRect">
@@ -12165,7 +12408,7 @@
         </p:nvSpPr>
         <p:spPr>
           <a:xfrm>
-            <a:off x="3593921" y="1357148"/>
+            <a:off x="4115129" y="1293140"/>
             <a:ext cx="1529392" cy="1478223"/>
           </a:xfrm>
           <a:prstGeom prst="rect">
@@ -12219,7 +12462,7 @@
         </p:nvSpPr>
         <p:spPr>
           <a:xfrm>
-            <a:off x="3735605" y="2396809"/>
+            <a:off x="4256813" y="2332801"/>
             <a:ext cx="1264806" cy="300209"/>
           </a:xfrm>
           <a:prstGeom prst="roundRect">
@@ -12271,7 +12514,7 @@
         </p:nvSpPr>
         <p:spPr>
           <a:xfrm>
-            <a:off x="5397611" y="1357148"/>
+            <a:off x="5918819" y="1293140"/>
             <a:ext cx="1529392" cy="1478223"/>
           </a:xfrm>
           <a:prstGeom prst="rect">
@@ -12325,7 +12568,7 @@
         </p:nvSpPr>
         <p:spPr>
           <a:xfrm>
-            <a:off x="5468453" y="2396809"/>
+            <a:off x="5989661" y="2332801"/>
             <a:ext cx="1387708" cy="300209"/>
           </a:xfrm>
           <a:prstGeom prst="roundRect">
@@ -12377,7 +12620,7 @@
         </p:nvSpPr>
         <p:spPr>
           <a:xfrm>
-            <a:off x="7185573" y="1357148"/>
+            <a:off x="7706781" y="1293140"/>
             <a:ext cx="1529392" cy="1478223"/>
           </a:xfrm>
           <a:prstGeom prst="rect">
@@ -12431,7 +12674,7 @@
         </p:nvSpPr>
         <p:spPr>
           <a:xfrm>
-            <a:off x="7327257" y="2396809"/>
+            <a:off x="7848465" y="2332801"/>
             <a:ext cx="1264806" cy="300209"/>
           </a:xfrm>
           <a:prstGeom prst="roundRect">
@@ -12483,7 +12726,7 @@
         </p:nvSpPr>
         <p:spPr>
           <a:xfrm>
-            <a:off x="2073920" y="1480694"/>
+            <a:off x="2595128" y="1416686"/>
             <a:ext cx="997389" cy="415498"/>
           </a:xfrm>
           <a:prstGeom prst="rect">
@@ -12522,7 +12765,7 @@
         </p:nvSpPr>
         <p:spPr>
           <a:xfrm>
-            <a:off x="3869313" y="1480694"/>
+            <a:off x="4390521" y="1416686"/>
             <a:ext cx="861133" cy="415498"/>
           </a:xfrm>
           <a:prstGeom prst="rect">
@@ -12561,7 +12804,7 @@
         </p:nvSpPr>
         <p:spPr>
           <a:xfrm>
-            <a:off x="5800085" y="1480694"/>
+            <a:off x="6321293" y="1416686"/>
             <a:ext cx="591829" cy="415498"/>
           </a:xfrm>
           <a:prstGeom prst="rect">
@@ -12600,7 +12843,7 @@
         </p:nvSpPr>
         <p:spPr>
           <a:xfrm>
-            <a:off x="7537909" y="1508449"/>
+            <a:off x="8059117" y="1444441"/>
             <a:ext cx="843501" cy="415498"/>
           </a:xfrm>
           <a:prstGeom prst="rect">
@@ -12639,7 +12882,7 @@
         </p:nvSpPr>
         <p:spPr>
           <a:xfrm>
-            <a:off x="1964712" y="1938775"/>
+            <a:off x="2485920" y="1874767"/>
             <a:ext cx="1240306" cy="369332"/>
           </a:xfrm>
           <a:prstGeom prst="rect">
@@ -12680,7 +12923,7 @@
         </p:nvSpPr>
         <p:spPr>
           <a:xfrm>
-            <a:off x="3780006" y="1974137"/>
+            <a:off x="4301214" y="1910129"/>
             <a:ext cx="1240306" cy="230832"/>
           </a:xfrm>
           <a:prstGeom prst="rect">
@@ -12715,7 +12958,7 @@
         </p:nvSpPr>
         <p:spPr>
           <a:xfrm>
-            <a:off x="5694323" y="2008025"/>
+            <a:off x="6215531" y="1944017"/>
             <a:ext cx="1240306" cy="230832"/>
           </a:xfrm>
           <a:prstGeom prst="rect">
@@ -12750,7 +12993,7 @@
         </p:nvSpPr>
         <p:spPr>
           <a:xfrm>
-            <a:off x="7603968" y="1959832"/>
+            <a:off x="8125176" y="1895824"/>
             <a:ext cx="1240306" cy="230832"/>
           </a:xfrm>
           <a:prstGeom prst="rect">
@@ -14064,7 +14307,7 @@
         <p:spPr>
           <a:xfrm>
             <a:off x="838200" y="1227436"/>
-            <a:ext cx="10515600" cy="3970318"/>
+            <a:ext cx="10515600" cy="4801314"/>
           </a:xfrm>
           <a:prstGeom prst="rect">
             <a:avLst/>
@@ -14089,7 +14332,7 @@
             </a:r>
             <a:endParaRPr lang="en-US" dirty="0">
               <a:solidFill>
-                <a:srgbClr val="0563C1"/>
+                <a:srgbClr val="002060"/>
               </a:solidFill>
               <a:latin typeface="Segoe UI" panose="020B0502040204020203" pitchFamily="34" charset="0"/>
               <a:cs typeface="Segoe UI" panose="020B0502040204020203" pitchFamily="34" charset="0"/>
@@ -14193,10 +14436,17 @@
                 <a:latin typeface="Segoe UI" panose="020B0502040204020203" pitchFamily="34" charset="0"/>
                 <a:cs typeface="Segoe UI" panose="020B0502040204020203" pitchFamily="34" charset="0"/>
               </a:rPr>
-              <a:t>Application:</a:t>
-            </a:r>
-          </a:p>
-          <a:p>
+              <a:t>Dataset:</a:t>
+            </a:r>
+            <a:br>
+              <a:rPr lang="en-US" dirty="0">
+                <a:solidFill>
+                  <a:srgbClr val="002060"/>
+                </a:solidFill>
+                <a:latin typeface="Segoe UI" panose="020B0502040204020203" pitchFamily="34" charset="0"/>
+                <a:cs typeface="Segoe UI" panose="020B0502040204020203" pitchFamily="34" charset="0"/>
+              </a:rPr>
+            </a:br>
             <a:r>
               <a:rPr lang="en-US" dirty="0">
                 <a:solidFill>
@@ -14212,7 +14462,7 @@
                   </a:extLst>
                 </a:hlinkClick>
               </a:rPr>
-              <a:t>https://github.com/RajeshRamadas/highway-vehicle-tracker/tree/75d96c9aa849d52c155dc343237ff121f7ebbb99</a:t>
+              <a:t>https://universe.roboflow.com/roboflow-100/vehicles-q0x2v</a:t>
             </a:r>
             <a:endParaRPr lang="en-US" dirty="0">
               <a:solidFill>
@@ -14240,7 +14490,7 @@
                 <a:latin typeface="Segoe UI" panose="020B0502040204020203" pitchFamily="34" charset="0"/>
                 <a:cs typeface="Segoe UI" panose="020B0502040204020203" pitchFamily="34" charset="0"/>
               </a:rPr>
-              <a:t>Report &amp; Documentation </a:t>
+              <a:t>Application:</a:t>
             </a:r>
           </a:p>
           <a:p>
@@ -14252,6 +14502,53 @@
                 <a:latin typeface="Segoe UI" panose="020B0502040204020203" pitchFamily="34" charset="0"/>
                 <a:cs typeface="Segoe UI" panose="020B0502040204020203" pitchFamily="34" charset="0"/>
                 <a:hlinkClick r:id="rId5">
+                  <a:extLst>
+                    <a:ext uri="{A12FA001-AC4F-418D-AE19-62706E023703}">
+                      <ahyp:hlinkClr xmlns:ahyp="http://schemas.microsoft.com/office/drawing/2018/hyperlinkcolor" val="tx"/>
+                    </a:ext>
+                  </a:extLst>
+                </a:hlinkClick>
+              </a:rPr>
+              <a:t>https://github.com/RajeshRamadas/highway-vehicle-tracker/tree/75d96c9aa849d52c155dc343237ff121f7ebbb99</a:t>
+            </a:r>
+            <a:endParaRPr lang="en-US" dirty="0">
+              <a:solidFill>
+                <a:srgbClr val="002060"/>
+              </a:solidFill>
+              <a:latin typeface="Segoe UI" panose="020B0502040204020203" pitchFamily="34" charset="0"/>
+              <a:cs typeface="Segoe UI" panose="020B0502040204020203" pitchFamily="34" charset="0"/>
+            </a:endParaRPr>
+          </a:p>
+          <a:p>
+            <a:endParaRPr lang="en-US" dirty="0">
+              <a:solidFill>
+                <a:srgbClr val="002060"/>
+              </a:solidFill>
+              <a:latin typeface="Segoe UI" panose="020B0502040204020203" pitchFamily="34" charset="0"/>
+              <a:cs typeface="Segoe UI" panose="020B0502040204020203" pitchFamily="34" charset="0"/>
+            </a:endParaRPr>
+          </a:p>
+          <a:p>
+            <a:r>
+              <a:rPr lang="en-US" dirty="0">
+                <a:solidFill>
+                  <a:srgbClr val="002060"/>
+                </a:solidFill>
+                <a:latin typeface="Segoe UI" panose="020B0502040204020203" pitchFamily="34" charset="0"/>
+                <a:cs typeface="Segoe UI" panose="020B0502040204020203" pitchFamily="34" charset="0"/>
+              </a:rPr>
+              <a:t>Report &amp; Documentation </a:t>
+            </a:r>
+          </a:p>
+          <a:p>
+            <a:r>
+              <a:rPr lang="en-US" dirty="0">
+                <a:solidFill>
+                  <a:srgbClr val="002060"/>
+                </a:solidFill>
+                <a:latin typeface="Segoe UI" panose="020B0502040204020203" pitchFamily="34" charset="0"/>
+                <a:cs typeface="Segoe UI" panose="020B0502040204020203" pitchFamily="34" charset="0"/>
+                <a:hlinkClick r:id="rId6">
                   <a:extLst>
                     <a:ext uri="{A12FA001-AC4F-418D-AE19-62706E023703}">
                       <ahyp:hlinkClr xmlns:ahyp="http://schemas.microsoft.com/office/drawing/2018/hyperlinkcolor" val="tx"/>

--- a/01-Project-management/presentation/KnowledgeDistillation.pptx
+++ b/01-Project-management/presentation/KnowledgeDistillation.pptx
@@ -8765,7 +8765,7 @@
           </a:lstStyle>
           <a:p>
             <a:r>
-              <a:rPr lang="en-US" sz="3000" b="1" dirty="0">
+              <a:rPr lang="en-US" sz="2700" b="1" dirty="0">
                 <a:solidFill>
                   <a:srgbClr val="002060"/>
                 </a:solidFill>
@@ -9277,7 +9277,7 @@
           </a:lstStyle>
           <a:p>
             <a:r>
-              <a:rPr lang="en-US" sz="2900" b="1" dirty="0">
+              <a:rPr lang="en-US" sz="2800" b="1" dirty="0">
                 <a:solidFill>
                   <a:srgbClr val="002060"/>
                 </a:solidFill>
@@ -10316,7 +10316,7 @@
         </p:nvSpPr>
         <p:spPr>
           <a:xfrm>
-            <a:off x="838200" y="365126"/>
+            <a:off x="838200" y="516273"/>
             <a:ext cx="10515600" cy="638922"/>
           </a:xfrm>
           <a:prstGeom prst="rect">
@@ -10325,7 +10325,7 @@
         </p:spPr>
         <p:txBody>
           <a:bodyPr vert="horz" lIns="91440" tIns="45720" rIns="91440" bIns="45720" rtlCol="0" anchor="ctr">
-            <a:normAutofit fontScale="82500" lnSpcReduction="20000"/>
+            <a:noAutofit/>
           </a:bodyPr>
           <a:lstStyle>
             <a:lvl1pPr algn="l" defTabSz="914400" rtl="0" eaLnBrk="1" latinLnBrk="0" hangingPunct="1">
@@ -10348,7 +10348,7 @@
           </a:lstStyle>
           <a:p>
             <a:r>
-              <a:rPr lang="en-US" sz="2800" b="1" dirty="0">
+              <a:rPr lang="en-US" sz="2700" b="1" dirty="0">
                 <a:solidFill>
                   <a:srgbClr val="002060"/>
                 </a:solidFill>
@@ -10360,7 +10360,7 @@
           </a:p>
           <a:p>
             <a:br>
-              <a:rPr lang="en-US" sz="1000" b="1" dirty="0">
+              <a:rPr lang="en-US" sz="2700" b="1" dirty="0">
                 <a:solidFill>
                   <a:srgbClr val="002060"/>
                 </a:solidFill>
@@ -10368,7 +10368,7 @@
                 <a:cs typeface="Arial" panose="020B0604020202020204" pitchFamily="34" charset="0"/>
               </a:rPr>
             </a:br>
-            <a:endParaRPr lang="en-US" sz="2000" b="1" dirty="0">
+            <a:endParaRPr lang="en-US" sz="2700" b="1" dirty="0">
               <a:solidFill>
                 <a:srgbClr val="002060"/>
               </a:solidFill>
@@ -11353,7 +11353,7 @@
         </p:nvSpPr>
         <p:spPr>
           <a:xfrm>
-            <a:off x="6142315" y="3085920"/>
+            <a:off x="6160603" y="3248448"/>
             <a:ext cx="2987001" cy="369332"/>
           </a:xfrm>
           <a:prstGeom prst="rect">
@@ -11437,7 +11437,7 @@
         </p:nvCxnSpPr>
         <p:spPr>
           <a:xfrm>
-            <a:off x="6069841" y="3129377"/>
+            <a:off x="6088129" y="3291905"/>
             <a:ext cx="0" cy="1338769"/>
           </a:xfrm>
           <a:prstGeom prst="line">
@@ -11478,7 +11478,7 @@
         </p:nvSpPr>
         <p:spPr>
           <a:xfrm>
-            <a:off x="6224579" y="3519479"/>
+            <a:off x="6242867" y="3682007"/>
             <a:ext cx="3609080" cy="830997"/>
           </a:xfrm>
           <a:prstGeom prst="rect">
@@ -11662,249 +11662,6 @@
                 <a:cs typeface="Segoe UI" panose="020B0502040204020203" pitchFamily="34" charset="0"/>
               </a:rPr>
               <a:t>mAP@50 improvement: From 0.43 to 0.97 with same training configuration</a:t>
-            </a:r>
-          </a:p>
-        </p:txBody>
-      </p:sp>
-      <p:sp>
-        <p:nvSpPr>
-          <p:cNvPr id="7" name="TextBox 6">
-            <a:extLst>
-              <a:ext uri="{FF2B5EF4-FFF2-40B4-BE49-F238E27FC236}">
-                <a16:creationId xmlns:a16="http://schemas.microsoft.com/office/drawing/2014/main" id="{9646C834-E85E-7368-B4E1-60EAAEF250F3}"/>
-              </a:ext>
-            </a:extLst>
-          </p:cNvPr>
-          <p:cNvSpPr txBox="1"/>
-          <p:nvPr/>
-        </p:nvSpPr>
-        <p:spPr>
-          <a:xfrm>
-            <a:off x="6160603" y="5619952"/>
-            <a:ext cx="6094476" cy="276999"/>
-          </a:xfrm>
-          <a:prstGeom prst="rect">
-            <a:avLst/>
-          </a:prstGeom>
-          <a:noFill/>
-        </p:spPr>
-        <p:txBody>
-          <a:bodyPr wrap="square">
-            <a:spAutoFit/>
-          </a:bodyPr>
-          <a:lstStyle/>
-          <a:p>
-            <a:r>
-              <a:rPr lang="en-US" sz="1200" dirty="0">
-                <a:solidFill>
-                  <a:srgbClr val="002060"/>
-                </a:solidFill>
-                <a:latin typeface="Segoe UI" panose="020B0502040204020203" pitchFamily="34" charset="0"/>
-                <a:cs typeface="Segoe UI" panose="020B0502040204020203" pitchFamily="34" charset="0"/>
-              </a:rPr>
-              <a:t>https://universe.roboflow.com/roboflow-100/vehicles-q0x2v</a:t>
-            </a:r>
-          </a:p>
-        </p:txBody>
-      </p:sp>
-      <p:cxnSp>
-        <p:nvCxnSpPr>
-          <p:cNvPr id="9" name="Straight Connector 8">
-            <a:extLst>
-              <a:ext uri="{FF2B5EF4-FFF2-40B4-BE49-F238E27FC236}">
-                <a16:creationId xmlns:a16="http://schemas.microsoft.com/office/drawing/2014/main" id="{B3C383D9-D829-90E8-F2C8-6FD98FEAA2D9}"/>
-              </a:ext>
-            </a:extLst>
-          </p:cNvPr>
-          <p:cNvCxnSpPr>
-            <a:cxnSpLocks/>
-          </p:cNvCxnSpPr>
-          <p:nvPr/>
-        </p:nvCxnSpPr>
-        <p:spPr>
-          <a:xfrm>
-            <a:off x="6075937" y="4528678"/>
-            <a:ext cx="0" cy="1338769"/>
-          </a:xfrm>
-          <a:prstGeom prst="line">
-            <a:avLst/>
-          </a:prstGeom>
-          <a:ln w="73025">
-            <a:solidFill>
-              <a:srgbClr val="002060"/>
-            </a:solidFill>
-          </a:ln>
-        </p:spPr>
-        <p:style>
-          <a:lnRef idx="1">
-            <a:schemeClr val="accent1"/>
-          </a:lnRef>
-          <a:fillRef idx="0">
-            <a:schemeClr val="accent1"/>
-          </a:fillRef>
-          <a:effectRef idx="0">
-            <a:schemeClr val="accent1"/>
-          </a:effectRef>
-          <a:fontRef idx="minor">
-            <a:schemeClr val="tx1"/>
-          </a:fontRef>
-        </p:style>
-      </p:cxnSp>
-      <p:sp>
-        <p:nvSpPr>
-          <p:cNvPr id="11" name="TextBox 10">
-            <a:extLst>
-              <a:ext uri="{FF2B5EF4-FFF2-40B4-BE49-F238E27FC236}">
-                <a16:creationId xmlns:a16="http://schemas.microsoft.com/office/drawing/2014/main" id="{E1E7FE10-9257-95CB-697B-049E10018747}"/>
-              </a:ext>
-            </a:extLst>
-          </p:cNvPr>
-          <p:cNvSpPr txBox="1"/>
-          <p:nvPr/>
-        </p:nvSpPr>
-        <p:spPr>
-          <a:xfrm>
-            <a:off x="6142315" y="4460587"/>
-            <a:ext cx="2987001" cy="369332"/>
-          </a:xfrm>
-          <a:prstGeom prst="rect">
-            <a:avLst/>
-          </a:prstGeom>
-          <a:noFill/>
-        </p:spPr>
-        <p:txBody>
-          <a:bodyPr wrap="square">
-            <a:spAutoFit/>
-          </a:bodyPr>
-          <a:lstStyle/>
-          <a:p>
-            <a:r>
-              <a:rPr lang="en-US" b="1" dirty="0">
-                <a:solidFill>
-                  <a:srgbClr val="002060"/>
-                </a:solidFill>
-              </a:rPr>
-              <a:t>Dataset</a:t>
-            </a:r>
-          </a:p>
-        </p:txBody>
-      </p:sp>
-      <p:sp>
-        <p:nvSpPr>
-          <p:cNvPr id="13" name="TextBox 12">
-            <a:extLst>
-              <a:ext uri="{FF2B5EF4-FFF2-40B4-BE49-F238E27FC236}">
-                <a16:creationId xmlns:a16="http://schemas.microsoft.com/office/drawing/2014/main" id="{F8C522B6-6F8A-E498-5668-79767350A9B1}"/>
-              </a:ext>
-            </a:extLst>
-          </p:cNvPr>
-          <p:cNvSpPr txBox="1"/>
-          <p:nvPr/>
-        </p:nvSpPr>
-        <p:spPr>
-          <a:xfrm>
-            <a:off x="6160603" y="4797648"/>
-            <a:ext cx="5781460" cy="830997"/>
-          </a:xfrm>
-          <a:prstGeom prst="rect">
-            <a:avLst/>
-          </a:prstGeom>
-          <a:noFill/>
-        </p:spPr>
-        <p:txBody>
-          <a:bodyPr wrap="square">
-            <a:spAutoFit/>
-          </a:bodyPr>
-          <a:lstStyle/>
-          <a:p>
-            <a:r>
-              <a:rPr lang="en-US" sz="1200" dirty="0">
-                <a:solidFill>
-                  <a:srgbClr val="002060"/>
-                </a:solidFill>
-                <a:latin typeface="Segoe UI" panose="020B0502040204020203" pitchFamily="34" charset="0"/>
-                <a:cs typeface="Segoe UI" panose="020B0502040204020203" pitchFamily="34" charset="0"/>
-              </a:rPr>
-              <a:t>Vehicles Computer Vision Project (</a:t>
-            </a:r>
-            <a:r>
-              <a:rPr lang="en-US" sz="1200" dirty="0" err="1">
-                <a:solidFill>
-                  <a:srgbClr val="002060"/>
-                </a:solidFill>
-                <a:latin typeface="Segoe UI" panose="020B0502040204020203" pitchFamily="34" charset="0"/>
-                <a:cs typeface="Segoe UI" panose="020B0502040204020203" pitchFamily="34" charset="0"/>
-              </a:rPr>
-              <a:t>Roboflow</a:t>
-            </a:r>
-            <a:r>
-              <a:rPr lang="en-US" sz="1200" dirty="0">
-                <a:solidFill>
-                  <a:srgbClr val="002060"/>
-                </a:solidFill>
-                <a:latin typeface="Segoe UI" panose="020B0502040204020203" pitchFamily="34" charset="0"/>
-                <a:cs typeface="Segoe UI" panose="020B0502040204020203" pitchFamily="34" charset="0"/>
-              </a:rPr>
-              <a:t> 100)</a:t>
-            </a:r>
-            <a:br>
-              <a:rPr lang="en-US" sz="1200" dirty="0">
-                <a:solidFill>
-                  <a:srgbClr val="002060"/>
-                </a:solidFill>
-                <a:latin typeface="Segoe UI" panose="020B0502040204020203" pitchFamily="34" charset="0"/>
-                <a:cs typeface="Segoe UI" panose="020B0502040204020203" pitchFamily="34" charset="0"/>
-              </a:rPr>
-            </a:br>
-            <a:r>
-              <a:rPr lang="en-US" sz="1200" dirty="0">
-                <a:solidFill>
-                  <a:srgbClr val="002060"/>
-                </a:solidFill>
-                <a:latin typeface="Segoe UI" panose="020B0502040204020203" pitchFamily="34" charset="0"/>
-                <a:cs typeface="Segoe UI" panose="020B0502040204020203" pitchFamily="34" charset="0"/>
-              </a:rPr>
-              <a:t>A public object detection dataset featuring 12 vehicle classes (e.g., car, bus, truck types). Originally created by </a:t>
-            </a:r>
-            <a:r>
-              <a:rPr lang="en-US" sz="1200" dirty="0" err="1">
-                <a:solidFill>
-                  <a:srgbClr val="002060"/>
-                </a:solidFill>
-                <a:latin typeface="Segoe UI" panose="020B0502040204020203" pitchFamily="34" charset="0"/>
-                <a:cs typeface="Segoe UI" panose="020B0502040204020203" pitchFamily="34" charset="0"/>
-              </a:rPr>
-              <a:t>Yudha</a:t>
-            </a:r>
-            <a:r>
-              <a:rPr lang="en-US" sz="1200" dirty="0">
-                <a:solidFill>
-                  <a:srgbClr val="002060"/>
-                </a:solidFill>
-                <a:latin typeface="Segoe UI" panose="020B0502040204020203" pitchFamily="34" charset="0"/>
-                <a:cs typeface="Segoe UI" panose="020B0502040204020203" pitchFamily="34" charset="0"/>
-              </a:rPr>
-              <a:t> Bhakti </a:t>
-            </a:r>
-            <a:r>
-              <a:rPr lang="en-US" sz="1200" dirty="0" err="1">
-                <a:solidFill>
-                  <a:srgbClr val="002060"/>
-                </a:solidFill>
-                <a:latin typeface="Segoe UI" panose="020B0502040204020203" pitchFamily="34" charset="0"/>
-                <a:cs typeface="Segoe UI" panose="020B0502040204020203" pitchFamily="34" charset="0"/>
-              </a:rPr>
-              <a:t>Nugraha</a:t>
-            </a:r>
-            <a:r>
-              <a:rPr lang="en-US" sz="1200" dirty="0">
-                <a:solidFill>
-                  <a:srgbClr val="002060"/>
-                </a:solidFill>
-                <a:latin typeface="Segoe UI" panose="020B0502040204020203" pitchFamily="34" charset="0"/>
-                <a:cs typeface="Segoe UI" panose="020B0502040204020203" pitchFamily="34" charset="0"/>
-              </a:rPr>
-              <a:t> and Kris, it’s part of the RF100 benchmark, sponsored by Intel to promote model generalizability</a:t>
             </a:r>
           </a:p>
         </p:txBody>
@@ -12120,7 +11877,7 @@
         </p:spPr>
         <p:txBody>
           <a:bodyPr vert="horz" lIns="91440" tIns="45720" rIns="91440" bIns="45720" rtlCol="0" anchor="ctr">
-            <a:normAutofit fontScale="90000" lnSpcReduction="20000"/>
+            <a:noAutofit/>
           </a:bodyPr>
           <a:lstStyle>
             <a:lvl1pPr algn="l" defTabSz="914400" rtl="0" eaLnBrk="1" latinLnBrk="0" hangingPunct="1">
@@ -12143,7 +11900,7 @@
           </a:lstStyle>
           <a:p>
             <a:r>
-              <a:rPr lang="en-US" sz="3300" b="1" dirty="0">
+              <a:rPr lang="en-US" sz="2700" b="1" dirty="0">
                 <a:solidFill>
                   <a:srgbClr val="002060"/>
                 </a:solidFill>
@@ -12153,7 +11910,7 @@
               <a:t>Results and Performance Analysis</a:t>
             </a:r>
             <a:br>
-              <a:rPr lang="en-US" sz="1000" b="1" dirty="0">
+              <a:rPr lang="en-US" sz="2700" b="1" dirty="0">
                 <a:solidFill>
                   <a:srgbClr val="002060"/>
                 </a:solidFill>
@@ -12161,7 +11918,7 @@
                 <a:cs typeface="Arial" panose="020B0604020202020204" pitchFamily="34" charset="0"/>
               </a:rPr>
             </a:br>
-            <a:endParaRPr lang="en-US" sz="2000" b="1" dirty="0">
+            <a:endParaRPr lang="en-US" sz="2700" b="1" dirty="0">
               <a:solidFill>
                 <a:srgbClr val="002060"/>
               </a:solidFill>
@@ -12196,7 +11953,7 @@
         </p:blipFill>
         <p:spPr>
           <a:xfrm>
-            <a:off x="2375154" y="3663330"/>
+            <a:off x="1853946" y="3727338"/>
             <a:ext cx="7145737" cy="1685919"/>
           </a:xfrm>
           <a:prstGeom prst="rect">
@@ -12220,7 +11977,7 @@
         </p:nvCxnSpPr>
         <p:spPr>
           <a:xfrm>
-            <a:off x="2130564" y="3178826"/>
+            <a:off x="1609356" y="3242834"/>
             <a:ext cx="0" cy="2170423"/>
           </a:xfrm>
           <a:prstGeom prst="line">
@@ -12261,7 +12018,7 @@
         </p:nvSpPr>
         <p:spPr>
           <a:xfrm>
-            <a:off x="2375154" y="3178826"/>
+            <a:off x="1853946" y="3242834"/>
             <a:ext cx="6096000" cy="369332"/>
           </a:xfrm>
           <a:prstGeom prst="rect">
@@ -12302,7 +12059,7 @@
         </p:nvSpPr>
         <p:spPr>
           <a:xfrm>
-            <a:off x="2319736" y="1293140"/>
+            <a:off x="1798528" y="1357148"/>
             <a:ext cx="1529392" cy="1478223"/>
           </a:xfrm>
           <a:prstGeom prst="rect">
@@ -12356,7 +12113,7 @@
         </p:nvSpPr>
         <p:spPr>
           <a:xfrm>
-            <a:off x="2461420" y="2332801"/>
+            <a:off x="1940212" y="2396809"/>
             <a:ext cx="1264806" cy="300209"/>
           </a:xfrm>
           <a:prstGeom prst="roundRect">
@@ -12408,7 +12165,7 @@
         </p:nvSpPr>
         <p:spPr>
           <a:xfrm>
-            <a:off x="4115129" y="1293140"/>
+            <a:off x="3593921" y="1357148"/>
             <a:ext cx="1529392" cy="1478223"/>
           </a:xfrm>
           <a:prstGeom prst="rect">
@@ -12462,7 +12219,7 @@
         </p:nvSpPr>
         <p:spPr>
           <a:xfrm>
-            <a:off x="4256813" y="2332801"/>
+            <a:off x="3735605" y="2396809"/>
             <a:ext cx="1264806" cy="300209"/>
           </a:xfrm>
           <a:prstGeom prst="roundRect">
@@ -12514,7 +12271,7 @@
         </p:nvSpPr>
         <p:spPr>
           <a:xfrm>
-            <a:off x="5918819" y="1293140"/>
+            <a:off x="5397611" y="1357148"/>
             <a:ext cx="1529392" cy="1478223"/>
           </a:xfrm>
           <a:prstGeom prst="rect">
@@ -12568,7 +12325,7 @@
         </p:nvSpPr>
         <p:spPr>
           <a:xfrm>
-            <a:off x="5989661" y="2332801"/>
+            <a:off x="5468453" y="2396809"/>
             <a:ext cx="1387708" cy="300209"/>
           </a:xfrm>
           <a:prstGeom prst="roundRect">
@@ -12620,7 +12377,7 @@
         </p:nvSpPr>
         <p:spPr>
           <a:xfrm>
-            <a:off x="7706781" y="1293140"/>
+            <a:off x="7185573" y="1357148"/>
             <a:ext cx="1529392" cy="1478223"/>
           </a:xfrm>
           <a:prstGeom prst="rect">
@@ -12674,7 +12431,7 @@
         </p:nvSpPr>
         <p:spPr>
           <a:xfrm>
-            <a:off x="7848465" y="2332801"/>
+            <a:off x="7327257" y="2396809"/>
             <a:ext cx="1264806" cy="300209"/>
           </a:xfrm>
           <a:prstGeom prst="roundRect">
@@ -12726,7 +12483,7 @@
         </p:nvSpPr>
         <p:spPr>
           <a:xfrm>
-            <a:off x="2595128" y="1416686"/>
+            <a:off x="2073920" y="1480694"/>
             <a:ext cx="997389" cy="415498"/>
           </a:xfrm>
           <a:prstGeom prst="rect">
@@ -12765,7 +12522,7 @@
         </p:nvSpPr>
         <p:spPr>
           <a:xfrm>
-            <a:off x="4390521" y="1416686"/>
+            <a:off x="3869313" y="1480694"/>
             <a:ext cx="861133" cy="415498"/>
           </a:xfrm>
           <a:prstGeom prst="rect">
@@ -12804,7 +12561,7 @@
         </p:nvSpPr>
         <p:spPr>
           <a:xfrm>
-            <a:off x="6321293" y="1416686"/>
+            <a:off x="5800085" y="1480694"/>
             <a:ext cx="591829" cy="415498"/>
           </a:xfrm>
           <a:prstGeom prst="rect">
@@ -12843,7 +12600,7 @@
         </p:nvSpPr>
         <p:spPr>
           <a:xfrm>
-            <a:off x="8059117" y="1444441"/>
+            <a:off x="7537909" y="1508449"/>
             <a:ext cx="843501" cy="415498"/>
           </a:xfrm>
           <a:prstGeom prst="rect">
@@ -12882,7 +12639,7 @@
         </p:nvSpPr>
         <p:spPr>
           <a:xfrm>
-            <a:off x="2485920" y="1874767"/>
+            <a:off x="1964712" y="1938775"/>
             <a:ext cx="1240306" cy="369332"/>
           </a:xfrm>
           <a:prstGeom prst="rect">
@@ -12923,7 +12680,7 @@
         </p:nvSpPr>
         <p:spPr>
           <a:xfrm>
-            <a:off x="4301214" y="1910129"/>
+            <a:off x="3780006" y="1974137"/>
             <a:ext cx="1240306" cy="230832"/>
           </a:xfrm>
           <a:prstGeom prst="rect">
@@ -12958,7 +12715,7 @@
         </p:nvSpPr>
         <p:spPr>
           <a:xfrm>
-            <a:off x="6215531" y="1944017"/>
+            <a:off x="5694323" y="2008025"/>
             <a:ext cx="1240306" cy="230832"/>
           </a:xfrm>
           <a:prstGeom prst="rect">
@@ -12993,7 +12750,7 @@
         </p:nvSpPr>
         <p:spPr>
           <a:xfrm>
-            <a:off x="8125176" y="1895824"/>
+            <a:off x="7603968" y="1959832"/>
             <a:ext cx="1240306" cy="230832"/>
           </a:xfrm>
           <a:prstGeom prst="rect">
@@ -13320,7 +13077,7 @@
         </p:nvSpPr>
         <p:spPr>
           <a:xfrm>
-            <a:off x="838200" y="365126"/>
+            <a:off x="838200" y="659111"/>
             <a:ext cx="10515600" cy="638922"/>
           </a:xfrm>
           <a:prstGeom prst="rect">
@@ -13329,7 +13086,7 @@
         </p:spPr>
         <p:txBody>
           <a:bodyPr vert="horz" lIns="91440" tIns="45720" rIns="91440" bIns="45720" rtlCol="0" anchor="ctr">
-            <a:normAutofit fontScale="45000" lnSpcReduction="20000"/>
+            <a:noAutofit/>
           </a:bodyPr>
           <a:lstStyle>
             <a:lvl1pPr algn="l" defTabSz="914400" rtl="0" eaLnBrk="1" latinLnBrk="0" hangingPunct="1">
@@ -13352,7 +13109,7 @@
           </a:lstStyle>
           <a:p>
             <a:r>
-              <a:rPr lang="en-US" sz="5100" b="1" dirty="0">
+              <a:rPr lang="en-US" sz="2700" b="1" dirty="0">
                 <a:solidFill>
                   <a:srgbClr val="002060"/>
                 </a:solidFill>
@@ -13363,7 +13120,7 @@
             </a:r>
           </a:p>
           <a:p>
-            <a:endParaRPr lang="en-US" sz="2800" b="1" dirty="0">
+            <a:endParaRPr lang="en-US" sz="2700" b="1" dirty="0">
               <a:solidFill>
                 <a:srgbClr val="002060"/>
               </a:solidFill>
@@ -13373,7 +13130,7 @@
           </a:p>
           <a:p>
             <a:br>
-              <a:rPr lang="en-US" sz="1000" b="1" dirty="0">
+              <a:rPr lang="en-US" sz="2700" b="1" dirty="0">
                 <a:solidFill>
                   <a:srgbClr val="002060"/>
                 </a:solidFill>
@@ -13381,7 +13138,7 @@
                 <a:cs typeface="Arial" panose="020B0604020202020204" pitchFamily="34" charset="0"/>
               </a:rPr>
             </a:br>
-            <a:endParaRPr lang="en-US" sz="2000" b="1" dirty="0">
+            <a:endParaRPr lang="en-US" sz="2700" b="1" dirty="0">
               <a:solidFill>
                 <a:srgbClr val="002060"/>
               </a:solidFill>
@@ -14023,7 +13780,7 @@
           <a:lstStyle/>
           <a:p>
             <a:r>
-              <a:rPr lang="en-US" sz="2300" b="1" dirty="0">
+              <a:rPr lang="en-US" sz="2700" b="1" dirty="0">
                 <a:solidFill>
                   <a:srgbClr val="002060"/>
                 </a:solidFill>
@@ -14251,14 +14008,24 @@
           <a:lstStyle/>
           <a:p>
             <a:r>
-              <a:rPr lang="en-US" sz="2300" b="1" dirty="0">
+              <a:rPr lang="en-US" sz="2700" b="1" dirty="0">
                 <a:solidFill>
                   <a:srgbClr val="002060"/>
                 </a:solidFill>
                 <a:latin typeface="Arial" panose="020B0604020202020204" pitchFamily="34" charset="0"/>
                 <a:cs typeface="Arial" panose="020B0604020202020204" pitchFamily="34" charset="0"/>
               </a:rPr>
-              <a:t>Repository  </a:t>
+              <a:t>Repository</a:t>
+            </a:r>
+            <a:r>
+              <a:rPr lang="en-US" sz="2300" b="1" dirty="0">
+                <a:solidFill>
+                  <a:srgbClr val="002060"/>
+                </a:solidFill>
+                <a:latin typeface="Arial" panose="020B0604020202020204" pitchFamily="34" charset="0"/>
+                <a:cs typeface="Arial" panose="020B0604020202020204" pitchFamily="34" charset="0"/>
+              </a:rPr>
+              <a:t>  </a:t>
             </a:r>
           </a:p>
         </p:txBody>
@@ -14307,7 +14074,7 @@
         <p:spPr>
           <a:xfrm>
             <a:off x="838200" y="1227436"/>
-            <a:ext cx="10515600" cy="4801314"/>
+            <a:ext cx="10515600" cy="3970318"/>
           </a:xfrm>
           <a:prstGeom prst="rect">
             <a:avLst/>
@@ -14332,7 +14099,7 @@
             </a:r>
             <a:endParaRPr lang="en-US" dirty="0">
               <a:solidFill>
-                <a:srgbClr val="002060"/>
+                <a:srgbClr val="0563C1"/>
               </a:solidFill>
               <a:latin typeface="Segoe UI" panose="020B0502040204020203" pitchFamily="34" charset="0"/>
               <a:cs typeface="Segoe UI" panose="020B0502040204020203" pitchFamily="34" charset="0"/>
@@ -14436,17 +14203,10 @@
                 <a:latin typeface="Segoe UI" panose="020B0502040204020203" pitchFamily="34" charset="0"/>
                 <a:cs typeface="Segoe UI" panose="020B0502040204020203" pitchFamily="34" charset="0"/>
               </a:rPr>
-              <a:t>Dataset:</a:t>
-            </a:r>
-            <a:br>
-              <a:rPr lang="en-US" dirty="0">
-                <a:solidFill>
-                  <a:srgbClr val="002060"/>
-                </a:solidFill>
-                <a:latin typeface="Segoe UI" panose="020B0502040204020203" pitchFamily="34" charset="0"/>
-                <a:cs typeface="Segoe UI" panose="020B0502040204020203" pitchFamily="34" charset="0"/>
-              </a:rPr>
-            </a:br>
+              <a:t>Application:</a:t>
+            </a:r>
+          </a:p>
+          <a:p>
             <a:r>
               <a:rPr lang="en-US" dirty="0">
                 <a:solidFill>
@@ -14462,7 +14222,7 @@
                   </a:extLst>
                 </a:hlinkClick>
               </a:rPr>
-              <a:t>https://universe.roboflow.com/roboflow-100/vehicles-q0x2v</a:t>
+              <a:t>https://github.com/RajeshRamadas/highway-vehicle-tracker/tree/75d96c9aa849d52c155dc343237ff121f7ebbb99</a:t>
             </a:r>
             <a:endParaRPr lang="en-US" dirty="0">
               <a:solidFill>
@@ -14490,7 +14250,7 @@
                 <a:latin typeface="Segoe UI" panose="020B0502040204020203" pitchFamily="34" charset="0"/>
                 <a:cs typeface="Segoe UI" panose="020B0502040204020203" pitchFamily="34" charset="0"/>
               </a:rPr>
-              <a:t>Application:</a:t>
+              <a:t>Report &amp; Documentation </a:t>
             </a:r>
           </a:p>
           <a:p>
@@ -14502,53 +14262,6 @@
                 <a:latin typeface="Segoe UI" panose="020B0502040204020203" pitchFamily="34" charset="0"/>
                 <a:cs typeface="Segoe UI" panose="020B0502040204020203" pitchFamily="34" charset="0"/>
                 <a:hlinkClick r:id="rId5">
-                  <a:extLst>
-                    <a:ext uri="{A12FA001-AC4F-418D-AE19-62706E023703}">
-                      <ahyp:hlinkClr xmlns:ahyp="http://schemas.microsoft.com/office/drawing/2018/hyperlinkcolor" val="tx"/>
-                    </a:ext>
-                  </a:extLst>
-                </a:hlinkClick>
-              </a:rPr>
-              <a:t>https://github.com/RajeshRamadas/highway-vehicle-tracker/tree/75d96c9aa849d52c155dc343237ff121f7ebbb99</a:t>
-            </a:r>
-            <a:endParaRPr lang="en-US" dirty="0">
-              <a:solidFill>
-                <a:srgbClr val="002060"/>
-              </a:solidFill>
-              <a:latin typeface="Segoe UI" panose="020B0502040204020203" pitchFamily="34" charset="0"/>
-              <a:cs typeface="Segoe UI" panose="020B0502040204020203" pitchFamily="34" charset="0"/>
-            </a:endParaRPr>
-          </a:p>
-          <a:p>
-            <a:endParaRPr lang="en-US" dirty="0">
-              <a:solidFill>
-                <a:srgbClr val="002060"/>
-              </a:solidFill>
-              <a:latin typeface="Segoe UI" panose="020B0502040204020203" pitchFamily="34" charset="0"/>
-              <a:cs typeface="Segoe UI" panose="020B0502040204020203" pitchFamily="34" charset="0"/>
-            </a:endParaRPr>
-          </a:p>
-          <a:p>
-            <a:r>
-              <a:rPr lang="en-US" dirty="0">
-                <a:solidFill>
-                  <a:srgbClr val="002060"/>
-                </a:solidFill>
-                <a:latin typeface="Segoe UI" panose="020B0502040204020203" pitchFamily="34" charset="0"/>
-                <a:cs typeface="Segoe UI" panose="020B0502040204020203" pitchFamily="34" charset="0"/>
-              </a:rPr>
-              <a:t>Report &amp; Documentation </a:t>
-            </a:r>
-          </a:p>
-          <a:p>
-            <a:r>
-              <a:rPr lang="en-US" dirty="0">
-                <a:solidFill>
-                  <a:srgbClr val="002060"/>
-                </a:solidFill>
-                <a:latin typeface="Segoe UI" panose="020B0502040204020203" pitchFamily="34" charset="0"/>
-                <a:cs typeface="Segoe UI" panose="020B0502040204020203" pitchFamily="34" charset="0"/>
-                <a:hlinkClick r:id="rId6">
                   <a:extLst>
                     <a:ext uri="{A12FA001-AC4F-418D-AE19-62706E023703}">
                       <ahyp:hlinkClr xmlns:ahyp="http://schemas.microsoft.com/office/drawing/2018/hyperlinkcolor" val="tx"/>
@@ -15416,7 +15129,7 @@
           </a:lstStyle>
           <a:p>
             <a:r>
-              <a:rPr lang="en-US" sz="3600" b="1" dirty="0">
+              <a:rPr lang="en-US" sz="2800" b="1" dirty="0">
                 <a:solidFill>
                   <a:srgbClr val="002060"/>
                 </a:solidFill>
@@ -15425,7 +15138,7 @@
               </a:rPr>
               <a:t>Agenda</a:t>
             </a:r>
-            <a:endParaRPr lang="en-US" sz="2000" b="1" dirty="0">
+            <a:endParaRPr lang="en-US" sz="2800" b="1" dirty="0">
               <a:solidFill>
                 <a:srgbClr val="002060"/>
               </a:solidFill>
@@ -15700,7 +15413,7 @@
         </p:spPr>
         <p:txBody>
           <a:bodyPr vert="horz" lIns="91440" tIns="45720" rIns="91440" bIns="45720" rtlCol="0" anchor="ctr">
-            <a:normAutofit fontScale="90000" lnSpcReduction="20000"/>
+            <a:noAutofit/>
           </a:bodyPr>
           <a:lstStyle>
             <a:lvl1pPr algn="l" defTabSz="914400" rtl="0" eaLnBrk="1" latinLnBrk="0" hangingPunct="1">
@@ -15723,7 +15436,7 @@
           </a:lstStyle>
           <a:p>
             <a:r>
-              <a:rPr lang="en-US" sz="3600" b="1" dirty="0">
+              <a:rPr lang="en-US" sz="2700" b="1" dirty="0">
                 <a:solidFill>
                   <a:srgbClr val="002060"/>
                 </a:solidFill>
@@ -15733,14 +15446,14 @@
               <a:t>Research Overview</a:t>
             </a:r>
             <a:br>
-              <a:rPr lang="en-US" sz="1000" b="1" dirty="0">
+              <a:rPr lang="en-US" sz="2700" b="1" dirty="0">
                 <a:solidFill>
                   <a:srgbClr val="002060"/>
                 </a:solidFill>
                 <a:latin typeface="+mn-lt"/>
               </a:rPr>
             </a:br>
-            <a:endParaRPr lang="en-US" sz="2000" b="1" dirty="0">
+            <a:endParaRPr lang="en-US" sz="2700" b="1" dirty="0">
               <a:solidFill>
                 <a:srgbClr val="002060"/>
               </a:solidFill>
@@ -16169,7 +15882,7 @@
         </p:spPr>
         <p:txBody>
           <a:bodyPr vert="horz" lIns="91440" tIns="45720" rIns="91440" bIns="45720" rtlCol="0" anchor="ctr">
-            <a:normAutofit fontScale="90000" lnSpcReduction="20000"/>
+            <a:noAutofit/>
           </a:bodyPr>
           <a:lstStyle>
             <a:lvl1pPr algn="l" defTabSz="914400" rtl="0" eaLnBrk="1" latinLnBrk="0" hangingPunct="1">
@@ -16192,7 +15905,7 @@
           </a:lstStyle>
           <a:p>
             <a:r>
-              <a:rPr lang="en-US" sz="3600" b="1" dirty="0">
+              <a:rPr lang="en-US" sz="2700" b="1" dirty="0">
                 <a:solidFill>
                   <a:srgbClr val="002060"/>
                 </a:solidFill>
@@ -16202,14 +15915,14 @@
               <a:t>Research Overview</a:t>
             </a:r>
             <a:br>
-              <a:rPr lang="en-US" sz="1000" b="1" dirty="0">
+              <a:rPr lang="en-US" sz="2700" b="1" dirty="0">
                 <a:solidFill>
                   <a:srgbClr val="002060"/>
                 </a:solidFill>
                 <a:latin typeface="+mn-lt"/>
               </a:rPr>
             </a:br>
-            <a:endParaRPr lang="en-US" sz="2000" b="1" dirty="0">
+            <a:endParaRPr lang="en-US" sz="2700" b="1" dirty="0">
               <a:solidFill>
                 <a:srgbClr val="002060"/>
               </a:solidFill>
@@ -19470,7 +19183,7 @@
           <a:p>
             <a:pPr algn="l"/>
             <a:r>
-              <a:rPr lang="en-US" sz="2800" b="1" dirty="0">
+              <a:rPr lang="en-US" sz="2700" b="1" dirty="0">
                 <a:solidFill>
                   <a:srgbClr val="002060"/>
                 </a:solidFill>
@@ -22550,7 +22263,7 @@
         </p:spPr>
         <p:txBody>
           <a:bodyPr vert="horz" lIns="91440" tIns="45720" rIns="91440" bIns="45720" rtlCol="0" anchor="ctr">
-            <a:normAutofit fontScale="82500" lnSpcReduction="20000"/>
+            <a:noAutofit/>
           </a:bodyPr>
           <a:lstStyle>
             <a:lvl1pPr algn="l" defTabSz="914400" rtl="0" eaLnBrk="1" latinLnBrk="0" hangingPunct="1">
@@ -22573,7 +22286,7 @@
           </a:lstStyle>
           <a:p>
             <a:r>
-              <a:rPr lang="en-US" sz="3600" b="1" dirty="0">
+              <a:rPr lang="en-US" sz="2700" b="1" dirty="0">
                 <a:solidFill>
                   <a:srgbClr val="002060"/>
                 </a:solidFill>
@@ -22583,14 +22296,14 @@
               <a:t>Knowledge Distillation: Temperature</a:t>
             </a:r>
             <a:br>
-              <a:rPr lang="en-US" sz="1000" b="1" dirty="0">
+              <a:rPr lang="en-US" sz="2700" b="1" dirty="0">
                 <a:solidFill>
                   <a:srgbClr val="002060"/>
                 </a:solidFill>
                 <a:latin typeface="+mn-lt"/>
               </a:rPr>
             </a:br>
-            <a:endParaRPr lang="en-US" sz="2000" b="1" dirty="0">
+            <a:endParaRPr lang="en-US" sz="2700" b="1" dirty="0">
               <a:solidFill>
                 <a:srgbClr val="002060"/>
               </a:solidFill>

--- a/01-Project-management/presentation/KnowledgeDistillation.pptx
+++ b/01-Project-management/presentation/KnowledgeDistillation.pptx
@@ -6,7 +6,7 @@
     <p:sldMasterId id="2147483660" r:id="rId2"/>
   </p:sldMasterIdLst>
   <p:notesMasterIdLst>
-    <p:notesMasterId r:id="rId27"/>
+    <p:notesMasterId r:id="rId30"/>
   </p:notesMasterIdLst>
   <p:sldIdLst>
     <p:sldId id="257" r:id="rId3"/>
@@ -21,18 +21,21 @@
     <p:sldId id="341" r:id="rId12"/>
     <p:sldId id="351" r:id="rId13"/>
     <p:sldId id="360" r:id="rId14"/>
-    <p:sldId id="358" r:id="rId15"/>
-    <p:sldId id="350" r:id="rId16"/>
-    <p:sldId id="329" r:id="rId17"/>
-    <p:sldId id="355" r:id="rId18"/>
-    <p:sldId id="353" r:id="rId19"/>
-    <p:sldId id="356" r:id="rId20"/>
-    <p:sldId id="357" r:id="rId21"/>
-    <p:sldId id="354" r:id="rId22"/>
-    <p:sldId id="352" r:id="rId23"/>
-    <p:sldId id="343" r:id="rId24"/>
-    <p:sldId id="344" r:id="rId25"/>
-    <p:sldId id="321" r:id="rId26"/>
+    <p:sldId id="362" r:id="rId15"/>
+    <p:sldId id="364" r:id="rId16"/>
+    <p:sldId id="358" r:id="rId17"/>
+    <p:sldId id="361" r:id="rId18"/>
+    <p:sldId id="350" r:id="rId19"/>
+    <p:sldId id="329" r:id="rId20"/>
+    <p:sldId id="355" r:id="rId21"/>
+    <p:sldId id="353" r:id="rId22"/>
+    <p:sldId id="356" r:id="rId23"/>
+    <p:sldId id="357" r:id="rId24"/>
+    <p:sldId id="354" r:id="rId25"/>
+    <p:sldId id="352" r:id="rId26"/>
+    <p:sldId id="343" r:id="rId27"/>
+    <p:sldId id="344" r:id="rId28"/>
+    <p:sldId id="321" r:id="rId29"/>
   </p:sldIdLst>
   <p:sldSz cx="12192000" cy="6858000"/>
   <p:notesSz cx="6858000" cy="9144000"/>
@@ -221,7 +224,7 @@
           <a:p>
             <a:fld id="{B5F2714E-FC32-4294-838A-7AA012D11B30}" type="datetimeFigureOut">
               <a:rPr lang="en-US" smtClean="0"/>
-              <a:t>5/31/2025</a:t>
+              <a:t>6/1/2025</a:t>
             </a:fld>
             <a:endParaRPr lang="en-US"/>
           </a:p>
@@ -719,7 +722,7 @@
           <a:p>
             <a:fld id="{A043E7FB-59A9-40D8-AE84-673056C5A732}" type="datetimeFigureOut">
               <a:rPr lang="en-US" smtClean="0"/>
-              <a:t>5/31/2025</a:t>
+              <a:t>6/1/2025</a:t>
             </a:fld>
             <a:endParaRPr lang="en-US"/>
           </a:p>
@@ -917,7 +920,7 @@
           <a:p>
             <a:fld id="{A043E7FB-59A9-40D8-AE84-673056C5A732}" type="datetimeFigureOut">
               <a:rPr lang="en-US" smtClean="0"/>
-              <a:t>5/31/2025</a:t>
+              <a:t>6/1/2025</a:t>
             </a:fld>
             <a:endParaRPr lang="en-US"/>
           </a:p>
@@ -1125,7 +1128,7 @@
           <a:p>
             <a:fld id="{A043E7FB-59A9-40D8-AE84-673056C5A732}" type="datetimeFigureOut">
               <a:rPr lang="en-US" smtClean="0"/>
-              <a:t>5/31/2025</a:t>
+              <a:t>6/1/2025</a:t>
             </a:fld>
             <a:endParaRPr lang="en-US"/>
           </a:p>
@@ -3274,7 +3277,7 @@
           <a:p>
             <a:fld id="{A043E7FB-59A9-40D8-AE84-673056C5A732}" type="datetimeFigureOut">
               <a:rPr lang="en-US" smtClean="0"/>
-              <a:t>5/31/2025</a:t>
+              <a:t>6/1/2025</a:t>
             </a:fld>
             <a:endParaRPr lang="en-US"/>
           </a:p>
@@ -4631,7 +4634,7 @@
           <a:p>
             <a:fld id="{A043E7FB-59A9-40D8-AE84-673056C5A732}" type="datetimeFigureOut">
               <a:rPr lang="en-US" smtClean="0"/>
-              <a:t>5/31/2025</a:t>
+              <a:t>6/1/2025</a:t>
             </a:fld>
             <a:endParaRPr lang="en-US"/>
           </a:p>
@@ -4896,7 +4899,7 @@
           <a:p>
             <a:fld id="{A043E7FB-59A9-40D8-AE84-673056C5A732}" type="datetimeFigureOut">
               <a:rPr lang="en-US" smtClean="0"/>
-              <a:t>5/31/2025</a:t>
+              <a:t>6/1/2025</a:t>
             </a:fld>
             <a:endParaRPr lang="en-US"/>
           </a:p>
@@ -5308,7 +5311,7 @@
           <a:p>
             <a:fld id="{A043E7FB-59A9-40D8-AE84-673056C5A732}" type="datetimeFigureOut">
               <a:rPr lang="en-US" smtClean="0"/>
-              <a:t>5/31/2025</a:t>
+              <a:t>6/1/2025</a:t>
             </a:fld>
             <a:endParaRPr lang="en-US"/>
           </a:p>
@@ -5449,7 +5452,7 @@
           <a:p>
             <a:fld id="{A043E7FB-59A9-40D8-AE84-673056C5A732}" type="datetimeFigureOut">
               <a:rPr lang="en-US" smtClean="0"/>
-              <a:t>5/31/2025</a:t>
+              <a:t>6/1/2025</a:t>
             </a:fld>
             <a:endParaRPr lang="en-US"/>
           </a:p>
@@ -5562,7 +5565,7 @@
           <a:p>
             <a:fld id="{A043E7FB-59A9-40D8-AE84-673056C5A732}" type="datetimeFigureOut">
               <a:rPr lang="en-US" smtClean="0"/>
-              <a:t>5/31/2025</a:t>
+              <a:t>6/1/2025</a:t>
             </a:fld>
             <a:endParaRPr lang="en-US"/>
           </a:p>
@@ -5873,7 +5876,7 @@
           <a:p>
             <a:fld id="{A043E7FB-59A9-40D8-AE84-673056C5A732}" type="datetimeFigureOut">
               <a:rPr lang="en-US" smtClean="0"/>
-              <a:t>5/31/2025</a:t>
+              <a:t>6/1/2025</a:t>
             </a:fld>
             <a:endParaRPr lang="en-US"/>
           </a:p>
@@ -6161,7 +6164,7 @@
           <a:p>
             <a:fld id="{A043E7FB-59A9-40D8-AE84-673056C5A732}" type="datetimeFigureOut">
               <a:rPr lang="en-US" smtClean="0"/>
-              <a:t>5/31/2025</a:t>
+              <a:t>6/1/2025</a:t>
             </a:fld>
             <a:endParaRPr lang="en-US"/>
           </a:p>
@@ -6402,7 +6405,7 @@
           <a:p>
             <a:fld id="{A043E7FB-59A9-40D8-AE84-673056C5A732}" type="datetimeFigureOut">
               <a:rPr lang="en-US" smtClean="0"/>
-              <a:t>5/31/2025</a:t>
+              <a:t>6/1/2025</a:t>
             </a:fld>
             <a:endParaRPr lang="en-US"/>
           </a:p>
@@ -10597,10 +10600,10 @@
       </p:sp>
       <p:sp>
         <p:nvSpPr>
-          <p:cNvPr id="58" name="TextBox 57">
-            <a:extLst>
-              <a:ext uri="{FF2B5EF4-FFF2-40B4-BE49-F238E27FC236}">
-                <a16:creationId xmlns:a16="http://schemas.microsoft.com/office/drawing/2014/main" id="{0401FB76-2118-8BCA-3D04-04C39561FB88}"/>
+          <p:cNvPr id="64" name="TextBox 63">
+            <a:extLst>
+              <a:ext uri="{FF2B5EF4-FFF2-40B4-BE49-F238E27FC236}">
+                <a16:creationId xmlns:a16="http://schemas.microsoft.com/office/drawing/2014/main" id="{878169EC-45E8-1FB0-195D-73972330D8BE}"/>
               </a:ext>
             </a:extLst>
           </p:cNvPr>
@@ -10609,8 +10612,8 @@
         </p:nvSpPr>
         <p:spPr>
           <a:xfrm>
-            <a:off x="6096000" y="1039398"/>
-            <a:ext cx="6096000" cy="369332"/>
+            <a:off x="6353526" y="970529"/>
+            <a:ext cx="2987001" cy="369332"/>
           </a:xfrm>
           <a:prstGeom prst="rect">
             <a:avLst/>
@@ -10629,45 +10632,6 @@
                   <a:srgbClr val="002060"/>
                 </a:solidFill>
               </a:rPr>
-              <a:t>Dataset Processing Results</a:t>
-            </a:r>
-          </a:p>
-        </p:txBody>
-      </p:sp>
-      <p:sp>
-        <p:nvSpPr>
-          <p:cNvPr id="64" name="TextBox 63">
-            <a:extLst>
-              <a:ext uri="{FF2B5EF4-FFF2-40B4-BE49-F238E27FC236}">
-                <a16:creationId xmlns:a16="http://schemas.microsoft.com/office/drawing/2014/main" id="{878169EC-45E8-1FB0-195D-73972330D8BE}"/>
-              </a:ext>
-            </a:extLst>
-          </p:cNvPr>
-          <p:cNvSpPr txBox="1"/>
-          <p:nvPr/>
-        </p:nvSpPr>
-        <p:spPr>
-          <a:xfrm>
-            <a:off x="6135282" y="3067410"/>
-            <a:ext cx="2987001" cy="369332"/>
-          </a:xfrm>
-          <a:prstGeom prst="rect">
-            <a:avLst/>
-          </a:prstGeom>
-          <a:noFill/>
-        </p:spPr>
-        <p:txBody>
-          <a:bodyPr wrap="square">
-            <a:spAutoFit/>
-          </a:bodyPr>
-          <a:lstStyle/>
-          <a:p>
-            <a:r>
-              <a:rPr lang="en-US" b="1" dirty="0">
-                <a:solidFill>
-                  <a:srgbClr val="002060"/>
-                </a:solidFill>
-              </a:rPr>
               <a:t>Technology Stack</a:t>
             </a:r>
           </a:p>
@@ -10675,10 +10639,10 @@
       </p:sp>
       <p:cxnSp>
         <p:nvCxnSpPr>
-          <p:cNvPr id="65" name="Straight Connector 64">
-            <a:extLst>
-              <a:ext uri="{FF2B5EF4-FFF2-40B4-BE49-F238E27FC236}">
-                <a16:creationId xmlns:a16="http://schemas.microsoft.com/office/drawing/2014/main" id="{C2877416-5CDF-FE25-F988-B97E4C3B7250}"/>
+          <p:cNvPr id="66" name="Straight Connector 65">
+            <a:extLst>
+              <a:ext uri="{FF2B5EF4-FFF2-40B4-BE49-F238E27FC236}">
+                <a16:creationId xmlns:a16="http://schemas.microsoft.com/office/drawing/2014/main" id="{3EBB97F5-F944-8420-98BD-A932EFE518D7}"/>
               </a:ext>
             </a:extLst>
           </p:cNvPr>
@@ -10689,8 +10653,8 @@
         </p:nvCxnSpPr>
         <p:spPr>
           <a:xfrm>
-            <a:off x="6056719" y="1082855"/>
-            <a:ext cx="0" cy="1943194"/>
+            <a:off x="6274963" y="1018044"/>
+            <a:ext cx="0" cy="1317905"/>
           </a:xfrm>
           <a:prstGeom prst="line">
             <a:avLst/>
@@ -10716,49 +10680,6 @@
           </a:fontRef>
         </p:style>
       </p:cxnSp>
-      <p:cxnSp>
-        <p:nvCxnSpPr>
-          <p:cNvPr id="66" name="Straight Connector 65">
-            <a:extLst>
-              <a:ext uri="{FF2B5EF4-FFF2-40B4-BE49-F238E27FC236}">
-                <a16:creationId xmlns:a16="http://schemas.microsoft.com/office/drawing/2014/main" id="{3EBB97F5-F944-8420-98BD-A932EFE518D7}"/>
-              </a:ext>
-            </a:extLst>
-          </p:cNvPr>
-          <p:cNvCxnSpPr>
-            <a:cxnSpLocks/>
-          </p:cNvCxnSpPr>
-          <p:nvPr/>
-        </p:nvCxnSpPr>
-        <p:spPr>
-          <a:xfrm>
-            <a:off x="6056719" y="3114925"/>
-            <a:ext cx="0" cy="1317905"/>
-          </a:xfrm>
-          <a:prstGeom prst="line">
-            <a:avLst/>
-          </a:prstGeom>
-          <a:ln w="73025">
-            <a:solidFill>
-              <a:srgbClr val="002060"/>
-            </a:solidFill>
-          </a:ln>
-        </p:spPr>
-        <p:style>
-          <a:lnRef idx="1">
-            <a:schemeClr val="accent1"/>
-          </a:lnRef>
-          <a:fillRef idx="0">
-            <a:schemeClr val="accent1"/>
-          </a:fillRef>
-          <a:effectRef idx="0">
-            <a:schemeClr val="accent1"/>
-          </a:effectRef>
-          <a:fontRef idx="minor">
-            <a:schemeClr val="tx1"/>
-          </a:fontRef>
-        </p:style>
-      </p:cxnSp>
       <p:sp>
         <p:nvSpPr>
           <p:cNvPr id="68" name="TextBox 67">
@@ -10773,7 +10694,7 @@
         </p:nvSpPr>
         <p:spPr>
           <a:xfrm>
-            <a:off x="6188419" y="3436742"/>
+            <a:off x="6406663" y="1339861"/>
             <a:ext cx="3609080" cy="830997"/>
           </a:xfrm>
           <a:prstGeom prst="rect">
@@ -10848,115 +10769,6 @@
                 <a:cs typeface="Segoe UI" panose="020B0502040204020203" pitchFamily="34" charset="0"/>
               </a:rPr>
               <a:t>Source Control: Git/GitHub with version control</a:t>
-            </a:r>
-          </a:p>
-        </p:txBody>
-      </p:sp>
-      <p:sp>
-        <p:nvSpPr>
-          <p:cNvPr id="71" name="TextBox 70">
-            <a:extLst>
-              <a:ext uri="{FF2B5EF4-FFF2-40B4-BE49-F238E27FC236}">
-                <a16:creationId xmlns:a16="http://schemas.microsoft.com/office/drawing/2014/main" id="{0C4AD157-2A94-028F-9FE8-ADAECFF5A683}"/>
-              </a:ext>
-            </a:extLst>
-          </p:cNvPr>
-          <p:cNvSpPr txBox="1"/>
-          <p:nvPr/>
-        </p:nvSpPr>
-        <p:spPr>
-          <a:xfrm>
-            <a:off x="6160603" y="1456278"/>
-            <a:ext cx="3230444" cy="1384995"/>
-          </a:xfrm>
-          <a:prstGeom prst="rect">
-            <a:avLst/>
-          </a:prstGeom>
-          <a:noFill/>
-        </p:spPr>
-        <p:txBody>
-          <a:bodyPr wrap="square">
-            <a:spAutoFit/>
-          </a:bodyPr>
-          <a:lstStyle/>
-          <a:p>
-            <a:pPr marL="171450" indent="-171450">
-              <a:buFont typeface="Arial" panose="020B0604020202020204" pitchFamily="34" charset="0"/>
-              <a:buChar char="•"/>
-            </a:pPr>
-            <a:r>
-              <a:rPr lang="en-US" sz="1200" dirty="0">
-                <a:solidFill>
-                  <a:srgbClr val="002060"/>
-                </a:solidFill>
-                <a:latin typeface="Segoe UI" panose="020B0502040204020203" pitchFamily="34" charset="0"/>
-                <a:cs typeface="Segoe UI" panose="020B0502040204020203" pitchFamily="34" charset="0"/>
-              </a:rPr>
-              <a:t>Original training images: 2,634</a:t>
-            </a:r>
-          </a:p>
-          <a:p>
-            <a:pPr marL="171450" indent="-171450">
-              <a:buFont typeface="Arial" panose="020B0604020202020204" pitchFamily="34" charset="0"/>
-              <a:buChar char="•"/>
-            </a:pPr>
-            <a:r>
-              <a:rPr lang="en-US" sz="1200" dirty="0">
-                <a:solidFill>
-                  <a:srgbClr val="002060"/>
-                </a:solidFill>
-                <a:latin typeface="Segoe UI" panose="020B0502040204020203" pitchFamily="34" charset="0"/>
-                <a:cs typeface="Segoe UI" panose="020B0502040204020203" pitchFamily="34" charset="0"/>
-              </a:rPr>
-              <a:t>Augmented images generated: 27,260</a:t>
-            </a:r>
-          </a:p>
-          <a:p>
-            <a:pPr marL="171450" indent="-171450">
-              <a:buFont typeface="Arial" panose="020B0604020202020204" pitchFamily="34" charset="0"/>
-              <a:buChar char="•"/>
-            </a:pPr>
-            <a:r>
-              <a:rPr lang="en-US" sz="1200" dirty="0">
-                <a:solidFill>
-                  <a:srgbClr val="002060"/>
-                </a:solidFill>
-                <a:latin typeface="Segoe UI" panose="020B0502040204020203" pitchFamily="34" charset="0"/>
-                <a:cs typeface="Segoe UI" panose="020B0502040204020203" pitchFamily="34" charset="0"/>
-              </a:rPr>
-              <a:t>Final training set size: 29,894</a:t>
-            </a:r>
-          </a:p>
-          <a:p>
-            <a:pPr marL="171450" indent="-171450">
-              <a:buFont typeface="Arial" panose="020B0604020202020204" pitchFamily="34" charset="0"/>
-              <a:buChar char="•"/>
-            </a:pPr>
-            <a:r>
-              <a:rPr lang="en-US" sz="1200" dirty="0">
-                <a:solidFill>
-                  <a:srgbClr val="002060"/>
-                </a:solidFill>
-                <a:latin typeface="Segoe UI" panose="020B0502040204020203" pitchFamily="34" charset="0"/>
-                <a:cs typeface="Segoe UI" panose="020B0502040204020203" pitchFamily="34" charset="0"/>
-              </a:rPr>
-              <a:t>Class balance improvement: Disparity reduced from 15-20% to 3-5%</a:t>
-            </a:r>
-          </a:p>
-          <a:p>
-            <a:pPr marL="171450" indent="-171450">
-              <a:buFont typeface="Arial" panose="020B0604020202020204" pitchFamily="34" charset="0"/>
-              <a:buChar char="•"/>
-            </a:pPr>
-            <a:r>
-              <a:rPr lang="en-US" sz="1200" dirty="0">
-                <a:solidFill>
-                  <a:srgbClr val="002060"/>
-                </a:solidFill>
-                <a:latin typeface="Segoe UI" panose="020B0502040204020203" pitchFamily="34" charset="0"/>
-                <a:cs typeface="Segoe UI" panose="020B0502040204020203" pitchFamily="34" charset="0"/>
-              </a:rPr>
-              <a:t>mAP@50 improvement: From 0.43 to 0.97 with same training configuration</a:t>
             </a:r>
           </a:p>
         </p:txBody>
@@ -11417,116 +11229,8 @@
         </p:blipFill>
         <p:spPr>
           <a:xfrm>
-            <a:off x="962025" y="2526314"/>
-            <a:ext cx="6482141" cy="1451729"/>
-          </a:xfrm>
-          <a:prstGeom prst="rect">
-            <a:avLst/>
-          </a:prstGeom>
-        </p:spPr>
-      </p:pic>
-      <p:pic>
-        <p:nvPicPr>
-          <p:cNvPr id="10" name="Picture 9" descr="A traffic jam on a road&#10;&#10;AI-generated content may be incorrect.">
-            <a:extLst>
-              <a:ext uri="{FF2B5EF4-FFF2-40B4-BE49-F238E27FC236}">
-                <a16:creationId xmlns:a16="http://schemas.microsoft.com/office/drawing/2014/main" id="{22BB86AC-257C-70A6-5122-36CE6A3FDC0A}"/>
-              </a:ext>
-            </a:extLst>
-          </p:cNvPr>
-          <p:cNvPicPr>
-            <a:picLocks noChangeAspect="1"/>
-          </p:cNvPicPr>
-          <p:nvPr/>
-        </p:nvPicPr>
-        <p:blipFill>
-          <a:blip r:embed="rId3">
-            <a:extLst>
-              <a:ext uri="{28A0092B-C50C-407E-A947-70E740481C1C}">
-                <a14:useLocalDpi xmlns:a14="http://schemas.microsoft.com/office/drawing/2010/main" val="0"/>
-              </a:ext>
-            </a:extLst>
-          </a:blip>
-          <a:stretch>
-            <a:fillRect/>
-          </a:stretch>
-        </p:blipFill>
-        <p:spPr>
-          <a:xfrm>
-            <a:off x="1028700" y="4456458"/>
-            <a:ext cx="1724238" cy="1293178"/>
-          </a:xfrm>
-          <a:prstGeom prst="rect">
-            <a:avLst/>
-          </a:prstGeom>
-        </p:spPr>
-      </p:pic>
-      <p:pic>
-        <p:nvPicPr>
-          <p:cNvPr id="12" name="Picture 11" descr="A traffic jam on a highway">
-            <a:extLst>
-              <a:ext uri="{FF2B5EF4-FFF2-40B4-BE49-F238E27FC236}">
-                <a16:creationId xmlns:a16="http://schemas.microsoft.com/office/drawing/2014/main" id="{3C4B4E74-5771-7940-EDBB-CEA676F1F130}"/>
-              </a:ext>
-            </a:extLst>
-          </p:cNvPr>
-          <p:cNvPicPr>
-            <a:picLocks noChangeAspect="1"/>
-          </p:cNvPicPr>
-          <p:nvPr/>
-        </p:nvPicPr>
-        <p:blipFill>
-          <a:blip r:embed="rId4">
-            <a:extLst>
-              <a:ext uri="{28A0092B-C50C-407E-A947-70E740481C1C}">
-                <a14:useLocalDpi xmlns:a14="http://schemas.microsoft.com/office/drawing/2010/main" val="0"/>
-              </a:ext>
-            </a:extLst>
-          </a:blip>
-          <a:stretch>
-            <a:fillRect/>
-          </a:stretch>
-        </p:blipFill>
-        <p:spPr>
-          <a:xfrm>
-            <a:off x="3410150" y="4430102"/>
-            <a:ext cx="1754124" cy="1315593"/>
-          </a:xfrm>
-          <a:prstGeom prst="rect">
-            <a:avLst/>
-          </a:prstGeom>
-        </p:spPr>
-      </p:pic>
-      <p:pic>
-        <p:nvPicPr>
-          <p:cNvPr id="19" name="Picture 18" descr="A traffic jam on a highway&#10;&#10;AI-generated content may be incorrect.">
-            <a:extLst>
-              <a:ext uri="{FF2B5EF4-FFF2-40B4-BE49-F238E27FC236}">
-                <a16:creationId xmlns:a16="http://schemas.microsoft.com/office/drawing/2014/main" id="{0F98BB8D-0896-B621-95AB-EBCF5B783356}"/>
-              </a:ext>
-            </a:extLst>
-          </p:cNvPr>
-          <p:cNvPicPr>
-            <a:picLocks noChangeAspect="1"/>
-          </p:cNvPicPr>
-          <p:nvPr/>
-        </p:nvPicPr>
-        <p:blipFill>
-          <a:blip r:embed="rId5">
-            <a:extLst>
-              <a:ext uri="{28A0092B-C50C-407E-A947-70E740481C1C}">
-                <a14:useLocalDpi xmlns:a14="http://schemas.microsoft.com/office/drawing/2010/main" val="0"/>
-              </a:ext>
-            </a:extLst>
-          </a:blip>
-          <a:stretch>
-            <a:fillRect/>
-          </a:stretch>
-        </p:blipFill>
-        <p:spPr>
-          <a:xfrm>
-            <a:off x="5756717" y="4445251"/>
-            <a:ext cx="1754124" cy="1315593"/>
+            <a:off x="1117473" y="3028710"/>
+            <a:ext cx="8948989" cy="2004200"/>
           </a:xfrm>
           <a:prstGeom prst="rect">
             <a:avLst/>
@@ -11767,34 +11471,15 @@
           </a:lstStyle>
           <a:p>
             <a:r>
-              <a:rPr lang="en-US" sz="2800" b="1" dirty="0">
+              <a:rPr lang="en-US" sz="2700" b="1" dirty="0">
                 <a:solidFill>
                   <a:srgbClr val="002060"/>
                 </a:solidFill>
                 <a:latin typeface="Arial" panose="020B0604020202020204" pitchFamily="34" charset="0"/>
                 <a:cs typeface="Arial" panose="020B0604020202020204" pitchFamily="34" charset="0"/>
               </a:rPr>
-              <a:t>Best Model Selection - </a:t>
-            </a:r>
-            <a:r>
-              <a:rPr lang="en-US" sz="2400" b="1" dirty="0">
-                <a:solidFill>
-                  <a:srgbClr val="002060"/>
-                </a:solidFill>
-                <a:latin typeface="Arial" panose="020B0604020202020204" pitchFamily="34" charset="0"/>
-                <a:cs typeface="Arial" panose="020B0604020202020204" pitchFamily="34" charset="0"/>
-              </a:rPr>
-              <a:t>Key Metrics </a:t>
-            </a:r>
-            <a:br>
-              <a:rPr lang="en-US" sz="2700" b="1" dirty="0">
-                <a:solidFill>
-                  <a:srgbClr val="002060"/>
-                </a:solidFill>
-                <a:latin typeface="Arial" panose="020B0604020202020204" pitchFamily="34" charset="0"/>
-                <a:cs typeface="Arial" panose="020B0604020202020204" pitchFamily="34" charset="0"/>
-              </a:rPr>
-            </a:br>
+              <a:t>Model Performance before Augmentation </a:t>
+            </a:r>
             <a:endParaRPr lang="en-US" sz="2700" b="1" dirty="0">
               <a:solidFill>
                 <a:srgbClr val="002060"/>
@@ -11811,7 +11496,7 @@
     </p:spTree>
     <p:extLst>
       <p:ext uri="{BB962C8B-B14F-4D97-AF65-F5344CB8AC3E}">
-        <p14:creationId xmlns:p14="http://schemas.microsoft.com/office/powerpoint/2010/main" val="1995856105"/>
+        <p14:creationId xmlns:p14="http://schemas.microsoft.com/office/powerpoint/2010/main" val="4042734659"/>
       </p:ext>
     </p:extLst>
   </p:cSld>
@@ -12042,24 +11727,15 @@
           </a:lstStyle>
           <a:p>
             <a:r>
-              <a:rPr lang="en-US" sz="2800" b="1" dirty="0">
+              <a:rPr lang="en-US" sz="2700" b="1" dirty="0">
                 <a:solidFill>
                   <a:srgbClr val="002060"/>
                 </a:solidFill>
                 <a:latin typeface="Arial" panose="020B0604020202020204" pitchFamily="34" charset="0"/>
                 <a:cs typeface="Arial" panose="020B0604020202020204" pitchFamily="34" charset="0"/>
               </a:rPr>
-              <a:t>YoloV8 Neural Architecture Search</a:t>
-            </a:r>
-            <a:br>
-              <a:rPr lang="en-US" sz="2700" b="1" dirty="0">
-                <a:solidFill>
-                  <a:srgbClr val="002060"/>
-                </a:solidFill>
-                <a:latin typeface="Arial" panose="020B0604020202020204" pitchFamily="34" charset="0"/>
-                <a:cs typeface="Arial" panose="020B0604020202020204" pitchFamily="34" charset="0"/>
-              </a:rPr>
-            </a:br>
+              <a:t>Augmentation Technique </a:t>
+            </a:r>
             <a:endParaRPr lang="en-US" sz="2700" b="1" dirty="0">
               <a:solidFill>
                 <a:srgbClr val="002060"/>
@@ -12073,10 +11749,1006 @@
           </a:p>
         </p:txBody>
       </p:sp>
+      <p:sp>
+        <p:nvSpPr>
+          <p:cNvPr id="58" name="TextBox 57">
+            <a:extLst>
+              <a:ext uri="{FF2B5EF4-FFF2-40B4-BE49-F238E27FC236}">
+                <a16:creationId xmlns:a16="http://schemas.microsoft.com/office/drawing/2014/main" id="{0401FB76-2118-8BCA-3D04-04C39561FB88}"/>
+              </a:ext>
+            </a:extLst>
+          </p:cNvPr>
+          <p:cNvSpPr txBox="1"/>
+          <p:nvPr/>
+        </p:nvSpPr>
+        <p:spPr>
+          <a:xfrm>
+            <a:off x="7518316" y="1494353"/>
+            <a:ext cx="2811780" cy="369332"/>
+          </a:xfrm>
+          <a:prstGeom prst="rect">
+            <a:avLst/>
+          </a:prstGeom>
+          <a:noFill/>
+        </p:spPr>
+        <p:txBody>
+          <a:bodyPr wrap="square">
+            <a:spAutoFit/>
+          </a:bodyPr>
+          <a:lstStyle/>
+          <a:p>
+            <a:r>
+              <a:rPr lang="en-US" b="1" dirty="0">
+                <a:solidFill>
+                  <a:srgbClr val="002060"/>
+                </a:solidFill>
+              </a:rPr>
+              <a:t>Dataset Processing Results</a:t>
+            </a:r>
+          </a:p>
+        </p:txBody>
+      </p:sp>
+      <p:cxnSp>
+        <p:nvCxnSpPr>
+          <p:cNvPr id="65" name="Straight Connector 64">
+            <a:extLst>
+              <a:ext uri="{FF2B5EF4-FFF2-40B4-BE49-F238E27FC236}">
+                <a16:creationId xmlns:a16="http://schemas.microsoft.com/office/drawing/2014/main" id="{C2877416-5CDF-FE25-F988-B97E4C3B7250}"/>
+              </a:ext>
+            </a:extLst>
+          </p:cNvPr>
+          <p:cNvCxnSpPr>
+            <a:cxnSpLocks/>
+          </p:cNvCxnSpPr>
+          <p:nvPr/>
+        </p:nvCxnSpPr>
+        <p:spPr>
+          <a:xfrm>
+            <a:off x="7479035" y="1537810"/>
+            <a:ext cx="0" cy="2127749"/>
+          </a:xfrm>
+          <a:prstGeom prst="line">
+            <a:avLst/>
+          </a:prstGeom>
+          <a:ln w="73025">
+            <a:solidFill>
+              <a:srgbClr val="002060"/>
+            </a:solidFill>
+          </a:ln>
+        </p:spPr>
+        <p:style>
+          <a:lnRef idx="1">
+            <a:schemeClr val="accent1"/>
+          </a:lnRef>
+          <a:fillRef idx="0">
+            <a:schemeClr val="accent1"/>
+          </a:fillRef>
+          <a:effectRef idx="0">
+            <a:schemeClr val="accent1"/>
+          </a:effectRef>
+          <a:fontRef idx="minor">
+            <a:schemeClr val="tx1"/>
+          </a:fontRef>
+        </p:style>
+      </p:cxnSp>
+      <p:sp>
+        <p:nvSpPr>
+          <p:cNvPr id="71" name="TextBox 70">
+            <a:extLst>
+              <a:ext uri="{FF2B5EF4-FFF2-40B4-BE49-F238E27FC236}">
+                <a16:creationId xmlns:a16="http://schemas.microsoft.com/office/drawing/2014/main" id="{0C4AD157-2A94-028F-9FE8-ADAECFF5A683}"/>
+              </a:ext>
+            </a:extLst>
+          </p:cNvPr>
+          <p:cNvSpPr txBox="1"/>
+          <p:nvPr/>
+        </p:nvSpPr>
+        <p:spPr>
+          <a:xfrm>
+            <a:off x="7582918" y="1911233"/>
+            <a:ext cx="4350002" cy="1754326"/>
+          </a:xfrm>
+          <a:prstGeom prst="rect">
+            <a:avLst/>
+          </a:prstGeom>
+          <a:noFill/>
+        </p:spPr>
+        <p:txBody>
+          <a:bodyPr wrap="square">
+            <a:spAutoFit/>
+          </a:bodyPr>
+          <a:lstStyle/>
+          <a:p>
+            <a:pPr marL="171450" indent="-171450">
+              <a:buFont typeface="Arial" panose="020B0604020202020204" pitchFamily="34" charset="0"/>
+              <a:buChar char="•"/>
+            </a:pPr>
+            <a:r>
+              <a:rPr lang="en-US" sz="1200" dirty="0">
+                <a:solidFill>
+                  <a:srgbClr val="002060"/>
+                </a:solidFill>
+                <a:latin typeface="Segoe UI" panose="020B0502040204020203" pitchFamily="34" charset="0"/>
+                <a:cs typeface="Segoe UI" panose="020B0502040204020203" pitchFamily="34" charset="0"/>
+              </a:rPr>
+              <a:t>Original training images: 2,634</a:t>
+            </a:r>
+          </a:p>
+          <a:p>
+            <a:pPr marL="171450" indent="-171450">
+              <a:buFont typeface="Arial" panose="020B0604020202020204" pitchFamily="34" charset="0"/>
+              <a:buChar char="•"/>
+            </a:pPr>
+            <a:r>
+              <a:rPr lang="en-US" sz="1200" dirty="0">
+                <a:solidFill>
+                  <a:srgbClr val="002060"/>
+                </a:solidFill>
+                <a:latin typeface="Segoe UI" panose="020B0502040204020203" pitchFamily="34" charset="0"/>
+                <a:cs typeface="Segoe UI" panose="020B0502040204020203" pitchFamily="34" charset="0"/>
+              </a:rPr>
+              <a:t>Augmented images generated: 27,260</a:t>
+            </a:r>
+          </a:p>
+          <a:p>
+            <a:pPr marL="171450" indent="-171450">
+              <a:buFont typeface="Arial" panose="020B0604020202020204" pitchFamily="34" charset="0"/>
+              <a:buChar char="•"/>
+            </a:pPr>
+            <a:r>
+              <a:rPr lang="en-US" sz="1200" dirty="0">
+                <a:solidFill>
+                  <a:srgbClr val="002060"/>
+                </a:solidFill>
+                <a:latin typeface="Segoe UI" panose="020B0502040204020203" pitchFamily="34" charset="0"/>
+                <a:cs typeface="Segoe UI" panose="020B0502040204020203" pitchFamily="34" charset="0"/>
+              </a:rPr>
+              <a:t>Final training set size: 29,894</a:t>
+            </a:r>
+          </a:p>
+          <a:p>
+            <a:pPr marL="171450" indent="-171450">
+              <a:buFont typeface="Arial" panose="020B0604020202020204" pitchFamily="34" charset="0"/>
+              <a:buChar char="•"/>
+            </a:pPr>
+            <a:r>
+              <a:rPr lang="en-US" sz="1200" dirty="0">
+                <a:solidFill>
+                  <a:srgbClr val="002060"/>
+                </a:solidFill>
+                <a:latin typeface="Segoe UI" panose="020B0502040204020203" pitchFamily="34" charset="0"/>
+                <a:cs typeface="Segoe UI" panose="020B0502040204020203" pitchFamily="34" charset="0"/>
+              </a:rPr>
+              <a:t>Balances class distribution to improve model generalization.</a:t>
+            </a:r>
+          </a:p>
+          <a:p>
+            <a:pPr marL="171450" indent="-171450">
+              <a:buFont typeface="Arial" panose="020B0604020202020204" pitchFamily="34" charset="0"/>
+              <a:buChar char="•"/>
+            </a:pPr>
+            <a:r>
+              <a:rPr lang="en-US" sz="1200" dirty="0">
+                <a:solidFill>
+                  <a:srgbClr val="002060"/>
+                </a:solidFill>
+                <a:latin typeface="Segoe UI" panose="020B0502040204020203" pitchFamily="34" charset="0"/>
+                <a:cs typeface="Segoe UI" panose="020B0502040204020203" pitchFamily="34" charset="0"/>
+              </a:rPr>
+              <a:t>Class balance improvement: Disparity reduced from 15-20% to 3-5%</a:t>
+            </a:r>
+          </a:p>
+          <a:p>
+            <a:pPr marL="171450" indent="-171450">
+              <a:buFont typeface="Arial" panose="020B0604020202020204" pitchFamily="34" charset="0"/>
+              <a:buChar char="•"/>
+            </a:pPr>
+            <a:r>
+              <a:rPr lang="en-US" sz="1200" dirty="0">
+                <a:solidFill>
+                  <a:srgbClr val="002060"/>
+                </a:solidFill>
+                <a:latin typeface="Segoe UI" panose="020B0502040204020203" pitchFamily="34" charset="0"/>
+                <a:cs typeface="Segoe UI" panose="020B0502040204020203" pitchFamily="34" charset="0"/>
+              </a:rPr>
+              <a:t>mAP@50 improvement: From 0.43 to 0.97 with same training configuration</a:t>
+            </a:r>
+          </a:p>
+        </p:txBody>
+      </p:sp>
+      <p:sp>
+        <p:nvSpPr>
+          <p:cNvPr id="13" name="TextBox 12">
+            <a:extLst>
+              <a:ext uri="{FF2B5EF4-FFF2-40B4-BE49-F238E27FC236}">
+                <a16:creationId xmlns:a16="http://schemas.microsoft.com/office/drawing/2014/main" id="{57F84544-6937-6CE4-4596-B291E6CF0334}"/>
+              </a:ext>
+            </a:extLst>
+          </p:cNvPr>
+          <p:cNvSpPr txBox="1"/>
+          <p:nvPr/>
+        </p:nvSpPr>
+        <p:spPr>
+          <a:xfrm>
+            <a:off x="838199" y="1494353"/>
+            <a:ext cx="4245863" cy="369332"/>
+          </a:xfrm>
+          <a:prstGeom prst="rect">
+            <a:avLst/>
+          </a:prstGeom>
+          <a:noFill/>
+        </p:spPr>
+        <p:txBody>
+          <a:bodyPr wrap="square">
+            <a:spAutoFit/>
+          </a:bodyPr>
+          <a:lstStyle/>
+          <a:p>
+            <a:r>
+              <a:rPr lang="en-US" b="1" dirty="0">
+                <a:solidFill>
+                  <a:srgbClr val="002060"/>
+                </a:solidFill>
+              </a:rPr>
+              <a:t>Targeted Augmentation Strategy</a:t>
+            </a:r>
+          </a:p>
+        </p:txBody>
+      </p:sp>
+      <p:cxnSp>
+        <p:nvCxnSpPr>
+          <p:cNvPr id="14" name="Straight Connector 13">
+            <a:extLst>
+              <a:ext uri="{FF2B5EF4-FFF2-40B4-BE49-F238E27FC236}">
+                <a16:creationId xmlns:a16="http://schemas.microsoft.com/office/drawing/2014/main" id="{B54D3690-3D27-E15A-EEC6-6DC12AE157E9}"/>
+              </a:ext>
+            </a:extLst>
+          </p:cNvPr>
+          <p:cNvCxnSpPr>
+            <a:cxnSpLocks/>
+          </p:cNvCxnSpPr>
+          <p:nvPr/>
+        </p:nvCxnSpPr>
+        <p:spPr>
+          <a:xfrm>
+            <a:off x="798919" y="1537810"/>
+            <a:ext cx="0" cy="1204420"/>
+          </a:xfrm>
+          <a:prstGeom prst="line">
+            <a:avLst/>
+          </a:prstGeom>
+          <a:ln w="73025">
+            <a:solidFill>
+              <a:srgbClr val="002060"/>
+            </a:solidFill>
+          </a:ln>
+        </p:spPr>
+        <p:style>
+          <a:lnRef idx="1">
+            <a:schemeClr val="accent1"/>
+          </a:lnRef>
+          <a:fillRef idx="0">
+            <a:schemeClr val="accent1"/>
+          </a:fillRef>
+          <a:effectRef idx="0">
+            <a:schemeClr val="accent1"/>
+          </a:effectRef>
+          <a:fontRef idx="minor">
+            <a:schemeClr val="tx1"/>
+          </a:fontRef>
+        </p:style>
+      </p:cxnSp>
+      <p:sp>
+        <p:nvSpPr>
+          <p:cNvPr id="15" name="TextBox 14">
+            <a:extLst>
+              <a:ext uri="{FF2B5EF4-FFF2-40B4-BE49-F238E27FC236}">
+                <a16:creationId xmlns:a16="http://schemas.microsoft.com/office/drawing/2014/main" id="{F3D0D0B2-F6A0-5615-873C-9FCA0E83440A}"/>
+              </a:ext>
+            </a:extLst>
+          </p:cNvPr>
+          <p:cNvSpPr txBox="1"/>
+          <p:nvPr/>
+        </p:nvSpPr>
+        <p:spPr>
+          <a:xfrm>
+            <a:off x="902802" y="1911233"/>
+            <a:ext cx="6336198" cy="830997"/>
+          </a:xfrm>
+          <a:prstGeom prst="rect">
+            <a:avLst/>
+          </a:prstGeom>
+          <a:noFill/>
+        </p:spPr>
+        <p:txBody>
+          <a:bodyPr wrap="square">
+            <a:spAutoFit/>
+          </a:bodyPr>
+          <a:lstStyle/>
+          <a:p>
+            <a:pPr marL="171450" indent="-171450">
+              <a:buFont typeface="Arial" panose="020B0604020202020204" pitchFamily="34" charset="0"/>
+              <a:buChar char="•"/>
+            </a:pPr>
+            <a:r>
+              <a:rPr lang="en-US" sz="1200" b="1" dirty="0">
+                <a:solidFill>
+                  <a:srgbClr val="002060"/>
+                </a:solidFill>
+                <a:latin typeface="Segoe UI" panose="020B0502040204020203" pitchFamily="34" charset="0"/>
+                <a:cs typeface="Segoe UI" panose="020B0502040204020203" pitchFamily="34" charset="0"/>
+              </a:rPr>
+              <a:t>Minority Class Identification</a:t>
+            </a:r>
+            <a:r>
+              <a:rPr lang="en-US" sz="1200" dirty="0">
+                <a:solidFill>
+                  <a:srgbClr val="002060"/>
+                </a:solidFill>
+                <a:latin typeface="Segoe UI" panose="020B0502040204020203" pitchFamily="34" charset="0"/>
+                <a:cs typeface="Segoe UI" panose="020B0502040204020203" pitchFamily="34" charset="0"/>
+              </a:rPr>
+              <a:t>: Classes with object percentages below a configurable threshold (default: 10%) are tagged as "minority".</a:t>
+            </a:r>
+          </a:p>
+          <a:p>
+            <a:pPr marL="171450" indent="-171450">
+              <a:buFont typeface="Arial" panose="020B0604020202020204" pitchFamily="34" charset="0"/>
+              <a:buChar char="•"/>
+            </a:pPr>
+            <a:r>
+              <a:rPr lang="en-US" sz="1200" b="1" dirty="0">
+                <a:solidFill>
+                  <a:srgbClr val="002060"/>
+                </a:solidFill>
+                <a:latin typeface="Segoe UI" panose="020B0502040204020203" pitchFamily="34" charset="0"/>
+                <a:cs typeface="Segoe UI" panose="020B0502040204020203" pitchFamily="34" charset="0"/>
+              </a:rPr>
+              <a:t>Augmentation Factor</a:t>
+            </a:r>
+            <a:r>
+              <a:rPr lang="en-US" sz="1200" dirty="0">
+                <a:solidFill>
+                  <a:srgbClr val="002060"/>
+                </a:solidFill>
+                <a:latin typeface="Segoe UI" panose="020B0502040204020203" pitchFamily="34" charset="0"/>
+                <a:cs typeface="Segoe UI" panose="020B0502040204020203" pitchFamily="34" charset="0"/>
+              </a:rPr>
+              <a:t>: Each image containing minority classes is augmented multiple times (default: 5</a:t>
+            </a:r>
+          </a:p>
+        </p:txBody>
+      </p:sp>
+      <p:sp>
+        <p:nvSpPr>
+          <p:cNvPr id="19" name="TextBox 18">
+            <a:extLst>
+              <a:ext uri="{FF2B5EF4-FFF2-40B4-BE49-F238E27FC236}">
+                <a16:creationId xmlns:a16="http://schemas.microsoft.com/office/drawing/2014/main" id="{F5B8E16A-2B3B-054C-FF38-7CB2C1781732}"/>
+              </a:ext>
+            </a:extLst>
+          </p:cNvPr>
+          <p:cNvSpPr txBox="1"/>
+          <p:nvPr/>
+        </p:nvSpPr>
+        <p:spPr>
+          <a:xfrm>
+            <a:off x="902802" y="3111672"/>
+            <a:ext cx="3644984" cy="369332"/>
+          </a:xfrm>
+          <a:prstGeom prst="rect">
+            <a:avLst/>
+          </a:prstGeom>
+          <a:noFill/>
+        </p:spPr>
+        <p:txBody>
+          <a:bodyPr wrap="square">
+            <a:spAutoFit/>
+          </a:bodyPr>
+          <a:lstStyle/>
+          <a:p>
+            <a:r>
+              <a:rPr lang="en-US" b="1" dirty="0">
+                <a:solidFill>
+                  <a:srgbClr val="002060"/>
+                </a:solidFill>
+              </a:rPr>
+              <a:t>Applied Augmentation Techniques</a:t>
+            </a:r>
+          </a:p>
+        </p:txBody>
+      </p:sp>
+      <p:cxnSp>
+        <p:nvCxnSpPr>
+          <p:cNvPr id="2" name="Straight Connector 1">
+            <a:extLst>
+              <a:ext uri="{FF2B5EF4-FFF2-40B4-BE49-F238E27FC236}">
+                <a16:creationId xmlns:a16="http://schemas.microsoft.com/office/drawing/2014/main" id="{D4AA347A-A7C7-E1CE-A309-177BEEC1D7F9}"/>
+              </a:ext>
+            </a:extLst>
+          </p:cNvPr>
+          <p:cNvCxnSpPr>
+            <a:cxnSpLocks/>
+          </p:cNvCxnSpPr>
+          <p:nvPr/>
+        </p:nvCxnSpPr>
+        <p:spPr>
+          <a:xfrm>
+            <a:off x="798919" y="3122266"/>
+            <a:ext cx="0" cy="3019185"/>
+          </a:xfrm>
+          <a:prstGeom prst="line">
+            <a:avLst/>
+          </a:prstGeom>
+          <a:ln w="73025">
+            <a:solidFill>
+              <a:srgbClr val="002060"/>
+            </a:solidFill>
+          </a:ln>
+        </p:spPr>
+        <p:style>
+          <a:lnRef idx="1">
+            <a:schemeClr val="accent1"/>
+          </a:lnRef>
+          <a:fillRef idx="0">
+            <a:schemeClr val="accent1"/>
+          </a:fillRef>
+          <a:effectRef idx="0">
+            <a:schemeClr val="accent1"/>
+          </a:effectRef>
+          <a:fontRef idx="minor">
+            <a:schemeClr val="tx1"/>
+          </a:fontRef>
+        </p:style>
+      </p:cxnSp>
+      <p:sp>
+        <p:nvSpPr>
+          <p:cNvPr id="16" name="TextBox 15">
+            <a:extLst>
+              <a:ext uri="{FF2B5EF4-FFF2-40B4-BE49-F238E27FC236}">
+                <a16:creationId xmlns:a16="http://schemas.microsoft.com/office/drawing/2014/main" id="{7300966C-E087-4ABD-885E-9E888CCD5FB4}"/>
+              </a:ext>
+            </a:extLst>
+          </p:cNvPr>
+          <p:cNvSpPr txBox="1"/>
+          <p:nvPr/>
+        </p:nvSpPr>
+        <p:spPr>
+          <a:xfrm>
+            <a:off x="902802" y="3242560"/>
+            <a:ext cx="3175422" cy="2769989"/>
+          </a:xfrm>
+          <a:prstGeom prst="rect">
+            <a:avLst/>
+          </a:prstGeom>
+          <a:noFill/>
+        </p:spPr>
+        <p:txBody>
+          <a:bodyPr wrap="square">
+            <a:spAutoFit/>
+          </a:bodyPr>
+          <a:lstStyle/>
+          <a:p>
+            <a:r>
+              <a:rPr lang="en-US" sz="1200" dirty="0">
+                <a:solidFill>
+                  <a:srgbClr val="002060"/>
+                </a:solidFill>
+                <a:latin typeface="Segoe UI" panose="020B0502040204020203" pitchFamily="34" charset="0"/>
+                <a:cs typeface="Segoe UI" panose="020B0502040204020203" pitchFamily="34" charset="0"/>
+              </a:rPr>
+              <a:t>	</a:t>
+            </a:r>
+          </a:p>
+          <a:p>
+            <a:pPr marL="171450" indent="-171450">
+              <a:buFont typeface="Arial" panose="020B0604020202020204" pitchFamily="34" charset="0"/>
+              <a:buChar char="•"/>
+            </a:pPr>
+            <a:r>
+              <a:rPr lang="en-US" sz="1200" dirty="0" err="1">
+                <a:solidFill>
+                  <a:srgbClr val="002060"/>
+                </a:solidFill>
+                <a:latin typeface="Segoe UI" panose="020B0502040204020203" pitchFamily="34" charset="0"/>
+                <a:cs typeface="Segoe UI" panose="020B0502040204020203" pitchFamily="34" charset="0"/>
+              </a:rPr>
+              <a:t>RandomBrightnessContrast</a:t>
+            </a:r>
+            <a:r>
+              <a:rPr lang="en-US" sz="1200" dirty="0">
+                <a:solidFill>
+                  <a:srgbClr val="002060"/>
+                </a:solidFill>
+                <a:latin typeface="Segoe UI" panose="020B0502040204020203" pitchFamily="34" charset="0"/>
+                <a:cs typeface="Segoe UI" panose="020B0502040204020203" pitchFamily="34" charset="0"/>
+              </a:rPr>
+              <a:t>	</a:t>
+            </a:r>
+          </a:p>
+          <a:p>
+            <a:pPr marL="171450" indent="-171450">
+              <a:buFont typeface="Arial" panose="020B0604020202020204" pitchFamily="34" charset="0"/>
+              <a:buChar char="•"/>
+            </a:pPr>
+            <a:r>
+              <a:rPr lang="en-US" sz="1200" dirty="0" err="1">
+                <a:solidFill>
+                  <a:srgbClr val="002060"/>
+                </a:solidFill>
+                <a:latin typeface="Segoe UI" panose="020B0502040204020203" pitchFamily="34" charset="0"/>
+                <a:cs typeface="Segoe UI" panose="020B0502040204020203" pitchFamily="34" charset="0"/>
+              </a:rPr>
+              <a:t>HueSaturationValue</a:t>
+            </a:r>
+            <a:r>
+              <a:rPr lang="en-US" sz="1200" dirty="0">
+                <a:solidFill>
+                  <a:srgbClr val="002060"/>
+                </a:solidFill>
+                <a:latin typeface="Segoe UI" panose="020B0502040204020203" pitchFamily="34" charset="0"/>
+                <a:cs typeface="Segoe UI" panose="020B0502040204020203" pitchFamily="34" charset="0"/>
+              </a:rPr>
+              <a:t>	</a:t>
+            </a:r>
+          </a:p>
+          <a:p>
+            <a:pPr marL="171450" indent="-171450">
+              <a:buFont typeface="Arial" panose="020B0604020202020204" pitchFamily="34" charset="0"/>
+              <a:buChar char="•"/>
+            </a:pPr>
+            <a:r>
+              <a:rPr lang="en-US" sz="1200" dirty="0">
+                <a:solidFill>
+                  <a:srgbClr val="002060"/>
+                </a:solidFill>
+                <a:latin typeface="Segoe UI" panose="020B0502040204020203" pitchFamily="34" charset="0"/>
+                <a:cs typeface="Segoe UI" panose="020B0502040204020203" pitchFamily="34" charset="0"/>
+              </a:rPr>
+              <a:t>RandomRotate90	</a:t>
+            </a:r>
+          </a:p>
+          <a:p>
+            <a:pPr marL="171450" indent="-171450">
+              <a:buFont typeface="Arial" panose="020B0604020202020204" pitchFamily="34" charset="0"/>
+              <a:buChar char="•"/>
+            </a:pPr>
+            <a:r>
+              <a:rPr lang="en-US" sz="1200" dirty="0">
+                <a:solidFill>
+                  <a:srgbClr val="002060"/>
+                </a:solidFill>
+                <a:latin typeface="Segoe UI" panose="020B0502040204020203" pitchFamily="34" charset="0"/>
+                <a:cs typeface="Segoe UI" panose="020B0502040204020203" pitchFamily="34" charset="0"/>
+              </a:rPr>
+              <a:t>Blur	</a:t>
+            </a:r>
+          </a:p>
+          <a:p>
+            <a:pPr marL="171450" indent="-171450">
+              <a:buFont typeface="Arial" panose="020B0604020202020204" pitchFamily="34" charset="0"/>
+              <a:buChar char="•"/>
+            </a:pPr>
+            <a:r>
+              <a:rPr lang="en-US" sz="1200" dirty="0" err="1">
+                <a:solidFill>
+                  <a:srgbClr val="002060"/>
+                </a:solidFill>
+                <a:latin typeface="Segoe UI" panose="020B0502040204020203" pitchFamily="34" charset="0"/>
+                <a:cs typeface="Segoe UI" panose="020B0502040204020203" pitchFamily="34" charset="0"/>
+              </a:rPr>
+              <a:t>RandomShadow</a:t>
+            </a:r>
+            <a:r>
+              <a:rPr lang="en-US" sz="1200" dirty="0">
+                <a:solidFill>
+                  <a:srgbClr val="002060"/>
+                </a:solidFill>
+                <a:latin typeface="Segoe UI" panose="020B0502040204020203" pitchFamily="34" charset="0"/>
+                <a:cs typeface="Segoe UI" panose="020B0502040204020203" pitchFamily="34" charset="0"/>
+              </a:rPr>
+              <a:t>	</a:t>
+            </a:r>
+          </a:p>
+          <a:p>
+            <a:pPr marL="171450" indent="-171450">
+              <a:buFont typeface="Arial" panose="020B0604020202020204" pitchFamily="34" charset="0"/>
+              <a:buChar char="•"/>
+            </a:pPr>
+            <a:r>
+              <a:rPr lang="en-US" sz="1200" dirty="0" err="1">
+                <a:solidFill>
+                  <a:srgbClr val="002060"/>
+                </a:solidFill>
+                <a:latin typeface="Segoe UI" panose="020B0502040204020203" pitchFamily="34" charset="0"/>
+                <a:cs typeface="Segoe UI" panose="020B0502040204020203" pitchFamily="34" charset="0"/>
+              </a:rPr>
+              <a:t>RandomFog</a:t>
+            </a:r>
+            <a:r>
+              <a:rPr lang="en-US" sz="1200" dirty="0">
+                <a:solidFill>
+                  <a:srgbClr val="002060"/>
+                </a:solidFill>
+                <a:latin typeface="Segoe UI" panose="020B0502040204020203" pitchFamily="34" charset="0"/>
+                <a:cs typeface="Segoe UI" panose="020B0502040204020203" pitchFamily="34" charset="0"/>
+              </a:rPr>
+              <a:t>	</a:t>
+            </a:r>
+          </a:p>
+          <a:p>
+            <a:pPr marL="171450" indent="-171450">
+              <a:buFont typeface="Arial" panose="020B0604020202020204" pitchFamily="34" charset="0"/>
+              <a:buChar char="•"/>
+            </a:pPr>
+            <a:r>
+              <a:rPr lang="en-US" sz="1200" dirty="0">
+                <a:solidFill>
+                  <a:srgbClr val="002060"/>
+                </a:solidFill>
+                <a:latin typeface="Segoe UI" panose="020B0502040204020203" pitchFamily="34" charset="0"/>
+                <a:cs typeface="Segoe UI" panose="020B0502040204020203" pitchFamily="34" charset="0"/>
+              </a:rPr>
+              <a:t>Affine	</a:t>
+            </a:r>
+          </a:p>
+          <a:p>
+            <a:pPr marL="171450" indent="-171450">
+              <a:buFont typeface="Arial" panose="020B0604020202020204" pitchFamily="34" charset="0"/>
+              <a:buChar char="•"/>
+            </a:pPr>
+            <a:r>
+              <a:rPr lang="en-US" sz="1200" dirty="0" err="1">
+                <a:solidFill>
+                  <a:srgbClr val="002060"/>
+                </a:solidFill>
+                <a:latin typeface="Segoe UI" panose="020B0502040204020203" pitchFamily="34" charset="0"/>
+                <a:cs typeface="Segoe UI" panose="020B0502040204020203" pitchFamily="34" charset="0"/>
+              </a:rPr>
+              <a:t>RandomSunFlare</a:t>
+            </a:r>
+            <a:r>
+              <a:rPr lang="en-US" sz="1200" dirty="0">
+                <a:solidFill>
+                  <a:srgbClr val="002060"/>
+                </a:solidFill>
+                <a:latin typeface="Segoe UI" panose="020B0502040204020203" pitchFamily="34" charset="0"/>
+                <a:cs typeface="Segoe UI" panose="020B0502040204020203" pitchFamily="34" charset="0"/>
+              </a:rPr>
+              <a:t>	</a:t>
+            </a:r>
+          </a:p>
+          <a:p>
+            <a:pPr marL="171450" indent="-171450">
+              <a:buFont typeface="Arial" panose="020B0604020202020204" pitchFamily="34" charset="0"/>
+              <a:buChar char="•"/>
+            </a:pPr>
+            <a:r>
+              <a:rPr lang="en-US" sz="1200" dirty="0" err="1">
+                <a:solidFill>
+                  <a:srgbClr val="002060"/>
+                </a:solidFill>
+                <a:latin typeface="Segoe UI" panose="020B0502040204020203" pitchFamily="34" charset="0"/>
+                <a:cs typeface="Segoe UI" panose="020B0502040204020203" pitchFamily="34" charset="0"/>
+              </a:rPr>
+              <a:t>ISONoise</a:t>
+            </a:r>
+            <a:r>
+              <a:rPr lang="en-US" sz="1200" dirty="0">
+                <a:solidFill>
+                  <a:srgbClr val="002060"/>
+                </a:solidFill>
+                <a:latin typeface="Segoe UI" panose="020B0502040204020203" pitchFamily="34" charset="0"/>
+                <a:cs typeface="Segoe UI" panose="020B0502040204020203" pitchFamily="34" charset="0"/>
+              </a:rPr>
+              <a:t>	</a:t>
+            </a:r>
+          </a:p>
+          <a:p>
+            <a:pPr marL="171450" indent="-171450">
+              <a:buFont typeface="Arial" panose="020B0604020202020204" pitchFamily="34" charset="0"/>
+              <a:buChar char="•"/>
+            </a:pPr>
+            <a:r>
+              <a:rPr lang="en-US" sz="1200" dirty="0" err="1">
+                <a:solidFill>
+                  <a:srgbClr val="002060"/>
+                </a:solidFill>
+                <a:latin typeface="Segoe UI" panose="020B0502040204020203" pitchFamily="34" charset="0"/>
+                <a:cs typeface="Segoe UI" panose="020B0502040204020203" pitchFamily="34" charset="0"/>
+              </a:rPr>
+              <a:t>RandomSnow</a:t>
+            </a:r>
+            <a:r>
+              <a:rPr lang="en-US" sz="1200" dirty="0">
+                <a:solidFill>
+                  <a:srgbClr val="002060"/>
+                </a:solidFill>
+                <a:latin typeface="Segoe UI" panose="020B0502040204020203" pitchFamily="34" charset="0"/>
+                <a:cs typeface="Segoe UI" panose="020B0502040204020203" pitchFamily="34" charset="0"/>
+              </a:rPr>
+              <a:t>	</a:t>
+            </a:r>
+          </a:p>
+          <a:p>
+            <a:pPr marL="171450" indent="-171450">
+              <a:buFont typeface="Arial" panose="020B0604020202020204" pitchFamily="34" charset="0"/>
+              <a:buChar char="•"/>
+            </a:pPr>
+            <a:r>
+              <a:rPr lang="en-US" sz="1200" dirty="0">
+                <a:solidFill>
+                  <a:srgbClr val="002060"/>
+                </a:solidFill>
+                <a:latin typeface="Segoe UI" panose="020B0502040204020203" pitchFamily="34" charset="0"/>
+                <a:cs typeface="Segoe UI" panose="020B0502040204020203" pitchFamily="34" charset="0"/>
+              </a:rPr>
+              <a:t>CLAHE	</a:t>
+            </a:r>
+          </a:p>
+          <a:p>
+            <a:pPr marL="171450" indent="-171450">
+              <a:buFont typeface="Arial" panose="020B0604020202020204" pitchFamily="34" charset="0"/>
+              <a:buChar char="•"/>
+            </a:pPr>
+            <a:r>
+              <a:rPr lang="en-US" sz="1200" dirty="0" err="1">
+                <a:solidFill>
+                  <a:srgbClr val="002060"/>
+                </a:solidFill>
+                <a:latin typeface="Segoe UI" panose="020B0502040204020203" pitchFamily="34" charset="0"/>
+                <a:cs typeface="Segoe UI" panose="020B0502040204020203" pitchFamily="34" charset="0"/>
+              </a:rPr>
+              <a:t>ChannelShuffle</a:t>
+            </a:r>
+            <a:r>
+              <a:rPr lang="en-US" sz="1200" dirty="0">
+                <a:solidFill>
+                  <a:srgbClr val="002060"/>
+                </a:solidFill>
+                <a:latin typeface="Segoe UI" panose="020B0502040204020203" pitchFamily="34" charset="0"/>
+                <a:cs typeface="Segoe UI" panose="020B0502040204020203" pitchFamily="34" charset="0"/>
+              </a:rPr>
+              <a:t>	</a:t>
+            </a:r>
+          </a:p>
+          <a:p>
+            <a:pPr marL="171450" indent="-171450">
+              <a:buFont typeface="Arial" panose="020B0604020202020204" pitchFamily="34" charset="0"/>
+              <a:buChar char="•"/>
+            </a:pPr>
+            <a:r>
+              <a:rPr lang="en-US" sz="1200" dirty="0" err="1">
+                <a:solidFill>
+                  <a:srgbClr val="002060"/>
+                </a:solidFill>
+                <a:latin typeface="Segoe UI" panose="020B0502040204020203" pitchFamily="34" charset="0"/>
+                <a:cs typeface="Segoe UI" panose="020B0502040204020203" pitchFamily="34" charset="0"/>
+              </a:rPr>
+              <a:t>ColorJitter</a:t>
+            </a:r>
+            <a:r>
+              <a:rPr lang="en-US" dirty="0"/>
+              <a:t>	</a:t>
+            </a:r>
+          </a:p>
+        </p:txBody>
+      </p:sp>
+      <p:pic>
+        <p:nvPicPr>
+          <p:cNvPr id="18" name="Picture 17" descr="A traffic jam on a road&#10;&#10;AI-generated content may be incorrect.">
+            <a:extLst>
+              <a:ext uri="{FF2B5EF4-FFF2-40B4-BE49-F238E27FC236}">
+                <a16:creationId xmlns:a16="http://schemas.microsoft.com/office/drawing/2014/main" id="{22BB86AC-257C-70A6-5122-36CE6A3FDC0A}"/>
+              </a:ext>
+            </a:extLst>
+          </p:cNvPr>
+          <p:cNvPicPr>
+            <a:picLocks noChangeAspect="1"/>
+          </p:cNvPicPr>
+          <p:nvPr/>
+        </p:nvPicPr>
+        <p:blipFill>
+          <a:blip r:embed="rId2">
+            <a:extLst>
+              <a:ext uri="{28A0092B-C50C-407E-A947-70E740481C1C}">
+                <a14:useLocalDpi xmlns:a14="http://schemas.microsoft.com/office/drawing/2010/main" val="0"/>
+              </a:ext>
+            </a:extLst>
+          </a:blip>
+          <a:stretch>
+            <a:fillRect/>
+          </a:stretch>
+        </p:blipFill>
+        <p:spPr>
+          <a:xfrm>
+            <a:off x="3815214" y="4092442"/>
+            <a:ext cx="1724238" cy="1293178"/>
+          </a:xfrm>
+          <a:prstGeom prst="rect">
+            <a:avLst/>
+          </a:prstGeom>
+        </p:spPr>
+      </p:pic>
+      <p:pic>
+        <p:nvPicPr>
+          <p:cNvPr id="21" name="Picture 20" descr="A traffic jam on a highway">
+            <a:extLst>
+              <a:ext uri="{FF2B5EF4-FFF2-40B4-BE49-F238E27FC236}">
+                <a16:creationId xmlns:a16="http://schemas.microsoft.com/office/drawing/2014/main" id="{3C4B4E74-5771-7940-EDBB-CEA676F1F130}"/>
+              </a:ext>
+            </a:extLst>
+          </p:cNvPr>
+          <p:cNvPicPr>
+            <a:picLocks noChangeAspect="1"/>
+          </p:cNvPicPr>
+          <p:nvPr/>
+        </p:nvPicPr>
+        <p:blipFill>
+          <a:blip r:embed="rId3">
+            <a:extLst>
+              <a:ext uri="{28A0092B-C50C-407E-A947-70E740481C1C}">
+                <a14:useLocalDpi xmlns:a14="http://schemas.microsoft.com/office/drawing/2010/main" val="0"/>
+              </a:ext>
+            </a:extLst>
+          </a:blip>
+          <a:stretch>
+            <a:fillRect/>
+          </a:stretch>
+        </p:blipFill>
+        <p:spPr>
+          <a:xfrm>
+            <a:off x="5570516" y="4081232"/>
+            <a:ext cx="1754124" cy="1315595"/>
+          </a:xfrm>
+          <a:prstGeom prst="rect">
+            <a:avLst/>
+          </a:prstGeom>
+        </p:spPr>
+      </p:pic>
+      <p:pic>
+        <p:nvPicPr>
+          <p:cNvPr id="24" name="Picture 23">
+            <a:extLst>
+              <a:ext uri="{FF2B5EF4-FFF2-40B4-BE49-F238E27FC236}">
+                <a16:creationId xmlns:a16="http://schemas.microsoft.com/office/drawing/2014/main" id="{0D12AB34-CE46-5BE6-844F-ED57D2BB7A2F}"/>
+              </a:ext>
+            </a:extLst>
+          </p:cNvPr>
+          <p:cNvPicPr>
+            <a:picLocks noChangeAspect="1"/>
+          </p:cNvPicPr>
+          <p:nvPr/>
+        </p:nvPicPr>
+        <p:blipFill>
+          <a:blip r:embed="rId4"/>
+          <a:stretch>
+            <a:fillRect/>
+          </a:stretch>
+        </p:blipFill>
+        <p:spPr>
+          <a:xfrm>
+            <a:off x="7844373" y="4081234"/>
+            <a:ext cx="1724237" cy="1315593"/>
+          </a:xfrm>
+          <a:prstGeom prst="rect">
+            <a:avLst/>
+          </a:prstGeom>
+        </p:spPr>
+      </p:pic>
+      <p:pic>
+        <p:nvPicPr>
+          <p:cNvPr id="25" name="Picture 24">
+            <a:extLst>
+              <a:ext uri="{FF2B5EF4-FFF2-40B4-BE49-F238E27FC236}">
+                <a16:creationId xmlns:a16="http://schemas.microsoft.com/office/drawing/2014/main" id="{D592C334-0883-603F-9D4D-988ADDE0E470}"/>
+              </a:ext>
+            </a:extLst>
+          </p:cNvPr>
+          <p:cNvPicPr>
+            <a:picLocks noChangeAspect="1"/>
+          </p:cNvPicPr>
+          <p:nvPr/>
+        </p:nvPicPr>
+        <p:blipFill>
+          <a:blip r:embed="rId5"/>
+          <a:srcRect r="12339"/>
+          <a:stretch/>
+        </p:blipFill>
+        <p:spPr>
+          <a:xfrm>
+            <a:off x="9599676" y="4081232"/>
+            <a:ext cx="1754124" cy="1315593"/>
+          </a:xfrm>
+          <a:prstGeom prst="rect">
+            <a:avLst/>
+          </a:prstGeom>
+        </p:spPr>
+      </p:pic>
+      <p:sp>
+        <p:nvSpPr>
+          <p:cNvPr id="27" name="TextBox 26">
+            <a:extLst>
+              <a:ext uri="{FF2B5EF4-FFF2-40B4-BE49-F238E27FC236}">
+                <a16:creationId xmlns:a16="http://schemas.microsoft.com/office/drawing/2014/main" id="{667A64A3-64CB-13A2-46A2-E8307329BE81}"/>
+              </a:ext>
+            </a:extLst>
+          </p:cNvPr>
+          <p:cNvSpPr txBox="1"/>
+          <p:nvPr/>
+        </p:nvSpPr>
+        <p:spPr>
+          <a:xfrm>
+            <a:off x="4677333" y="5571792"/>
+            <a:ext cx="1846980" cy="276999"/>
+          </a:xfrm>
+          <a:prstGeom prst="rect">
+            <a:avLst/>
+          </a:prstGeom>
+          <a:noFill/>
+        </p:spPr>
+        <p:txBody>
+          <a:bodyPr wrap="none" rtlCol="0">
+            <a:spAutoFit/>
+          </a:bodyPr>
+          <a:lstStyle/>
+          <a:p>
+            <a:r>
+              <a:rPr lang="en-US" sz="1200" dirty="0">
+                <a:solidFill>
+                  <a:srgbClr val="002060"/>
+                </a:solidFill>
+                <a:latin typeface="Abadi" panose="020F0502020204030204" pitchFamily="34" charset="0"/>
+              </a:rPr>
+              <a:t>BEFORE AUGMENTATION</a:t>
+            </a:r>
+          </a:p>
+        </p:txBody>
+      </p:sp>
+      <p:sp>
+        <p:nvSpPr>
+          <p:cNvPr id="28" name="TextBox 27">
+            <a:extLst>
+              <a:ext uri="{FF2B5EF4-FFF2-40B4-BE49-F238E27FC236}">
+                <a16:creationId xmlns:a16="http://schemas.microsoft.com/office/drawing/2014/main" id="{C673F073-F599-B9F1-1AA9-E0D8C9775F65}"/>
+              </a:ext>
+            </a:extLst>
+          </p:cNvPr>
+          <p:cNvSpPr txBox="1"/>
+          <p:nvPr/>
+        </p:nvSpPr>
+        <p:spPr>
+          <a:xfrm>
+            <a:off x="8706491" y="5571791"/>
+            <a:ext cx="1737976" cy="276999"/>
+          </a:xfrm>
+          <a:prstGeom prst="rect">
+            <a:avLst/>
+          </a:prstGeom>
+          <a:noFill/>
+        </p:spPr>
+        <p:txBody>
+          <a:bodyPr wrap="none" rtlCol="0">
+            <a:spAutoFit/>
+          </a:bodyPr>
+          <a:lstStyle/>
+          <a:p>
+            <a:r>
+              <a:rPr lang="en-US" sz="1200" dirty="0">
+                <a:solidFill>
+                  <a:srgbClr val="002060"/>
+                </a:solidFill>
+                <a:latin typeface="Abadi" panose="020F0502020204030204" pitchFamily="34" charset="0"/>
+              </a:rPr>
+              <a:t>AFTER AUGMENTATION</a:t>
+            </a:r>
+          </a:p>
+        </p:txBody>
+      </p:sp>
     </p:spTree>
     <p:extLst>
       <p:ext uri="{BB962C8B-B14F-4D97-AF65-F5344CB8AC3E}">
-        <p14:creationId xmlns:p14="http://schemas.microsoft.com/office/powerpoint/2010/main" val="1118124791"/>
+        <p14:creationId xmlns:p14="http://schemas.microsoft.com/office/powerpoint/2010/main" val="30763938"/>
       </p:ext>
     </p:extLst>
   </p:cSld>
@@ -12105,10 +12777,10 @@
       </p:grpSpPr>
       <p:sp>
         <p:nvSpPr>
-          <p:cNvPr id="2" name="Title 1">
-            <a:extLst>
-              <a:ext uri="{FF2B5EF4-FFF2-40B4-BE49-F238E27FC236}">
-                <a16:creationId xmlns:a16="http://schemas.microsoft.com/office/drawing/2014/main" id="{ED3F830A-0841-2B85-58E5-6CE63A3347BC}"/>
+          <p:cNvPr id="4" name="Footer Placeholder 3">
+            <a:extLst>
+              <a:ext uri="{FF2B5EF4-FFF2-40B4-BE49-F238E27FC236}">
+                <a16:creationId xmlns:a16="http://schemas.microsoft.com/office/drawing/2014/main" id="{B8027B5C-B1A1-0376-4174-FFF61C554492}"/>
               </a:ext>
             </a:extLst>
           </p:cNvPr>
@@ -12116,157 +12788,13 @@
             <a:spLocks noGrp="1"/>
           </p:cNvSpPr>
           <p:nvPr>
-            <p:ph type="title"/>
+            <p:ph type="ftr" sz="quarter" idx="11"/>
           </p:nvPr>
         </p:nvSpPr>
         <p:spPr>
           <a:xfrm>
-            <a:off x="838200" y="365126"/>
-            <a:ext cx="10515600" cy="638922"/>
-          </a:xfrm>
-        </p:spPr>
-        <p:txBody>
-          <a:bodyPr>
-            <a:normAutofit/>
-          </a:bodyPr>
-          <a:lstStyle/>
-          <a:p>
-            <a:pPr algn="l"/>
-            <a:r>
-              <a:rPr lang="en-US" sz="2700" b="1" dirty="0">
-                <a:solidFill>
-                  <a:srgbClr val="002060"/>
-                </a:solidFill>
-                <a:latin typeface="Arial" panose="020B0604020202020204" pitchFamily="34" charset="0"/>
-                <a:cs typeface="Arial" panose="020B0604020202020204" pitchFamily="34" charset="0"/>
-              </a:rPr>
-              <a:t>Yolov8n Custom Config</a:t>
-            </a:r>
-          </a:p>
-        </p:txBody>
-      </p:sp>
-      <p:sp>
-        <p:nvSpPr>
-          <p:cNvPr id="5" name="Slide Number Placeholder 4">
-            <a:extLst>
-              <a:ext uri="{FF2B5EF4-FFF2-40B4-BE49-F238E27FC236}">
-                <a16:creationId xmlns:a16="http://schemas.microsoft.com/office/drawing/2014/main" id="{80A790D5-177D-B6A2-0E90-81EF4FE37C9F}"/>
-              </a:ext>
-            </a:extLst>
-          </p:cNvPr>
-          <p:cNvSpPr>
-            <a:spLocks noGrp="1"/>
-          </p:cNvSpPr>
-          <p:nvPr>
-            <p:ph type="sldNum" sz="quarter" idx="12"/>
-          </p:nvPr>
-        </p:nvSpPr>
-        <p:spPr/>
-        <p:txBody>
-          <a:bodyPr/>
-          <a:lstStyle/>
-          <a:p>
-            <a:fld id="{C98AED0B-3B00-448B-836B-316F7AA19B4B}" type="slidenum">
-              <a:rPr lang="en-US" smtClean="0"/>
-              <a:t>15</a:t>
-            </a:fld>
-            <a:endParaRPr lang="en-US"/>
-          </a:p>
-        </p:txBody>
-      </p:sp>
-      <p:pic>
-        <p:nvPicPr>
-          <p:cNvPr id="7" name="Picture 6">
-            <a:extLst>
-              <a:ext uri="{FF2B5EF4-FFF2-40B4-BE49-F238E27FC236}">
-                <a16:creationId xmlns:a16="http://schemas.microsoft.com/office/drawing/2014/main" id="{39B16431-2563-E35B-71C8-D6A78969B6E1}"/>
-              </a:ext>
-            </a:extLst>
-          </p:cNvPr>
-          <p:cNvPicPr>
-            <a:picLocks noChangeAspect="1"/>
-          </p:cNvPicPr>
-          <p:nvPr/>
-        </p:nvPicPr>
-        <p:blipFill>
-          <a:blip r:embed="rId2"/>
-          <a:stretch>
-            <a:fillRect/>
-          </a:stretch>
-        </p:blipFill>
-        <p:spPr>
-          <a:xfrm>
-            <a:off x="6467729" y="1223608"/>
-            <a:ext cx="3397383" cy="4410784"/>
-          </a:xfrm>
-          <a:prstGeom prst="rect">
-            <a:avLst/>
-          </a:prstGeom>
-        </p:spPr>
-      </p:pic>
-      <p:cxnSp>
-        <p:nvCxnSpPr>
-          <p:cNvPr id="8" name="Straight Connector 7">
-            <a:extLst>
-              <a:ext uri="{FF2B5EF4-FFF2-40B4-BE49-F238E27FC236}">
-                <a16:creationId xmlns:a16="http://schemas.microsoft.com/office/drawing/2014/main" id="{EE013C2F-8136-2184-5113-E1A2B9637D9B}"/>
-              </a:ext>
-            </a:extLst>
-          </p:cNvPr>
-          <p:cNvCxnSpPr>
-            <a:cxnSpLocks/>
-          </p:cNvCxnSpPr>
-          <p:nvPr/>
-        </p:nvCxnSpPr>
-        <p:spPr>
-          <a:xfrm>
-            <a:off x="1059873" y="1263976"/>
-            <a:ext cx="0" cy="4410784"/>
-          </a:xfrm>
-          <a:prstGeom prst="line">
-            <a:avLst/>
-          </a:prstGeom>
-          <a:ln w="73025">
-            <a:solidFill>
-              <a:srgbClr val="002060"/>
-            </a:solidFill>
-          </a:ln>
-        </p:spPr>
-        <p:style>
-          <a:lnRef idx="1">
-            <a:schemeClr val="accent1"/>
-          </a:lnRef>
-          <a:fillRef idx="0">
-            <a:schemeClr val="accent1"/>
-          </a:fillRef>
-          <a:effectRef idx="0">
-            <a:schemeClr val="accent1"/>
-          </a:effectRef>
-          <a:fontRef idx="minor">
-            <a:schemeClr val="tx1"/>
-          </a:fontRef>
-        </p:style>
-      </p:cxnSp>
-      <p:sp>
-        <p:nvSpPr>
-          <p:cNvPr id="12" name="Date Placeholder 2">
-            <a:extLst>
-              <a:ext uri="{FF2B5EF4-FFF2-40B4-BE49-F238E27FC236}">
-                <a16:creationId xmlns:a16="http://schemas.microsoft.com/office/drawing/2014/main" id="{825445C4-6081-57DA-FE4A-D4B0BEA91E1B}"/>
-              </a:ext>
-            </a:extLst>
-          </p:cNvPr>
-          <p:cNvSpPr>
-            <a:spLocks noGrp="1"/>
-          </p:cNvSpPr>
-          <p:nvPr>
-            <p:ph type="dt" sz="half" idx="10"/>
-          </p:nvPr>
-        </p:nvSpPr>
-        <p:spPr>
-          <a:xfrm>
-            <a:off x="292608" y="6356349"/>
-            <a:ext cx="3085338" cy="365125"/>
+            <a:off x="1028700" y="6356350"/>
+            <a:ext cx="6210300" cy="365125"/>
           </a:xfrm>
         </p:spPr>
         <p:txBody>
@@ -12291,17 +12819,17 @@
                   </a:schemeClr>
                 </a:solidFill>
               </a:rPr>
-              <a:t>Neural Architecture Search &amp; Knowledge Distillation</a:t>
-            </a:r>
-          </a:p>
-        </p:txBody>
-      </p:sp>
-      <p:sp>
-        <p:nvSpPr>
-          <p:cNvPr id="13" name="Footer Placeholder 3">
-            <a:extLst>
-              <a:ext uri="{FF2B5EF4-FFF2-40B4-BE49-F238E27FC236}">
-                <a16:creationId xmlns:a16="http://schemas.microsoft.com/office/drawing/2014/main" id="{39546B38-531B-4070-3AAD-30EB1D9CDA2E}"/>
+              <a:t>International University Of Applied Sciences</a:t>
+            </a:r>
+          </a:p>
+        </p:txBody>
+      </p:sp>
+      <p:sp>
+        <p:nvSpPr>
+          <p:cNvPr id="3" name="Date Placeholder 2">
+            <a:extLst>
+              <a:ext uri="{FF2B5EF4-FFF2-40B4-BE49-F238E27FC236}">
+                <a16:creationId xmlns:a16="http://schemas.microsoft.com/office/drawing/2014/main" id="{8B0DD3C9-E5D2-AE60-3AFE-8A43297A9FBC}"/>
               </a:ext>
             </a:extLst>
           </p:cNvPr>
@@ -12309,13 +12837,13 @@
             <a:spLocks noGrp="1"/>
           </p:cNvSpPr>
           <p:nvPr>
-            <p:ph type="ftr" sz="quarter" idx="11"/>
+            <p:ph type="dt" sz="half" idx="10"/>
           </p:nvPr>
         </p:nvSpPr>
         <p:spPr>
           <a:xfrm>
-            <a:off x="4913744" y="6356350"/>
-            <a:ext cx="2325255" cy="365125"/>
+            <a:off x="292608" y="6356349"/>
+            <a:ext cx="3085338" cy="365125"/>
           </a:xfrm>
         </p:spPr>
         <p:txBody>
@@ -12340,167 +12868,143 @@
                   </a:schemeClr>
                 </a:solidFill>
               </a:rPr>
-              <a:t>International University Of Applied Sciences</a:t>
-            </a:r>
-          </a:p>
-        </p:txBody>
-      </p:sp>
-      <p:pic>
-        <p:nvPicPr>
-          <p:cNvPr id="9" name="Picture 8">
-            <a:extLst>
-              <a:ext uri="{FF2B5EF4-FFF2-40B4-BE49-F238E27FC236}">
-                <a16:creationId xmlns:a16="http://schemas.microsoft.com/office/drawing/2014/main" id="{8D31FA89-38B3-0FA8-A8D8-795F1ED5F59B}"/>
-              </a:ext>
-            </a:extLst>
-          </p:cNvPr>
-          <p:cNvPicPr>
-            <a:picLocks noChangeAspect="1"/>
-          </p:cNvPicPr>
+              <a:t>Neural Architecture Search &amp; Knowledge Distillation</a:t>
+            </a:r>
+          </a:p>
+        </p:txBody>
+      </p:sp>
+      <p:sp>
+        <p:nvSpPr>
+          <p:cNvPr id="5" name="Slide Number Placeholder 4">
+            <a:extLst>
+              <a:ext uri="{FF2B5EF4-FFF2-40B4-BE49-F238E27FC236}">
+                <a16:creationId xmlns:a16="http://schemas.microsoft.com/office/drawing/2014/main" id="{80A790D5-177D-B6A2-0E90-81EF4FE37C9F}"/>
+              </a:ext>
+            </a:extLst>
+          </p:cNvPr>
+          <p:cNvSpPr>
+            <a:spLocks noGrp="1"/>
+          </p:cNvSpPr>
+          <p:nvPr>
+            <p:ph type="sldNum" sz="quarter" idx="12"/>
+          </p:nvPr>
+        </p:nvSpPr>
+        <p:spPr>
+          <a:xfrm>
+            <a:off x="11034184" y="6356350"/>
+            <a:ext cx="514349" cy="365125"/>
+          </a:xfrm>
+        </p:spPr>
+        <p:txBody>
+          <a:bodyPr>
+            <a:normAutofit/>
+          </a:bodyPr>
+          <a:lstStyle/>
+          <a:p>
+            <a:pPr>
+              <a:spcAft>
+                <a:spcPts val="600"/>
+              </a:spcAft>
+            </a:pPr>
+            <a:fld id="{C98AED0B-3B00-448B-836B-316F7AA19B4B}" type="slidenum">
+              <a:rPr lang="en-US">
+                <a:solidFill>
+                  <a:schemeClr val="tx1">
+                    <a:alpha val="80000"/>
+                  </a:schemeClr>
+                </a:solidFill>
+              </a:rPr>
+              <a:pPr>
+                <a:spcAft>
+                  <a:spcPts val="600"/>
+                </a:spcAft>
+              </a:pPr>
+              <a:t>15</a:t>
+            </a:fld>
+            <a:endParaRPr lang="en-US">
+              <a:solidFill>
+                <a:schemeClr val="tx1">
+                  <a:alpha val="80000"/>
+                </a:schemeClr>
+              </a:solidFill>
+            </a:endParaRPr>
+          </a:p>
+        </p:txBody>
+      </p:sp>
+      <p:sp>
+        <p:nvSpPr>
+          <p:cNvPr id="8" name="Title 1">
+            <a:extLst>
+              <a:ext uri="{FF2B5EF4-FFF2-40B4-BE49-F238E27FC236}">
+                <a16:creationId xmlns:a16="http://schemas.microsoft.com/office/drawing/2014/main" id="{58FF4C60-14F0-104E-A6FA-3FCA6169A054}"/>
+              </a:ext>
+            </a:extLst>
+          </p:cNvPr>
+          <p:cNvSpPr txBox="1">
+            <a:spLocks/>
+          </p:cNvSpPr>
           <p:nvPr/>
-        </p:nvPicPr>
-        <p:blipFill>
-          <a:blip r:embed="rId3"/>
-          <a:stretch>
-            <a:fillRect/>
-          </a:stretch>
-        </p:blipFill>
-        <p:spPr>
-          <a:xfrm>
-            <a:off x="1223949" y="1263976"/>
-            <a:ext cx="3214801" cy="4410784"/>
+        </p:nvSpPr>
+        <p:spPr>
+          <a:xfrm>
+            <a:off x="838200" y="365126"/>
+            <a:ext cx="10515600" cy="638922"/>
           </a:xfrm>
           <a:prstGeom prst="rect">
             <a:avLst/>
           </a:prstGeom>
         </p:spPr>
-      </p:pic>
-      <p:cxnSp>
-        <p:nvCxnSpPr>
-          <p:cNvPr id="14" name="Straight Arrow Connector 13">
-            <a:extLst>
-              <a:ext uri="{FF2B5EF4-FFF2-40B4-BE49-F238E27FC236}">
-                <a16:creationId xmlns:a16="http://schemas.microsoft.com/office/drawing/2014/main" id="{8254662D-9590-E3D1-B66B-D209FC73BA6B}"/>
-              </a:ext>
-            </a:extLst>
-          </p:cNvPr>
-          <p:cNvCxnSpPr/>
-          <p:nvPr/>
-        </p:nvCxnSpPr>
-        <p:spPr>
-          <a:xfrm>
-            <a:off x="4913744" y="3200400"/>
-            <a:ext cx="1078992" cy="0"/>
-          </a:xfrm>
-          <a:prstGeom prst="straightConnector1">
-            <a:avLst/>
-          </a:prstGeom>
-          <a:ln w="82550">
-            <a:solidFill>
-              <a:srgbClr val="002060"/>
-            </a:solidFill>
-            <a:tailEnd type="triangle"/>
-          </a:ln>
-        </p:spPr>
-        <p:style>
-          <a:lnRef idx="1">
-            <a:schemeClr val="accent1"/>
-          </a:lnRef>
-          <a:fillRef idx="0">
-            <a:schemeClr val="accent1"/>
-          </a:fillRef>
-          <a:effectRef idx="0">
-            <a:schemeClr val="accent1"/>
-          </a:effectRef>
-          <a:fontRef idx="minor">
-            <a:schemeClr val="tx1"/>
-          </a:fontRef>
-        </p:style>
-      </p:cxnSp>
-      <p:sp>
-        <p:nvSpPr>
-          <p:cNvPr id="15" name="TextBox 14">
-            <a:extLst>
-              <a:ext uri="{FF2B5EF4-FFF2-40B4-BE49-F238E27FC236}">
-                <a16:creationId xmlns:a16="http://schemas.microsoft.com/office/drawing/2014/main" id="{7F0BB5C8-C136-C6A7-54EE-1C836AB4222A}"/>
-              </a:ext>
-            </a:extLst>
-          </p:cNvPr>
-          <p:cNvSpPr txBox="1"/>
-          <p:nvPr/>
-        </p:nvSpPr>
-        <p:spPr>
-          <a:xfrm>
-            <a:off x="1579417" y="5772772"/>
-            <a:ext cx="1941557" cy="276999"/>
-          </a:xfrm>
-          <a:prstGeom prst="rect">
-            <a:avLst/>
-          </a:prstGeom>
-          <a:noFill/>
-        </p:spPr>
-        <p:txBody>
-          <a:bodyPr wrap="none" rtlCol="0">
-            <a:spAutoFit/>
+        <p:txBody>
+          <a:bodyPr vert="horz" lIns="91440" tIns="45720" rIns="91440" bIns="45720" rtlCol="0" anchor="ctr">
+            <a:noAutofit/>
           </a:bodyPr>
-          <a:lstStyle/>
-          <a:p>
-            <a:r>
-              <a:rPr lang="en-US" sz="1200" dirty="0">
+          <a:lstStyle>
+            <a:lvl1pPr algn="l" defTabSz="914400" rtl="0" eaLnBrk="1" latinLnBrk="0" hangingPunct="1">
+              <a:lnSpc>
+                <a:spcPct val="90000"/>
+              </a:lnSpc>
+              <a:spcBef>
+                <a:spcPct val="0"/>
+              </a:spcBef>
+              <a:buNone/>
+              <a:defRPr sz="4400" kern="1200">
+                <a:solidFill>
+                  <a:schemeClr val="tx1"/>
+                </a:solidFill>
+                <a:latin typeface="+mj-lt"/>
+                <a:ea typeface="+mj-ea"/>
+                <a:cs typeface="+mj-cs"/>
+              </a:defRPr>
+            </a:lvl1pPr>
+          </a:lstStyle>
+          <a:p>
+            <a:r>
+              <a:rPr lang="en-US" sz="2800" b="1" dirty="0">
                 <a:solidFill>
                   <a:srgbClr val="002060"/>
                 </a:solidFill>
-                <a:latin typeface="Abadi" panose="020F0502020204030204" pitchFamily="34" charset="0"/>
-              </a:rPr>
-              <a:t>NAS BEST MODEL CONFIG</a:t>
-            </a:r>
-          </a:p>
-        </p:txBody>
-      </p:sp>
-      <p:sp>
-        <p:nvSpPr>
-          <p:cNvPr id="16" name="TextBox 15">
-            <a:extLst>
-              <a:ext uri="{FF2B5EF4-FFF2-40B4-BE49-F238E27FC236}">
-                <a16:creationId xmlns:a16="http://schemas.microsoft.com/office/drawing/2014/main" id="{15451CCB-06B5-B220-0E8A-15536D177A37}"/>
-              </a:ext>
-            </a:extLst>
-          </p:cNvPr>
-          <p:cNvSpPr txBox="1"/>
-          <p:nvPr/>
-        </p:nvSpPr>
-        <p:spPr>
-          <a:xfrm>
-            <a:off x="7006296" y="5772771"/>
-            <a:ext cx="2523448" cy="276999"/>
-          </a:xfrm>
-          <a:prstGeom prst="rect">
-            <a:avLst/>
-          </a:prstGeom>
-          <a:noFill/>
-        </p:spPr>
-        <p:txBody>
-          <a:bodyPr wrap="none" rtlCol="0">
-            <a:spAutoFit/>
-          </a:bodyPr>
-          <a:lstStyle/>
-          <a:p>
-            <a:r>
-              <a:rPr lang="en-US" sz="1200" dirty="0">
-                <a:solidFill>
-                  <a:srgbClr val="002060"/>
-                </a:solidFill>
-                <a:latin typeface="Abadi" panose="020F0502020204030204" pitchFamily="34" charset="0"/>
-              </a:rPr>
-              <a:t>YOLOV8 CUSTOM CONFIGURATION</a:t>
-            </a:r>
+                <a:latin typeface="Arial" panose="020B0604020202020204" pitchFamily="34" charset="0"/>
+                <a:cs typeface="Arial" panose="020B0604020202020204" pitchFamily="34" charset="0"/>
+              </a:rPr>
+              <a:t>NAS Training Configuration </a:t>
+            </a:r>
+            <a:endParaRPr lang="en-US" sz="2700" b="1" dirty="0">
+              <a:solidFill>
+                <a:srgbClr val="002060"/>
+              </a:solidFill>
+              <a:highlight>
+                <a:srgbClr val="FFFF00"/>
+              </a:highlight>
+              <a:latin typeface="Arial" panose="020B0604020202020204" pitchFamily="34" charset="0"/>
+              <a:cs typeface="Arial" panose="020B0604020202020204" pitchFamily="34" charset="0"/>
+            </a:endParaRPr>
           </a:p>
         </p:txBody>
       </p:sp>
     </p:spTree>
     <p:extLst>
       <p:ext uri="{BB962C8B-B14F-4D97-AF65-F5344CB8AC3E}">
-        <p14:creationId xmlns:p14="http://schemas.microsoft.com/office/powerpoint/2010/main" val="1254977674"/>
+        <p14:creationId xmlns:p14="http://schemas.microsoft.com/office/powerpoint/2010/main" val="1995856105"/>
       </p:ext>
     </p:extLst>
   </p:cSld>
@@ -12731,14 +13235,24 @@
           </a:lstStyle>
           <a:p>
             <a:r>
-              <a:rPr lang="en-US" sz="2700" b="1" dirty="0">
+              <a:rPr lang="en-US" sz="2800" b="1" dirty="0">
                 <a:solidFill>
                   <a:srgbClr val="002060"/>
                 </a:solidFill>
                 <a:latin typeface="Arial" panose="020B0604020202020204" pitchFamily="34" charset="0"/>
                 <a:cs typeface="Arial" panose="020B0604020202020204" pitchFamily="34" charset="0"/>
               </a:rPr>
-              <a:t>Knowledge Distillation Teacher Analysis</a:t>
+              <a:t>NAS Best Model Selection - </a:t>
+            </a:r>
+            <a:r>
+              <a:rPr lang="en-US" sz="2400" b="1" dirty="0">
+                <a:solidFill>
+                  <a:srgbClr val="002060"/>
+                </a:solidFill>
+                <a:latin typeface="Arial" panose="020B0604020202020204" pitchFamily="34" charset="0"/>
+                <a:cs typeface="Arial" panose="020B0604020202020204" pitchFamily="34" charset="0"/>
+              </a:rPr>
+              <a:t>Key Metrics </a:t>
             </a:r>
             <a:br>
               <a:rPr lang="en-US" sz="2700" b="1" dirty="0">
@@ -12762,82 +13276,10 @@
           </a:p>
         </p:txBody>
       </p:sp>
-      <p:pic>
-        <p:nvPicPr>
-          <p:cNvPr id="6" name="Picture 5" descr="A group of graphs showing the growth of a number of individuals">
-            <a:extLst>
-              <a:ext uri="{FF2B5EF4-FFF2-40B4-BE49-F238E27FC236}">
-                <a16:creationId xmlns:a16="http://schemas.microsoft.com/office/drawing/2014/main" id="{63ACD4ED-E6D0-6A63-9216-3E1FE6CB65EE}"/>
-              </a:ext>
-            </a:extLst>
-          </p:cNvPr>
-          <p:cNvPicPr>
-            <a:picLocks noChangeAspect="1"/>
-          </p:cNvPicPr>
-          <p:nvPr/>
-        </p:nvPicPr>
-        <p:blipFill>
-          <a:blip r:embed="rId2">
-            <a:extLst>
-              <a:ext uri="{28A0092B-C50C-407E-A947-70E740481C1C}">
-                <a14:useLocalDpi xmlns:a14="http://schemas.microsoft.com/office/drawing/2010/main" val="0"/>
-              </a:ext>
-            </a:extLst>
-          </a:blip>
-          <a:stretch>
-            <a:fillRect/>
-          </a:stretch>
-        </p:blipFill>
-        <p:spPr>
-          <a:xfrm>
-            <a:off x="5081058" y="1819600"/>
-            <a:ext cx="6210300" cy="3105150"/>
-          </a:xfrm>
-          <a:prstGeom prst="rect">
-            <a:avLst/>
-          </a:prstGeom>
-        </p:spPr>
-      </p:pic>
-      <p:pic>
-        <p:nvPicPr>
-          <p:cNvPr id="9" name="Picture 8" descr="A screenshot of a graph&#10;&#10;AI-generated content may be incorrect.">
-            <a:extLst>
-              <a:ext uri="{FF2B5EF4-FFF2-40B4-BE49-F238E27FC236}">
-                <a16:creationId xmlns:a16="http://schemas.microsoft.com/office/drawing/2014/main" id="{4542966E-8336-4856-40AC-A1E33F3CE853}"/>
-              </a:ext>
-            </a:extLst>
-          </p:cNvPr>
-          <p:cNvPicPr>
-            <a:picLocks noChangeAspect="1"/>
-          </p:cNvPicPr>
-          <p:nvPr/>
-        </p:nvPicPr>
-        <p:blipFill>
-          <a:blip r:embed="rId3">
-            <a:extLst>
-              <a:ext uri="{28A0092B-C50C-407E-A947-70E740481C1C}">
-                <a14:useLocalDpi xmlns:a14="http://schemas.microsoft.com/office/drawing/2010/main" val="0"/>
-              </a:ext>
-            </a:extLst>
-          </a:blip>
-          <a:stretch>
-            <a:fillRect/>
-          </a:stretch>
-        </p:blipFill>
-        <p:spPr>
-          <a:xfrm>
-            <a:off x="627484" y="1933250"/>
-            <a:ext cx="3988667" cy="2991500"/>
-          </a:xfrm>
-          <a:prstGeom prst="rect">
-            <a:avLst/>
-          </a:prstGeom>
-        </p:spPr>
-      </p:pic>
     </p:spTree>
     <p:extLst>
       <p:ext uri="{BB962C8B-B14F-4D97-AF65-F5344CB8AC3E}">
-        <p14:creationId xmlns:p14="http://schemas.microsoft.com/office/powerpoint/2010/main" val="2461246348"/>
+        <p14:creationId xmlns:p14="http://schemas.microsoft.com/office/powerpoint/2010/main" val="3443018611"/>
       </p:ext>
     </p:extLst>
   </p:cSld>
@@ -13068,15 +13510,24 @@
           </a:lstStyle>
           <a:p>
             <a:r>
-              <a:rPr lang="en-US" sz="2700" b="1" dirty="0">
+              <a:rPr lang="en-US" sz="2800" b="1" dirty="0">
                 <a:solidFill>
                   <a:srgbClr val="002060"/>
                 </a:solidFill>
                 <a:latin typeface="Arial" panose="020B0604020202020204" pitchFamily="34" charset="0"/>
                 <a:cs typeface="Arial" panose="020B0604020202020204" pitchFamily="34" charset="0"/>
               </a:rPr>
-              <a:t>Knowledge Distillation Custom Student Analysis</a:t>
-            </a:r>
+              <a:t>YoloV8 Neural Architecture Search</a:t>
+            </a:r>
+            <a:br>
+              <a:rPr lang="en-US" sz="2700" b="1" dirty="0">
+                <a:solidFill>
+                  <a:srgbClr val="002060"/>
+                </a:solidFill>
+                <a:latin typeface="Arial" panose="020B0604020202020204" pitchFamily="34" charset="0"/>
+                <a:cs typeface="Arial" panose="020B0604020202020204" pitchFamily="34" charset="0"/>
+              </a:rPr>
+            </a:br>
             <a:endParaRPr lang="en-US" sz="2700" b="1" dirty="0">
               <a:solidFill>
                 <a:srgbClr val="002060"/>
@@ -13090,82 +13541,10 @@
           </a:p>
         </p:txBody>
       </p:sp>
-      <p:pic>
-        <p:nvPicPr>
-          <p:cNvPr id="6" name="Picture 5" descr="A screenshot of a computer&#10;&#10;AI-generated content may be incorrect.">
-            <a:extLst>
-              <a:ext uri="{FF2B5EF4-FFF2-40B4-BE49-F238E27FC236}">
-                <a16:creationId xmlns:a16="http://schemas.microsoft.com/office/drawing/2014/main" id="{1665D7E2-FC4E-2C1D-6510-DC66F0BF1724}"/>
-              </a:ext>
-            </a:extLst>
-          </p:cNvPr>
-          <p:cNvPicPr>
-            <a:picLocks noChangeAspect="1"/>
-          </p:cNvPicPr>
-          <p:nvPr/>
-        </p:nvPicPr>
-        <p:blipFill>
-          <a:blip r:embed="rId2">
-            <a:extLst>
-              <a:ext uri="{28A0092B-C50C-407E-A947-70E740481C1C}">
-                <a14:useLocalDpi xmlns:a14="http://schemas.microsoft.com/office/drawing/2010/main" val="0"/>
-              </a:ext>
-            </a:extLst>
-          </a:blip>
-          <a:stretch>
-            <a:fillRect/>
-          </a:stretch>
-        </p:blipFill>
-        <p:spPr>
-          <a:xfrm>
-            <a:off x="419100" y="1828800"/>
-            <a:ext cx="4267200" cy="3200400"/>
-          </a:xfrm>
-          <a:prstGeom prst="rect">
-            <a:avLst/>
-          </a:prstGeom>
-        </p:spPr>
-      </p:pic>
-      <p:pic>
-        <p:nvPicPr>
-          <p:cNvPr id="11" name="Picture 10" descr="A group of graphs showing the growth of a number of individuals">
-            <a:extLst>
-              <a:ext uri="{FF2B5EF4-FFF2-40B4-BE49-F238E27FC236}">
-                <a16:creationId xmlns:a16="http://schemas.microsoft.com/office/drawing/2014/main" id="{9F1FF512-A1EA-9526-5986-395D035AF708}"/>
-              </a:ext>
-            </a:extLst>
-          </p:cNvPr>
-          <p:cNvPicPr>
-            <a:picLocks noChangeAspect="1"/>
-          </p:cNvPicPr>
-          <p:nvPr/>
-        </p:nvPicPr>
-        <p:blipFill>
-          <a:blip r:embed="rId3">
-            <a:extLst>
-              <a:ext uri="{28A0092B-C50C-407E-A947-70E740481C1C}">
-                <a14:useLocalDpi xmlns:a14="http://schemas.microsoft.com/office/drawing/2010/main" val="0"/>
-              </a:ext>
-            </a:extLst>
-          </a:blip>
-          <a:stretch>
-            <a:fillRect/>
-          </a:stretch>
-        </p:blipFill>
-        <p:spPr>
-          <a:xfrm>
-            <a:off x="4972050" y="1828800"/>
-            <a:ext cx="6381750" cy="3190875"/>
-          </a:xfrm>
-          <a:prstGeom prst="rect">
-            <a:avLst/>
-          </a:prstGeom>
-        </p:spPr>
-      </p:pic>
     </p:spTree>
     <p:extLst>
       <p:ext uri="{BB962C8B-B14F-4D97-AF65-F5344CB8AC3E}">
-        <p14:creationId xmlns:p14="http://schemas.microsoft.com/office/powerpoint/2010/main" val="2988481813"/>
+        <p14:creationId xmlns:p14="http://schemas.microsoft.com/office/powerpoint/2010/main" val="1118124791"/>
       </p:ext>
     </p:extLst>
   </p:cSld>
@@ -13194,10 +13573,10 @@
       </p:grpSpPr>
       <p:sp>
         <p:nvSpPr>
-          <p:cNvPr id="4" name="Footer Placeholder 3">
-            <a:extLst>
-              <a:ext uri="{FF2B5EF4-FFF2-40B4-BE49-F238E27FC236}">
-                <a16:creationId xmlns:a16="http://schemas.microsoft.com/office/drawing/2014/main" id="{B8027B5C-B1A1-0376-4174-FFF61C554492}"/>
+          <p:cNvPr id="2" name="Title 1">
+            <a:extLst>
+              <a:ext uri="{FF2B5EF4-FFF2-40B4-BE49-F238E27FC236}">
+                <a16:creationId xmlns:a16="http://schemas.microsoft.com/office/drawing/2014/main" id="{ED3F830A-0841-2B85-58E5-6CE63A3347BC}"/>
               </a:ext>
             </a:extLst>
           </p:cNvPr>
@@ -13205,13 +13584,157 @@
             <a:spLocks noGrp="1"/>
           </p:cNvSpPr>
           <p:nvPr>
-            <p:ph type="ftr" sz="quarter" idx="11"/>
+            <p:ph type="title"/>
           </p:nvPr>
         </p:nvSpPr>
         <p:spPr>
           <a:xfrm>
-            <a:off x="1028700" y="6356350"/>
-            <a:ext cx="6210300" cy="365125"/>
+            <a:off x="838200" y="365126"/>
+            <a:ext cx="10515600" cy="638922"/>
+          </a:xfrm>
+        </p:spPr>
+        <p:txBody>
+          <a:bodyPr>
+            <a:normAutofit/>
+          </a:bodyPr>
+          <a:lstStyle/>
+          <a:p>
+            <a:pPr algn="l"/>
+            <a:r>
+              <a:rPr lang="en-US" sz="2700" b="1" dirty="0">
+                <a:solidFill>
+                  <a:srgbClr val="002060"/>
+                </a:solidFill>
+                <a:latin typeface="Arial" panose="020B0604020202020204" pitchFamily="34" charset="0"/>
+                <a:cs typeface="Arial" panose="020B0604020202020204" pitchFamily="34" charset="0"/>
+              </a:rPr>
+              <a:t>Yolov8n Custom Config</a:t>
+            </a:r>
+          </a:p>
+        </p:txBody>
+      </p:sp>
+      <p:sp>
+        <p:nvSpPr>
+          <p:cNvPr id="5" name="Slide Number Placeholder 4">
+            <a:extLst>
+              <a:ext uri="{FF2B5EF4-FFF2-40B4-BE49-F238E27FC236}">
+                <a16:creationId xmlns:a16="http://schemas.microsoft.com/office/drawing/2014/main" id="{80A790D5-177D-B6A2-0E90-81EF4FE37C9F}"/>
+              </a:ext>
+            </a:extLst>
+          </p:cNvPr>
+          <p:cNvSpPr>
+            <a:spLocks noGrp="1"/>
+          </p:cNvSpPr>
+          <p:nvPr>
+            <p:ph type="sldNum" sz="quarter" idx="12"/>
+          </p:nvPr>
+        </p:nvSpPr>
+        <p:spPr/>
+        <p:txBody>
+          <a:bodyPr/>
+          <a:lstStyle/>
+          <a:p>
+            <a:fld id="{C98AED0B-3B00-448B-836B-316F7AA19B4B}" type="slidenum">
+              <a:rPr lang="en-US" smtClean="0"/>
+              <a:t>18</a:t>
+            </a:fld>
+            <a:endParaRPr lang="en-US"/>
+          </a:p>
+        </p:txBody>
+      </p:sp>
+      <p:pic>
+        <p:nvPicPr>
+          <p:cNvPr id="7" name="Picture 6">
+            <a:extLst>
+              <a:ext uri="{FF2B5EF4-FFF2-40B4-BE49-F238E27FC236}">
+                <a16:creationId xmlns:a16="http://schemas.microsoft.com/office/drawing/2014/main" id="{39B16431-2563-E35B-71C8-D6A78969B6E1}"/>
+              </a:ext>
+            </a:extLst>
+          </p:cNvPr>
+          <p:cNvPicPr>
+            <a:picLocks noChangeAspect="1"/>
+          </p:cNvPicPr>
+          <p:nvPr/>
+        </p:nvPicPr>
+        <p:blipFill>
+          <a:blip r:embed="rId2"/>
+          <a:stretch>
+            <a:fillRect/>
+          </a:stretch>
+        </p:blipFill>
+        <p:spPr>
+          <a:xfrm>
+            <a:off x="6467729" y="1223608"/>
+            <a:ext cx="3397383" cy="4410784"/>
+          </a:xfrm>
+          <a:prstGeom prst="rect">
+            <a:avLst/>
+          </a:prstGeom>
+        </p:spPr>
+      </p:pic>
+      <p:cxnSp>
+        <p:nvCxnSpPr>
+          <p:cNvPr id="8" name="Straight Connector 7">
+            <a:extLst>
+              <a:ext uri="{FF2B5EF4-FFF2-40B4-BE49-F238E27FC236}">
+                <a16:creationId xmlns:a16="http://schemas.microsoft.com/office/drawing/2014/main" id="{EE013C2F-8136-2184-5113-E1A2B9637D9B}"/>
+              </a:ext>
+            </a:extLst>
+          </p:cNvPr>
+          <p:cNvCxnSpPr>
+            <a:cxnSpLocks/>
+          </p:cNvCxnSpPr>
+          <p:nvPr/>
+        </p:nvCxnSpPr>
+        <p:spPr>
+          <a:xfrm>
+            <a:off x="1059873" y="1263976"/>
+            <a:ext cx="0" cy="4410784"/>
+          </a:xfrm>
+          <a:prstGeom prst="line">
+            <a:avLst/>
+          </a:prstGeom>
+          <a:ln w="73025">
+            <a:solidFill>
+              <a:srgbClr val="002060"/>
+            </a:solidFill>
+          </a:ln>
+        </p:spPr>
+        <p:style>
+          <a:lnRef idx="1">
+            <a:schemeClr val="accent1"/>
+          </a:lnRef>
+          <a:fillRef idx="0">
+            <a:schemeClr val="accent1"/>
+          </a:fillRef>
+          <a:effectRef idx="0">
+            <a:schemeClr val="accent1"/>
+          </a:effectRef>
+          <a:fontRef idx="minor">
+            <a:schemeClr val="tx1"/>
+          </a:fontRef>
+        </p:style>
+      </p:cxnSp>
+      <p:sp>
+        <p:nvSpPr>
+          <p:cNvPr id="12" name="Date Placeholder 2">
+            <a:extLst>
+              <a:ext uri="{FF2B5EF4-FFF2-40B4-BE49-F238E27FC236}">
+                <a16:creationId xmlns:a16="http://schemas.microsoft.com/office/drawing/2014/main" id="{825445C4-6081-57DA-FE4A-D4B0BEA91E1B}"/>
+              </a:ext>
+            </a:extLst>
+          </p:cNvPr>
+          <p:cNvSpPr>
+            <a:spLocks noGrp="1"/>
+          </p:cNvSpPr>
+          <p:nvPr>
+            <p:ph type="dt" sz="half" idx="10"/>
+          </p:nvPr>
+        </p:nvSpPr>
+        <p:spPr>
+          <a:xfrm>
+            <a:off x="292608" y="6356349"/>
+            <a:ext cx="3085338" cy="365125"/>
           </a:xfrm>
         </p:spPr>
         <p:txBody>
@@ -13236,17 +13759,17 @@
                   </a:schemeClr>
                 </a:solidFill>
               </a:rPr>
-              <a:t>International University Of Applied Sciences</a:t>
-            </a:r>
-          </a:p>
-        </p:txBody>
-      </p:sp>
-      <p:sp>
-        <p:nvSpPr>
-          <p:cNvPr id="3" name="Date Placeholder 2">
-            <a:extLst>
-              <a:ext uri="{FF2B5EF4-FFF2-40B4-BE49-F238E27FC236}">
-                <a16:creationId xmlns:a16="http://schemas.microsoft.com/office/drawing/2014/main" id="{8B0DD3C9-E5D2-AE60-3AFE-8A43297A9FBC}"/>
+              <a:t>Neural Architecture Search &amp; Knowledge Distillation</a:t>
+            </a:r>
+          </a:p>
+        </p:txBody>
+      </p:sp>
+      <p:sp>
+        <p:nvSpPr>
+          <p:cNvPr id="13" name="Footer Placeholder 3">
+            <a:extLst>
+              <a:ext uri="{FF2B5EF4-FFF2-40B4-BE49-F238E27FC236}">
+                <a16:creationId xmlns:a16="http://schemas.microsoft.com/office/drawing/2014/main" id="{39546B38-531B-4070-3AAD-30EB1D9CDA2E}"/>
               </a:ext>
             </a:extLst>
           </p:cNvPr>
@@ -13254,13 +13777,13 @@
             <a:spLocks noGrp="1"/>
           </p:cNvSpPr>
           <p:nvPr>
-            <p:ph type="dt" sz="half" idx="10"/>
+            <p:ph type="ftr" sz="quarter" idx="11"/>
           </p:nvPr>
         </p:nvSpPr>
         <p:spPr>
           <a:xfrm>
-            <a:off x="292608" y="6356349"/>
-            <a:ext cx="3085338" cy="365125"/>
+            <a:off x="4913744" y="6356350"/>
+            <a:ext cx="2325255" cy="365125"/>
           </a:xfrm>
         </p:spPr>
         <p:txBody>
@@ -13285,145 +13808,17 @@
                   </a:schemeClr>
                 </a:solidFill>
               </a:rPr>
-              <a:t>Neural Architecture Search &amp; Knowledge Distillation</a:t>
-            </a:r>
-          </a:p>
-        </p:txBody>
-      </p:sp>
-      <p:sp>
-        <p:nvSpPr>
-          <p:cNvPr id="5" name="Slide Number Placeholder 4">
-            <a:extLst>
-              <a:ext uri="{FF2B5EF4-FFF2-40B4-BE49-F238E27FC236}">
-                <a16:creationId xmlns:a16="http://schemas.microsoft.com/office/drawing/2014/main" id="{80A790D5-177D-B6A2-0E90-81EF4FE37C9F}"/>
-              </a:ext>
-            </a:extLst>
-          </p:cNvPr>
-          <p:cNvSpPr>
-            <a:spLocks noGrp="1"/>
-          </p:cNvSpPr>
-          <p:nvPr>
-            <p:ph type="sldNum" sz="quarter" idx="12"/>
-          </p:nvPr>
-        </p:nvSpPr>
-        <p:spPr>
-          <a:xfrm>
-            <a:off x="11034184" y="6356350"/>
-            <a:ext cx="514349" cy="365125"/>
-          </a:xfrm>
-        </p:spPr>
-        <p:txBody>
-          <a:bodyPr>
-            <a:normAutofit/>
-          </a:bodyPr>
-          <a:lstStyle/>
-          <a:p>
-            <a:pPr>
-              <a:spcAft>
-                <a:spcPts val="600"/>
-              </a:spcAft>
-            </a:pPr>
-            <a:fld id="{C98AED0B-3B00-448B-836B-316F7AA19B4B}" type="slidenum">
-              <a:rPr lang="en-US">
-                <a:solidFill>
-                  <a:schemeClr val="tx1">
-                    <a:alpha val="80000"/>
-                  </a:schemeClr>
-                </a:solidFill>
-              </a:rPr>
-              <a:pPr>
-                <a:spcAft>
-                  <a:spcPts val="600"/>
-                </a:spcAft>
-              </a:pPr>
-              <a:t>18</a:t>
-            </a:fld>
-            <a:endParaRPr lang="en-US">
-              <a:solidFill>
-                <a:schemeClr val="tx1">
-                  <a:alpha val="80000"/>
-                </a:schemeClr>
-              </a:solidFill>
-            </a:endParaRPr>
-          </a:p>
-        </p:txBody>
-      </p:sp>
-      <p:sp>
-        <p:nvSpPr>
-          <p:cNvPr id="8" name="Title 1">
-            <a:extLst>
-              <a:ext uri="{FF2B5EF4-FFF2-40B4-BE49-F238E27FC236}">
-                <a16:creationId xmlns:a16="http://schemas.microsoft.com/office/drawing/2014/main" id="{58FF4C60-14F0-104E-A6FA-3FCA6169A054}"/>
-              </a:ext>
-            </a:extLst>
-          </p:cNvPr>
-          <p:cNvSpPr txBox="1">
-            <a:spLocks/>
-          </p:cNvSpPr>
-          <p:nvPr/>
-        </p:nvSpPr>
-        <p:spPr>
-          <a:xfrm>
-            <a:off x="838200" y="365126"/>
-            <a:ext cx="10515600" cy="638922"/>
-          </a:xfrm>
-          <a:prstGeom prst="rect">
-            <a:avLst/>
-          </a:prstGeom>
-        </p:spPr>
-        <p:txBody>
-          <a:bodyPr vert="horz" lIns="91440" tIns="45720" rIns="91440" bIns="45720" rtlCol="0" anchor="ctr">
-            <a:noAutofit/>
-          </a:bodyPr>
-          <a:lstStyle>
-            <a:lvl1pPr algn="l" defTabSz="914400" rtl="0" eaLnBrk="1" latinLnBrk="0" hangingPunct="1">
-              <a:lnSpc>
-                <a:spcPct val="90000"/>
-              </a:lnSpc>
-              <a:spcBef>
-                <a:spcPct val="0"/>
-              </a:spcBef>
-              <a:buNone/>
-              <a:defRPr sz="4400" kern="1200">
-                <a:solidFill>
-                  <a:schemeClr val="tx1"/>
-                </a:solidFill>
-                <a:latin typeface="+mj-lt"/>
-                <a:ea typeface="+mj-ea"/>
-                <a:cs typeface="+mj-cs"/>
-              </a:defRPr>
-            </a:lvl1pPr>
-          </a:lstStyle>
-          <a:p>
-            <a:r>
-              <a:rPr lang="en-US" sz="2700" b="1" dirty="0">
-                <a:solidFill>
-                  <a:srgbClr val="002060"/>
-                </a:solidFill>
-                <a:latin typeface="Arial" panose="020B0604020202020204" pitchFamily="34" charset="0"/>
-                <a:cs typeface="Arial" panose="020B0604020202020204" pitchFamily="34" charset="0"/>
-              </a:rPr>
-              <a:t>Knowledge Distillation Yolov8n Analysis</a:t>
-            </a:r>
-            <a:endParaRPr lang="en-US" sz="2700" b="1" dirty="0">
-              <a:solidFill>
-                <a:srgbClr val="002060"/>
-              </a:solidFill>
-              <a:highlight>
-                <a:srgbClr val="FFFF00"/>
-              </a:highlight>
-              <a:latin typeface="Arial" panose="020B0604020202020204" pitchFamily="34" charset="0"/>
-              <a:cs typeface="Arial" panose="020B0604020202020204" pitchFamily="34" charset="0"/>
-            </a:endParaRPr>
+              <a:t>International University Of Applied Sciences</a:t>
+            </a:r>
           </a:p>
         </p:txBody>
       </p:sp>
       <p:pic>
         <p:nvPicPr>
-          <p:cNvPr id="7" name="Picture 6" descr="A screenshot of a graph&#10;&#10;AI-generated content may be incorrect.">
-            <a:extLst>
-              <a:ext uri="{FF2B5EF4-FFF2-40B4-BE49-F238E27FC236}">
-                <a16:creationId xmlns:a16="http://schemas.microsoft.com/office/drawing/2014/main" id="{A5B51E23-129E-8C8A-7964-7F2BE3137E6A}"/>
+          <p:cNvPr id="9" name="Picture 8">
+            <a:extLst>
+              <a:ext uri="{FF2B5EF4-FFF2-40B4-BE49-F238E27FC236}">
+                <a16:creationId xmlns:a16="http://schemas.microsoft.com/office/drawing/2014/main" id="{8D31FA89-38B3-0FA8-A8D8-795F1ED5F59B}"/>
               </a:ext>
             </a:extLst>
           </p:cNvPr>
@@ -13433,67 +13828,147 @@
           <p:nvPr/>
         </p:nvPicPr>
         <p:blipFill>
-          <a:blip r:embed="rId2">
-            <a:extLst>
-              <a:ext uri="{28A0092B-C50C-407E-A947-70E740481C1C}">
-                <a14:useLocalDpi xmlns:a14="http://schemas.microsoft.com/office/drawing/2010/main" val="0"/>
-              </a:ext>
-            </a:extLst>
-          </a:blip>
+          <a:blip r:embed="rId3"/>
           <a:stretch>
             <a:fillRect/>
           </a:stretch>
         </p:blipFill>
         <p:spPr>
           <a:xfrm>
-            <a:off x="428624" y="1810940"/>
-            <a:ext cx="4314825" cy="3236119"/>
+            <a:off x="1223949" y="1263976"/>
+            <a:ext cx="3214801" cy="4410784"/>
           </a:xfrm>
           <a:prstGeom prst="rect">
             <a:avLst/>
           </a:prstGeom>
         </p:spPr>
       </p:pic>
-      <p:pic>
-        <p:nvPicPr>
-          <p:cNvPr id="10" name="Picture 9" descr="A group of graphs showing the growth of a number of individuals">
-            <a:extLst>
-              <a:ext uri="{FF2B5EF4-FFF2-40B4-BE49-F238E27FC236}">
-                <a16:creationId xmlns:a16="http://schemas.microsoft.com/office/drawing/2014/main" id="{548DEBB6-8B07-2581-D48E-5EE0B4DCF3A3}"/>
-              </a:ext>
-            </a:extLst>
-          </p:cNvPr>
-          <p:cNvPicPr>
-            <a:picLocks noChangeAspect="1"/>
-          </p:cNvPicPr>
+      <p:cxnSp>
+        <p:nvCxnSpPr>
+          <p:cNvPr id="14" name="Straight Arrow Connector 13">
+            <a:extLst>
+              <a:ext uri="{FF2B5EF4-FFF2-40B4-BE49-F238E27FC236}">
+                <a16:creationId xmlns:a16="http://schemas.microsoft.com/office/drawing/2014/main" id="{8254662D-9590-E3D1-B66B-D209FC73BA6B}"/>
+              </a:ext>
+            </a:extLst>
+          </p:cNvPr>
+          <p:cNvCxnSpPr/>
           <p:nvPr/>
-        </p:nvPicPr>
-        <p:blipFill>
-          <a:blip r:embed="rId3">
-            <a:extLst>
-              <a:ext uri="{28A0092B-C50C-407E-A947-70E740481C1C}">
-                <a14:useLocalDpi xmlns:a14="http://schemas.microsoft.com/office/drawing/2010/main" val="0"/>
-              </a:ext>
-            </a:extLst>
-          </a:blip>
-          <a:stretch>
-            <a:fillRect/>
-          </a:stretch>
-        </p:blipFill>
-        <p:spPr>
-          <a:xfrm>
-            <a:off x="4850073" y="1810940"/>
-            <a:ext cx="6698460" cy="3349230"/>
+        </p:nvCxnSpPr>
+        <p:spPr>
+          <a:xfrm>
+            <a:off x="4913744" y="3200400"/>
+            <a:ext cx="1078992" cy="0"/>
+          </a:xfrm>
+          <a:prstGeom prst="straightConnector1">
+            <a:avLst/>
+          </a:prstGeom>
+          <a:ln w="82550">
+            <a:solidFill>
+              <a:srgbClr val="002060"/>
+            </a:solidFill>
+            <a:tailEnd type="triangle"/>
+          </a:ln>
+        </p:spPr>
+        <p:style>
+          <a:lnRef idx="1">
+            <a:schemeClr val="accent1"/>
+          </a:lnRef>
+          <a:fillRef idx="0">
+            <a:schemeClr val="accent1"/>
+          </a:fillRef>
+          <a:effectRef idx="0">
+            <a:schemeClr val="accent1"/>
+          </a:effectRef>
+          <a:fontRef idx="minor">
+            <a:schemeClr val="tx1"/>
+          </a:fontRef>
+        </p:style>
+      </p:cxnSp>
+      <p:sp>
+        <p:nvSpPr>
+          <p:cNvPr id="15" name="TextBox 14">
+            <a:extLst>
+              <a:ext uri="{FF2B5EF4-FFF2-40B4-BE49-F238E27FC236}">
+                <a16:creationId xmlns:a16="http://schemas.microsoft.com/office/drawing/2014/main" id="{7F0BB5C8-C136-C6A7-54EE-1C836AB4222A}"/>
+              </a:ext>
+            </a:extLst>
+          </p:cNvPr>
+          <p:cNvSpPr txBox="1"/>
+          <p:nvPr/>
+        </p:nvSpPr>
+        <p:spPr>
+          <a:xfrm>
+            <a:off x="1579417" y="5772772"/>
+            <a:ext cx="1941557" cy="276999"/>
           </a:xfrm>
           <a:prstGeom prst="rect">
             <a:avLst/>
           </a:prstGeom>
-        </p:spPr>
-      </p:pic>
+          <a:noFill/>
+        </p:spPr>
+        <p:txBody>
+          <a:bodyPr wrap="none" rtlCol="0">
+            <a:spAutoFit/>
+          </a:bodyPr>
+          <a:lstStyle/>
+          <a:p>
+            <a:r>
+              <a:rPr lang="en-US" sz="1200" dirty="0">
+                <a:solidFill>
+                  <a:srgbClr val="002060"/>
+                </a:solidFill>
+                <a:latin typeface="Abadi" panose="020F0502020204030204" pitchFamily="34" charset="0"/>
+              </a:rPr>
+              <a:t>NAS BEST MODEL CONFIG</a:t>
+            </a:r>
+          </a:p>
+        </p:txBody>
+      </p:sp>
+      <p:sp>
+        <p:nvSpPr>
+          <p:cNvPr id="16" name="TextBox 15">
+            <a:extLst>
+              <a:ext uri="{FF2B5EF4-FFF2-40B4-BE49-F238E27FC236}">
+                <a16:creationId xmlns:a16="http://schemas.microsoft.com/office/drawing/2014/main" id="{15451CCB-06B5-B220-0E8A-15536D177A37}"/>
+              </a:ext>
+            </a:extLst>
+          </p:cNvPr>
+          <p:cNvSpPr txBox="1"/>
+          <p:nvPr/>
+        </p:nvSpPr>
+        <p:spPr>
+          <a:xfrm>
+            <a:off x="7006296" y="5772771"/>
+            <a:ext cx="2523448" cy="276999"/>
+          </a:xfrm>
+          <a:prstGeom prst="rect">
+            <a:avLst/>
+          </a:prstGeom>
+          <a:noFill/>
+        </p:spPr>
+        <p:txBody>
+          <a:bodyPr wrap="none" rtlCol="0">
+            <a:spAutoFit/>
+          </a:bodyPr>
+          <a:lstStyle/>
+          <a:p>
+            <a:r>
+              <a:rPr lang="en-US" sz="1200" dirty="0">
+                <a:solidFill>
+                  <a:srgbClr val="002060"/>
+                </a:solidFill>
+                <a:latin typeface="Abadi" panose="020F0502020204030204" pitchFamily="34" charset="0"/>
+              </a:rPr>
+              <a:t>YOLOV8 CUSTOM CONFIGURATION</a:t>
+            </a:r>
+          </a:p>
+        </p:txBody>
+      </p:sp>
     </p:spTree>
     <p:extLst>
       <p:ext uri="{BB962C8B-B14F-4D97-AF65-F5344CB8AC3E}">
-        <p14:creationId xmlns:p14="http://schemas.microsoft.com/office/powerpoint/2010/main" val="1595682580"/>
+        <p14:creationId xmlns:p14="http://schemas.microsoft.com/office/powerpoint/2010/main" val="1254977674"/>
       </p:ext>
     </p:extLst>
   </p:cSld>
@@ -13731,8 +14206,17 @@
                 <a:latin typeface="Arial" panose="020B0604020202020204" pitchFamily="34" charset="0"/>
                 <a:cs typeface="Arial" panose="020B0604020202020204" pitchFamily="34" charset="0"/>
               </a:rPr>
-              <a:t>Yolov8n Vs Custom Yolov8n  Vs Teacher</a:t>
-            </a:r>
+              <a:t>Knowledge Distillation Teacher Analysis</a:t>
+            </a:r>
+            <a:br>
+              <a:rPr lang="en-US" sz="2700" b="1" dirty="0">
+                <a:solidFill>
+                  <a:srgbClr val="002060"/>
+                </a:solidFill>
+                <a:latin typeface="Arial" panose="020B0604020202020204" pitchFamily="34" charset="0"/>
+                <a:cs typeface="Arial" panose="020B0604020202020204" pitchFamily="34" charset="0"/>
+              </a:rPr>
+            </a:br>
             <a:endParaRPr lang="en-US" sz="2700" b="1" dirty="0">
               <a:solidFill>
                 <a:srgbClr val="002060"/>
@@ -13748,10 +14232,10 @@
       </p:sp>
       <p:pic>
         <p:nvPicPr>
-          <p:cNvPr id="6" name="Picture 5" descr="A graph of different colored lines&#10;&#10;AI-generated content may be incorrect.">
-            <a:extLst>
-              <a:ext uri="{FF2B5EF4-FFF2-40B4-BE49-F238E27FC236}">
-                <a16:creationId xmlns:a16="http://schemas.microsoft.com/office/drawing/2014/main" id="{908D266C-BA74-CF28-F549-9166C8C4E224}"/>
+          <p:cNvPr id="6" name="Picture 5" descr="A group of graphs showing the growth of a number of individuals">
+            <a:extLst>
+              <a:ext uri="{FF2B5EF4-FFF2-40B4-BE49-F238E27FC236}">
+                <a16:creationId xmlns:a16="http://schemas.microsoft.com/office/drawing/2014/main" id="{63ACD4ED-E6D0-6A63-9216-3E1FE6CB65EE}"/>
               </a:ext>
             </a:extLst>
           </p:cNvPr>
@@ -13774,8 +14258,8 @@
         </p:blipFill>
         <p:spPr>
           <a:xfrm>
-            <a:off x="931701" y="2083201"/>
-            <a:ext cx="3371850" cy="2247900"/>
+            <a:off x="5081058" y="1819600"/>
+            <a:ext cx="6210300" cy="3105150"/>
           </a:xfrm>
           <a:prstGeom prst="rect">
             <a:avLst/>
@@ -13784,10 +14268,10 @@
       </p:pic>
       <p:pic>
         <p:nvPicPr>
-          <p:cNvPr id="11" name="Picture 10" descr="A graph of a graph showing different colors&#10;&#10;AI-generated content may be incorrect.">
-            <a:extLst>
-              <a:ext uri="{FF2B5EF4-FFF2-40B4-BE49-F238E27FC236}">
-                <a16:creationId xmlns:a16="http://schemas.microsoft.com/office/drawing/2014/main" id="{A71CE207-451F-C141-A268-4C9207B88462}"/>
+          <p:cNvPr id="9" name="Picture 8" descr="A screenshot of a graph&#10;&#10;AI-generated content may be incorrect.">
+            <a:extLst>
+              <a:ext uri="{FF2B5EF4-FFF2-40B4-BE49-F238E27FC236}">
+                <a16:creationId xmlns:a16="http://schemas.microsoft.com/office/drawing/2014/main" id="{4542966E-8336-4856-40AC-A1E33F3CE853}"/>
               </a:ext>
             </a:extLst>
           </p:cNvPr>
@@ -13810,44 +14294,8 @@
         </p:blipFill>
         <p:spPr>
           <a:xfrm>
-            <a:off x="4688827" y="2082799"/>
-            <a:ext cx="3371850" cy="2247900"/>
-          </a:xfrm>
-          <a:prstGeom prst="rect">
-            <a:avLst/>
-          </a:prstGeom>
-        </p:spPr>
-      </p:pic>
-      <p:pic>
-        <p:nvPicPr>
-          <p:cNvPr id="13" name="Picture 12" descr="A graph of a graph of confidence&#10;&#10;AI-generated content may be incorrect.">
-            <a:extLst>
-              <a:ext uri="{FF2B5EF4-FFF2-40B4-BE49-F238E27FC236}">
-                <a16:creationId xmlns:a16="http://schemas.microsoft.com/office/drawing/2014/main" id="{AEDF0FA9-283C-D4A5-C497-10C2DEF8EA4D}"/>
-              </a:ext>
-            </a:extLst>
-          </p:cNvPr>
-          <p:cNvPicPr>
-            <a:picLocks noChangeAspect="1"/>
-          </p:cNvPicPr>
-          <p:nvPr/>
-        </p:nvPicPr>
-        <p:blipFill>
-          <a:blip r:embed="rId4">
-            <a:extLst>
-              <a:ext uri="{28A0092B-C50C-407E-A947-70E740481C1C}">
-                <a14:useLocalDpi xmlns:a14="http://schemas.microsoft.com/office/drawing/2010/main" val="0"/>
-              </a:ext>
-            </a:extLst>
-          </a:blip>
-          <a:stretch>
-            <a:fillRect/>
-          </a:stretch>
-        </p:blipFill>
-        <p:spPr>
-          <a:xfrm>
-            <a:off x="8315325" y="2082799"/>
-            <a:ext cx="3372453" cy="2248302"/>
+            <a:off x="627484" y="1933250"/>
+            <a:ext cx="3988667" cy="2991500"/>
           </a:xfrm>
           <a:prstGeom prst="rect">
             <a:avLst/>
@@ -13857,7 +14305,7 @@
     </p:spTree>
     <p:extLst>
       <p:ext uri="{BB962C8B-B14F-4D97-AF65-F5344CB8AC3E}">
-        <p14:creationId xmlns:p14="http://schemas.microsoft.com/office/powerpoint/2010/main" val="2144474917"/>
+        <p14:creationId xmlns:p14="http://schemas.microsoft.com/office/powerpoint/2010/main" val="2461246348"/>
       </p:ext>
     </p:extLst>
   </p:cSld>
@@ -14776,17 +15224,8 @@
                 <a:latin typeface="Arial" panose="020B0604020202020204" pitchFamily="34" charset="0"/>
                 <a:cs typeface="Arial" panose="020B0604020202020204" pitchFamily="34" charset="0"/>
               </a:rPr>
-              <a:t>Results and Performance Analysis</a:t>
-            </a:r>
-            <a:br>
-              <a:rPr lang="en-US" sz="2700" b="1" dirty="0">
-                <a:solidFill>
-                  <a:srgbClr val="002060"/>
-                </a:solidFill>
-                <a:latin typeface="Arial" panose="020B0604020202020204" pitchFamily="34" charset="0"/>
-                <a:cs typeface="Arial" panose="020B0604020202020204" pitchFamily="34" charset="0"/>
-              </a:rPr>
-            </a:br>
+              <a:t>Knowledge Distillation Custom Student Analysis</a:t>
+            </a:r>
             <a:endParaRPr lang="en-US" sz="2700" b="1" dirty="0">
               <a:solidFill>
                 <a:srgbClr val="002060"/>
@@ -14802,10 +15241,10 @@
       </p:sp>
       <p:pic>
         <p:nvPicPr>
-          <p:cNvPr id="7" name="Picture 6">
-            <a:extLst>
-              <a:ext uri="{FF2B5EF4-FFF2-40B4-BE49-F238E27FC236}">
-                <a16:creationId xmlns:a16="http://schemas.microsoft.com/office/drawing/2014/main" id="{F3301D7B-A765-3A6E-E266-99D7C15063D4}"/>
+          <p:cNvPr id="6" name="Picture 5" descr="A screenshot of a computer&#10;&#10;AI-generated content may be incorrect.">
+            <a:extLst>
+              <a:ext uri="{FF2B5EF4-FFF2-40B4-BE49-F238E27FC236}">
+                <a16:creationId xmlns:a16="http://schemas.microsoft.com/office/drawing/2014/main" id="{1665D7E2-FC4E-2C1D-6510-DC66F0BF1724}"/>
               </a:ext>
             </a:extLst>
           </p:cNvPr>
@@ -14815,835 +15254,67 @@
           <p:nvPr/>
         </p:nvPicPr>
         <p:blipFill>
-          <a:blip r:embed="rId2"/>
+          <a:blip r:embed="rId2">
+            <a:extLst>
+              <a:ext uri="{28A0092B-C50C-407E-A947-70E740481C1C}">
+                <a14:useLocalDpi xmlns:a14="http://schemas.microsoft.com/office/drawing/2010/main" val="0"/>
+              </a:ext>
+            </a:extLst>
+          </a:blip>
           <a:stretch>
             <a:fillRect/>
           </a:stretch>
         </p:blipFill>
         <p:spPr>
           <a:xfrm>
-            <a:off x="1853946" y="3727338"/>
-            <a:ext cx="7145737" cy="1685919"/>
+            <a:off x="419100" y="1828800"/>
+            <a:ext cx="4267200" cy="3200400"/>
           </a:xfrm>
           <a:prstGeom prst="rect">
             <a:avLst/>
           </a:prstGeom>
         </p:spPr>
       </p:pic>
-      <p:cxnSp>
-        <p:nvCxnSpPr>
-          <p:cNvPr id="9" name="Straight Connector 8">
-            <a:extLst>
-              <a:ext uri="{FF2B5EF4-FFF2-40B4-BE49-F238E27FC236}">
-                <a16:creationId xmlns:a16="http://schemas.microsoft.com/office/drawing/2014/main" id="{F96391AE-13F5-AA55-F1A2-22BAD6FC4FA5}"/>
-              </a:ext>
-            </a:extLst>
-          </p:cNvPr>
-          <p:cNvCxnSpPr>
-            <a:cxnSpLocks/>
-          </p:cNvCxnSpPr>
+      <p:pic>
+        <p:nvPicPr>
+          <p:cNvPr id="11" name="Picture 10" descr="A group of graphs showing the growth of a number of individuals">
+            <a:extLst>
+              <a:ext uri="{FF2B5EF4-FFF2-40B4-BE49-F238E27FC236}">
+                <a16:creationId xmlns:a16="http://schemas.microsoft.com/office/drawing/2014/main" id="{9F1FF512-A1EA-9526-5986-395D035AF708}"/>
+              </a:ext>
+            </a:extLst>
+          </p:cNvPr>
+          <p:cNvPicPr>
+            <a:picLocks noChangeAspect="1"/>
+          </p:cNvPicPr>
           <p:nvPr/>
-        </p:nvCxnSpPr>
-        <p:spPr>
-          <a:xfrm>
-            <a:off x="1609356" y="3242834"/>
-            <a:ext cx="0" cy="2170423"/>
-          </a:xfrm>
-          <a:prstGeom prst="line">
-            <a:avLst/>
-          </a:prstGeom>
-          <a:ln w="73025">
-            <a:solidFill>
-              <a:srgbClr val="002060"/>
-            </a:solidFill>
-          </a:ln>
-        </p:spPr>
-        <p:style>
-          <a:lnRef idx="1">
-            <a:schemeClr val="accent1"/>
-          </a:lnRef>
-          <a:fillRef idx="0">
-            <a:schemeClr val="accent1"/>
-          </a:fillRef>
-          <a:effectRef idx="0">
-            <a:schemeClr val="accent1"/>
-          </a:effectRef>
-          <a:fontRef idx="minor">
-            <a:schemeClr val="tx1"/>
-          </a:fontRef>
-        </p:style>
-      </p:cxnSp>
-      <p:sp>
-        <p:nvSpPr>
-          <p:cNvPr id="26" name="TextBox 25">
-            <a:extLst>
-              <a:ext uri="{FF2B5EF4-FFF2-40B4-BE49-F238E27FC236}">
-                <a16:creationId xmlns:a16="http://schemas.microsoft.com/office/drawing/2014/main" id="{855825E8-6BB8-43CC-C0CE-0B53756D2C95}"/>
-              </a:ext>
-            </a:extLst>
-          </p:cNvPr>
-          <p:cNvSpPr txBox="1"/>
-          <p:nvPr/>
-        </p:nvSpPr>
-        <p:spPr>
-          <a:xfrm>
-            <a:off x="1853946" y="3242834"/>
-            <a:ext cx="6096000" cy="369332"/>
+        </p:nvPicPr>
+        <p:blipFill>
+          <a:blip r:embed="rId3">
+            <a:extLst>
+              <a:ext uri="{28A0092B-C50C-407E-A947-70E740481C1C}">
+                <a14:useLocalDpi xmlns:a14="http://schemas.microsoft.com/office/drawing/2010/main" val="0"/>
+              </a:ext>
+            </a:extLst>
+          </a:blip>
+          <a:stretch>
+            <a:fillRect/>
+          </a:stretch>
+        </p:blipFill>
+        <p:spPr>
+          <a:xfrm>
+            <a:off x="4972050" y="1828800"/>
+            <a:ext cx="6381750" cy="3190875"/>
           </a:xfrm>
           <a:prstGeom prst="rect">
             <a:avLst/>
           </a:prstGeom>
-          <a:noFill/>
-        </p:spPr>
-        <p:txBody>
-          <a:bodyPr wrap="square">
-            <a:spAutoFit/>
-          </a:bodyPr>
-          <a:lstStyle/>
-          <a:p>
-            <a:r>
-              <a:rPr lang="en-US" b="1" dirty="0">
-                <a:solidFill>
-                  <a:srgbClr val="002060"/>
-                </a:solidFill>
-                <a:latin typeface="Arial" panose="020B0604020202020204" pitchFamily="34" charset="0"/>
-                <a:cs typeface="Arial" panose="020B0604020202020204" pitchFamily="34" charset="0"/>
-              </a:rPr>
-              <a:t>Comprehensive Performance Metrics</a:t>
-            </a:r>
-          </a:p>
-        </p:txBody>
-      </p:sp>
-      <p:sp>
-        <p:nvSpPr>
-          <p:cNvPr id="49" name="Rectangle 48">
-            <a:extLst>
-              <a:ext uri="{FF2B5EF4-FFF2-40B4-BE49-F238E27FC236}">
-                <a16:creationId xmlns:a16="http://schemas.microsoft.com/office/drawing/2014/main" id="{123561D4-BA41-F057-7950-00F4DBFA6DD8}"/>
-              </a:ext>
-            </a:extLst>
-          </p:cNvPr>
-          <p:cNvSpPr/>
-          <p:nvPr/>
-        </p:nvSpPr>
-        <p:spPr>
-          <a:xfrm>
-            <a:off x="1798528" y="1357148"/>
-            <a:ext cx="1529392" cy="1478223"/>
-          </a:xfrm>
-          <a:prstGeom prst="rect">
-            <a:avLst/>
-          </a:prstGeom>
-          <a:solidFill>
-            <a:schemeClr val="bg1"/>
-          </a:solidFill>
-          <a:ln>
-            <a:solidFill>
-              <a:srgbClr val="002060"/>
-            </a:solidFill>
-          </a:ln>
-        </p:spPr>
-        <p:style>
-          <a:lnRef idx="2">
-            <a:schemeClr val="accent1">
-              <a:shade val="15000"/>
-            </a:schemeClr>
-          </a:lnRef>
-          <a:fillRef idx="1">
-            <a:schemeClr val="accent1"/>
-          </a:fillRef>
-          <a:effectRef idx="0">
-            <a:schemeClr val="accent1"/>
-          </a:effectRef>
-          <a:fontRef idx="minor">
-            <a:schemeClr val="lt1"/>
-          </a:fontRef>
-        </p:style>
-        <p:txBody>
-          <a:bodyPr rtlCol="0" anchor="ctr"/>
-          <a:lstStyle/>
-          <a:p>
-            <a:pPr algn="ctr"/>
-            <a:endParaRPr lang="en-US"/>
-          </a:p>
-        </p:txBody>
-      </p:sp>
-      <p:sp>
-        <p:nvSpPr>
-          <p:cNvPr id="50" name="Rectangle: Rounded Corners 49">
-            <a:extLst>
-              <a:ext uri="{FF2B5EF4-FFF2-40B4-BE49-F238E27FC236}">
-                <a16:creationId xmlns:a16="http://schemas.microsoft.com/office/drawing/2014/main" id="{84711725-6F6E-314A-0721-1B105EC4D8C6}"/>
-              </a:ext>
-            </a:extLst>
-          </p:cNvPr>
-          <p:cNvSpPr/>
-          <p:nvPr/>
-        </p:nvSpPr>
-        <p:spPr>
-          <a:xfrm>
-            <a:off x="1940212" y="2396809"/>
-            <a:ext cx="1264806" cy="300209"/>
-          </a:xfrm>
-          <a:prstGeom prst="roundRect">
-            <a:avLst/>
-          </a:prstGeom>
-          <a:ln>
-            <a:noFill/>
-          </a:ln>
-        </p:spPr>
-        <p:style>
-          <a:lnRef idx="2">
-            <a:schemeClr val="accent6">
-              <a:shade val="15000"/>
-            </a:schemeClr>
-          </a:lnRef>
-          <a:fillRef idx="1">
-            <a:schemeClr val="accent6"/>
-          </a:fillRef>
-          <a:effectRef idx="0">
-            <a:schemeClr val="accent6"/>
-          </a:effectRef>
-          <a:fontRef idx="minor">
-            <a:schemeClr val="lt1"/>
-          </a:fontRef>
-        </p:style>
-        <p:txBody>
-          <a:bodyPr rtlCol="0" anchor="ctr"/>
-          <a:lstStyle/>
-          <a:p>
-            <a:pPr algn="ctr"/>
-            <a:r>
-              <a:rPr lang="en-US" sz="900" dirty="0"/>
-              <a:t>-1% vs Baseline</a:t>
-            </a:r>
-          </a:p>
-        </p:txBody>
-      </p:sp>
-      <p:sp>
-        <p:nvSpPr>
-          <p:cNvPr id="51" name="Rectangle 50">
-            <a:extLst>
-              <a:ext uri="{FF2B5EF4-FFF2-40B4-BE49-F238E27FC236}">
-                <a16:creationId xmlns:a16="http://schemas.microsoft.com/office/drawing/2014/main" id="{4D4AC6A7-B743-5628-F3C3-07EBB30032B3}"/>
-              </a:ext>
-            </a:extLst>
-          </p:cNvPr>
-          <p:cNvSpPr/>
-          <p:nvPr/>
-        </p:nvSpPr>
-        <p:spPr>
-          <a:xfrm>
-            <a:off x="3593921" y="1357148"/>
-            <a:ext cx="1529392" cy="1478223"/>
-          </a:xfrm>
-          <a:prstGeom prst="rect">
-            <a:avLst/>
-          </a:prstGeom>
-          <a:solidFill>
-            <a:schemeClr val="bg1"/>
-          </a:solidFill>
-          <a:ln>
-            <a:solidFill>
-              <a:srgbClr val="002060"/>
-            </a:solidFill>
-          </a:ln>
-        </p:spPr>
-        <p:style>
-          <a:lnRef idx="2">
-            <a:schemeClr val="accent1">
-              <a:shade val="15000"/>
-            </a:schemeClr>
-          </a:lnRef>
-          <a:fillRef idx="1">
-            <a:schemeClr val="accent1"/>
-          </a:fillRef>
-          <a:effectRef idx="0">
-            <a:schemeClr val="accent1"/>
-          </a:effectRef>
-          <a:fontRef idx="minor">
-            <a:schemeClr val="lt1"/>
-          </a:fontRef>
-        </p:style>
-        <p:txBody>
-          <a:bodyPr rtlCol="0" anchor="ctr"/>
-          <a:lstStyle/>
-          <a:p>
-            <a:pPr algn="ctr"/>
-            <a:endParaRPr lang="en-US"/>
-          </a:p>
-        </p:txBody>
-      </p:sp>
-      <p:sp>
-        <p:nvSpPr>
-          <p:cNvPr id="52" name="Rectangle: Rounded Corners 51">
-            <a:extLst>
-              <a:ext uri="{FF2B5EF4-FFF2-40B4-BE49-F238E27FC236}">
-                <a16:creationId xmlns:a16="http://schemas.microsoft.com/office/drawing/2014/main" id="{5CA16F70-A41B-DFC0-06AE-F914134D2235}"/>
-              </a:ext>
-            </a:extLst>
-          </p:cNvPr>
-          <p:cNvSpPr/>
-          <p:nvPr/>
-        </p:nvSpPr>
-        <p:spPr>
-          <a:xfrm>
-            <a:off x="3735605" y="2396809"/>
-            <a:ext cx="1264806" cy="300209"/>
-          </a:xfrm>
-          <a:prstGeom prst="roundRect">
-            <a:avLst/>
-          </a:prstGeom>
-          <a:ln>
-            <a:noFill/>
-          </a:ln>
-        </p:spPr>
-        <p:style>
-          <a:lnRef idx="2">
-            <a:schemeClr val="accent6">
-              <a:shade val="15000"/>
-            </a:schemeClr>
-          </a:lnRef>
-          <a:fillRef idx="1">
-            <a:schemeClr val="accent6"/>
-          </a:fillRef>
-          <a:effectRef idx="0">
-            <a:schemeClr val="accent6"/>
-          </a:effectRef>
-          <a:fontRef idx="minor">
-            <a:schemeClr val="lt1"/>
-          </a:fontRef>
-        </p:style>
-        <p:txBody>
-          <a:bodyPr rtlCol="0" anchor="ctr"/>
-          <a:lstStyle/>
-          <a:p>
-            <a:pPr algn="ctr"/>
-            <a:r>
-              <a:rPr lang="en-US" sz="800" dirty="0"/>
-              <a:t>mAP@50 Retention</a:t>
-            </a:r>
-          </a:p>
-        </p:txBody>
-      </p:sp>
-      <p:sp>
-        <p:nvSpPr>
-          <p:cNvPr id="53" name="Rectangle 52">
-            <a:extLst>
-              <a:ext uri="{FF2B5EF4-FFF2-40B4-BE49-F238E27FC236}">
-                <a16:creationId xmlns:a16="http://schemas.microsoft.com/office/drawing/2014/main" id="{6D94BE60-40FB-3193-3E04-09FDED8E399D}"/>
-              </a:ext>
-            </a:extLst>
-          </p:cNvPr>
-          <p:cNvSpPr/>
-          <p:nvPr/>
-        </p:nvSpPr>
-        <p:spPr>
-          <a:xfrm>
-            <a:off x="5397611" y="1357148"/>
-            <a:ext cx="1529392" cy="1478223"/>
-          </a:xfrm>
-          <a:prstGeom prst="rect">
-            <a:avLst/>
-          </a:prstGeom>
-          <a:solidFill>
-            <a:schemeClr val="bg1"/>
-          </a:solidFill>
-          <a:ln>
-            <a:solidFill>
-              <a:srgbClr val="002060"/>
-            </a:solidFill>
-          </a:ln>
-        </p:spPr>
-        <p:style>
-          <a:lnRef idx="2">
-            <a:schemeClr val="accent1">
-              <a:shade val="15000"/>
-            </a:schemeClr>
-          </a:lnRef>
-          <a:fillRef idx="1">
-            <a:schemeClr val="accent1"/>
-          </a:fillRef>
-          <a:effectRef idx="0">
-            <a:schemeClr val="accent1"/>
-          </a:effectRef>
-          <a:fontRef idx="minor">
-            <a:schemeClr val="lt1"/>
-          </a:fontRef>
-        </p:style>
-        <p:txBody>
-          <a:bodyPr rtlCol="0" anchor="ctr"/>
-          <a:lstStyle/>
-          <a:p>
-            <a:pPr algn="ctr"/>
-            <a:endParaRPr lang="en-US"/>
-          </a:p>
-        </p:txBody>
-      </p:sp>
-      <p:sp>
-        <p:nvSpPr>
-          <p:cNvPr id="54" name="Rectangle: Rounded Corners 53">
-            <a:extLst>
-              <a:ext uri="{FF2B5EF4-FFF2-40B4-BE49-F238E27FC236}">
-                <a16:creationId xmlns:a16="http://schemas.microsoft.com/office/drawing/2014/main" id="{8F48FFA2-BD69-51F5-CAE3-4FECD606BCD0}"/>
-              </a:ext>
-            </a:extLst>
-          </p:cNvPr>
-          <p:cNvSpPr/>
-          <p:nvPr/>
-        </p:nvSpPr>
-        <p:spPr>
-          <a:xfrm>
-            <a:off x="5468453" y="2396809"/>
-            <a:ext cx="1387708" cy="300209"/>
-          </a:xfrm>
-          <a:prstGeom prst="roundRect">
-            <a:avLst/>
-          </a:prstGeom>
-          <a:ln>
-            <a:noFill/>
-          </a:ln>
-        </p:spPr>
-        <p:style>
-          <a:lnRef idx="2">
-            <a:schemeClr val="accent6">
-              <a:shade val="15000"/>
-            </a:schemeClr>
-          </a:lnRef>
-          <a:fillRef idx="1">
-            <a:schemeClr val="accent6"/>
-          </a:fillRef>
-          <a:effectRef idx="0">
-            <a:schemeClr val="accent6"/>
-          </a:effectRef>
-          <a:fontRef idx="minor">
-            <a:schemeClr val="lt1"/>
-          </a:fontRef>
-        </p:style>
-        <p:txBody>
-          <a:bodyPr rtlCol="0" anchor="ctr"/>
-          <a:lstStyle/>
-          <a:p>
-            <a:pPr algn="ctr"/>
-            <a:r>
-              <a:rPr lang="en-US" sz="900" dirty="0"/>
-              <a:t>Real-time Performance </a:t>
-            </a:r>
-          </a:p>
-        </p:txBody>
-      </p:sp>
-      <p:sp>
-        <p:nvSpPr>
-          <p:cNvPr id="55" name="Rectangle 54">
-            <a:extLst>
-              <a:ext uri="{FF2B5EF4-FFF2-40B4-BE49-F238E27FC236}">
-                <a16:creationId xmlns:a16="http://schemas.microsoft.com/office/drawing/2014/main" id="{2AE66524-AD0D-5B23-D847-29A643E58EF3}"/>
-              </a:ext>
-            </a:extLst>
-          </p:cNvPr>
-          <p:cNvSpPr/>
-          <p:nvPr/>
-        </p:nvSpPr>
-        <p:spPr>
-          <a:xfrm>
-            <a:off x="7185573" y="1357148"/>
-            <a:ext cx="1529392" cy="1478223"/>
-          </a:xfrm>
-          <a:prstGeom prst="rect">
-            <a:avLst/>
-          </a:prstGeom>
-          <a:solidFill>
-            <a:schemeClr val="bg1"/>
-          </a:solidFill>
-          <a:ln>
-            <a:solidFill>
-              <a:srgbClr val="002060"/>
-            </a:solidFill>
-          </a:ln>
-        </p:spPr>
-        <p:style>
-          <a:lnRef idx="2">
-            <a:schemeClr val="accent1">
-              <a:shade val="15000"/>
-            </a:schemeClr>
-          </a:lnRef>
-          <a:fillRef idx="1">
-            <a:schemeClr val="accent1"/>
-          </a:fillRef>
-          <a:effectRef idx="0">
-            <a:schemeClr val="accent1"/>
-          </a:effectRef>
-          <a:fontRef idx="minor">
-            <a:schemeClr val="lt1"/>
-          </a:fontRef>
-        </p:style>
-        <p:txBody>
-          <a:bodyPr rtlCol="0" anchor="ctr"/>
-          <a:lstStyle/>
-          <a:p>
-            <a:pPr algn="ctr"/>
-            <a:endParaRPr lang="en-US"/>
-          </a:p>
-        </p:txBody>
-      </p:sp>
-      <p:sp>
-        <p:nvSpPr>
-          <p:cNvPr id="56" name="Rectangle: Rounded Corners 55">
-            <a:extLst>
-              <a:ext uri="{FF2B5EF4-FFF2-40B4-BE49-F238E27FC236}">
-                <a16:creationId xmlns:a16="http://schemas.microsoft.com/office/drawing/2014/main" id="{DC89E30F-3865-F40A-F688-FC4887A1309B}"/>
-              </a:ext>
-            </a:extLst>
-          </p:cNvPr>
-          <p:cNvSpPr/>
-          <p:nvPr/>
-        </p:nvSpPr>
-        <p:spPr>
-          <a:xfrm>
-            <a:off x="7327257" y="2396809"/>
-            <a:ext cx="1264806" cy="300209"/>
-          </a:xfrm>
-          <a:prstGeom prst="roundRect">
-            <a:avLst/>
-          </a:prstGeom>
-          <a:ln>
-            <a:noFill/>
-          </a:ln>
-        </p:spPr>
-        <p:style>
-          <a:lnRef idx="2">
-            <a:schemeClr val="accent6">
-              <a:shade val="15000"/>
-            </a:schemeClr>
-          </a:lnRef>
-          <a:fillRef idx="1">
-            <a:schemeClr val="accent6"/>
-          </a:fillRef>
-          <a:effectRef idx="0">
-            <a:schemeClr val="accent6"/>
-          </a:effectRef>
-          <a:fontRef idx="minor">
-            <a:schemeClr val="lt1"/>
-          </a:fontRef>
-        </p:style>
-        <p:txBody>
-          <a:bodyPr rtlCol="0" anchor="ctr"/>
-          <a:lstStyle/>
-          <a:p>
-            <a:pPr algn="ctr"/>
-            <a:r>
-              <a:rPr lang="en-US" sz="900" dirty="0"/>
-              <a:t>76.92% Size Reduction</a:t>
-            </a:r>
-          </a:p>
-        </p:txBody>
-      </p:sp>
-      <p:sp>
-        <p:nvSpPr>
-          <p:cNvPr id="40" name="TextBox 39">
-            <a:extLst>
-              <a:ext uri="{FF2B5EF4-FFF2-40B4-BE49-F238E27FC236}">
-                <a16:creationId xmlns:a16="http://schemas.microsoft.com/office/drawing/2014/main" id="{90C92407-26F4-BBF8-07F9-61F1D30503D0}"/>
-              </a:ext>
-            </a:extLst>
-          </p:cNvPr>
-          <p:cNvSpPr txBox="1"/>
-          <p:nvPr/>
-        </p:nvSpPr>
-        <p:spPr>
-          <a:xfrm>
-            <a:off x="2073920" y="1480694"/>
-            <a:ext cx="997389" cy="415498"/>
-          </a:xfrm>
-          <a:prstGeom prst="rect">
-            <a:avLst/>
-          </a:prstGeom>
-          <a:noFill/>
-        </p:spPr>
-        <p:txBody>
-          <a:bodyPr wrap="none" rtlCol="0">
-            <a:spAutoFit/>
-          </a:bodyPr>
-          <a:lstStyle/>
-          <a:p>
-            <a:r>
-              <a:rPr lang="en-US" sz="2100" b="1" dirty="0">
-                <a:solidFill>
-                  <a:srgbClr val="002060"/>
-                </a:solidFill>
-              </a:rPr>
-              <a:t>97.74%</a:t>
-            </a:r>
-          </a:p>
-        </p:txBody>
-      </p:sp>
-      <p:sp>
-        <p:nvSpPr>
-          <p:cNvPr id="45" name="TextBox 44">
-            <a:extLst>
-              <a:ext uri="{FF2B5EF4-FFF2-40B4-BE49-F238E27FC236}">
-                <a16:creationId xmlns:a16="http://schemas.microsoft.com/office/drawing/2014/main" id="{6EA145AB-5F48-5E0A-CB66-EDDAD8021B87}"/>
-              </a:ext>
-            </a:extLst>
-          </p:cNvPr>
-          <p:cNvSpPr txBox="1"/>
-          <p:nvPr/>
-        </p:nvSpPr>
-        <p:spPr>
-          <a:xfrm>
-            <a:off x="3869313" y="1480694"/>
-            <a:ext cx="861133" cy="415498"/>
-          </a:xfrm>
-          <a:prstGeom prst="rect">
-            <a:avLst/>
-          </a:prstGeom>
-          <a:noFill/>
-        </p:spPr>
-        <p:txBody>
-          <a:bodyPr wrap="none" rtlCol="0">
-            <a:spAutoFit/>
-          </a:bodyPr>
-          <a:lstStyle/>
-          <a:p>
-            <a:r>
-              <a:rPr lang="en-US" sz="2100" b="1" dirty="0">
-                <a:solidFill>
-                  <a:srgbClr val="002060"/>
-                </a:solidFill>
-              </a:rPr>
-              <a:t>99.5%</a:t>
-            </a:r>
-          </a:p>
-        </p:txBody>
-      </p:sp>
-      <p:sp>
-        <p:nvSpPr>
-          <p:cNvPr id="48" name="TextBox 47">
-            <a:extLst>
-              <a:ext uri="{FF2B5EF4-FFF2-40B4-BE49-F238E27FC236}">
-                <a16:creationId xmlns:a16="http://schemas.microsoft.com/office/drawing/2014/main" id="{CF9D9539-A762-9E0D-FFE4-406FD0BF355B}"/>
-              </a:ext>
-            </a:extLst>
-          </p:cNvPr>
-          <p:cNvSpPr txBox="1"/>
-          <p:nvPr/>
-        </p:nvSpPr>
-        <p:spPr>
-          <a:xfrm>
-            <a:off x="5800085" y="1480694"/>
-            <a:ext cx="591829" cy="415498"/>
-          </a:xfrm>
-          <a:prstGeom prst="rect">
-            <a:avLst/>
-          </a:prstGeom>
-          <a:noFill/>
-        </p:spPr>
-        <p:txBody>
-          <a:bodyPr wrap="none" rtlCol="0">
-            <a:spAutoFit/>
-          </a:bodyPr>
-          <a:lstStyle/>
-          <a:p>
-            <a:r>
-              <a:rPr lang="en-US" sz="2100" b="1" dirty="0">
-                <a:solidFill>
-                  <a:srgbClr val="002060"/>
-                </a:solidFill>
-              </a:rPr>
-              <a:t>30+</a:t>
-            </a:r>
-          </a:p>
-        </p:txBody>
-      </p:sp>
-      <p:sp>
-        <p:nvSpPr>
-          <p:cNvPr id="57" name="TextBox 56">
-            <a:extLst>
-              <a:ext uri="{FF2B5EF4-FFF2-40B4-BE49-F238E27FC236}">
-                <a16:creationId xmlns:a16="http://schemas.microsoft.com/office/drawing/2014/main" id="{3876D9C6-522E-E4C4-5B55-17C68BD17FE5}"/>
-              </a:ext>
-            </a:extLst>
-          </p:cNvPr>
-          <p:cNvSpPr txBox="1"/>
-          <p:nvPr/>
-        </p:nvSpPr>
-        <p:spPr>
-          <a:xfrm>
-            <a:off x="7537909" y="1508449"/>
-            <a:ext cx="843501" cy="415498"/>
-          </a:xfrm>
-          <a:prstGeom prst="rect">
-            <a:avLst/>
-          </a:prstGeom>
-          <a:noFill/>
-        </p:spPr>
-        <p:txBody>
-          <a:bodyPr wrap="none" rtlCol="0">
-            <a:spAutoFit/>
-          </a:bodyPr>
-          <a:lstStyle/>
-          <a:p>
-            <a:r>
-              <a:rPr lang="en-US" sz="2100" b="1" dirty="0">
-                <a:solidFill>
-                  <a:srgbClr val="002060"/>
-                </a:solidFill>
-              </a:rPr>
-              <a:t>30MB</a:t>
-            </a:r>
-          </a:p>
-        </p:txBody>
-      </p:sp>
-      <p:sp>
-        <p:nvSpPr>
-          <p:cNvPr id="59" name="TextBox 58">
-            <a:extLst>
-              <a:ext uri="{FF2B5EF4-FFF2-40B4-BE49-F238E27FC236}">
-                <a16:creationId xmlns:a16="http://schemas.microsoft.com/office/drawing/2014/main" id="{3F201A7F-1C80-10A6-00D7-FC5671FE388F}"/>
-              </a:ext>
-            </a:extLst>
-          </p:cNvPr>
-          <p:cNvSpPr txBox="1"/>
-          <p:nvPr/>
-        </p:nvSpPr>
-        <p:spPr>
-          <a:xfrm>
-            <a:off x="1964712" y="1938775"/>
-            <a:ext cx="1240306" cy="369332"/>
-          </a:xfrm>
-          <a:prstGeom prst="rect">
-            <a:avLst/>
-          </a:prstGeom>
-          <a:noFill/>
-        </p:spPr>
-        <p:txBody>
-          <a:bodyPr wrap="square">
-            <a:spAutoFit/>
-          </a:bodyPr>
-          <a:lstStyle/>
-          <a:p>
-            <a:r>
-              <a:rPr lang="en-US" sz="900" dirty="0"/>
-              <a:t>Final Model Accuracy </a:t>
-            </a:r>
-          </a:p>
-          <a:p>
-            <a:r>
-              <a:rPr lang="en-US" sz="900" dirty="0"/>
-              <a:t>        (mAP@50)</a:t>
-            </a:r>
-          </a:p>
-        </p:txBody>
-      </p:sp>
-      <p:sp>
-        <p:nvSpPr>
-          <p:cNvPr id="60" name="TextBox 59">
-            <a:extLst>
-              <a:ext uri="{FF2B5EF4-FFF2-40B4-BE49-F238E27FC236}">
-                <a16:creationId xmlns:a16="http://schemas.microsoft.com/office/drawing/2014/main" id="{6A880CCD-2435-C2EC-65DA-2155DE446A3B}"/>
-              </a:ext>
-            </a:extLst>
-          </p:cNvPr>
-          <p:cNvSpPr txBox="1"/>
-          <p:nvPr/>
-        </p:nvSpPr>
-        <p:spPr>
-          <a:xfrm>
-            <a:off x="3780006" y="1974137"/>
-            <a:ext cx="1240306" cy="230832"/>
-          </a:xfrm>
-          <a:prstGeom prst="rect">
-            <a:avLst/>
-          </a:prstGeom>
-          <a:noFill/>
-        </p:spPr>
-        <p:txBody>
-          <a:bodyPr wrap="square">
-            <a:spAutoFit/>
-          </a:bodyPr>
-          <a:lstStyle/>
-          <a:p>
-            <a:r>
-              <a:rPr lang="en-US" sz="900" dirty="0"/>
-              <a:t>Knowledge Retention</a:t>
-            </a:r>
-          </a:p>
-        </p:txBody>
-      </p:sp>
-      <p:sp>
-        <p:nvSpPr>
-          <p:cNvPr id="61" name="TextBox 60">
-            <a:extLst>
-              <a:ext uri="{FF2B5EF4-FFF2-40B4-BE49-F238E27FC236}">
-                <a16:creationId xmlns:a16="http://schemas.microsoft.com/office/drawing/2014/main" id="{121C67C7-2BBC-F123-836E-CC879C289B05}"/>
-              </a:ext>
-            </a:extLst>
-          </p:cNvPr>
-          <p:cNvSpPr txBox="1"/>
-          <p:nvPr/>
-        </p:nvSpPr>
-        <p:spPr>
-          <a:xfrm>
-            <a:off x="5694323" y="2008025"/>
-            <a:ext cx="1240306" cy="230832"/>
-          </a:xfrm>
-          <a:prstGeom prst="rect">
-            <a:avLst/>
-          </a:prstGeom>
-          <a:noFill/>
-        </p:spPr>
-        <p:txBody>
-          <a:bodyPr wrap="square">
-            <a:spAutoFit/>
-          </a:bodyPr>
-          <a:lstStyle/>
-          <a:p>
-            <a:r>
-              <a:rPr lang="en-US" sz="900" dirty="0"/>
-              <a:t>FPS Achieved</a:t>
-            </a:r>
-          </a:p>
-        </p:txBody>
-      </p:sp>
-      <p:sp>
-        <p:nvSpPr>
-          <p:cNvPr id="62" name="TextBox 61">
-            <a:extLst>
-              <a:ext uri="{FF2B5EF4-FFF2-40B4-BE49-F238E27FC236}">
-                <a16:creationId xmlns:a16="http://schemas.microsoft.com/office/drawing/2014/main" id="{E754264F-4C98-E0F6-1714-90F12AED7D68}"/>
-              </a:ext>
-            </a:extLst>
-          </p:cNvPr>
-          <p:cNvSpPr txBox="1"/>
-          <p:nvPr/>
-        </p:nvSpPr>
-        <p:spPr>
-          <a:xfrm>
-            <a:off x="7603968" y="1959832"/>
-            <a:ext cx="1240306" cy="230832"/>
-          </a:xfrm>
-          <a:prstGeom prst="rect">
-            <a:avLst/>
-          </a:prstGeom>
-          <a:noFill/>
-        </p:spPr>
-        <p:txBody>
-          <a:bodyPr wrap="square">
-            <a:spAutoFit/>
-          </a:bodyPr>
-          <a:lstStyle/>
-          <a:p>
-            <a:r>
-              <a:rPr lang="en-US" sz="900" dirty="0"/>
-              <a:t>Model Size</a:t>
-            </a:r>
-          </a:p>
-        </p:txBody>
-      </p:sp>
+        </p:spPr>
+      </p:pic>
     </p:spTree>
     <p:extLst>
       <p:ext uri="{BB962C8B-B14F-4D97-AF65-F5344CB8AC3E}">
-        <p14:creationId xmlns:p14="http://schemas.microsoft.com/office/powerpoint/2010/main" val="1681518274"/>
+        <p14:creationId xmlns:p14="http://schemas.microsoft.com/office/powerpoint/2010/main" val="2988481813"/>
       </p:ext>
     </p:extLst>
   </p:cSld>
@@ -15672,114 +15343,10 @@
       </p:grpSpPr>
       <p:sp>
         <p:nvSpPr>
-          <p:cNvPr id="30" name="Rectangle 29">
-            <a:extLst>
-              <a:ext uri="{FF2B5EF4-FFF2-40B4-BE49-F238E27FC236}">
-                <a16:creationId xmlns:a16="http://schemas.microsoft.com/office/drawing/2014/main" id="{ACEAB88A-11F8-B83F-E7B7-9D70A96AE663}"/>
-              </a:ext>
-            </a:extLst>
-          </p:cNvPr>
-          <p:cNvSpPr/>
-          <p:nvPr/>
-        </p:nvSpPr>
-        <p:spPr>
-          <a:xfrm>
-            <a:off x="1106054" y="4261401"/>
-            <a:ext cx="9395691" cy="993928"/>
-          </a:xfrm>
-          <a:prstGeom prst="rect">
-            <a:avLst/>
-          </a:prstGeom>
-          <a:solidFill>
-            <a:schemeClr val="accent5">
-              <a:lumMod val="20000"/>
-              <a:lumOff val="80000"/>
-            </a:schemeClr>
-          </a:solidFill>
-          <a:ln>
-            <a:noFill/>
-          </a:ln>
-        </p:spPr>
-        <p:style>
-          <a:lnRef idx="1">
-            <a:schemeClr val="accent3"/>
-          </a:lnRef>
-          <a:fillRef idx="2">
-            <a:schemeClr val="accent3"/>
-          </a:fillRef>
-          <a:effectRef idx="1">
-            <a:schemeClr val="accent3"/>
-          </a:effectRef>
-          <a:fontRef idx="minor">
-            <a:schemeClr val="dk1"/>
-          </a:fontRef>
-        </p:style>
-        <p:txBody>
-          <a:bodyPr rtlCol="0" anchor="ctr"/>
-          <a:lstStyle/>
-          <a:p>
-            <a:endParaRPr lang="en-US" sz="1400" dirty="0"/>
-          </a:p>
-        </p:txBody>
-      </p:sp>
-      <p:sp>
-        <p:nvSpPr>
-          <p:cNvPr id="2" name="Rectangle 1">
-            <a:extLst>
-              <a:ext uri="{FF2B5EF4-FFF2-40B4-BE49-F238E27FC236}">
-                <a16:creationId xmlns:a16="http://schemas.microsoft.com/office/drawing/2014/main" id="{A8E846C1-DDB4-BA8A-64D9-39E1EB5663D2}"/>
-              </a:ext>
-            </a:extLst>
-          </p:cNvPr>
-          <p:cNvSpPr/>
-          <p:nvPr/>
-        </p:nvSpPr>
-        <p:spPr>
-          <a:xfrm>
-            <a:off x="1106054" y="1414233"/>
-            <a:ext cx="9395691" cy="1486810"/>
-          </a:xfrm>
-          <a:prstGeom prst="rect">
-            <a:avLst/>
-          </a:prstGeom>
-          <a:solidFill>
-            <a:schemeClr val="accent5">
-              <a:lumMod val="20000"/>
-              <a:lumOff val="80000"/>
-            </a:schemeClr>
-          </a:solidFill>
-          <a:ln>
-            <a:noFill/>
-          </a:ln>
-        </p:spPr>
-        <p:style>
-          <a:lnRef idx="1">
-            <a:schemeClr val="accent3"/>
-          </a:lnRef>
-          <a:fillRef idx="2">
-            <a:schemeClr val="accent3"/>
-          </a:fillRef>
-          <a:effectRef idx="1">
-            <a:schemeClr val="accent3"/>
-          </a:effectRef>
-          <a:fontRef idx="minor">
-            <a:schemeClr val="dk1"/>
-          </a:fontRef>
-        </p:style>
-        <p:txBody>
-          <a:bodyPr rtlCol="0" anchor="ctr"/>
-          <a:lstStyle/>
-          <a:p>
-            <a:endParaRPr lang="en-US" sz="1400" dirty="0"/>
-          </a:p>
-        </p:txBody>
-      </p:sp>
-      <p:sp>
-        <p:nvSpPr>
-          <p:cNvPr id="3" name="Date Placeholder 2">
-            <a:extLst>
-              <a:ext uri="{FF2B5EF4-FFF2-40B4-BE49-F238E27FC236}">
-                <a16:creationId xmlns:a16="http://schemas.microsoft.com/office/drawing/2014/main" id="{8B0DD3C9-E5D2-AE60-3AFE-8A43297A9FBC}"/>
+          <p:cNvPr id="4" name="Footer Placeholder 3">
+            <a:extLst>
+              <a:ext uri="{FF2B5EF4-FFF2-40B4-BE49-F238E27FC236}">
+                <a16:creationId xmlns:a16="http://schemas.microsoft.com/office/drawing/2014/main" id="{B8027B5C-B1A1-0376-4174-FFF61C554492}"/>
               </a:ext>
             </a:extLst>
           </p:cNvPr>
@@ -15787,13 +15354,13 @@
             <a:spLocks noGrp="1"/>
           </p:cNvSpPr>
           <p:nvPr>
-            <p:ph type="dt" sz="half" idx="10"/>
+            <p:ph type="ftr" sz="quarter" idx="11"/>
           </p:nvPr>
         </p:nvSpPr>
         <p:spPr>
           <a:xfrm>
-            <a:off x="292608" y="6356349"/>
-            <a:ext cx="3085338" cy="365125"/>
+            <a:off x="1028700" y="6356350"/>
+            <a:ext cx="6210300" cy="365125"/>
           </a:xfrm>
         </p:spPr>
         <p:txBody>
@@ -15818,17 +15385,17 @@
                   </a:schemeClr>
                 </a:solidFill>
               </a:rPr>
-              <a:t>Neural Architecture Search &amp; Knowledge Distillation</a:t>
-            </a:r>
-          </a:p>
-        </p:txBody>
-      </p:sp>
-      <p:sp>
-        <p:nvSpPr>
-          <p:cNvPr id="4" name="Footer Placeholder 3">
-            <a:extLst>
-              <a:ext uri="{FF2B5EF4-FFF2-40B4-BE49-F238E27FC236}">
-                <a16:creationId xmlns:a16="http://schemas.microsoft.com/office/drawing/2014/main" id="{B8027B5C-B1A1-0376-4174-FFF61C554492}"/>
+              <a:t>International University Of Applied Sciences</a:t>
+            </a:r>
+          </a:p>
+        </p:txBody>
+      </p:sp>
+      <p:sp>
+        <p:nvSpPr>
+          <p:cNvPr id="3" name="Date Placeholder 2">
+            <a:extLst>
+              <a:ext uri="{FF2B5EF4-FFF2-40B4-BE49-F238E27FC236}">
+                <a16:creationId xmlns:a16="http://schemas.microsoft.com/office/drawing/2014/main" id="{8B0DD3C9-E5D2-AE60-3AFE-8A43297A9FBC}"/>
               </a:ext>
             </a:extLst>
           </p:cNvPr>
@@ -15836,13 +15403,13 @@
             <a:spLocks noGrp="1"/>
           </p:cNvSpPr>
           <p:nvPr>
-            <p:ph type="ftr" sz="quarter" idx="11"/>
+            <p:ph type="dt" sz="half" idx="10"/>
           </p:nvPr>
         </p:nvSpPr>
         <p:spPr>
           <a:xfrm>
-            <a:off x="4913744" y="6356350"/>
-            <a:ext cx="2325255" cy="365125"/>
+            <a:off x="292608" y="6356349"/>
+            <a:ext cx="3085338" cy="365125"/>
           </a:xfrm>
         </p:spPr>
         <p:txBody>
@@ -15867,7 +15434,7 @@
                   </a:schemeClr>
                 </a:solidFill>
               </a:rPr>
-              <a:t>International University Of Applied Sciences</a:t>
+              <a:t>Neural Architecture Search &amp; Knowledge Distillation</a:t>
             </a:r>
           </a:p>
         </p:txBody>
@@ -15946,7 +15513,7 @@
         </p:nvSpPr>
         <p:spPr>
           <a:xfrm>
-            <a:off x="838200" y="659111"/>
+            <a:off x="838200" y="365126"/>
             <a:ext cx="10515600" cy="638922"/>
           </a:xfrm>
           <a:prstGeom prst="rect">
@@ -15985,28 +15552,8 @@
                 <a:latin typeface="Arial" panose="020B0604020202020204" pitchFamily="34" charset="0"/>
                 <a:cs typeface="Arial" panose="020B0604020202020204" pitchFamily="34" charset="0"/>
               </a:rPr>
-              <a:t>Conclusion</a:t>
-            </a:r>
-          </a:p>
-          <a:p>
-            <a:endParaRPr lang="en-US" sz="2700" b="1" dirty="0">
-              <a:solidFill>
-                <a:srgbClr val="002060"/>
-              </a:solidFill>
-              <a:latin typeface="Arial" panose="020B0604020202020204" pitchFamily="34" charset="0"/>
-              <a:cs typeface="Arial" panose="020B0604020202020204" pitchFamily="34" charset="0"/>
-            </a:endParaRPr>
-          </a:p>
-          <a:p>
-            <a:br>
-              <a:rPr lang="en-US" sz="2700" b="1" dirty="0">
-                <a:solidFill>
-                  <a:srgbClr val="002060"/>
-                </a:solidFill>
-                <a:latin typeface="Arial" panose="020B0604020202020204" pitchFamily="34" charset="0"/>
-                <a:cs typeface="Arial" panose="020B0604020202020204" pitchFamily="34" charset="0"/>
-              </a:rPr>
-            </a:br>
+              <a:t>Knowledge Distillation Yolov8n Analysis</a:t>
+            </a:r>
             <a:endParaRPr lang="en-US" sz="2700" b="1" dirty="0">
               <a:solidFill>
                 <a:srgbClr val="002060"/>
@@ -16020,580 +15567,82 @@
           </a:p>
         </p:txBody>
       </p:sp>
-      <p:sp>
-        <p:nvSpPr>
-          <p:cNvPr id="6" name="TextBox 5">
-            <a:extLst>
-              <a:ext uri="{FF2B5EF4-FFF2-40B4-BE49-F238E27FC236}">
-                <a16:creationId xmlns:a16="http://schemas.microsoft.com/office/drawing/2014/main" id="{03510D4C-4F7C-5441-1A31-9E3DCE6C3F12}"/>
-              </a:ext>
-            </a:extLst>
-          </p:cNvPr>
-          <p:cNvSpPr txBox="1"/>
+      <p:pic>
+        <p:nvPicPr>
+          <p:cNvPr id="7" name="Picture 6" descr="A screenshot of a graph&#10;&#10;AI-generated content may be incorrect.">
+            <a:extLst>
+              <a:ext uri="{FF2B5EF4-FFF2-40B4-BE49-F238E27FC236}">
+                <a16:creationId xmlns:a16="http://schemas.microsoft.com/office/drawing/2014/main" id="{A5B51E23-129E-8C8A-7964-7F2BE3137E6A}"/>
+              </a:ext>
+            </a:extLst>
+          </p:cNvPr>
+          <p:cNvPicPr>
+            <a:picLocks noChangeAspect="1"/>
+          </p:cNvPicPr>
           <p:nvPr/>
-        </p:nvSpPr>
-        <p:spPr>
-          <a:xfrm>
-            <a:off x="1106054" y="1414233"/>
-            <a:ext cx="6096000" cy="646331"/>
+        </p:nvPicPr>
+        <p:blipFill>
+          <a:blip r:embed="rId2">
+            <a:extLst>
+              <a:ext uri="{28A0092B-C50C-407E-A947-70E740481C1C}">
+                <a14:useLocalDpi xmlns:a14="http://schemas.microsoft.com/office/drawing/2010/main" val="0"/>
+              </a:ext>
+            </a:extLst>
+          </a:blip>
+          <a:stretch>
+            <a:fillRect/>
+          </a:stretch>
+        </p:blipFill>
+        <p:spPr>
+          <a:xfrm>
+            <a:off x="428624" y="1810940"/>
+            <a:ext cx="4314825" cy="3236119"/>
           </a:xfrm>
           <a:prstGeom prst="rect">
             <a:avLst/>
           </a:prstGeom>
-          <a:noFill/>
-        </p:spPr>
-        <p:txBody>
-          <a:bodyPr wrap="square">
-            <a:spAutoFit/>
-          </a:bodyPr>
-          <a:lstStyle/>
-          <a:p>
-            <a:r>
-              <a:rPr lang="en-US" b="1" dirty="0">
-                <a:solidFill>
-                  <a:srgbClr val="002060"/>
-                </a:solidFill>
-              </a:rPr>
-              <a:t>Key Achievements</a:t>
-            </a:r>
-          </a:p>
-          <a:p>
-            <a:endParaRPr lang="en-US" b="1" dirty="0">
-              <a:solidFill>
-                <a:srgbClr val="002060"/>
-              </a:solidFill>
-            </a:endParaRPr>
-          </a:p>
-        </p:txBody>
-      </p:sp>
-      <p:cxnSp>
-        <p:nvCxnSpPr>
-          <p:cNvPr id="10" name="Straight Connector 9">
-            <a:extLst>
-              <a:ext uri="{FF2B5EF4-FFF2-40B4-BE49-F238E27FC236}">
-                <a16:creationId xmlns:a16="http://schemas.microsoft.com/office/drawing/2014/main" id="{C2C9933B-7C50-9C75-A7B7-8961068137BD}"/>
-              </a:ext>
-            </a:extLst>
-          </p:cNvPr>
-          <p:cNvCxnSpPr>
-            <a:cxnSpLocks/>
-          </p:cNvCxnSpPr>
+        </p:spPr>
+      </p:pic>
+      <p:pic>
+        <p:nvPicPr>
+          <p:cNvPr id="10" name="Picture 9" descr="A group of graphs showing the growth of a number of individuals">
+            <a:extLst>
+              <a:ext uri="{FF2B5EF4-FFF2-40B4-BE49-F238E27FC236}">
+                <a16:creationId xmlns:a16="http://schemas.microsoft.com/office/drawing/2014/main" id="{548DEBB6-8B07-2581-D48E-5EE0B4DCF3A3}"/>
+              </a:ext>
+            </a:extLst>
+          </p:cNvPr>
+          <p:cNvPicPr>
+            <a:picLocks noChangeAspect="1"/>
+          </p:cNvPicPr>
           <p:nvPr/>
-        </p:nvCxnSpPr>
-        <p:spPr>
-          <a:xfrm>
-            <a:off x="1009046" y="1402035"/>
-            <a:ext cx="0" cy="1499008"/>
-          </a:xfrm>
-          <a:prstGeom prst="line">
-            <a:avLst/>
-          </a:prstGeom>
-          <a:ln w="73025">
-            <a:solidFill>
-              <a:srgbClr val="002060"/>
-            </a:solidFill>
-          </a:ln>
-        </p:spPr>
-        <p:style>
-          <a:lnRef idx="1">
-            <a:schemeClr val="accent1"/>
-          </a:lnRef>
-          <a:fillRef idx="0">
-            <a:schemeClr val="accent1"/>
-          </a:fillRef>
-          <a:effectRef idx="0">
-            <a:schemeClr val="accent1"/>
-          </a:effectRef>
-          <a:fontRef idx="minor">
-            <a:schemeClr val="tx1"/>
-          </a:fontRef>
-        </p:style>
-      </p:cxnSp>
-      <p:sp>
-        <p:nvSpPr>
-          <p:cNvPr id="68" name="TextBox 67">
-            <a:extLst>
-              <a:ext uri="{FF2B5EF4-FFF2-40B4-BE49-F238E27FC236}">
-                <a16:creationId xmlns:a16="http://schemas.microsoft.com/office/drawing/2014/main" id="{FCB67E19-85D3-8690-4694-1C2126F199ED}"/>
-              </a:ext>
-            </a:extLst>
-          </p:cNvPr>
-          <p:cNvSpPr txBox="1"/>
-          <p:nvPr/>
-        </p:nvSpPr>
-        <p:spPr>
-          <a:xfrm>
-            <a:off x="1175430" y="1760259"/>
-            <a:ext cx="6452548" cy="1015663"/>
+        </p:nvPicPr>
+        <p:blipFill>
+          <a:blip r:embed="rId3">
+            <a:extLst>
+              <a:ext uri="{28A0092B-C50C-407E-A947-70E740481C1C}">
+                <a14:useLocalDpi xmlns:a14="http://schemas.microsoft.com/office/drawing/2010/main" val="0"/>
+              </a:ext>
+            </a:extLst>
+          </a:blip>
+          <a:stretch>
+            <a:fillRect/>
+          </a:stretch>
+        </p:blipFill>
+        <p:spPr>
+          <a:xfrm>
+            <a:off x="4850073" y="1810940"/>
+            <a:ext cx="6698460" cy="3349230"/>
           </a:xfrm>
           <a:prstGeom prst="rect">
             <a:avLst/>
           </a:prstGeom>
-          <a:noFill/>
-        </p:spPr>
-        <p:txBody>
-          <a:bodyPr wrap="square">
-            <a:spAutoFit/>
-          </a:bodyPr>
-          <a:lstStyle/>
-          <a:p>
-            <a:pPr marL="171450" indent="-171450">
-              <a:buFont typeface="Arial" panose="020B0604020202020204" pitchFamily="34" charset="0"/>
-              <a:buChar char="•"/>
-            </a:pPr>
-            <a:r>
-              <a:rPr lang="en-US" sz="1200" dirty="0">
-                <a:solidFill>
-                  <a:srgbClr val="002060"/>
-                </a:solidFill>
-                <a:latin typeface="Segoe UI" panose="020B0502040204020203" pitchFamily="34" charset="0"/>
-                <a:cs typeface="Segoe UI" panose="020B0502040204020203" pitchFamily="34" charset="0"/>
-              </a:rPr>
-              <a:t>Successfully broke the traditional performance-efficiency trade-off</a:t>
-            </a:r>
-          </a:p>
-          <a:p>
-            <a:pPr marL="171450" indent="-171450">
-              <a:buFont typeface="Arial" panose="020B0604020202020204" pitchFamily="34" charset="0"/>
-              <a:buChar char="•"/>
-            </a:pPr>
-            <a:r>
-              <a:rPr lang="en-US" sz="1200" dirty="0">
-                <a:solidFill>
-                  <a:srgbClr val="002060"/>
-                </a:solidFill>
-                <a:latin typeface="Segoe UI" panose="020B0502040204020203" pitchFamily="34" charset="0"/>
-                <a:cs typeface="Segoe UI" panose="020B0502040204020203" pitchFamily="34" charset="0"/>
-              </a:rPr>
-              <a:t>Achieved 99.5% knowledge retention from teacher to student model</a:t>
-            </a:r>
-          </a:p>
-          <a:p>
-            <a:pPr marL="171450" indent="-171450">
-              <a:buFont typeface="Arial" panose="020B0604020202020204" pitchFamily="34" charset="0"/>
-              <a:buChar char="•"/>
-            </a:pPr>
-            <a:r>
-              <a:rPr lang="en-US" sz="1200" dirty="0">
-                <a:solidFill>
-                  <a:srgbClr val="002060"/>
-                </a:solidFill>
-                <a:latin typeface="Segoe UI" panose="020B0502040204020203" pitchFamily="34" charset="0"/>
-                <a:cs typeface="Segoe UI" panose="020B0502040204020203" pitchFamily="34" charset="0"/>
-              </a:rPr>
-              <a:t>Maintained high accuracy (97.74%) while achieving real-time performance (30+ FPS)</a:t>
-            </a:r>
-          </a:p>
-          <a:p>
-            <a:pPr marL="171450" indent="-171450">
-              <a:buFont typeface="Arial" panose="020B0604020202020204" pitchFamily="34" charset="0"/>
-              <a:buChar char="•"/>
-            </a:pPr>
-            <a:r>
-              <a:rPr lang="en-US" sz="1200" dirty="0">
-                <a:solidFill>
-                  <a:srgbClr val="002060"/>
-                </a:solidFill>
-                <a:latin typeface="Segoe UI" panose="020B0502040204020203" pitchFamily="34" charset="0"/>
-                <a:cs typeface="Segoe UI" panose="020B0502040204020203" pitchFamily="34" charset="0"/>
-              </a:rPr>
-              <a:t>Reduced model size by 76% (130MB → 30MB)</a:t>
-            </a:r>
-          </a:p>
-          <a:p>
-            <a:pPr marL="171450" indent="-171450">
-              <a:buFont typeface="Arial" panose="020B0604020202020204" pitchFamily="34" charset="0"/>
-              <a:buChar char="•"/>
-            </a:pPr>
-            <a:r>
-              <a:rPr lang="en-US" sz="1200" dirty="0">
-                <a:solidFill>
-                  <a:srgbClr val="002060"/>
-                </a:solidFill>
-                <a:latin typeface="Segoe UI" panose="020B0502040204020203" pitchFamily="34" charset="0"/>
-                <a:cs typeface="Segoe UI" panose="020B0502040204020203" pitchFamily="34" charset="0"/>
-              </a:rPr>
-              <a:t>Implemented production-ready MLOps pipeline</a:t>
-            </a:r>
-          </a:p>
-        </p:txBody>
-      </p:sp>
-      <p:sp>
-        <p:nvSpPr>
-          <p:cNvPr id="9" name="Rectangle 8">
-            <a:extLst>
-              <a:ext uri="{FF2B5EF4-FFF2-40B4-BE49-F238E27FC236}">
-                <a16:creationId xmlns:a16="http://schemas.microsoft.com/office/drawing/2014/main" id="{F6B3E408-3E00-3833-41D6-2D7040061AB5}"/>
-              </a:ext>
-            </a:extLst>
-          </p:cNvPr>
-          <p:cNvSpPr/>
-          <p:nvPr/>
-        </p:nvSpPr>
-        <p:spPr>
-          <a:xfrm>
-            <a:off x="1106054" y="3011172"/>
-            <a:ext cx="9395691" cy="1136779"/>
-          </a:xfrm>
-          <a:prstGeom prst="rect">
-            <a:avLst/>
-          </a:prstGeom>
-          <a:solidFill>
-            <a:schemeClr val="accent5">
-              <a:lumMod val="20000"/>
-              <a:lumOff val="80000"/>
-            </a:schemeClr>
-          </a:solidFill>
-          <a:ln>
-            <a:noFill/>
-          </a:ln>
-        </p:spPr>
-        <p:style>
-          <a:lnRef idx="1">
-            <a:schemeClr val="accent3"/>
-          </a:lnRef>
-          <a:fillRef idx="2">
-            <a:schemeClr val="accent3"/>
-          </a:fillRef>
-          <a:effectRef idx="1">
-            <a:schemeClr val="accent3"/>
-          </a:effectRef>
-          <a:fontRef idx="minor">
-            <a:schemeClr val="dk1"/>
-          </a:fontRef>
-        </p:style>
-        <p:txBody>
-          <a:bodyPr rtlCol="0" anchor="ctr"/>
-          <a:lstStyle/>
-          <a:p>
-            <a:endParaRPr lang="en-US" sz="1400" dirty="0"/>
-          </a:p>
-        </p:txBody>
-      </p:sp>
-      <p:sp>
-        <p:nvSpPr>
-          <p:cNvPr id="11" name="TextBox 10">
-            <a:extLst>
-              <a:ext uri="{FF2B5EF4-FFF2-40B4-BE49-F238E27FC236}">
-                <a16:creationId xmlns:a16="http://schemas.microsoft.com/office/drawing/2014/main" id="{8E82D7BC-B1AA-396E-015E-7A5C01FF00DE}"/>
-              </a:ext>
-            </a:extLst>
-          </p:cNvPr>
-          <p:cNvSpPr txBox="1"/>
-          <p:nvPr/>
-        </p:nvSpPr>
-        <p:spPr>
-          <a:xfrm>
-            <a:off x="1106054" y="3011173"/>
-            <a:ext cx="6096000" cy="369332"/>
-          </a:xfrm>
-          <a:prstGeom prst="rect">
-            <a:avLst/>
-          </a:prstGeom>
-          <a:noFill/>
-        </p:spPr>
-        <p:txBody>
-          <a:bodyPr wrap="square">
-            <a:spAutoFit/>
-          </a:bodyPr>
-          <a:lstStyle/>
-          <a:p>
-            <a:r>
-              <a:rPr lang="en-US" b="1" dirty="0">
-                <a:solidFill>
-                  <a:srgbClr val="002060"/>
-                </a:solidFill>
-              </a:rPr>
-              <a:t>Practical Applications</a:t>
-            </a:r>
-          </a:p>
-        </p:txBody>
-      </p:sp>
-      <p:cxnSp>
-        <p:nvCxnSpPr>
-          <p:cNvPr id="12" name="Straight Connector 11">
-            <a:extLst>
-              <a:ext uri="{FF2B5EF4-FFF2-40B4-BE49-F238E27FC236}">
-                <a16:creationId xmlns:a16="http://schemas.microsoft.com/office/drawing/2014/main" id="{2DD60F60-D6B6-1E84-44A8-51E98A8F2EA9}"/>
-              </a:ext>
-            </a:extLst>
-          </p:cNvPr>
-          <p:cNvCxnSpPr>
-            <a:cxnSpLocks/>
-          </p:cNvCxnSpPr>
-          <p:nvPr/>
-        </p:nvCxnSpPr>
-        <p:spPr>
-          <a:xfrm>
-            <a:off x="1009046" y="2998975"/>
-            <a:ext cx="0" cy="1148976"/>
-          </a:xfrm>
-          <a:prstGeom prst="line">
-            <a:avLst/>
-          </a:prstGeom>
-          <a:ln w="73025">
-            <a:solidFill>
-              <a:srgbClr val="002060"/>
-            </a:solidFill>
-          </a:ln>
-        </p:spPr>
-        <p:style>
-          <a:lnRef idx="1">
-            <a:schemeClr val="accent1"/>
-          </a:lnRef>
-          <a:fillRef idx="0">
-            <a:schemeClr val="accent1"/>
-          </a:fillRef>
-          <a:effectRef idx="0">
-            <a:schemeClr val="accent1"/>
-          </a:effectRef>
-          <a:fontRef idx="minor">
-            <a:schemeClr val="tx1"/>
-          </a:fontRef>
-        </p:style>
-      </p:cxnSp>
-      <p:sp>
-        <p:nvSpPr>
-          <p:cNvPr id="13" name="TextBox 12">
-            <a:extLst>
-              <a:ext uri="{FF2B5EF4-FFF2-40B4-BE49-F238E27FC236}">
-                <a16:creationId xmlns:a16="http://schemas.microsoft.com/office/drawing/2014/main" id="{2E9EC7B5-B25E-7F04-2F16-F9FC908630C1}"/>
-              </a:ext>
-            </a:extLst>
-          </p:cNvPr>
-          <p:cNvSpPr txBox="1"/>
-          <p:nvPr/>
-        </p:nvSpPr>
-        <p:spPr>
-          <a:xfrm>
-            <a:off x="1175430" y="3370428"/>
-            <a:ext cx="6452548" cy="646331"/>
-          </a:xfrm>
-          <a:prstGeom prst="rect">
-            <a:avLst/>
-          </a:prstGeom>
-          <a:noFill/>
-        </p:spPr>
-        <p:txBody>
-          <a:bodyPr wrap="square">
-            <a:spAutoFit/>
-          </a:bodyPr>
-          <a:lstStyle/>
-          <a:p>
-            <a:pPr marL="171450" indent="-171450">
-              <a:buFont typeface="Arial" panose="020B0604020202020204" pitchFamily="34" charset="0"/>
-              <a:buChar char="•"/>
-            </a:pPr>
-            <a:r>
-              <a:rPr lang="en-US" sz="1200" dirty="0">
-                <a:solidFill>
-                  <a:srgbClr val="002060"/>
-                </a:solidFill>
-                <a:latin typeface="Segoe UI" panose="020B0502040204020203" pitchFamily="34" charset="0"/>
-                <a:cs typeface="Segoe UI" panose="020B0502040204020203" pitchFamily="34" charset="0"/>
-              </a:rPr>
-              <a:t>Highway vehicle tracking and counting systems</a:t>
-            </a:r>
-          </a:p>
-          <a:p>
-            <a:pPr marL="171450" indent="-171450">
-              <a:buFont typeface="Arial" panose="020B0604020202020204" pitchFamily="34" charset="0"/>
-              <a:buChar char="•"/>
-            </a:pPr>
-            <a:r>
-              <a:rPr lang="en-US" sz="1200" dirty="0">
-                <a:solidFill>
-                  <a:srgbClr val="002060"/>
-                </a:solidFill>
-                <a:latin typeface="Segoe UI" panose="020B0502040204020203" pitchFamily="34" charset="0"/>
-                <a:cs typeface="Segoe UI" panose="020B0502040204020203" pitchFamily="34" charset="0"/>
-              </a:rPr>
-              <a:t>Edge deployment for real-time traffic monitoring</a:t>
-            </a:r>
-          </a:p>
-          <a:p>
-            <a:pPr marL="171450" indent="-171450">
-              <a:buFont typeface="Arial" panose="020B0604020202020204" pitchFamily="34" charset="0"/>
-              <a:buChar char="•"/>
-            </a:pPr>
-            <a:r>
-              <a:rPr lang="en-US" sz="1200" dirty="0">
-                <a:solidFill>
-                  <a:srgbClr val="002060"/>
-                </a:solidFill>
-                <a:latin typeface="Segoe UI" panose="020B0502040204020203" pitchFamily="34" charset="0"/>
-                <a:cs typeface="Segoe UI" panose="020B0502040204020203" pitchFamily="34" charset="0"/>
-              </a:rPr>
-              <a:t>Scalable MLOps framework for model optimization</a:t>
-            </a:r>
-          </a:p>
-        </p:txBody>
-      </p:sp>
-      <p:sp>
-        <p:nvSpPr>
-          <p:cNvPr id="25" name="TextBox 24">
-            <a:extLst>
-              <a:ext uri="{FF2B5EF4-FFF2-40B4-BE49-F238E27FC236}">
-                <a16:creationId xmlns:a16="http://schemas.microsoft.com/office/drawing/2014/main" id="{F0FCD6B6-FE4A-A3E9-2E4D-33A79550368B}"/>
-              </a:ext>
-            </a:extLst>
-          </p:cNvPr>
-          <p:cNvSpPr txBox="1"/>
-          <p:nvPr/>
-        </p:nvSpPr>
-        <p:spPr>
-          <a:xfrm>
-            <a:off x="1106055" y="4234310"/>
-            <a:ext cx="6096000" cy="369332"/>
-          </a:xfrm>
-          <a:prstGeom prst="rect">
-            <a:avLst/>
-          </a:prstGeom>
-          <a:noFill/>
-        </p:spPr>
-        <p:txBody>
-          <a:bodyPr wrap="square">
-            <a:spAutoFit/>
-          </a:bodyPr>
-          <a:lstStyle/>
-          <a:p>
-            <a:r>
-              <a:rPr lang="en-US" b="1" dirty="0">
-                <a:solidFill>
-                  <a:srgbClr val="002060"/>
-                </a:solidFill>
-                <a:latin typeface="Arial" panose="020B0604020202020204" pitchFamily="34" charset="0"/>
-                <a:cs typeface="Arial" panose="020B0604020202020204" pitchFamily="34" charset="0"/>
-              </a:rPr>
-              <a:t>Future Research Directions</a:t>
-            </a:r>
-          </a:p>
-        </p:txBody>
-      </p:sp>
-      <p:cxnSp>
-        <p:nvCxnSpPr>
-          <p:cNvPr id="26" name="Straight Connector 25">
-            <a:extLst>
-              <a:ext uri="{FF2B5EF4-FFF2-40B4-BE49-F238E27FC236}">
-                <a16:creationId xmlns:a16="http://schemas.microsoft.com/office/drawing/2014/main" id="{1D64AD2A-D065-8138-8C4C-245CBCA6ECE1}"/>
-              </a:ext>
-            </a:extLst>
-          </p:cNvPr>
-          <p:cNvCxnSpPr>
-            <a:cxnSpLocks/>
-          </p:cNvCxnSpPr>
-          <p:nvPr/>
-        </p:nvCxnSpPr>
-        <p:spPr>
-          <a:xfrm>
-            <a:off x="1009047" y="4222112"/>
-            <a:ext cx="0" cy="1108093"/>
-          </a:xfrm>
-          <a:prstGeom prst="line">
-            <a:avLst/>
-          </a:prstGeom>
-          <a:ln w="73025">
-            <a:solidFill>
-              <a:srgbClr val="002060"/>
-            </a:solidFill>
-          </a:ln>
-        </p:spPr>
-        <p:style>
-          <a:lnRef idx="1">
-            <a:schemeClr val="accent1"/>
-          </a:lnRef>
-          <a:fillRef idx="0">
-            <a:schemeClr val="accent1"/>
-          </a:fillRef>
-          <a:effectRef idx="0">
-            <a:schemeClr val="accent1"/>
-          </a:effectRef>
-          <a:fontRef idx="minor">
-            <a:schemeClr val="tx1"/>
-          </a:fontRef>
-        </p:style>
-      </p:cxnSp>
-      <p:sp>
-        <p:nvSpPr>
-          <p:cNvPr id="27" name="TextBox 26">
-            <a:extLst>
-              <a:ext uri="{FF2B5EF4-FFF2-40B4-BE49-F238E27FC236}">
-                <a16:creationId xmlns:a16="http://schemas.microsoft.com/office/drawing/2014/main" id="{EB9A7E39-4E54-F97F-B219-D38303C68EF7}"/>
-              </a:ext>
-            </a:extLst>
-          </p:cNvPr>
-          <p:cNvSpPr txBox="1"/>
-          <p:nvPr/>
-        </p:nvSpPr>
-        <p:spPr>
-          <a:xfrm>
-            <a:off x="1175431" y="4551310"/>
-            <a:ext cx="6452548" cy="646331"/>
-          </a:xfrm>
-          <a:prstGeom prst="rect">
-            <a:avLst/>
-          </a:prstGeom>
-          <a:noFill/>
-        </p:spPr>
-        <p:txBody>
-          <a:bodyPr wrap="square">
-            <a:spAutoFit/>
-          </a:bodyPr>
-          <a:lstStyle/>
-          <a:p>
-            <a:pPr marL="171450" indent="-171450">
-              <a:buFont typeface="Arial" panose="020B0604020202020204" pitchFamily="34" charset="0"/>
-              <a:buChar char="•"/>
-            </a:pPr>
-            <a:r>
-              <a:rPr lang="en-US" sz="1200" dirty="0">
-                <a:solidFill>
-                  <a:srgbClr val="002060"/>
-                </a:solidFill>
-                <a:latin typeface="Segoe UI" panose="020B0502040204020203" pitchFamily="34" charset="0"/>
-                <a:cs typeface="Segoe UI" panose="020B0502040204020203" pitchFamily="34" charset="0"/>
-              </a:rPr>
-              <a:t>Extension to other object detection architectures</a:t>
-            </a:r>
-          </a:p>
-          <a:p>
-            <a:pPr marL="171450" indent="-171450">
-              <a:buFont typeface="Arial" panose="020B0604020202020204" pitchFamily="34" charset="0"/>
-              <a:buChar char="•"/>
-            </a:pPr>
-            <a:r>
-              <a:rPr lang="en-US" sz="1200" dirty="0">
-                <a:solidFill>
-                  <a:srgbClr val="002060"/>
-                </a:solidFill>
-                <a:latin typeface="Segoe UI" panose="020B0502040204020203" pitchFamily="34" charset="0"/>
-                <a:cs typeface="Segoe UI" panose="020B0502040204020203" pitchFamily="34" charset="0"/>
-              </a:rPr>
-              <a:t>Multi-teacher knowledge distillation approaches</a:t>
-            </a:r>
-          </a:p>
-          <a:p>
-            <a:pPr marL="171450" indent="-171450">
-              <a:buFont typeface="Arial" panose="020B0604020202020204" pitchFamily="34" charset="0"/>
-              <a:buChar char="•"/>
-            </a:pPr>
-            <a:r>
-              <a:rPr lang="en-US" sz="1200" dirty="0">
-                <a:solidFill>
-                  <a:srgbClr val="002060"/>
-                </a:solidFill>
-                <a:latin typeface="Segoe UI" panose="020B0502040204020203" pitchFamily="34" charset="0"/>
-                <a:cs typeface="Segoe UI" panose="020B0502040204020203" pitchFamily="34" charset="0"/>
-              </a:rPr>
-              <a:t>Real-time architecture adaptation based on hardware constraints</a:t>
-            </a:r>
-          </a:p>
-        </p:txBody>
-      </p:sp>
+        </p:spPr>
+      </p:pic>
     </p:spTree>
     <p:extLst>
       <p:ext uri="{BB962C8B-B14F-4D97-AF65-F5344CB8AC3E}">
-        <p14:creationId xmlns:p14="http://schemas.microsoft.com/office/powerpoint/2010/main" val="3716294631"/>
+        <p14:creationId xmlns:p14="http://schemas.microsoft.com/office/powerpoint/2010/main" val="1595682580"/>
       </p:ext>
     </p:extLst>
   </p:cSld>
@@ -16622,10 +15671,10 @@
       </p:grpSpPr>
       <p:sp>
         <p:nvSpPr>
-          <p:cNvPr id="2" name="Title 1">
-            <a:extLst>
-              <a:ext uri="{FF2B5EF4-FFF2-40B4-BE49-F238E27FC236}">
-                <a16:creationId xmlns:a16="http://schemas.microsoft.com/office/drawing/2014/main" id="{ED3F830A-0841-2B85-58E5-6CE63A3347BC}"/>
+          <p:cNvPr id="4" name="Footer Placeholder 3">
+            <a:extLst>
+              <a:ext uri="{FF2B5EF4-FFF2-40B4-BE49-F238E27FC236}">
+                <a16:creationId xmlns:a16="http://schemas.microsoft.com/office/drawing/2014/main" id="{B8027B5C-B1A1-0376-4174-FFF61C554492}"/>
               </a:ext>
             </a:extLst>
           </p:cNvPr>
@@ -16633,113 +15682,13 @@
             <a:spLocks noGrp="1"/>
           </p:cNvSpPr>
           <p:nvPr>
-            <p:ph type="title"/>
+            <p:ph type="ftr" sz="quarter" idx="11"/>
           </p:nvPr>
         </p:nvSpPr>
         <p:spPr>
           <a:xfrm>
-            <a:off x="838200" y="365126"/>
-            <a:ext cx="10515600" cy="638922"/>
-          </a:xfrm>
-        </p:spPr>
-        <p:txBody>
-          <a:bodyPr>
-            <a:normAutofit/>
-          </a:bodyPr>
-          <a:lstStyle/>
-          <a:p>
-            <a:r>
-              <a:rPr lang="en-US" sz="2700" b="1" dirty="0">
-                <a:solidFill>
-                  <a:srgbClr val="002060"/>
-                </a:solidFill>
-                <a:latin typeface="Arial" panose="020B0604020202020204" pitchFamily="34" charset="0"/>
-                <a:cs typeface="Arial" panose="020B0604020202020204" pitchFamily="34" charset="0"/>
-              </a:rPr>
-              <a:t>Demo : Highway Vehicle Tracking  </a:t>
-            </a:r>
-          </a:p>
-        </p:txBody>
-      </p:sp>
-      <p:sp>
-        <p:nvSpPr>
-          <p:cNvPr id="5" name="Slide Number Placeholder 4">
-            <a:extLst>
-              <a:ext uri="{FF2B5EF4-FFF2-40B4-BE49-F238E27FC236}">
-                <a16:creationId xmlns:a16="http://schemas.microsoft.com/office/drawing/2014/main" id="{80A790D5-177D-B6A2-0E90-81EF4FE37C9F}"/>
-              </a:ext>
-            </a:extLst>
-          </p:cNvPr>
-          <p:cNvSpPr>
-            <a:spLocks noGrp="1"/>
-          </p:cNvSpPr>
-          <p:nvPr>
-            <p:ph type="sldNum" sz="quarter" idx="12"/>
-          </p:nvPr>
-        </p:nvSpPr>
-        <p:spPr/>
-        <p:txBody>
-          <a:bodyPr/>
-          <a:lstStyle/>
-          <a:p>
-            <a:fld id="{C98AED0B-3B00-448B-836B-316F7AA19B4B}" type="slidenum">
-              <a:rPr lang="en-US" smtClean="0"/>
-              <a:t>22</a:t>
-            </a:fld>
-            <a:endParaRPr lang="en-US"/>
-          </a:p>
-        </p:txBody>
-      </p:sp>
-      <p:pic>
-        <p:nvPicPr>
-          <p:cNvPr id="7" name="Picture 6">
-            <a:extLst>
-              <a:ext uri="{FF2B5EF4-FFF2-40B4-BE49-F238E27FC236}">
-                <a16:creationId xmlns:a16="http://schemas.microsoft.com/office/drawing/2014/main" id="{8AA2BE19-D659-5C46-6603-ED8490AB2BA4}"/>
-              </a:ext>
-            </a:extLst>
-          </p:cNvPr>
-          <p:cNvPicPr>
-            <a:picLocks noChangeAspect="1"/>
-          </p:cNvPicPr>
-          <p:nvPr/>
-        </p:nvPicPr>
-        <p:blipFill>
-          <a:blip r:embed="rId2"/>
-          <a:stretch>
-            <a:fillRect/>
-          </a:stretch>
-        </p:blipFill>
-        <p:spPr>
-          <a:xfrm>
-            <a:off x="2856255" y="1238271"/>
-            <a:ext cx="6940907" cy="4540483"/>
-          </a:xfrm>
-          <a:prstGeom prst="rect">
-            <a:avLst/>
-          </a:prstGeom>
-        </p:spPr>
-      </p:pic>
-      <p:sp>
-        <p:nvSpPr>
-          <p:cNvPr id="6" name="Date Placeholder 2">
-            <a:extLst>
-              <a:ext uri="{FF2B5EF4-FFF2-40B4-BE49-F238E27FC236}">
-                <a16:creationId xmlns:a16="http://schemas.microsoft.com/office/drawing/2014/main" id="{C4648A69-C729-B783-6CA1-617599562CFA}"/>
-              </a:ext>
-            </a:extLst>
-          </p:cNvPr>
-          <p:cNvSpPr>
-            <a:spLocks noGrp="1"/>
-          </p:cNvSpPr>
-          <p:nvPr>
-            <p:ph type="dt" sz="half" idx="10"/>
-          </p:nvPr>
-        </p:nvSpPr>
-        <p:spPr>
-          <a:xfrm>
-            <a:off x="292608" y="6356349"/>
-            <a:ext cx="3085338" cy="365125"/>
+            <a:off x="1028700" y="6356350"/>
+            <a:ext cx="6210300" cy="365125"/>
           </a:xfrm>
         </p:spPr>
         <p:txBody>
@@ -16764,17 +15713,17 @@
                   </a:schemeClr>
                 </a:solidFill>
               </a:rPr>
-              <a:t>Neural Architecture Search &amp; Knowledge Distillation</a:t>
-            </a:r>
-          </a:p>
-        </p:txBody>
-      </p:sp>
-      <p:sp>
-        <p:nvSpPr>
-          <p:cNvPr id="8" name="Footer Placeholder 3">
-            <a:extLst>
-              <a:ext uri="{FF2B5EF4-FFF2-40B4-BE49-F238E27FC236}">
-                <a16:creationId xmlns:a16="http://schemas.microsoft.com/office/drawing/2014/main" id="{258E6F15-D03A-4DB0-EB5A-5B186E22948C}"/>
+              <a:t>International University Of Applied Sciences</a:t>
+            </a:r>
+          </a:p>
+        </p:txBody>
+      </p:sp>
+      <p:sp>
+        <p:nvSpPr>
+          <p:cNvPr id="3" name="Date Placeholder 2">
+            <a:extLst>
+              <a:ext uri="{FF2B5EF4-FFF2-40B4-BE49-F238E27FC236}">
+                <a16:creationId xmlns:a16="http://schemas.microsoft.com/office/drawing/2014/main" id="{8B0DD3C9-E5D2-AE60-3AFE-8A43297A9FBC}"/>
               </a:ext>
             </a:extLst>
           </p:cNvPr>
@@ -16782,13 +15731,13 @@
             <a:spLocks noGrp="1"/>
           </p:cNvSpPr>
           <p:nvPr>
-            <p:ph type="ftr" sz="quarter" idx="11"/>
+            <p:ph type="dt" sz="half" idx="10"/>
           </p:nvPr>
         </p:nvSpPr>
         <p:spPr>
           <a:xfrm>
-            <a:off x="4913744" y="6356350"/>
-            <a:ext cx="2325255" cy="365125"/>
+            <a:off x="292608" y="6356349"/>
+            <a:ext cx="3085338" cy="365125"/>
           </a:xfrm>
         </p:spPr>
         <p:txBody>
@@ -16813,15 +15762,251 @@
                   </a:schemeClr>
                 </a:solidFill>
               </a:rPr>
-              <a:t>International University Of Applied Sciences</a:t>
-            </a:r>
-          </a:p>
-        </p:txBody>
-      </p:sp>
+              <a:t>Neural Architecture Search &amp; Knowledge Distillation</a:t>
+            </a:r>
+          </a:p>
+        </p:txBody>
+      </p:sp>
+      <p:sp>
+        <p:nvSpPr>
+          <p:cNvPr id="5" name="Slide Number Placeholder 4">
+            <a:extLst>
+              <a:ext uri="{FF2B5EF4-FFF2-40B4-BE49-F238E27FC236}">
+                <a16:creationId xmlns:a16="http://schemas.microsoft.com/office/drawing/2014/main" id="{80A790D5-177D-B6A2-0E90-81EF4FE37C9F}"/>
+              </a:ext>
+            </a:extLst>
+          </p:cNvPr>
+          <p:cNvSpPr>
+            <a:spLocks noGrp="1"/>
+          </p:cNvSpPr>
+          <p:nvPr>
+            <p:ph type="sldNum" sz="quarter" idx="12"/>
+          </p:nvPr>
+        </p:nvSpPr>
+        <p:spPr>
+          <a:xfrm>
+            <a:off x="11034184" y="6356350"/>
+            <a:ext cx="514349" cy="365125"/>
+          </a:xfrm>
+        </p:spPr>
+        <p:txBody>
+          <a:bodyPr>
+            <a:normAutofit/>
+          </a:bodyPr>
+          <a:lstStyle/>
+          <a:p>
+            <a:pPr>
+              <a:spcAft>
+                <a:spcPts val="600"/>
+              </a:spcAft>
+            </a:pPr>
+            <a:fld id="{C98AED0B-3B00-448B-836B-316F7AA19B4B}" type="slidenum">
+              <a:rPr lang="en-US">
+                <a:solidFill>
+                  <a:schemeClr val="tx1">
+                    <a:alpha val="80000"/>
+                  </a:schemeClr>
+                </a:solidFill>
+              </a:rPr>
+              <a:pPr>
+                <a:spcAft>
+                  <a:spcPts val="600"/>
+                </a:spcAft>
+              </a:pPr>
+              <a:t>22</a:t>
+            </a:fld>
+            <a:endParaRPr lang="en-US">
+              <a:solidFill>
+                <a:schemeClr val="tx1">
+                  <a:alpha val="80000"/>
+                </a:schemeClr>
+              </a:solidFill>
+            </a:endParaRPr>
+          </a:p>
+        </p:txBody>
+      </p:sp>
+      <p:sp>
+        <p:nvSpPr>
+          <p:cNvPr id="8" name="Title 1">
+            <a:extLst>
+              <a:ext uri="{FF2B5EF4-FFF2-40B4-BE49-F238E27FC236}">
+                <a16:creationId xmlns:a16="http://schemas.microsoft.com/office/drawing/2014/main" id="{58FF4C60-14F0-104E-A6FA-3FCA6169A054}"/>
+              </a:ext>
+            </a:extLst>
+          </p:cNvPr>
+          <p:cNvSpPr txBox="1">
+            <a:spLocks/>
+          </p:cNvSpPr>
+          <p:nvPr/>
+        </p:nvSpPr>
+        <p:spPr>
+          <a:xfrm>
+            <a:off x="838200" y="365126"/>
+            <a:ext cx="10515600" cy="638922"/>
+          </a:xfrm>
+          <a:prstGeom prst="rect">
+            <a:avLst/>
+          </a:prstGeom>
+        </p:spPr>
+        <p:txBody>
+          <a:bodyPr vert="horz" lIns="91440" tIns="45720" rIns="91440" bIns="45720" rtlCol="0" anchor="ctr">
+            <a:noAutofit/>
+          </a:bodyPr>
+          <a:lstStyle>
+            <a:lvl1pPr algn="l" defTabSz="914400" rtl="0" eaLnBrk="1" latinLnBrk="0" hangingPunct="1">
+              <a:lnSpc>
+                <a:spcPct val="90000"/>
+              </a:lnSpc>
+              <a:spcBef>
+                <a:spcPct val="0"/>
+              </a:spcBef>
+              <a:buNone/>
+              <a:defRPr sz="4400" kern="1200">
+                <a:solidFill>
+                  <a:schemeClr val="tx1"/>
+                </a:solidFill>
+                <a:latin typeface="+mj-lt"/>
+                <a:ea typeface="+mj-ea"/>
+                <a:cs typeface="+mj-cs"/>
+              </a:defRPr>
+            </a:lvl1pPr>
+          </a:lstStyle>
+          <a:p>
+            <a:r>
+              <a:rPr lang="en-US" sz="2700" b="1" dirty="0">
+                <a:solidFill>
+                  <a:srgbClr val="002060"/>
+                </a:solidFill>
+                <a:latin typeface="Arial" panose="020B0604020202020204" pitchFamily="34" charset="0"/>
+                <a:cs typeface="Arial" panose="020B0604020202020204" pitchFamily="34" charset="0"/>
+              </a:rPr>
+              <a:t>Yolov8n Vs Custom Yolov8n  Vs Teacher</a:t>
+            </a:r>
+            <a:endParaRPr lang="en-US" sz="2700" b="1" dirty="0">
+              <a:solidFill>
+                <a:srgbClr val="002060"/>
+              </a:solidFill>
+              <a:highlight>
+                <a:srgbClr val="FFFF00"/>
+              </a:highlight>
+              <a:latin typeface="Arial" panose="020B0604020202020204" pitchFamily="34" charset="0"/>
+              <a:cs typeface="Arial" panose="020B0604020202020204" pitchFamily="34" charset="0"/>
+            </a:endParaRPr>
+          </a:p>
+        </p:txBody>
+      </p:sp>
+      <p:pic>
+        <p:nvPicPr>
+          <p:cNvPr id="6" name="Picture 5" descr="A graph of different colored lines&#10;&#10;AI-generated content may be incorrect.">
+            <a:extLst>
+              <a:ext uri="{FF2B5EF4-FFF2-40B4-BE49-F238E27FC236}">
+                <a16:creationId xmlns:a16="http://schemas.microsoft.com/office/drawing/2014/main" id="{908D266C-BA74-CF28-F549-9166C8C4E224}"/>
+              </a:ext>
+            </a:extLst>
+          </p:cNvPr>
+          <p:cNvPicPr>
+            <a:picLocks noChangeAspect="1"/>
+          </p:cNvPicPr>
+          <p:nvPr/>
+        </p:nvPicPr>
+        <p:blipFill>
+          <a:blip r:embed="rId2">
+            <a:extLst>
+              <a:ext uri="{28A0092B-C50C-407E-A947-70E740481C1C}">
+                <a14:useLocalDpi xmlns:a14="http://schemas.microsoft.com/office/drawing/2010/main" val="0"/>
+              </a:ext>
+            </a:extLst>
+          </a:blip>
+          <a:stretch>
+            <a:fillRect/>
+          </a:stretch>
+        </p:blipFill>
+        <p:spPr>
+          <a:xfrm>
+            <a:off x="931701" y="2083201"/>
+            <a:ext cx="3371850" cy="2247900"/>
+          </a:xfrm>
+          <a:prstGeom prst="rect">
+            <a:avLst/>
+          </a:prstGeom>
+        </p:spPr>
+      </p:pic>
+      <p:pic>
+        <p:nvPicPr>
+          <p:cNvPr id="11" name="Picture 10" descr="A graph of a graph showing different colors&#10;&#10;AI-generated content may be incorrect.">
+            <a:extLst>
+              <a:ext uri="{FF2B5EF4-FFF2-40B4-BE49-F238E27FC236}">
+                <a16:creationId xmlns:a16="http://schemas.microsoft.com/office/drawing/2014/main" id="{A71CE207-451F-C141-A268-4C9207B88462}"/>
+              </a:ext>
+            </a:extLst>
+          </p:cNvPr>
+          <p:cNvPicPr>
+            <a:picLocks noChangeAspect="1"/>
+          </p:cNvPicPr>
+          <p:nvPr/>
+        </p:nvPicPr>
+        <p:blipFill>
+          <a:blip r:embed="rId3">
+            <a:extLst>
+              <a:ext uri="{28A0092B-C50C-407E-A947-70E740481C1C}">
+                <a14:useLocalDpi xmlns:a14="http://schemas.microsoft.com/office/drawing/2010/main" val="0"/>
+              </a:ext>
+            </a:extLst>
+          </a:blip>
+          <a:stretch>
+            <a:fillRect/>
+          </a:stretch>
+        </p:blipFill>
+        <p:spPr>
+          <a:xfrm>
+            <a:off x="4688827" y="2082799"/>
+            <a:ext cx="3371850" cy="2247900"/>
+          </a:xfrm>
+          <a:prstGeom prst="rect">
+            <a:avLst/>
+          </a:prstGeom>
+        </p:spPr>
+      </p:pic>
+      <p:pic>
+        <p:nvPicPr>
+          <p:cNvPr id="13" name="Picture 12" descr="A graph of a graph of confidence&#10;&#10;AI-generated content may be incorrect.">
+            <a:extLst>
+              <a:ext uri="{FF2B5EF4-FFF2-40B4-BE49-F238E27FC236}">
+                <a16:creationId xmlns:a16="http://schemas.microsoft.com/office/drawing/2014/main" id="{AEDF0FA9-283C-D4A5-C497-10C2DEF8EA4D}"/>
+              </a:ext>
+            </a:extLst>
+          </p:cNvPr>
+          <p:cNvPicPr>
+            <a:picLocks noChangeAspect="1"/>
+          </p:cNvPicPr>
+          <p:nvPr/>
+        </p:nvPicPr>
+        <p:blipFill>
+          <a:blip r:embed="rId4">
+            <a:extLst>
+              <a:ext uri="{28A0092B-C50C-407E-A947-70E740481C1C}">
+                <a14:useLocalDpi xmlns:a14="http://schemas.microsoft.com/office/drawing/2010/main" val="0"/>
+              </a:ext>
+            </a:extLst>
+          </a:blip>
+          <a:stretch>
+            <a:fillRect/>
+          </a:stretch>
+        </p:blipFill>
+        <p:spPr>
+          <a:xfrm>
+            <a:off x="8315325" y="2082799"/>
+            <a:ext cx="3372453" cy="2248302"/>
+          </a:xfrm>
+          <a:prstGeom prst="rect">
+            <a:avLst/>
+          </a:prstGeom>
+        </p:spPr>
+      </p:pic>
     </p:spTree>
     <p:extLst>
       <p:ext uri="{BB962C8B-B14F-4D97-AF65-F5344CB8AC3E}">
-        <p14:creationId xmlns:p14="http://schemas.microsoft.com/office/powerpoint/2010/main" val="3536711662"/>
+        <p14:creationId xmlns:p14="http://schemas.microsoft.com/office/powerpoint/2010/main" val="2144474917"/>
       </p:ext>
     </p:extLst>
   </p:cSld>
@@ -16850,6 +16035,2061 @@
       </p:grpSpPr>
       <p:sp>
         <p:nvSpPr>
+          <p:cNvPr id="4" name="Footer Placeholder 3">
+            <a:extLst>
+              <a:ext uri="{FF2B5EF4-FFF2-40B4-BE49-F238E27FC236}">
+                <a16:creationId xmlns:a16="http://schemas.microsoft.com/office/drawing/2014/main" id="{B8027B5C-B1A1-0376-4174-FFF61C554492}"/>
+              </a:ext>
+            </a:extLst>
+          </p:cNvPr>
+          <p:cNvSpPr>
+            <a:spLocks noGrp="1"/>
+          </p:cNvSpPr>
+          <p:nvPr>
+            <p:ph type="ftr" sz="quarter" idx="11"/>
+          </p:nvPr>
+        </p:nvSpPr>
+        <p:spPr>
+          <a:xfrm>
+            <a:off x="1028700" y="6356350"/>
+            <a:ext cx="6210300" cy="365125"/>
+          </a:xfrm>
+        </p:spPr>
+        <p:txBody>
+          <a:bodyPr>
+            <a:normAutofit/>
+          </a:bodyPr>
+          <a:lstStyle/>
+          <a:p>
+            <a:pPr algn="r">
+              <a:lnSpc>
+                <a:spcPct val="90000"/>
+              </a:lnSpc>
+              <a:spcAft>
+                <a:spcPts val="504"/>
+              </a:spcAft>
+            </a:pPr>
+            <a:r>
+              <a:rPr lang="en-US" sz="900" dirty="0">
+                <a:solidFill>
+                  <a:schemeClr val="tx1">
+                    <a:alpha val="80000"/>
+                  </a:schemeClr>
+                </a:solidFill>
+              </a:rPr>
+              <a:t>International University Of Applied Sciences</a:t>
+            </a:r>
+          </a:p>
+        </p:txBody>
+      </p:sp>
+      <p:sp>
+        <p:nvSpPr>
+          <p:cNvPr id="3" name="Date Placeholder 2">
+            <a:extLst>
+              <a:ext uri="{FF2B5EF4-FFF2-40B4-BE49-F238E27FC236}">
+                <a16:creationId xmlns:a16="http://schemas.microsoft.com/office/drawing/2014/main" id="{8B0DD3C9-E5D2-AE60-3AFE-8A43297A9FBC}"/>
+              </a:ext>
+            </a:extLst>
+          </p:cNvPr>
+          <p:cNvSpPr>
+            <a:spLocks noGrp="1"/>
+          </p:cNvSpPr>
+          <p:nvPr>
+            <p:ph type="dt" sz="half" idx="10"/>
+          </p:nvPr>
+        </p:nvSpPr>
+        <p:spPr>
+          <a:xfrm>
+            <a:off x="292608" y="6356349"/>
+            <a:ext cx="3085338" cy="365125"/>
+          </a:xfrm>
+        </p:spPr>
+        <p:txBody>
+          <a:bodyPr>
+            <a:normAutofit/>
+          </a:bodyPr>
+          <a:lstStyle/>
+          <a:p>
+            <a:pPr algn="r">
+              <a:lnSpc>
+                <a:spcPct val="90000"/>
+              </a:lnSpc>
+              <a:spcAft>
+                <a:spcPts val="504"/>
+              </a:spcAft>
+            </a:pPr>
+            <a:r>
+              <a:rPr lang="en-US" sz="900" dirty="0">
+                <a:solidFill>
+                  <a:schemeClr val="tx1">
+                    <a:alpha val="80000"/>
+                  </a:schemeClr>
+                </a:solidFill>
+              </a:rPr>
+              <a:t>Neural Architecture Search &amp; Knowledge Distillation</a:t>
+            </a:r>
+          </a:p>
+        </p:txBody>
+      </p:sp>
+      <p:sp>
+        <p:nvSpPr>
+          <p:cNvPr id="5" name="Slide Number Placeholder 4">
+            <a:extLst>
+              <a:ext uri="{FF2B5EF4-FFF2-40B4-BE49-F238E27FC236}">
+                <a16:creationId xmlns:a16="http://schemas.microsoft.com/office/drawing/2014/main" id="{80A790D5-177D-B6A2-0E90-81EF4FE37C9F}"/>
+              </a:ext>
+            </a:extLst>
+          </p:cNvPr>
+          <p:cNvSpPr>
+            <a:spLocks noGrp="1"/>
+          </p:cNvSpPr>
+          <p:nvPr>
+            <p:ph type="sldNum" sz="quarter" idx="12"/>
+          </p:nvPr>
+        </p:nvSpPr>
+        <p:spPr>
+          <a:xfrm>
+            <a:off x="11034184" y="6356350"/>
+            <a:ext cx="514349" cy="365125"/>
+          </a:xfrm>
+        </p:spPr>
+        <p:txBody>
+          <a:bodyPr>
+            <a:normAutofit/>
+          </a:bodyPr>
+          <a:lstStyle/>
+          <a:p>
+            <a:pPr>
+              <a:spcAft>
+                <a:spcPts val="600"/>
+              </a:spcAft>
+            </a:pPr>
+            <a:fld id="{C98AED0B-3B00-448B-836B-316F7AA19B4B}" type="slidenum">
+              <a:rPr lang="en-US">
+                <a:solidFill>
+                  <a:schemeClr val="tx1">
+                    <a:alpha val="80000"/>
+                  </a:schemeClr>
+                </a:solidFill>
+              </a:rPr>
+              <a:pPr>
+                <a:spcAft>
+                  <a:spcPts val="600"/>
+                </a:spcAft>
+              </a:pPr>
+              <a:t>23</a:t>
+            </a:fld>
+            <a:endParaRPr lang="en-US">
+              <a:solidFill>
+                <a:schemeClr val="tx1">
+                  <a:alpha val="80000"/>
+                </a:schemeClr>
+              </a:solidFill>
+            </a:endParaRPr>
+          </a:p>
+        </p:txBody>
+      </p:sp>
+      <p:sp>
+        <p:nvSpPr>
+          <p:cNvPr id="8" name="Title 1">
+            <a:extLst>
+              <a:ext uri="{FF2B5EF4-FFF2-40B4-BE49-F238E27FC236}">
+                <a16:creationId xmlns:a16="http://schemas.microsoft.com/office/drawing/2014/main" id="{58FF4C60-14F0-104E-A6FA-3FCA6169A054}"/>
+              </a:ext>
+            </a:extLst>
+          </p:cNvPr>
+          <p:cNvSpPr txBox="1">
+            <a:spLocks/>
+          </p:cNvSpPr>
+          <p:nvPr/>
+        </p:nvSpPr>
+        <p:spPr>
+          <a:xfrm>
+            <a:off x="838200" y="365126"/>
+            <a:ext cx="10515600" cy="638922"/>
+          </a:xfrm>
+          <a:prstGeom prst="rect">
+            <a:avLst/>
+          </a:prstGeom>
+        </p:spPr>
+        <p:txBody>
+          <a:bodyPr vert="horz" lIns="91440" tIns="45720" rIns="91440" bIns="45720" rtlCol="0" anchor="ctr">
+            <a:noAutofit/>
+          </a:bodyPr>
+          <a:lstStyle>
+            <a:lvl1pPr algn="l" defTabSz="914400" rtl="0" eaLnBrk="1" latinLnBrk="0" hangingPunct="1">
+              <a:lnSpc>
+                <a:spcPct val="90000"/>
+              </a:lnSpc>
+              <a:spcBef>
+                <a:spcPct val="0"/>
+              </a:spcBef>
+              <a:buNone/>
+              <a:defRPr sz="4400" kern="1200">
+                <a:solidFill>
+                  <a:schemeClr val="tx1"/>
+                </a:solidFill>
+                <a:latin typeface="+mj-lt"/>
+                <a:ea typeface="+mj-ea"/>
+                <a:cs typeface="+mj-cs"/>
+              </a:defRPr>
+            </a:lvl1pPr>
+          </a:lstStyle>
+          <a:p>
+            <a:r>
+              <a:rPr lang="en-US" sz="2700" b="1" dirty="0">
+                <a:solidFill>
+                  <a:srgbClr val="002060"/>
+                </a:solidFill>
+                <a:latin typeface="Arial" panose="020B0604020202020204" pitchFamily="34" charset="0"/>
+                <a:cs typeface="Arial" panose="020B0604020202020204" pitchFamily="34" charset="0"/>
+              </a:rPr>
+              <a:t>Results and Performance Analysis</a:t>
+            </a:r>
+            <a:br>
+              <a:rPr lang="en-US" sz="2700" b="1" dirty="0">
+                <a:solidFill>
+                  <a:srgbClr val="002060"/>
+                </a:solidFill>
+                <a:latin typeface="Arial" panose="020B0604020202020204" pitchFamily="34" charset="0"/>
+                <a:cs typeface="Arial" panose="020B0604020202020204" pitchFamily="34" charset="0"/>
+              </a:rPr>
+            </a:br>
+            <a:endParaRPr lang="en-US" sz="2700" b="1" dirty="0">
+              <a:solidFill>
+                <a:srgbClr val="002060"/>
+              </a:solidFill>
+              <a:highlight>
+                <a:srgbClr val="FFFF00"/>
+              </a:highlight>
+              <a:latin typeface="Arial" panose="020B0604020202020204" pitchFamily="34" charset="0"/>
+              <a:cs typeface="Arial" panose="020B0604020202020204" pitchFamily="34" charset="0"/>
+            </a:endParaRPr>
+          </a:p>
+        </p:txBody>
+      </p:sp>
+      <p:pic>
+        <p:nvPicPr>
+          <p:cNvPr id="7" name="Picture 6">
+            <a:extLst>
+              <a:ext uri="{FF2B5EF4-FFF2-40B4-BE49-F238E27FC236}">
+                <a16:creationId xmlns:a16="http://schemas.microsoft.com/office/drawing/2014/main" id="{F3301D7B-A765-3A6E-E266-99D7C15063D4}"/>
+              </a:ext>
+            </a:extLst>
+          </p:cNvPr>
+          <p:cNvPicPr>
+            <a:picLocks noChangeAspect="1"/>
+          </p:cNvPicPr>
+          <p:nvPr/>
+        </p:nvPicPr>
+        <p:blipFill>
+          <a:blip r:embed="rId2"/>
+          <a:stretch>
+            <a:fillRect/>
+          </a:stretch>
+        </p:blipFill>
+        <p:spPr>
+          <a:xfrm>
+            <a:off x="1853946" y="3727338"/>
+            <a:ext cx="7145737" cy="1685919"/>
+          </a:xfrm>
+          <a:prstGeom prst="rect">
+            <a:avLst/>
+          </a:prstGeom>
+        </p:spPr>
+      </p:pic>
+      <p:cxnSp>
+        <p:nvCxnSpPr>
+          <p:cNvPr id="9" name="Straight Connector 8">
+            <a:extLst>
+              <a:ext uri="{FF2B5EF4-FFF2-40B4-BE49-F238E27FC236}">
+                <a16:creationId xmlns:a16="http://schemas.microsoft.com/office/drawing/2014/main" id="{F96391AE-13F5-AA55-F1A2-22BAD6FC4FA5}"/>
+              </a:ext>
+            </a:extLst>
+          </p:cNvPr>
+          <p:cNvCxnSpPr>
+            <a:cxnSpLocks/>
+          </p:cNvCxnSpPr>
+          <p:nvPr/>
+        </p:nvCxnSpPr>
+        <p:spPr>
+          <a:xfrm>
+            <a:off x="1609356" y="3242834"/>
+            <a:ext cx="0" cy="2170423"/>
+          </a:xfrm>
+          <a:prstGeom prst="line">
+            <a:avLst/>
+          </a:prstGeom>
+          <a:ln w="73025">
+            <a:solidFill>
+              <a:srgbClr val="002060"/>
+            </a:solidFill>
+          </a:ln>
+        </p:spPr>
+        <p:style>
+          <a:lnRef idx="1">
+            <a:schemeClr val="accent1"/>
+          </a:lnRef>
+          <a:fillRef idx="0">
+            <a:schemeClr val="accent1"/>
+          </a:fillRef>
+          <a:effectRef idx="0">
+            <a:schemeClr val="accent1"/>
+          </a:effectRef>
+          <a:fontRef idx="minor">
+            <a:schemeClr val="tx1"/>
+          </a:fontRef>
+        </p:style>
+      </p:cxnSp>
+      <p:sp>
+        <p:nvSpPr>
+          <p:cNvPr id="26" name="TextBox 25">
+            <a:extLst>
+              <a:ext uri="{FF2B5EF4-FFF2-40B4-BE49-F238E27FC236}">
+                <a16:creationId xmlns:a16="http://schemas.microsoft.com/office/drawing/2014/main" id="{855825E8-6BB8-43CC-C0CE-0B53756D2C95}"/>
+              </a:ext>
+            </a:extLst>
+          </p:cNvPr>
+          <p:cNvSpPr txBox="1"/>
+          <p:nvPr/>
+        </p:nvSpPr>
+        <p:spPr>
+          <a:xfrm>
+            <a:off x="1853946" y="3242834"/>
+            <a:ext cx="6096000" cy="369332"/>
+          </a:xfrm>
+          <a:prstGeom prst="rect">
+            <a:avLst/>
+          </a:prstGeom>
+          <a:noFill/>
+        </p:spPr>
+        <p:txBody>
+          <a:bodyPr wrap="square">
+            <a:spAutoFit/>
+          </a:bodyPr>
+          <a:lstStyle/>
+          <a:p>
+            <a:r>
+              <a:rPr lang="en-US" b="1" dirty="0">
+                <a:solidFill>
+                  <a:srgbClr val="002060"/>
+                </a:solidFill>
+                <a:latin typeface="Arial" panose="020B0604020202020204" pitchFamily="34" charset="0"/>
+                <a:cs typeface="Arial" panose="020B0604020202020204" pitchFamily="34" charset="0"/>
+              </a:rPr>
+              <a:t>Comprehensive Performance Metrics</a:t>
+            </a:r>
+          </a:p>
+        </p:txBody>
+      </p:sp>
+      <p:sp>
+        <p:nvSpPr>
+          <p:cNvPr id="49" name="Rectangle 48">
+            <a:extLst>
+              <a:ext uri="{FF2B5EF4-FFF2-40B4-BE49-F238E27FC236}">
+                <a16:creationId xmlns:a16="http://schemas.microsoft.com/office/drawing/2014/main" id="{123561D4-BA41-F057-7950-00F4DBFA6DD8}"/>
+              </a:ext>
+            </a:extLst>
+          </p:cNvPr>
+          <p:cNvSpPr/>
+          <p:nvPr/>
+        </p:nvSpPr>
+        <p:spPr>
+          <a:xfrm>
+            <a:off x="1798528" y="1357148"/>
+            <a:ext cx="1529392" cy="1478223"/>
+          </a:xfrm>
+          <a:prstGeom prst="rect">
+            <a:avLst/>
+          </a:prstGeom>
+          <a:solidFill>
+            <a:schemeClr val="bg1"/>
+          </a:solidFill>
+          <a:ln>
+            <a:solidFill>
+              <a:srgbClr val="002060"/>
+            </a:solidFill>
+          </a:ln>
+        </p:spPr>
+        <p:style>
+          <a:lnRef idx="2">
+            <a:schemeClr val="accent1">
+              <a:shade val="15000"/>
+            </a:schemeClr>
+          </a:lnRef>
+          <a:fillRef idx="1">
+            <a:schemeClr val="accent1"/>
+          </a:fillRef>
+          <a:effectRef idx="0">
+            <a:schemeClr val="accent1"/>
+          </a:effectRef>
+          <a:fontRef idx="minor">
+            <a:schemeClr val="lt1"/>
+          </a:fontRef>
+        </p:style>
+        <p:txBody>
+          <a:bodyPr rtlCol="0" anchor="ctr"/>
+          <a:lstStyle/>
+          <a:p>
+            <a:pPr algn="ctr"/>
+            <a:endParaRPr lang="en-US"/>
+          </a:p>
+        </p:txBody>
+      </p:sp>
+      <p:sp>
+        <p:nvSpPr>
+          <p:cNvPr id="50" name="Rectangle: Rounded Corners 49">
+            <a:extLst>
+              <a:ext uri="{FF2B5EF4-FFF2-40B4-BE49-F238E27FC236}">
+                <a16:creationId xmlns:a16="http://schemas.microsoft.com/office/drawing/2014/main" id="{84711725-6F6E-314A-0721-1B105EC4D8C6}"/>
+              </a:ext>
+            </a:extLst>
+          </p:cNvPr>
+          <p:cNvSpPr/>
+          <p:nvPr/>
+        </p:nvSpPr>
+        <p:spPr>
+          <a:xfrm>
+            <a:off x="1940212" y="2396809"/>
+            <a:ext cx="1264806" cy="300209"/>
+          </a:xfrm>
+          <a:prstGeom prst="roundRect">
+            <a:avLst/>
+          </a:prstGeom>
+          <a:ln>
+            <a:noFill/>
+          </a:ln>
+        </p:spPr>
+        <p:style>
+          <a:lnRef idx="2">
+            <a:schemeClr val="accent6">
+              <a:shade val="15000"/>
+            </a:schemeClr>
+          </a:lnRef>
+          <a:fillRef idx="1">
+            <a:schemeClr val="accent6"/>
+          </a:fillRef>
+          <a:effectRef idx="0">
+            <a:schemeClr val="accent6"/>
+          </a:effectRef>
+          <a:fontRef idx="minor">
+            <a:schemeClr val="lt1"/>
+          </a:fontRef>
+        </p:style>
+        <p:txBody>
+          <a:bodyPr rtlCol="0" anchor="ctr"/>
+          <a:lstStyle/>
+          <a:p>
+            <a:pPr algn="ctr"/>
+            <a:r>
+              <a:rPr lang="en-US" sz="900" dirty="0"/>
+              <a:t>-1% vs Baseline</a:t>
+            </a:r>
+          </a:p>
+        </p:txBody>
+      </p:sp>
+      <p:sp>
+        <p:nvSpPr>
+          <p:cNvPr id="51" name="Rectangle 50">
+            <a:extLst>
+              <a:ext uri="{FF2B5EF4-FFF2-40B4-BE49-F238E27FC236}">
+                <a16:creationId xmlns:a16="http://schemas.microsoft.com/office/drawing/2014/main" id="{4D4AC6A7-B743-5628-F3C3-07EBB30032B3}"/>
+              </a:ext>
+            </a:extLst>
+          </p:cNvPr>
+          <p:cNvSpPr/>
+          <p:nvPr/>
+        </p:nvSpPr>
+        <p:spPr>
+          <a:xfrm>
+            <a:off x="3593921" y="1357148"/>
+            <a:ext cx="1529392" cy="1478223"/>
+          </a:xfrm>
+          <a:prstGeom prst="rect">
+            <a:avLst/>
+          </a:prstGeom>
+          <a:solidFill>
+            <a:schemeClr val="bg1"/>
+          </a:solidFill>
+          <a:ln>
+            <a:solidFill>
+              <a:srgbClr val="002060"/>
+            </a:solidFill>
+          </a:ln>
+        </p:spPr>
+        <p:style>
+          <a:lnRef idx="2">
+            <a:schemeClr val="accent1">
+              <a:shade val="15000"/>
+            </a:schemeClr>
+          </a:lnRef>
+          <a:fillRef idx="1">
+            <a:schemeClr val="accent1"/>
+          </a:fillRef>
+          <a:effectRef idx="0">
+            <a:schemeClr val="accent1"/>
+          </a:effectRef>
+          <a:fontRef idx="minor">
+            <a:schemeClr val="lt1"/>
+          </a:fontRef>
+        </p:style>
+        <p:txBody>
+          <a:bodyPr rtlCol="0" anchor="ctr"/>
+          <a:lstStyle/>
+          <a:p>
+            <a:pPr algn="ctr"/>
+            <a:endParaRPr lang="en-US"/>
+          </a:p>
+        </p:txBody>
+      </p:sp>
+      <p:sp>
+        <p:nvSpPr>
+          <p:cNvPr id="52" name="Rectangle: Rounded Corners 51">
+            <a:extLst>
+              <a:ext uri="{FF2B5EF4-FFF2-40B4-BE49-F238E27FC236}">
+                <a16:creationId xmlns:a16="http://schemas.microsoft.com/office/drawing/2014/main" id="{5CA16F70-A41B-DFC0-06AE-F914134D2235}"/>
+              </a:ext>
+            </a:extLst>
+          </p:cNvPr>
+          <p:cNvSpPr/>
+          <p:nvPr/>
+        </p:nvSpPr>
+        <p:spPr>
+          <a:xfrm>
+            <a:off x="3735605" y="2396809"/>
+            <a:ext cx="1264806" cy="300209"/>
+          </a:xfrm>
+          <a:prstGeom prst="roundRect">
+            <a:avLst/>
+          </a:prstGeom>
+          <a:ln>
+            <a:noFill/>
+          </a:ln>
+        </p:spPr>
+        <p:style>
+          <a:lnRef idx="2">
+            <a:schemeClr val="accent6">
+              <a:shade val="15000"/>
+            </a:schemeClr>
+          </a:lnRef>
+          <a:fillRef idx="1">
+            <a:schemeClr val="accent6"/>
+          </a:fillRef>
+          <a:effectRef idx="0">
+            <a:schemeClr val="accent6"/>
+          </a:effectRef>
+          <a:fontRef idx="minor">
+            <a:schemeClr val="lt1"/>
+          </a:fontRef>
+        </p:style>
+        <p:txBody>
+          <a:bodyPr rtlCol="0" anchor="ctr"/>
+          <a:lstStyle/>
+          <a:p>
+            <a:pPr algn="ctr"/>
+            <a:r>
+              <a:rPr lang="en-US" sz="800" dirty="0"/>
+              <a:t>mAP@50 Retention</a:t>
+            </a:r>
+          </a:p>
+        </p:txBody>
+      </p:sp>
+      <p:sp>
+        <p:nvSpPr>
+          <p:cNvPr id="53" name="Rectangle 52">
+            <a:extLst>
+              <a:ext uri="{FF2B5EF4-FFF2-40B4-BE49-F238E27FC236}">
+                <a16:creationId xmlns:a16="http://schemas.microsoft.com/office/drawing/2014/main" id="{6D94BE60-40FB-3193-3E04-09FDED8E399D}"/>
+              </a:ext>
+            </a:extLst>
+          </p:cNvPr>
+          <p:cNvSpPr/>
+          <p:nvPr/>
+        </p:nvSpPr>
+        <p:spPr>
+          <a:xfrm>
+            <a:off x="5397611" y="1357148"/>
+            <a:ext cx="1529392" cy="1478223"/>
+          </a:xfrm>
+          <a:prstGeom prst="rect">
+            <a:avLst/>
+          </a:prstGeom>
+          <a:solidFill>
+            <a:schemeClr val="bg1"/>
+          </a:solidFill>
+          <a:ln>
+            <a:solidFill>
+              <a:srgbClr val="002060"/>
+            </a:solidFill>
+          </a:ln>
+        </p:spPr>
+        <p:style>
+          <a:lnRef idx="2">
+            <a:schemeClr val="accent1">
+              <a:shade val="15000"/>
+            </a:schemeClr>
+          </a:lnRef>
+          <a:fillRef idx="1">
+            <a:schemeClr val="accent1"/>
+          </a:fillRef>
+          <a:effectRef idx="0">
+            <a:schemeClr val="accent1"/>
+          </a:effectRef>
+          <a:fontRef idx="minor">
+            <a:schemeClr val="lt1"/>
+          </a:fontRef>
+        </p:style>
+        <p:txBody>
+          <a:bodyPr rtlCol="0" anchor="ctr"/>
+          <a:lstStyle/>
+          <a:p>
+            <a:pPr algn="ctr"/>
+            <a:endParaRPr lang="en-US"/>
+          </a:p>
+        </p:txBody>
+      </p:sp>
+      <p:sp>
+        <p:nvSpPr>
+          <p:cNvPr id="54" name="Rectangle: Rounded Corners 53">
+            <a:extLst>
+              <a:ext uri="{FF2B5EF4-FFF2-40B4-BE49-F238E27FC236}">
+                <a16:creationId xmlns:a16="http://schemas.microsoft.com/office/drawing/2014/main" id="{8F48FFA2-BD69-51F5-CAE3-4FECD606BCD0}"/>
+              </a:ext>
+            </a:extLst>
+          </p:cNvPr>
+          <p:cNvSpPr/>
+          <p:nvPr/>
+        </p:nvSpPr>
+        <p:spPr>
+          <a:xfrm>
+            <a:off x="5468453" y="2396809"/>
+            <a:ext cx="1387708" cy="300209"/>
+          </a:xfrm>
+          <a:prstGeom prst="roundRect">
+            <a:avLst/>
+          </a:prstGeom>
+          <a:ln>
+            <a:noFill/>
+          </a:ln>
+        </p:spPr>
+        <p:style>
+          <a:lnRef idx="2">
+            <a:schemeClr val="accent6">
+              <a:shade val="15000"/>
+            </a:schemeClr>
+          </a:lnRef>
+          <a:fillRef idx="1">
+            <a:schemeClr val="accent6"/>
+          </a:fillRef>
+          <a:effectRef idx="0">
+            <a:schemeClr val="accent6"/>
+          </a:effectRef>
+          <a:fontRef idx="minor">
+            <a:schemeClr val="lt1"/>
+          </a:fontRef>
+        </p:style>
+        <p:txBody>
+          <a:bodyPr rtlCol="0" anchor="ctr"/>
+          <a:lstStyle/>
+          <a:p>
+            <a:pPr algn="ctr"/>
+            <a:r>
+              <a:rPr lang="en-US" sz="900" dirty="0"/>
+              <a:t>Real-time Performance </a:t>
+            </a:r>
+          </a:p>
+        </p:txBody>
+      </p:sp>
+      <p:sp>
+        <p:nvSpPr>
+          <p:cNvPr id="55" name="Rectangle 54">
+            <a:extLst>
+              <a:ext uri="{FF2B5EF4-FFF2-40B4-BE49-F238E27FC236}">
+                <a16:creationId xmlns:a16="http://schemas.microsoft.com/office/drawing/2014/main" id="{2AE66524-AD0D-5B23-D847-29A643E58EF3}"/>
+              </a:ext>
+            </a:extLst>
+          </p:cNvPr>
+          <p:cNvSpPr/>
+          <p:nvPr/>
+        </p:nvSpPr>
+        <p:spPr>
+          <a:xfrm>
+            <a:off x="7185573" y="1357148"/>
+            <a:ext cx="1529392" cy="1478223"/>
+          </a:xfrm>
+          <a:prstGeom prst="rect">
+            <a:avLst/>
+          </a:prstGeom>
+          <a:solidFill>
+            <a:schemeClr val="bg1"/>
+          </a:solidFill>
+          <a:ln>
+            <a:solidFill>
+              <a:srgbClr val="002060"/>
+            </a:solidFill>
+          </a:ln>
+        </p:spPr>
+        <p:style>
+          <a:lnRef idx="2">
+            <a:schemeClr val="accent1">
+              <a:shade val="15000"/>
+            </a:schemeClr>
+          </a:lnRef>
+          <a:fillRef idx="1">
+            <a:schemeClr val="accent1"/>
+          </a:fillRef>
+          <a:effectRef idx="0">
+            <a:schemeClr val="accent1"/>
+          </a:effectRef>
+          <a:fontRef idx="minor">
+            <a:schemeClr val="lt1"/>
+          </a:fontRef>
+        </p:style>
+        <p:txBody>
+          <a:bodyPr rtlCol="0" anchor="ctr"/>
+          <a:lstStyle/>
+          <a:p>
+            <a:pPr algn="ctr"/>
+            <a:endParaRPr lang="en-US"/>
+          </a:p>
+        </p:txBody>
+      </p:sp>
+      <p:sp>
+        <p:nvSpPr>
+          <p:cNvPr id="56" name="Rectangle: Rounded Corners 55">
+            <a:extLst>
+              <a:ext uri="{FF2B5EF4-FFF2-40B4-BE49-F238E27FC236}">
+                <a16:creationId xmlns:a16="http://schemas.microsoft.com/office/drawing/2014/main" id="{DC89E30F-3865-F40A-F688-FC4887A1309B}"/>
+              </a:ext>
+            </a:extLst>
+          </p:cNvPr>
+          <p:cNvSpPr/>
+          <p:nvPr/>
+        </p:nvSpPr>
+        <p:spPr>
+          <a:xfrm>
+            <a:off x="7327257" y="2396809"/>
+            <a:ext cx="1264806" cy="300209"/>
+          </a:xfrm>
+          <a:prstGeom prst="roundRect">
+            <a:avLst/>
+          </a:prstGeom>
+          <a:ln>
+            <a:noFill/>
+          </a:ln>
+        </p:spPr>
+        <p:style>
+          <a:lnRef idx="2">
+            <a:schemeClr val="accent6">
+              <a:shade val="15000"/>
+            </a:schemeClr>
+          </a:lnRef>
+          <a:fillRef idx="1">
+            <a:schemeClr val="accent6"/>
+          </a:fillRef>
+          <a:effectRef idx="0">
+            <a:schemeClr val="accent6"/>
+          </a:effectRef>
+          <a:fontRef idx="minor">
+            <a:schemeClr val="lt1"/>
+          </a:fontRef>
+        </p:style>
+        <p:txBody>
+          <a:bodyPr rtlCol="0" anchor="ctr"/>
+          <a:lstStyle/>
+          <a:p>
+            <a:pPr algn="ctr"/>
+            <a:r>
+              <a:rPr lang="en-US" sz="900" dirty="0"/>
+              <a:t>76.92% Size Reduction</a:t>
+            </a:r>
+          </a:p>
+        </p:txBody>
+      </p:sp>
+      <p:sp>
+        <p:nvSpPr>
+          <p:cNvPr id="40" name="TextBox 39">
+            <a:extLst>
+              <a:ext uri="{FF2B5EF4-FFF2-40B4-BE49-F238E27FC236}">
+                <a16:creationId xmlns:a16="http://schemas.microsoft.com/office/drawing/2014/main" id="{90C92407-26F4-BBF8-07F9-61F1D30503D0}"/>
+              </a:ext>
+            </a:extLst>
+          </p:cNvPr>
+          <p:cNvSpPr txBox="1"/>
+          <p:nvPr/>
+        </p:nvSpPr>
+        <p:spPr>
+          <a:xfrm>
+            <a:off x="2073920" y="1480694"/>
+            <a:ext cx="997389" cy="415498"/>
+          </a:xfrm>
+          <a:prstGeom prst="rect">
+            <a:avLst/>
+          </a:prstGeom>
+          <a:noFill/>
+        </p:spPr>
+        <p:txBody>
+          <a:bodyPr wrap="none" rtlCol="0">
+            <a:spAutoFit/>
+          </a:bodyPr>
+          <a:lstStyle/>
+          <a:p>
+            <a:r>
+              <a:rPr lang="en-US" sz="2100" b="1" dirty="0">
+                <a:solidFill>
+                  <a:srgbClr val="002060"/>
+                </a:solidFill>
+              </a:rPr>
+              <a:t>97.74%</a:t>
+            </a:r>
+          </a:p>
+        </p:txBody>
+      </p:sp>
+      <p:sp>
+        <p:nvSpPr>
+          <p:cNvPr id="45" name="TextBox 44">
+            <a:extLst>
+              <a:ext uri="{FF2B5EF4-FFF2-40B4-BE49-F238E27FC236}">
+                <a16:creationId xmlns:a16="http://schemas.microsoft.com/office/drawing/2014/main" id="{6EA145AB-5F48-5E0A-CB66-EDDAD8021B87}"/>
+              </a:ext>
+            </a:extLst>
+          </p:cNvPr>
+          <p:cNvSpPr txBox="1"/>
+          <p:nvPr/>
+        </p:nvSpPr>
+        <p:spPr>
+          <a:xfrm>
+            <a:off x="3869313" y="1480694"/>
+            <a:ext cx="861133" cy="415498"/>
+          </a:xfrm>
+          <a:prstGeom prst="rect">
+            <a:avLst/>
+          </a:prstGeom>
+          <a:noFill/>
+        </p:spPr>
+        <p:txBody>
+          <a:bodyPr wrap="none" rtlCol="0">
+            <a:spAutoFit/>
+          </a:bodyPr>
+          <a:lstStyle/>
+          <a:p>
+            <a:r>
+              <a:rPr lang="en-US" sz="2100" b="1" dirty="0">
+                <a:solidFill>
+                  <a:srgbClr val="002060"/>
+                </a:solidFill>
+              </a:rPr>
+              <a:t>99.5%</a:t>
+            </a:r>
+          </a:p>
+        </p:txBody>
+      </p:sp>
+      <p:sp>
+        <p:nvSpPr>
+          <p:cNvPr id="48" name="TextBox 47">
+            <a:extLst>
+              <a:ext uri="{FF2B5EF4-FFF2-40B4-BE49-F238E27FC236}">
+                <a16:creationId xmlns:a16="http://schemas.microsoft.com/office/drawing/2014/main" id="{CF9D9539-A762-9E0D-FFE4-406FD0BF355B}"/>
+              </a:ext>
+            </a:extLst>
+          </p:cNvPr>
+          <p:cNvSpPr txBox="1"/>
+          <p:nvPr/>
+        </p:nvSpPr>
+        <p:spPr>
+          <a:xfrm>
+            <a:off x="5800085" y="1480694"/>
+            <a:ext cx="591829" cy="415498"/>
+          </a:xfrm>
+          <a:prstGeom prst="rect">
+            <a:avLst/>
+          </a:prstGeom>
+          <a:noFill/>
+        </p:spPr>
+        <p:txBody>
+          <a:bodyPr wrap="none" rtlCol="0">
+            <a:spAutoFit/>
+          </a:bodyPr>
+          <a:lstStyle/>
+          <a:p>
+            <a:r>
+              <a:rPr lang="en-US" sz="2100" b="1" dirty="0">
+                <a:solidFill>
+                  <a:srgbClr val="002060"/>
+                </a:solidFill>
+              </a:rPr>
+              <a:t>30+</a:t>
+            </a:r>
+          </a:p>
+        </p:txBody>
+      </p:sp>
+      <p:sp>
+        <p:nvSpPr>
+          <p:cNvPr id="57" name="TextBox 56">
+            <a:extLst>
+              <a:ext uri="{FF2B5EF4-FFF2-40B4-BE49-F238E27FC236}">
+                <a16:creationId xmlns:a16="http://schemas.microsoft.com/office/drawing/2014/main" id="{3876D9C6-522E-E4C4-5B55-17C68BD17FE5}"/>
+              </a:ext>
+            </a:extLst>
+          </p:cNvPr>
+          <p:cNvSpPr txBox="1"/>
+          <p:nvPr/>
+        </p:nvSpPr>
+        <p:spPr>
+          <a:xfrm>
+            <a:off x="7537909" y="1508449"/>
+            <a:ext cx="843501" cy="415498"/>
+          </a:xfrm>
+          <a:prstGeom prst="rect">
+            <a:avLst/>
+          </a:prstGeom>
+          <a:noFill/>
+        </p:spPr>
+        <p:txBody>
+          <a:bodyPr wrap="none" rtlCol="0">
+            <a:spAutoFit/>
+          </a:bodyPr>
+          <a:lstStyle/>
+          <a:p>
+            <a:r>
+              <a:rPr lang="en-US" sz="2100" b="1" dirty="0">
+                <a:solidFill>
+                  <a:srgbClr val="002060"/>
+                </a:solidFill>
+              </a:rPr>
+              <a:t>30MB</a:t>
+            </a:r>
+          </a:p>
+        </p:txBody>
+      </p:sp>
+      <p:sp>
+        <p:nvSpPr>
+          <p:cNvPr id="59" name="TextBox 58">
+            <a:extLst>
+              <a:ext uri="{FF2B5EF4-FFF2-40B4-BE49-F238E27FC236}">
+                <a16:creationId xmlns:a16="http://schemas.microsoft.com/office/drawing/2014/main" id="{3F201A7F-1C80-10A6-00D7-FC5671FE388F}"/>
+              </a:ext>
+            </a:extLst>
+          </p:cNvPr>
+          <p:cNvSpPr txBox="1"/>
+          <p:nvPr/>
+        </p:nvSpPr>
+        <p:spPr>
+          <a:xfrm>
+            <a:off x="1964712" y="1938775"/>
+            <a:ext cx="1240306" cy="369332"/>
+          </a:xfrm>
+          <a:prstGeom prst="rect">
+            <a:avLst/>
+          </a:prstGeom>
+          <a:noFill/>
+        </p:spPr>
+        <p:txBody>
+          <a:bodyPr wrap="square">
+            <a:spAutoFit/>
+          </a:bodyPr>
+          <a:lstStyle/>
+          <a:p>
+            <a:r>
+              <a:rPr lang="en-US" sz="900" dirty="0"/>
+              <a:t>Final Model Accuracy </a:t>
+            </a:r>
+          </a:p>
+          <a:p>
+            <a:r>
+              <a:rPr lang="en-US" sz="900" dirty="0"/>
+              <a:t>        (mAP@50)</a:t>
+            </a:r>
+          </a:p>
+        </p:txBody>
+      </p:sp>
+      <p:sp>
+        <p:nvSpPr>
+          <p:cNvPr id="60" name="TextBox 59">
+            <a:extLst>
+              <a:ext uri="{FF2B5EF4-FFF2-40B4-BE49-F238E27FC236}">
+                <a16:creationId xmlns:a16="http://schemas.microsoft.com/office/drawing/2014/main" id="{6A880CCD-2435-C2EC-65DA-2155DE446A3B}"/>
+              </a:ext>
+            </a:extLst>
+          </p:cNvPr>
+          <p:cNvSpPr txBox="1"/>
+          <p:nvPr/>
+        </p:nvSpPr>
+        <p:spPr>
+          <a:xfrm>
+            <a:off x="3780006" y="1974137"/>
+            <a:ext cx="1240306" cy="230832"/>
+          </a:xfrm>
+          <a:prstGeom prst="rect">
+            <a:avLst/>
+          </a:prstGeom>
+          <a:noFill/>
+        </p:spPr>
+        <p:txBody>
+          <a:bodyPr wrap="square">
+            <a:spAutoFit/>
+          </a:bodyPr>
+          <a:lstStyle/>
+          <a:p>
+            <a:r>
+              <a:rPr lang="en-US" sz="900" dirty="0"/>
+              <a:t>Knowledge Retention</a:t>
+            </a:r>
+          </a:p>
+        </p:txBody>
+      </p:sp>
+      <p:sp>
+        <p:nvSpPr>
+          <p:cNvPr id="61" name="TextBox 60">
+            <a:extLst>
+              <a:ext uri="{FF2B5EF4-FFF2-40B4-BE49-F238E27FC236}">
+                <a16:creationId xmlns:a16="http://schemas.microsoft.com/office/drawing/2014/main" id="{121C67C7-2BBC-F123-836E-CC879C289B05}"/>
+              </a:ext>
+            </a:extLst>
+          </p:cNvPr>
+          <p:cNvSpPr txBox="1"/>
+          <p:nvPr/>
+        </p:nvSpPr>
+        <p:spPr>
+          <a:xfrm>
+            <a:off x="5694323" y="2008025"/>
+            <a:ext cx="1240306" cy="230832"/>
+          </a:xfrm>
+          <a:prstGeom prst="rect">
+            <a:avLst/>
+          </a:prstGeom>
+          <a:noFill/>
+        </p:spPr>
+        <p:txBody>
+          <a:bodyPr wrap="square">
+            <a:spAutoFit/>
+          </a:bodyPr>
+          <a:lstStyle/>
+          <a:p>
+            <a:r>
+              <a:rPr lang="en-US" sz="900" dirty="0"/>
+              <a:t>FPS Achieved</a:t>
+            </a:r>
+          </a:p>
+        </p:txBody>
+      </p:sp>
+      <p:sp>
+        <p:nvSpPr>
+          <p:cNvPr id="62" name="TextBox 61">
+            <a:extLst>
+              <a:ext uri="{FF2B5EF4-FFF2-40B4-BE49-F238E27FC236}">
+                <a16:creationId xmlns:a16="http://schemas.microsoft.com/office/drawing/2014/main" id="{E754264F-4C98-E0F6-1714-90F12AED7D68}"/>
+              </a:ext>
+            </a:extLst>
+          </p:cNvPr>
+          <p:cNvSpPr txBox="1"/>
+          <p:nvPr/>
+        </p:nvSpPr>
+        <p:spPr>
+          <a:xfrm>
+            <a:off x="7603968" y="1959832"/>
+            <a:ext cx="1240306" cy="230832"/>
+          </a:xfrm>
+          <a:prstGeom prst="rect">
+            <a:avLst/>
+          </a:prstGeom>
+          <a:noFill/>
+        </p:spPr>
+        <p:txBody>
+          <a:bodyPr wrap="square">
+            <a:spAutoFit/>
+          </a:bodyPr>
+          <a:lstStyle/>
+          <a:p>
+            <a:r>
+              <a:rPr lang="en-US" sz="900" dirty="0"/>
+              <a:t>Model Size</a:t>
+            </a:r>
+          </a:p>
+        </p:txBody>
+      </p:sp>
+    </p:spTree>
+    <p:extLst>
+      <p:ext uri="{BB962C8B-B14F-4D97-AF65-F5344CB8AC3E}">
+        <p14:creationId xmlns:p14="http://schemas.microsoft.com/office/powerpoint/2010/main" val="1681518274"/>
+      </p:ext>
+    </p:extLst>
+  </p:cSld>
+  <p:clrMapOvr>
+    <a:masterClrMapping/>
+  </p:clrMapOvr>
+</p:sld>
+</file>
+
+<file path=ppt/slides/slide24.xml><?xml version="1.0" encoding="utf-8"?>
+<p:sld xmlns:a="http://schemas.openxmlformats.org/drawingml/2006/main" xmlns:r="http://schemas.openxmlformats.org/officeDocument/2006/relationships" xmlns:p="http://schemas.openxmlformats.org/presentationml/2006/main">
+  <p:cSld>
+    <p:spTree>
+      <p:nvGrpSpPr>
+        <p:cNvPr id="1" name=""/>
+        <p:cNvGrpSpPr/>
+        <p:nvPr/>
+      </p:nvGrpSpPr>
+      <p:grpSpPr>
+        <a:xfrm>
+          <a:off x="0" y="0"/>
+          <a:ext cx="0" cy="0"/>
+          <a:chOff x="0" y="0"/>
+          <a:chExt cx="0" cy="0"/>
+        </a:xfrm>
+      </p:grpSpPr>
+      <p:sp>
+        <p:nvSpPr>
+          <p:cNvPr id="30" name="Rectangle 29">
+            <a:extLst>
+              <a:ext uri="{FF2B5EF4-FFF2-40B4-BE49-F238E27FC236}">
+                <a16:creationId xmlns:a16="http://schemas.microsoft.com/office/drawing/2014/main" id="{ACEAB88A-11F8-B83F-E7B7-9D70A96AE663}"/>
+              </a:ext>
+            </a:extLst>
+          </p:cNvPr>
+          <p:cNvSpPr/>
+          <p:nvPr/>
+        </p:nvSpPr>
+        <p:spPr>
+          <a:xfrm>
+            <a:off x="1106054" y="4261401"/>
+            <a:ext cx="9395691" cy="993928"/>
+          </a:xfrm>
+          <a:prstGeom prst="rect">
+            <a:avLst/>
+          </a:prstGeom>
+          <a:solidFill>
+            <a:schemeClr val="accent5">
+              <a:lumMod val="20000"/>
+              <a:lumOff val="80000"/>
+            </a:schemeClr>
+          </a:solidFill>
+          <a:ln>
+            <a:noFill/>
+          </a:ln>
+        </p:spPr>
+        <p:style>
+          <a:lnRef idx="1">
+            <a:schemeClr val="accent3"/>
+          </a:lnRef>
+          <a:fillRef idx="2">
+            <a:schemeClr val="accent3"/>
+          </a:fillRef>
+          <a:effectRef idx="1">
+            <a:schemeClr val="accent3"/>
+          </a:effectRef>
+          <a:fontRef idx="minor">
+            <a:schemeClr val="dk1"/>
+          </a:fontRef>
+        </p:style>
+        <p:txBody>
+          <a:bodyPr rtlCol="0" anchor="ctr"/>
+          <a:lstStyle/>
+          <a:p>
+            <a:endParaRPr lang="en-US" sz="1400" dirty="0"/>
+          </a:p>
+        </p:txBody>
+      </p:sp>
+      <p:sp>
+        <p:nvSpPr>
+          <p:cNvPr id="2" name="Rectangle 1">
+            <a:extLst>
+              <a:ext uri="{FF2B5EF4-FFF2-40B4-BE49-F238E27FC236}">
+                <a16:creationId xmlns:a16="http://schemas.microsoft.com/office/drawing/2014/main" id="{A8E846C1-DDB4-BA8A-64D9-39E1EB5663D2}"/>
+              </a:ext>
+            </a:extLst>
+          </p:cNvPr>
+          <p:cNvSpPr/>
+          <p:nvPr/>
+        </p:nvSpPr>
+        <p:spPr>
+          <a:xfrm>
+            <a:off x="1106054" y="1414233"/>
+            <a:ext cx="9395691" cy="1486810"/>
+          </a:xfrm>
+          <a:prstGeom prst="rect">
+            <a:avLst/>
+          </a:prstGeom>
+          <a:solidFill>
+            <a:schemeClr val="accent5">
+              <a:lumMod val="20000"/>
+              <a:lumOff val="80000"/>
+            </a:schemeClr>
+          </a:solidFill>
+          <a:ln>
+            <a:noFill/>
+          </a:ln>
+        </p:spPr>
+        <p:style>
+          <a:lnRef idx="1">
+            <a:schemeClr val="accent3"/>
+          </a:lnRef>
+          <a:fillRef idx="2">
+            <a:schemeClr val="accent3"/>
+          </a:fillRef>
+          <a:effectRef idx="1">
+            <a:schemeClr val="accent3"/>
+          </a:effectRef>
+          <a:fontRef idx="minor">
+            <a:schemeClr val="dk1"/>
+          </a:fontRef>
+        </p:style>
+        <p:txBody>
+          <a:bodyPr rtlCol="0" anchor="ctr"/>
+          <a:lstStyle/>
+          <a:p>
+            <a:endParaRPr lang="en-US" sz="1400" dirty="0"/>
+          </a:p>
+        </p:txBody>
+      </p:sp>
+      <p:sp>
+        <p:nvSpPr>
+          <p:cNvPr id="3" name="Date Placeholder 2">
+            <a:extLst>
+              <a:ext uri="{FF2B5EF4-FFF2-40B4-BE49-F238E27FC236}">
+                <a16:creationId xmlns:a16="http://schemas.microsoft.com/office/drawing/2014/main" id="{8B0DD3C9-E5D2-AE60-3AFE-8A43297A9FBC}"/>
+              </a:ext>
+            </a:extLst>
+          </p:cNvPr>
+          <p:cNvSpPr>
+            <a:spLocks noGrp="1"/>
+          </p:cNvSpPr>
+          <p:nvPr>
+            <p:ph type="dt" sz="half" idx="10"/>
+          </p:nvPr>
+        </p:nvSpPr>
+        <p:spPr>
+          <a:xfrm>
+            <a:off x="292608" y="6356349"/>
+            <a:ext cx="3085338" cy="365125"/>
+          </a:xfrm>
+        </p:spPr>
+        <p:txBody>
+          <a:bodyPr>
+            <a:normAutofit/>
+          </a:bodyPr>
+          <a:lstStyle/>
+          <a:p>
+            <a:pPr algn="r">
+              <a:lnSpc>
+                <a:spcPct val="90000"/>
+              </a:lnSpc>
+              <a:spcAft>
+                <a:spcPts val="504"/>
+              </a:spcAft>
+            </a:pPr>
+            <a:r>
+              <a:rPr lang="en-US" sz="900" dirty="0">
+                <a:solidFill>
+                  <a:schemeClr val="tx1">
+                    <a:alpha val="80000"/>
+                  </a:schemeClr>
+                </a:solidFill>
+              </a:rPr>
+              <a:t>Neural Architecture Search &amp; Knowledge Distillation</a:t>
+            </a:r>
+          </a:p>
+        </p:txBody>
+      </p:sp>
+      <p:sp>
+        <p:nvSpPr>
+          <p:cNvPr id="4" name="Footer Placeholder 3">
+            <a:extLst>
+              <a:ext uri="{FF2B5EF4-FFF2-40B4-BE49-F238E27FC236}">
+                <a16:creationId xmlns:a16="http://schemas.microsoft.com/office/drawing/2014/main" id="{B8027B5C-B1A1-0376-4174-FFF61C554492}"/>
+              </a:ext>
+            </a:extLst>
+          </p:cNvPr>
+          <p:cNvSpPr>
+            <a:spLocks noGrp="1"/>
+          </p:cNvSpPr>
+          <p:nvPr>
+            <p:ph type="ftr" sz="quarter" idx="11"/>
+          </p:nvPr>
+        </p:nvSpPr>
+        <p:spPr>
+          <a:xfrm>
+            <a:off x="4913744" y="6356350"/>
+            <a:ext cx="2325255" cy="365125"/>
+          </a:xfrm>
+        </p:spPr>
+        <p:txBody>
+          <a:bodyPr>
+            <a:normAutofit/>
+          </a:bodyPr>
+          <a:lstStyle/>
+          <a:p>
+            <a:pPr algn="r">
+              <a:lnSpc>
+                <a:spcPct val="90000"/>
+              </a:lnSpc>
+              <a:spcAft>
+                <a:spcPts val="504"/>
+              </a:spcAft>
+            </a:pPr>
+            <a:r>
+              <a:rPr lang="en-US" sz="900" dirty="0">
+                <a:solidFill>
+                  <a:schemeClr val="tx1">
+                    <a:alpha val="80000"/>
+                  </a:schemeClr>
+                </a:solidFill>
+              </a:rPr>
+              <a:t>International University Of Applied Sciences</a:t>
+            </a:r>
+          </a:p>
+        </p:txBody>
+      </p:sp>
+      <p:sp>
+        <p:nvSpPr>
+          <p:cNvPr id="5" name="Slide Number Placeholder 4">
+            <a:extLst>
+              <a:ext uri="{FF2B5EF4-FFF2-40B4-BE49-F238E27FC236}">
+                <a16:creationId xmlns:a16="http://schemas.microsoft.com/office/drawing/2014/main" id="{80A790D5-177D-B6A2-0E90-81EF4FE37C9F}"/>
+              </a:ext>
+            </a:extLst>
+          </p:cNvPr>
+          <p:cNvSpPr>
+            <a:spLocks noGrp="1"/>
+          </p:cNvSpPr>
+          <p:nvPr>
+            <p:ph type="sldNum" sz="quarter" idx="12"/>
+          </p:nvPr>
+        </p:nvSpPr>
+        <p:spPr>
+          <a:xfrm>
+            <a:off x="11034184" y="6356350"/>
+            <a:ext cx="514349" cy="365125"/>
+          </a:xfrm>
+        </p:spPr>
+        <p:txBody>
+          <a:bodyPr>
+            <a:normAutofit/>
+          </a:bodyPr>
+          <a:lstStyle/>
+          <a:p>
+            <a:pPr>
+              <a:spcAft>
+                <a:spcPts val="600"/>
+              </a:spcAft>
+            </a:pPr>
+            <a:fld id="{C98AED0B-3B00-448B-836B-316F7AA19B4B}" type="slidenum">
+              <a:rPr lang="en-US">
+                <a:solidFill>
+                  <a:schemeClr val="tx1">
+                    <a:alpha val="80000"/>
+                  </a:schemeClr>
+                </a:solidFill>
+              </a:rPr>
+              <a:pPr>
+                <a:spcAft>
+                  <a:spcPts val="600"/>
+                </a:spcAft>
+              </a:pPr>
+              <a:t>24</a:t>
+            </a:fld>
+            <a:endParaRPr lang="en-US">
+              <a:solidFill>
+                <a:schemeClr val="tx1">
+                  <a:alpha val="80000"/>
+                </a:schemeClr>
+              </a:solidFill>
+            </a:endParaRPr>
+          </a:p>
+        </p:txBody>
+      </p:sp>
+      <p:sp>
+        <p:nvSpPr>
+          <p:cNvPr id="8" name="Title 1">
+            <a:extLst>
+              <a:ext uri="{FF2B5EF4-FFF2-40B4-BE49-F238E27FC236}">
+                <a16:creationId xmlns:a16="http://schemas.microsoft.com/office/drawing/2014/main" id="{58FF4C60-14F0-104E-A6FA-3FCA6169A054}"/>
+              </a:ext>
+            </a:extLst>
+          </p:cNvPr>
+          <p:cNvSpPr txBox="1">
+            <a:spLocks/>
+          </p:cNvSpPr>
+          <p:nvPr/>
+        </p:nvSpPr>
+        <p:spPr>
+          <a:xfrm>
+            <a:off x="838200" y="659111"/>
+            <a:ext cx="10515600" cy="638922"/>
+          </a:xfrm>
+          <a:prstGeom prst="rect">
+            <a:avLst/>
+          </a:prstGeom>
+        </p:spPr>
+        <p:txBody>
+          <a:bodyPr vert="horz" lIns="91440" tIns="45720" rIns="91440" bIns="45720" rtlCol="0" anchor="ctr">
+            <a:noAutofit/>
+          </a:bodyPr>
+          <a:lstStyle>
+            <a:lvl1pPr algn="l" defTabSz="914400" rtl="0" eaLnBrk="1" latinLnBrk="0" hangingPunct="1">
+              <a:lnSpc>
+                <a:spcPct val="90000"/>
+              </a:lnSpc>
+              <a:spcBef>
+                <a:spcPct val="0"/>
+              </a:spcBef>
+              <a:buNone/>
+              <a:defRPr sz="4400" kern="1200">
+                <a:solidFill>
+                  <a:schemeClr val="tx1"/>
+                </a:solidFill>
+                <a:latin typeface="+mj-lt"/>
+                <a:ea typeface="+mj-ea"/>
+                <a:cs typeface="+mj-cs"/>
+              </a:defRPr>
+            </a:lvl1pPr>
+          </a:lstStyle>
+          <a:p>
+            <a:r>
+              <a:rPr lang="en-US" sz="2700" b="1" dirty="0">
+                <a:solidFill>
+                  <a:srgbClr val="002060"/>
+                </a:solidFill>
+                <a:latin typeface="Arial" panose="020B0604020202020204" pitchFamily="34" charset="0"/>
+                <a:cs typeface="Arial" panose="020B0604020202020204" pitchFamily="34" charset="0"/>
+              </a:rPr>
+              <a:t>Conclusion</a:t>
+            </a:r>
+          </a:p>
+          <a:p>
+            <a:endParaRPr lang="en-US" sz="2700" b="1" dirty="0">
+              <a:solidFill>
+                <a:srgbClr val="002060"/>
+              </a:solidFill>
+              <a:latin typeface="Arial" panose="020B0604020202020204" pitchFamily="34" charset="0"/>
+              <a:cs typeface="Arial" panose="020B0604020202020204" pitchFamily="34" charset="0"/>
+            </a:endParaRPr>
+          </a:p>
+          <a:p>
+            <a:br>
+              <a:rPr lang="en-US" sz="2700" b="1" dirty="0">
+                <a:solidFill>
+                  <a:srgbClr val="002060"/>
+                </a:solidFill>
+                <a:latin typeface="Arial" panose="020B0604020202020204" pitchFamily="34" charset="0"/>
+                <a:cs typeface="Arial" panose="020B0604020202020204" pitchFamily="34" charset="0"/>
+              </a:rPr>
+            </a:br>
+            <a:endParaRPr lang="en-US" sz="2700" b="1" dirty="0">
+              <a:solidFill>
+                <a:srgbClr val="002060"/>
+              </a:solidFill>
+              <a:highlight>
+                <a:srgbClr val="FFFF00"/>
+              </a:highlight>
+              <a:latin typeface="Arial" panose="020B0604020202020204" pitchFamily="34" charset="0"/>
+              <a:cs typeface="Arial" panose="020B0604020202020204" pitchFamily="34" charset="0"/>
+            </a:endParaRPr>
+          </a:p>
+        </p:txBody>
+      </p:sp>
+      <p:sp>
+        <p:nvSpPr>
+          <p:cNvPr id="6" name="TextBox 5">
+            <a:extLst>
+              <a:ext uri="{FF2B5EF4-FFF2-40B4-BE49-F238E27FC236}">
+                <a16:creationId xmlns:a16="http://schemas.microsoft.com/office/drawing/2014/main" id="{03510D4C-4F7C-5441-1A31-9E3DCE6C3F12}"/>
+              </a:ext>
+            </a:extLst>
+          </p:cNvPr>
+          <p:cNvSpPr txBox="1"/>
+          <p:nvPr/>
+        </p:nvSpPr>
+        <p:spPr>
+          <a:xfrm>
+            <a:off x="1106054" y="1414233"/>
+            <a:ext cx="6096000" cy="646331"/>
+          </a:xfrm>
+          <a:prstGeom prst="rect">
+            <a:avLst/>
+          </a:prstGeom>
+          <a:noFill/>
+        </p:spPr>
+        <p:txBody>
+          <a:bodyPr wrap="square">
+            <a:spAutoFit/>
+          </a:bodyPr>
+          <a:lstStyle/>
+          <a:p>
+            <a:r>
+              <a:rPr lang="en-US" b="1" dirty="0">
+                <a:solidFill>
+                  <a:srgbClr val="002060"/>
+                </a:solidFill>
+              </a:rPr>
+              <a:t>Key Achievements</a:t>
+            </a:r>
+          </a:p>
+          <a:p>
+            <a:endParaRPr lang="en-US" b="1" dirty="0">
+              <a:solidFill>
+                <a:srgbClr val="002060"/>
+              </a:solidFill>
+            </a:endParaRPr>
+          </a:p>
+        </p:txBody>
+      </p:sp>
+      <p:cxnSp>
+        <p:nvCxnSpPr>
+          <p:cNvPr id="10" name="Straight Connector 9">
+            <a:extLst>
+              <a:ext uri="{FF2B5EF4-FFF2-40B4-BE49-F238E27FC236}">
+                <a16:creationId xmlns:a16="http://schemas.microsoft.com/office/drawing/2014/main" id="{C2C9933B-7C50-9C75-A7B7-8961068137BD}"/>
+              </a:ext>
+            </a:extLst>
+          </p:cNvPr>
+          <p:cNvCxnSpPr>
+            <a:cxnSpLocks/>
+          </p:cNvCxnSpPr>
+          <p:nvPr/>
+        </p:nvCxnSpPr>
+        <p:spPr>
+          <a:xfrm>
+            <a:off x="1009046" y="1402035"/>
+            <a:ext cx="0" cy="1499008"/>
+          </a:xfrm>
+          <a:prstGeom prst="line">
+            <a:avLst/>
+          </a:prstGeom>
+          <a:ln w="73025">
+            <a:solidFill>
+              <a:srgbClr val="002060"/>
+            </a:solidFill>
+          </a:ln>
+        </p:spPr>
+        <p:style>
+          <a:lnRef idx="1">
+            <a:schemeClr val="accent1"/>
+          </a:lnRef>
+          <a:fillRef idx="0">
+            <a:schemeClr val="accent1"/>
+          </a:fillRef>
+          <a:effectRef idx="0">
+            <a:schemeClr val="accent1"/>
+          </a:effectRef>
+          <a:fontRef idx="minor">
+            <a:schemeClr val="tx1"/>
+          </a:fontRef>
+        </p:style>
+      </p:cxnSp>
+      <p:sp>
+        <p:nvSpPr>
+          <p:cNvPr id="68" name="TextBox 67">
+            <a:extLst>
+              <a:ext uri="{FF2B5EF4-FFF2-40B4-BE49-F238E27FC236}">
+                <a16:creationId xmlns:a16="http://schemas.microsoft.com/office/drawing/2014/main" id="{FCB67E19-85D3-8690-4694-1C2126F199ED}"/>
+              </a:ext>
+            </a:extLst>
+          </p:cNvPr>
+          <p:cNvSpPr txBox="1"/>
+          <p:nvPr/>
+        </p:nvSpPr>
+        <p:spPr>
+          <a:xfrm>
+            <a:off x="1175430" y="1760259"/>
+            <a:ext cx="6452548" cy="1015663"/>
+          </a:xfrm>
+          <a:prstGeom prst="rect">
+            <a:avLst/>
+          </a:prstGeom>
+          <a:noFill/>
+        </p:spPr>
+        <p:txBody>
+          <a:bodyPr wrap="square">
+            <a:spAutoFit/>
+          </a:bodyPr>
+          <a:lstStyle/>
+          <a:p>
+            <a:pPr marL="171450" indent="-171450">
+              <a:buFont typeface="Arial" panose="020B0604020202020204" pitchFamily="34" charset="0"/>
+              <a:buChar char="•"/>
+            </a:pPr>
+            <a:r>
+              <a:rPr lang="en-US" sz="1200" dirty="0">
+                <a:solidFill>
+                  <a:srgbClr val="002060"/>
+                </a:solidFill>
+                <a:latin typeface="Segoe UI" panose="020B0502040204020203" pitchFamily="34" charset="0"/>
+                <a:cs typeface="Segoe UI" panose="020B0502040204020203" pitchFamily="34" charset="0"/>
+              </a:rPr>
+              <a:t>Successfully broke the traditional performance-efficiency trade-off</a:t>
+            </a:r>
+          </a:p>
+          <a:p>
+            <a:pPr marL="171450" indent="-171450">
+              <a:buFont typeface="Arial" panose="020B0604020202020204" pitchFamily="34" charset="0"/>
+              <a:buChar char="•"/>
+            </a:pPr>
+            <a:r>
+              <a:rPr lang="en-US" sz="1200" dirty="0">
+                <a:solidFill>
+                  <a:srgbClr val="002060"/>
+                </a:solidFill>
+                <a:latin typeface="Segoe UI" panose="020B0502040204020203" pitchFamily="34" charset="0"/>
+                <a:cs typeface="Segoe UI" panose="020B0502040204020203" pitchFamily="34" charset="0"/>
+              </a:rPr>
+              <a:t>Achieved 99.5% knowledge retention from teacher to student model</a:t>
+            </a:r>
+          </a:p>
+          <a:p>
+            <a:pPr marL="171450" indent="-171450">
+              <a:buFont typeface="Arial" panose="020B0604020202020204" pitchFamily="34" charset="0"/>
+              <a:buChar char="•"/>
+            </a:pPr>
+            <a:r>
+              <a:rPr lang="en-US" sz="1200" dirty="0">
+                <a:solidFill>
+                  <a:srgbClr val="002060"/>
+                </a:solidFill>
+                <a:latin typeface="Segoe UI" panose="020B0502040204020203" pitchFamily="34" charset="0"/>
+                <a:cs typeface="Segoe UI" panose="020B0502040204020203" pitchFamily="34" charset="0"/>
+              </a:rPr>
+              <a:t>Maintained high accuracy (97.74%) while achieving real-time performance (30+ FPS)</a:t>
+            </a:r>
+          </a:p>
+          <a:p>
+            <a:pPr marL="171450" indent="-171450">
+              <a:buFont typeface="Arial" panose="020B0604020202020204" pitchFamily="34" charset="0"/>
+              <a:buChar char="•"/>
+            </a:pPr>
+            <a:r>
+              <a:rPr lang="en-US" sz="1200" dirty="0">
+                <a:solidFill>
+                  <a:srgbClr val="002060"/>
+                </a:solidFill>
+                <a:latin typeface="Segoe UI" panose="020B0502040204020203" pitchFamily="34" charset="0"/>
+                <a:cs typeface="Segoe UI" panose="020B0502040204020203" pitchFamily="34" charset="0"/>
+              </a:rPr>
+              <a:t>Reduced model size by 76% (130MB → 30MB)</a:t>
+            </a:r>
+          </a:p>
+          <a:p>
+            <a:pPr marL="171450" indent="-171450">
+              <a:buFont typeface="Arial" panose="020B0604020202020204" pitchFamily="34" charset="0"/>
+              <a:buChar char="•"/>
+            </a:pPr>
+            <a:r>
+              <a:rPr lang="en-US" sz="1200" dirty="0">
+                <a:solidFill>
+                  <a:srgbClr val="002060"/>
+                </a:solidFill>
+                <a:latin typeface="Segoe UI" panose="020B0502040204020203" pitchFamily="34" charset="0"/>
+                <a:cs typeface="Segoe UI" panose="020B0502040204020203" pitchFamily="34" charset="0"/>
+              </a:rPr>
+              <a:t>Implemented production-ready MLOps pipeline</a:t>
+            </a:r>
+          </a:p>
+        </p:txBody>
+      </p:sp>
+      <p:sp>
+        <p:nvSpPr>
+          <p:cNvPr id="9" name="Rectangle 8">
+            <a:extLst>
+              <a:ext uri="{FF2B5EF4-FFF2-40B4-BE49-F238E27FC236}">
+                <a16:creationId xmlns:a16="http://schemas.microsoft.com/office/drawing/2014/main" id="{F6B3E408-3E00-3833-41D6-2D7040061AB5}"/>
+              </a:ext>
+            </a:extLst>
+          </p:cNvPr>
+          <p:cNvSpPr/>
+          <p:nvPr/>
+        </p:nvSpPr>
+        <p:spPr>
+          <a:xfrm>
+            <a:off x="1106054" y="3011172"/>
+            <a:ext cx="9395691" cy="1136779"/>
+          </a:xfrm>
+          <a:prstGeom prst="rect">
+            <a:avLst/>
+          </a:prstGeom>
+          <a:solidFill>
+            <a:schemeClr val="accent5">
+              <a:lumMod val="20000"/>
+              <a:lumOff val="80000"/>
+            </a:schemeClr>
+          </a:solidFill>
+          <a:ln>
+            <a:noFill/>
+          </a:ln>
+        </p:spPr>
+        <p:style>
+          <a:lnRef idx="1">
+            <a:schemeClr val="accent3"/>
+          </a:lnRef>
+          <a:fillRef idx="2">
+            <a:schemeClr val="accent3"/>
+          </a:fillRef>
+          <a:effectRef idx="1">
+            <a:schemeClr val="accent3"/>
+          </a:effectRef>
+          <a:fontRef idx="minor">
+            <a:schemeClr val="dk1"/>
+          </a:fontRef>
+        </p:style>
+        <p:txBody>
+          <a:bodyPr rtlCol="0" anchor="ctr"/>
+          <a:lstStyle/>
+          <a:p>
+            <a:endParaRPr lang="en-US" sz="1400" dirty="0"/>
+          </a:p>
+        </p:txBody>
+      </p:sp>
+      <p:sp>
+        <p:nvSpPr>
+          <p:cNvPr id="11" name="TextBox 10">
+            <a:extLst>
+              <a:ext uri="{FF2B5EF4-FFF2-40B4-BE49-F238E27FC236}">
+                <a16:creationId xmlns:a16="http://schemas.microsoft.com/office/drawing/2014/main" id="{8E82D7BC-B1AA-396E-015E-7A5C01FF00DE}"/>
+              </a:ext>
+            </a:extLst>
+          </p:cNvPr>
+          <p:cNvSpPr txBox="1"/>
+          <p:nvPr/>
+        </p:nvSpPr>
+        <p:spPr>
+          <a:xfrm>
+            <a:off x="1106054" y="3011173"/>
+            <a:ext cx="6096000" cy="369332"/>
+          </a:xfrm>
+          <a:prstGeom prst="rect">
+            <a:avLst/>
+          </a:prstGeom>
+          <a:noFill/>
+        </p:spPr>
+        <p:txBody>
+          <a:bodyPr wrap="square">
+            <a:spAutoFit/>
+          </a:bodyPr>
+          <a:lstStyle/>
+          <a:p>
+            <a:r>
+              <a:rPr lang="en-US" b="1" dirty="0">
+                <a:solidFill>
+                  <a:srgbClr val="002060"/>
+                </a:solidFill>
+              </a:rPr>
+              <a:t>Practical Applications</a:t>
+            </a:r>
+          </a:p>
+        </p:txBody>
+      </p:sp>
+      <p:cxnSp>
+        <p:nvCxnSpPr>
+          <p:cNvPr id="12" name="Straight Connector 11">
+            <a:extLst>
+              <a:ext uri="{FF2B5EF4-FFF2-40B4-BE49-F238E27FC236}">
+                <a16:creationId xmlns:a16="http://schemas.microsoft.com/office/drawing/2014/main" id="{2DD60F60-D6B6-1E84-44A8-51E98A8F2EA9}"/>
+              </a:ext>
+            </a:extLst>
+          </p:cNvPr>
+          <p:cNvCxnSpPr>
+            <a:cxnSpLocks/>
+          </p:cNvCxnSpPr>
+          <p:nvPr/>
+        </p:nvCxnSpPr>
+        <p:spPr>
+          <a:xfrm>
+            <a:off x="1009046" y="2998975"/>
+            <a:ext cx="0" cy="1148976"/>
+          </a:xfrm>
+          <a:prstGeom prst="line">
+            <a:avLst/>
+          </a:prstGeom>
+          <a:ln w="73025">
+            <a:solidFill>
+              <a:srgbClr val="002060"/>
+            </a:solidFill>
+          </a:ln>
+        </p:spPr>
+        <p:style>
+          <a:lnRef idx="1">
+            <a:schemeClr val="accent1"/>
+          </a:lnRef>
+          <a:fillRef idx="0">
+            <a:schemeClr val="accent1"/>
+          </a:fillRef>
+          <a:effectRef idx="0">
+            <a:schemeClr val="accent1"/>
+          </a:effectRef>
+          <a:fontRef idx="minor">
+            <a:schemeClr val="tx1"/>
+          </a:fontRef>
+        </p:style>
+      </p:cxnSp>
+      <p:sp>
+        <p:nvSpPr>
+          <p:cNvPr id="13" name="TextBox 12">
+            <a:extLst>
+              <a:ext uri="{FF2B5EF4-FFF2-40B4-BE49-F238E27FC236}">
+                <a16:creationId xmlns:a16="http://schemas.microsoft.com/office/drawing/2014/main" id="{2E9EC7B5-B25E-7F04-2F16-F9FC908630C1}"/>
+              </a:ext>
+            </a:extLst>
+          </p:cNvPr>
+          <p:cNvSpPr txBox="1"/>
+          <p:nvPr/>
+        </p:nvSpPr>
+        <p:spPr>
+          <a:xfrm>
+            <a:off x="1175430" y="3370428"/>
+            <a:ext cx="6452548" cy="646331"/>
+          </a:xfrm>
+          <a:prstGeom prst="rect">
+            <a:avLst/>
+          </a:prstGeom>
+          <a:noFill/>
+        </p:spPr>
+        <p:txBody>
+          <a:bodyPr wrap="square">
+            <a:spAutoFit/>
+          </a:bodyPr>
+          <a:lstStyle/>
+          <a:p>
+            <a:pPr marL="171450" indent="-171450">
+              <a:buFont typeface="Arial" panose="020B0604020202020204" pitchFamily="34" charset="0"/>
+              <a:buChar char="•"/>
+            </a:pPr>
+            <a:r>
+              <a:rPr lang="en-US" sz="1200" dirty="0">
+                <a:solidFill>
+                  <a:srgbClr val="002060"/>
+                </a:solidFill>
+                <a:latin typeface="Segoe UI" panose="020B0502040204020203" pitchFamily="34" charset="0"/>
+                <a:cs typeface="Segoe UI" panose="020B0502040204020203" pitchFamily="34" charset="0"/>
+              </a:rPr>
+              <a:t>Highway vehicle tracking and counting systems</a:t>
+            </a:r>
+          </a:p>
+          <a:p>
+            <a:pPr marL="171450" indent="-171450">
+              <a:buFont typeface="Arial" panose="020B0604020202020204" pitchFamily="34" charset="0"/>
+              <a:buChar char="•"/>
+            </a:pPr>
+            <a:r>
+              <a:rPr lang="en-US" sz="1200" dirty="0">
+                <a:solidFill>
+                  <a:srgbClr val="002060"/>
+                </a:solidFill>
+                <a:latin typeface="Segoe UI" panose="020B0502040204020203" pitchFamily="34" charset="0"/>
+                <a:cs typeface="Segoe UI" panose="020B0502040204020203" pitchFamily="34" charset="0"/>
+              </a:rPr>
+              <a:t>Edge deployment for real-time traffic monitoring</a:t>
+            </a:r>
+          </a:p>
+          <a:p>
+            <a:pPr marL="171450" indent="-171450">
+              <a:buFont typeface="Arial" panose="020B0604020202020204" pitchFamily="34" charset="0"/>
+              <a:buChar char="•"/>
+            </a:pPr>
+            <a:r>
+              <a:rPr lang="en-US" sz="1200" dirty="0">
+                <a:solidFill>
+                  <a:srgbClr val="002060"/>
+                </a:solidFill>
+                <a:latin typeface="Segoe UI" panose="020B0502040204020203" pitchFamily="34" charset="0"/>
+                <a:cs typeface="Segoe UI" panose="020B0502040204020203" pitchFamily="34" charset="0"/>
+              </a:rPr>
+              <a:t>Scalable MLOps framework for model optimization</a:t>
+            </a:r>
+          </a:p>
+        </p:txBody>
+      </p:sp>
+      <p:sp>
+        <p:nvSpPr>
+          <p:cNvPr id="25" name="TextBox 24">
+            <a:extLst>
+              <a:ext uri="{FF2B5EF4-FFF2-40B4-BE49-F238E27FC236}">
+                <a16:creationId xmlns:a16="http://schemas.microsoft.com/office/drawing/2014/main" id="{F0FCD6B6-FE4A-A3E9-2E4D-33A79550368B}"/>
+              </a:ext>
+            </a:extLst>
+          </p:cNvPr>
+          <p:cNvSpPr txBox="1"/>
+          <p:nvPr/>
+        </p:nvSpPr>
+        <p:spPr>
+          <a:xfrm>
+            <a:off x="1106055" y="4234310"/>
+            <a:ext cx="6096000" cy="369332"/>
+          </a:xfrm>
+          <a:prstGeom prst="rect">
+            <a:avLst/>
+          </a:prstGeom>
+          <a:noFill/>
+        </p:spPr>
+        <p:txBody>
+          <a:bodyPr wrap="square">
+            <a:spAutoFit/>
+          </a:bodyPr>
+          <a:lstStyle/>
+          <a:p>
+            <a:r>
+              <a:rPr lang="en-US" b="1" dirty="0">
+                <a:solidFill>
+                  <a:srgbClr val="002060"/>
+                </a:solidFill>
+                <a:latin typeface="Arial" panose="020B0604020202020204" pitchFamily="34" charset="0"/>
+                <a:cs typeface="Arial" panose="020B0604020202020204" pitchFamily="34" charset="0"/>
+              </a:rPr>
+              <a:t>Future Research Directions</a:t>
+            </a:r>
+          </a:p>
+        </p:txBody>
+      </p:sp>
+      <p:cxnSp>
+        <p:nvCxnSpPr>
+          <p:cNvPr id="26" name="Straight Connector 25">
+            <a:extLst>
+              <a:ext uri="{FF2B5EF4-FFF2-40B4-BE49-F238E27FC236}">
+                <a16:creationId xmlns:a16="http://schemas.microsoft.com/office/drawing/2014/main" id="{1D64AD2A-D065-8138-8C4C-245CBCA6ECE1}"/>
+              </a:ext>
+            </a:extLst>
+          </p:cNvPr>
+          <p:cNvCxnSpPr>
+            <a:cxnSpLocks/>
+          </p:cNvCxnSpPr>
+          <p:nvPr/>
+        </p:nvCxnSpPr>
+        <p:spPr>
+          <a:xfrm>
+            <a:off x="1009047" y="4222112"/>
+            <a:ext cx="0" cy="1108093"/>
+          </a:xfrm>
+          <a:prstGeom prst="line">
+            <a:avLst/>
+          </a:prstGeom>
+          <a:ln w="73025">
+            <a:solidFill>
+              <a:srgbClr val="002060"/>
+            </a:solidFill>
+          </a:ln>
+        </p:spPr>
+        <p:style>
+          <a:lnRef idx="1">
+            <a:schemeClr val="accent1"/>
+          </a:lnRef>
+          <a:fillRef idx="0">
+            <a:schemeClr val="accent1"/>
+          </a:fillRef>
+          <a:effectRef idx="0">
+            <a:schemeClr val="accent1"/>
+          </a:effectRef>
+          <a:fontRef idx="minor">
+            <a:schemeClr val="tx1"/>
+          </a:fontRef>
+        </p:style>
+      </p:cxnSp>
+      <p:sp>
+        <p:nvSpPr>
+          <p:cNvPr id="27" name="TextBox 26">
+            <a:extLst>
+              <a:ext uri="{FF2B5EF4-FFF2-40B4-BE49-F238E27FC236}">
+                <a16:creationId xmlns:a16="http://schemas.microsoft.com/office/drawing/2014/main" id="{EB9A7E39-4E54-F97F-B219-D38303C68EF7}"/>
+              </a:ext>
+            </a:extLst>
+          </p:cNvPr>
+          <p:cNvSpPr txBox="1"/>
+          <p:nvPr/>
+        </p:nvSpPr>
+        <p:spPr>
+          <a:xfrm>
+            <a:off x="1175431" y="4551310"/>
+            <a:ext cx="6452548" cy="646331"/>
+          </a:xfrm>
+          <a:prstGeom prst="rect">
+            <a:avLst/>
+          </a:prstGeom>
+          <a:noFill/>
+        </p:spPr>
+        <p:txBody>
+          <a:bodyPr wrap="square">
+            <a:spAutoFit/>
+          </a:bodyPr>
+          <a:lstStyle/>
+          <a:p>
+            <a:pPr marL="171450" indent="-171450">
+              <a:buFont typeface="Arial" panose="020B0604020202020204" pitchFamily="34" charset="0"/>
+              <a:buChar char="•"/>
+            </a:pPr>
+            <a:r>
+              <a:rPr lang="en-US" sz="1200" dirty="0">
+                <a:solidFill>
+                  <a:srgbClr val="002060"/>
+                </a:solidFill>
+                <a:latin typeface="Segoe UI" panose="020B0502040204020203" pitchFamily="34" charset="0"/>
+                <a:cs typeface="Segoe UI" panose="020B0502040204020203" pitchFamily="34" charset="0"/>
+              </a:rPr>
+              <a:t>Extension to other object detection architectures</a:t>
+            </a:r>
+          </a:p>
+          <a:p>
+            <a:pPr marL="171450" indent="-171450">
+              <a:buFont typeface="Arial" panose="020B0604020202020204" pitchFamily="34" charset="0"/>
+              <a:buChar char="•"/>
+            </a:pPr>
+            <a:r>
+              <a:rPr lang="en-US" sz="1200" dirty="0">
+                <a:solidFill>
+                  <a:srgbClr val="002060"/>
+                </a:solidFill>
+                <a:latin typeface="Segoe UI" panose="020B0502040204020203" pitchFamily="34" charset="0"/>
+                <a:cs typeface="Segoe UI" panose="020B0502040204020203" pitchFamily="34" charset="0"/>
+              </a:rPr>
+              <a:t>Multi-teacher knowledge distillation approaches</a:t>
+            </a:r>
+          </a:p>
+          <a:p>
+            <a:pPr marL="171450" indent="-171450">
+              <a:buFont typeface="Arial" panose="020B0604020202020204" pitchFamily="34" charset="0"/>
+              <a:buChar char="•"/>
+            </a:pPr>
+            <a:r>
+              <a:rPr lang="en-US" sz="1200" dirty="0">
+                <a:solidFill>
+                  <a:srgbClr val="002060"/>
+                </a:solidFill>
+                <a:latin typeface="Segoe UI" panose="020B0502040204020203" pitchFamily="34" charset="0"/>
+                <a:cs typeface="Segoe UI" panose="020B0502040204020203" pitchFamily="34" charset="0"/>
+              </a:rPr>
+              <a:t>Real-time architecture adaptation based on hardware constraints</a:t>
+            </a:r>
+          </a:p>
+        </p:txBody>
+      </p:sp>
+    </p:spTree>
+    <p:extLst>
+      <p:ext uri="{BB962C8B-B14F-4D97-AF65-F5344CB8AC3E}">
+        <p14:creationId xmlns:p14="http://schemas.microsoft.com/office/powerpoint/2010/main" val="3716294631"/>
+      </p:ext>
+    </p:extLst>
+  </p:cSld>
+  <p:clrMapOvr>
+    <a:masterClrMapping/>
+  </p:clrMapOvr>
+</p:sld>
+</file>
+
+<file path=ppt/slides/slide25.xml><?xml version="1.0" encoding="utf-8"?>
+<p:sld xmlns:a="http://schemas.openxmlformats.org/drawingml/2006/main" xmlns:r="http://schemas.openxmlformats.org/officeDocument/2006/relationships" xmlns:p="http://schemas.openxmlformats.org/presentationml/2006/main">
+  <p:cSld>
+    <p:spTree>
+      <p:nvGrpSpPr>
+        <p:cNvPr id="1" name=""/>
+        <p:cNvGrpSpPr/>
+        <p:nvPr/>
+      </p:nvGrpSpPr>
+      <p:grpSpPr>
+        <a:xfrm>
+          <a:off x="0" y="0"/>
+          <a:ext cx="0" cy="0"/>
+          <a:chOff x="0" y="0"/>
+          <a:chExt cx="0" cy="0"/>
+        </a:xfrm>
+      </p:grpSpPr>
+      <p:sp>
+        <p:nvSpPr>
           <p:cNvPr id="2" name="Title 1">
             <a:extLst>
               <a:ext uri="{FF2B5EF4-FFF2-40B4-BE49-F238E27FC236}">
@@ -16884,17 +18124,7 @@
                 <a:latin typeface="Arial" panose="020B0604020202020204" pitchFamily="34" charset="0"/>
                 <a:cs typeface="Arial" panose="020B0604020202020204" pitchFamily="34" charset="0"/>
               </a:rPr>
-              <a:t>Repository</a:t>
-            </a:r>
-            <a:r>
-              <a:rPr lang="en-US" sz="2300" b="1" dirty="0">
-                <a:solidFill>
-                  <a:srgbClr val="002060"/>
-                </a:solidFill>
-                <a:latin typeface="Arial" panose="020B0604020202020204" pitchFamily="34" charset="0"/>
-                <a:cs typeface="Arial" panose="020B0604020202020204" pitchFamily="34" charset="0"/>
-              </a:rPr>
-              <a:t>  </a:t>
+              <a:t>Demo : Highway Vehicle Tracking  </a:t>
             </a:r>
           </a:p>
         </p:txBody>
@@ -16922,7 +18152,245 @@
           <a:p>
             <a:fld id="{C98AED0B-3B00-448B-836B-316F7AA19B4B}" type="slidenum">
               <a:rPr lang="en-US" smtClean="0"/>
-              <a:t>23</a:t>
+              <a:t>25</a:t>
+            </a:fld>
+            <a:endParaRPr lang="en-US"/>
+          </a:p>
+        </p:txBody>
+      </p:sp>
+      <p:pic>
+        <p:nvPicPr>
+          <p:cNvPr id="7" name="Picture 6">
+            <a:extLst>
+              <a:ext uri="{FF2B5EF4-FFF2-40B4-BE49-F238E27FC236}">
+                <a16:creationId xmlns:a16="http://schemas.microsoft.com/office/drawing/2014/main" id="{8AA2BE19-D659-5C46-6603-ED8490AB2BA4}"/>
+              </a:ext>
+            </a:extLst>
+          </p:cNvPr>
+          <p:cNvPicPr>
+            <a:picLocks noChangeAspect="1"/>
+          </p:cNvPicPr>
+          <p:nvPr/>
+        </p:nvPicPr>
+        <p:blipFill>
+          <a:blip r:embed="rId2"/>
+          <a:stretch>
+            <a:fillRect/>
+          </a:stretch>
+        </p:blipFill>
+        <p:spPr>
+          <a:xfrm>
+            <a:off x="2856255" y="1238271"/>
+            <a:ext cx="6940907" cy="4540483"/>
+          </a:xfrm>
+          <a:prstGeom prst="rect">
+            <a:avLst/>
+          </a:prstGeom>
+        </p:spPr>
+      </p:pic>
+      <p:sp>
+        <p:nvSpPr>
+          <p:cNvPr id="6" name="Date Placeholder 2">
+            <a:extLst>
+              <a:ext uri="{FF2B5EF4-FFF2-40B4-BE49-F238E27FC236}">
+                <a16:creationId xmlns:a16="http://schemas.microsoft.com/office/drawing/2014/main" id="{C4648A69-C729-B783-6CA1-617599562CFA}"/>
+              </a:ext>
+            </a:extLst>
+          </p:cNvPr>
+          <p:cNvSpPr>
+            <a:spLocks noGrp="1"/>
+          </p:cNvSpPr>
+          <p:nvPr>
+            <p:ph type="dt" sz="half" idx="10"/>
+          </p:nvPr>
+        </p:nvSpPr>
+        <p:spPr>
+          <a:xfrm>
+            <a:off x="292608" y="6356349"/>
+            <a:ext cx="3085338" cy="365125"/>
+          </a:xfrm>
+        </p:spPr>
+        <p:txBody>
+          <a:bodyPr>
+            <a:normAutofit/>
+          </a:bodyPr>
+          <a:lstStyle/>
+          <a:p>
+            <a:pPr algn="r">
+              <a:lnSpc>
+                <a:spcPct val="90000"/>
+              </a:lnSpc>
+              <a:spcAft>
+                <a:spcPts val="504"/>
+              </a:spcAft>
+            </a:pPr>
+            <a:r>
+              <a:rPr lang="en-US" sz="900" dirty="0">
+                <a:solidFill>
+                  <a:schemeClr val="tx1">
+                    <a:alpha val="80000"/>
+                  </a:schemeClr>
+                </a:solidFill>
+              </a:rPr>
+              <a:t>Neural Architecture Search &amp; Knowledge Distillation</a:t>
+            </a:r>
+          </a:p>
+        </p:txBody>
+      </p:sp>
+      <p:sp>
+        <p:nvSpPr>
+          <p:cNvPr id="8" name="Footer Placeholder 3">
+            <a:extLst>
+              <a:ext uri="{FF2B5EF4-FFF2-40B4-BE49-F238E27FC236}">
+                <a16:creationId xmlns:a16="http://schemas.microsoft.com/office/drawing/2014/main" id="{258E6F15-D03A-4DB0-EB5A-5B186E22948C}"/>
+              </a:ext>
+            </a:extLst>
+          </p:cNvPr>
+          <p:cNvSpPr>
+            <a:spLocks noGrp="1"/>
+          </p:cNvSpPr>
+          <p:nvPr>
+            <p:ph type="ftr" sz="quarter" idx="11"/>
+          </p:nvPr>
+        </p:nvSpPr>
+        <p:spPr>
+          <a:xfrm>
+            <a:off x="4913744" y="6356350"/>
+            <a:ext cx="2325255" cy="365125"/>
+          </a:xfrm>
+        </p:spPr>
+        <p:txBody>
+          <a:bodyPr>
+            <a:normAutofit/>
+          </a:bodyPr>
+          <a:lstStyle/>
+          <a:p>
+            <a:pPr algn="r">
+              <a:lnSpc>
+                <a:spcPct val="90000"/>
+              </a:lnSpc>
+              <a:spcAft>
+                <a:spcPts val="504"/>
+              </a:spcAft>
+            </a:pPr>
+            <a:r>
+              <a:rPr lang="en-US" sz="900" dirty="0">
+                <a:solidFill>
+                  <a:schemeClr val="tx1">
+                    <a:alpha val="80000"/>
+                  </a:schemeClr>
+                </a:solidFill>
+              </a:rPr>
+              <a:t>International University Of Applied Sciences</a:t>
+            </a:r>
+          </a:p>
+        </p:txBody>
+      </p:sp>
+    </p:spTree>
+    <p:extLst>
+      <p:ext uri="{BB962C8B-B14F-4D97-AF65-F5344CB8AC3E}">
+        <p14:creationId xmlns:p14="http://schemas.microsoft.com/office/powerpoint/2010/main" val="3536711662"/>
+      </p:ext>
+    </p:extLst>
+  </p:cSld>
+  <p:clrMapOvr>
+    <a:masterClrMapping/>
+  </p:clrMapOvr>
+</p:sld>
+</file>
+
+<file path=ppt/slides/slide26.xml><?xml version="1.0" encoding="utf-8"?>
+<p:sld xmlns:a="http://schemas.openxmlformats.org/drawingml/2006/main" xmlns:r="http://schemas.openxmlformats.org/officeDocument/2006/relationships" xmlns:p="http://schemas.openxmlformats.org/presentationml/2006/main">
+  <p:cSld>
+    <p:spTree>
+      <p:nvGrpSpPr>
+        <p:cNvPr id="1" name=""/>
+        <p:cNvGrpSpPr/>
+        <p:nvPr/>
+      </p:nvGrpSpPr>
+      <p:grpSpPr>
+        <a:xfrm>
+          <a:off x="0" y="0"/>
+          <a:ext cx="0" cy="0"/>
+          <a:chOff x="0" y="0"/>
+          <a:chExt cx="0" cy="0"/>
+        </a:xfrm>
+      </p:grpSpPr>
+      <p:sp>
+        <p:nvSpPr>
+          <p:cNvPr id="2" name="Title 1">
+            <a:extLst>
+              <a:ext uri="{FF2B5EF4-FFF2-40B4-BE49-F238E27FC236}">
+                <a16:creationId xmlns:a16="http://schemas.microsoft.com/office/drawing/2014/main" id="{ED3F830A-0841-2B85-58E5-6CE63A3347BC}"/>
+              </a:ext>
+            </a:extLst>
+          </p:cNvPr>
+          <p:cNvSpPr>
+            <a:spLocks noGrp="1"/>
+          </p:cNvSpPr>
+          <p:nvPr>
+            <p:ph type="title"/>
+          </p:nvPr>
+        </p:nvSpPr>
+        <p:spPr>
+          <a:xfrm>
+            <a:off x="838200" y="365126"/>
+            <a:ext cx="10515600" cy="638922"/>
+          </a:xfrm>
+        </p:spPr>
+        <p:txBody>
+          <a:bodyPr>
+            <a:normAutofit/>
+          </a:bodyPr>
+          <a:lstStyle/>
+          <a:p>
+            <a:r>
+              <a:rPr lang="en-US" sz="2700" b="1" dirty="0">
+                <a:solidFill>
+                  <a:srgbClr val="002060"/>
+                </a:solidFill>
+                <a:latin typeface="Arial" panose="020B0604020202020204" pitchFamily="34" charset="0"/>
+                <a:cs typeface="Arial" panose="020B0604020202020204" pitchFamily="34" charset="0"/>
+              </a:rPr>
+              <a:t>Repository</a:t>
+            </a:r>
+            <a:r>
+              <a:rPr lang="en-US" sz="2300" b="1" dirty="0">
+                <a:solidFill>
+                  <a:srgbClr val="002060"/>
+                </a:solidFill>
+                <a:latin typeface="Arial" panose="020B0604020202020204" pitchFamily="34" charset="0"/>
+                <a:cs typeface="Arial" panose="020B0604020202020204" pitchFamily="34" charset="0"/>
+              </a:rPr>
+              <a:t>  </a:t>
+            </a:r>
+          </a:p>
+        </p:txBody>
+      </p:sp>
+      <p:sp>
+        <p:nvSpPr>
+          <p:cNvPr id="5" name="Slide Number Placeholder 4">
+            <a:extLst>
+              <a:ext uri="{FF2B5EF4-FFF2-40B4-BE49-F238E27FC236}">
+                <a16:creationId xmlns:a16="http://schemas.microsoft.com/office/drawing/2014/main" id="{80A790D5-177D-B6A2-0E90-81EF4FE37C9F}"/>
+              </a:ext>
+            </a:extLst>
+          </p:cNvPr>
+          <p:cNvSpPr>
+            <a:spLocks noGrp="1"/>
+          </p:cNvSpPr>
+          <p:nvPr>
+            <p:ph type="sldNum" sz="quarter" idx="12"/>
+          </p:nvPr>
+        </p:nvSpPr>
+        <p:spPr/>
+        <p:txBody>
+          <a:bodyPr/>
+          <a:lstStyle/>
+          <a:p>
+            <a:fld id="{C98AED0B-3B00-448B-836B-316F7AA19B4B}" type="slidenum">
+              <a:rPr lang="en-US" smtClean="0"/>
+              <a:t>26</a:t>
             </a:fld>
             <a:endParaRPr lang="en-US"/>
           </a:p>
@@ -17314,7 +18782,7 @@
 </p:sld>
 </file>
 
-<file path=ppt/slides/slide24.xml><?xml version="1.0" encoding="utf-8"?>
+<file path=ppt/slides/slide27.xml><?xml version="1.0" encoding="utf-8"?>
 <p:sld xmlns:a="http://schemas.openxmlformats.org/drawingml/2006/main" xmlns:r="http://schemas.openxmlformats.org/officeDocument/2006/relationships" xmlns:p="http://schemas.openxmlformats.org/presentationml/2006/main">
   <p:cSld>
     <p:spTree>

--- a/01-Project-management/presentation/KnowledgeDistillation.pptx
+++ b/01-Project-management/presentation/KnowledgeDistillation.pptx
@@ -13375,10 +13375,10 @@
       </p:sp>
       <p:pic>
         <p:nvPicPr>
-          <p:cNvPr id="7" name="Picture 6">
-            <a:extLst>
-              <a:ext uri="{FF2B5EF4-FFF2-40B4-BE49-F238E27FC236}">
-                <a16:creationId xmlns:a16="http://schemas.microsoft.com/office/drawing/2014/main" id="{828FD801-F04A-A25E-8D4E-D58F8C048E8E}"/>
+          <p:cNvPr id="6" name="Picture 5">
+            <a:extLst>
+              <a:ext uri="{FF2B5EF4-FFF2-40B4-BE49-F238E27FC236}">
+                <a16:creationId xmlns:a16="http://schemas.microsoft.com/office/drawing/2014/main" id="{92DB5AFC-4439-9324-A934-8663EBDCA32F}"/>
               </a:ext>
             </a:extLst>
           </p:cNvPr>
@@ -13395,14 +13395,97 @@
         </p:blipFill>
         <p:spPr>
           <a:xfrm>
-            <a:off x="1117473" y="3028710"/>
-            <a:ext cx="8948989" cy="2004200"/>
+            <a:off x="1096556" y="2749006"/>
+            <a:ext cx="9208732" cy="1634481"/>
           </a:xfrm>
           <a:prstGeom prst="rect">
             <a:avLst/>
           </a:prstGeom>
         </p:spPr>
       </p:pic>
+      <p:cxnSp>
+        <p:nvCxnSpPr>
+          <p:cNvPr id="9" name="Straight Connector 8">
+            <a:extLst>
+              <a:ext uri="{FF2B5EF4-FFF2-40B4-BE49-F238E27FC236}">
+                <a16:creationId xmlns:a16="http://schemas.microsoft.com/office/drawing/2014/main" id="{7629295B-4E57-4488-CFE3-E28C1B480BE4}"/>
+              </a:ext>
+            </a:extLst>
+          </p:cNvPr>
+          <p:cNvCxnSpPr>
+            <a:cxnSpLocks/>
+          </p:cNvCxnSpPr>
+          <p:nvPr/>
+        </p:nvCxnSpPr>
+        <p:spPr>
+          <a:xfrm>
+            <a:off x="948113" y="2742633"/>
+            <a:ext cx="0" cy="1640854"/>
+          </a:xfrm>
+          <a:prstGeom prst="line">
+            <a:avLst/>
+          </a:prstGeom>
+          <a:ln w="73025">
+            <a:solidFill>
+              <a:srgbClr val="002060"/>
+            </a:solidFill>
+          </a:ln>
+        </p:spPr>
+        <p:style>
+          <a:lnRef idx="1">
+            <a:schemeClr val="accent1"/>
+          </a:lnRef>
+          <a:fillRef idx="0">
+            <a:schemeClr val="accent1"/>
+          </a:fillRef>
+          <a:effectRef idx="0">
+            <a:schemeClr val="accent1"/>
+          </a:effectRef>
+          <a:fontRef idx="minor">
+            <a:schemeClr val="tx1"/>
+          </a:fontRef>
+        </p:style>
+      </p:cxnSp>
+      <p:sp>
+        <p:nvSpPr>
+          <p:cNvPr id="10" name="TextBox 9">
+            <a:extLst>
+              <a:ext uri="{FF2B5EF4-FFF2-40B4-BE49-F238E27FC236}">
+                <a16:creationId xmlns:a16="http://schemas.microsoft.com/office/drawing/2014/main" id="{736F0DAE-658F-B55F-709C-862691434925}"/>
+              </a:ext>
+            </a:extLst>
+          </p:cNvPr>
+          <p:cNvSpPr txBox="1"/>
+          <p:nvPr/>
+        </p:nvSpPr>
+        <p:spPr>
+          <a:xfrm>
+            <a:off x="4887178" y="4528007"/>
+            <a:ext cx="1382110" cy="276999"/>
+          </a:xfrm>
+          <a:prstGeom prst="rect">
+            <a:avLst/>
+          </a:prstGeom>
+          <a:noFill/>
+        </p:spPr>
+        <p:txBody>
+          <a:bodyPr wrap="none" rtlCol="0">
+            <a:spAutoFit/>
+          </a:bodyPr>
+          <a:lstStyle/>
+          <a:p>
+            <a:r>
+              <a:rPr lang="en-US" sz="1200" dirty="0">
+                <a:solidFill>
+                  <a:srgbClr val="002060"/>
+                </a:solidFill>
+                <a:latin typeface="Abadi" panose="020F0502020204030204" pitchFamily="34" charset="0"/>
+              </a:rPr>
+              <a:t>FILE : DATA.YAML</a:t>
+            </a:r>
+          </a:p>
+        </p:txBody>
+      </p:sp>
     </p:spTree>
     <p:extLst>
       <p:ext uri="{BB962C8B-B14F-4D97-AF65-F5344CB8AC3E}">

--- a/01-Project-management/presentation/KnowledgeDistillation.pptx
+++ b/01-Project-management/presentation/KnowledgeDistillation.pptx
@@ -224,7 +224,7 @@
           <a:p>
             <a:fld id="{B5F2714E-FC32-4294-838A-7AA012D11B30}" type="datetimeFigureOut">
               <a:rPr lang="en-US" smtClean="0"/>
-              <a:t>6/6/2025</a:t>
+              <a:t>6/7/2025</a:t>
             </a:fld>
             <a:endParaRPr lang="en-US"/>
           </a:p>
@@ -722,7 +722,7 @@
           <a:p>
             <a:fld id="{A043E7FB-59A9-40D8-AE84-673056C5A732}" type="datetimeFigureOut">
               <a:rPr lang="en-US" smtClean="0"/>
-              <a:t>6/6/2025</a:t>
+              <a:t>6/7/2025</a:t>
             </a:fld>
             <a:endParaRPr lang="en-US"/>
           </a:p>
@@ -920,7 +920,7 @@
           <a:p>
             <a:fld id="{A043E7FB-59A9-40D8-AE84-673056C5A732}" type="datetimeFigureOut">
               <a:rPr lang="en-US" smtClean="0"/>
-              <a:t>6/6/2025</a:t>
+              <a:t>6/7/2025</a:t>
             </a:fld>
             <a:endParaRPr lang="en-US"/>
           </a:p>
@@ -1128,7 +1128,7 @@
           <a:p>
             <a:fld id="{A043E7FB-59A9-40D8-AE84-673056C5A732}" type="datetimeFigureOut">
               <a:rPr lang="en-US" smtClean="0"/>
-              <a:t>6/6/2025</a:t>
+              <a:t>6/7/2025</a:t>
             </a:fld>
             <a:endParaRPr lang="en-US"/>
           </a:p>
@@ -3277,7 +3277,7 @@
           <a:p>
             <a:fld id="{A043E7FB-59A9-40D8-AE84-673056C5A732}" type="datetimeFigureOut">
               <a:rPr lang="en-US" smtClean="0"/>
-              <a:t>6/6/2025</a:t>
+              <a:t>6/7/2025</a:t>
             </a:fld>
             <a:endParaRPr lang="en-US"/>
           </a:p>
@@ -4634,7 +4634,7 @@
           <a:p>
             <a:fld id="{A043E7FB-59A9-40D8-AE84-673056C5A732}" type="datetimeFigureOut">
               <a:rPr lang="en-US" smtClean="0"/>
-              <a:t>6/6/2025</a:t>
+              <a:t>6/7/2025</a:t>
             </a:fld>
             <a:endParaRPr lang="en-US"/>
           </a:p>
@@ -4899,7 +4899,7 @@
           <a:p>
             <a:fld id="{A043E7FB-59A9-40D8-AE84-673056C5A732}" type="datetimeFigureOut">
               <a:rPr lang="en-US" smtClean="0"/>
-              <a:t>6/6/2025</a:t>
+              <a:t>6/7/2025</a:t>
             </a:fld>
             <a:endParaRPr lang="en-US"/>
           </a:p>
@@ -5311,7 +5311,7 @@
           <a:p>
             <a:fld id="{A043E7FB-59A9-40D8-AE84-673056C5A732}" type="datetimeFigureOut">
               <a:rPr lang="en-US" smtClean="0"/>
-              <a:t>6/6/2025</a:t>
+              <a:t>6/7/2025</a:t>
             </a:fld>
             <a:endParaRPr lang="en-US"/>
           </a:p>
@@ -5452,7 +5452,7 @@
           <a:p>
             <a:fld id="{A043E7FB-59A9-40D8-AE84-673056C5A732}" type="datetimeFigureOut">
               <a:rPr lang="en-US" smtClean="0"/>
-              <a:t>6/6/2025</a:t>
+              <a:t>6/7/2025</a:t>
             </a:fld>
             <a:endParaRPr lang="en-US"/>
           </a:p>
@@ -5565,7 +5565,7 @@
           <a:p>
             <a:fld id="{A043E7FB-59A9-40D8-AE84-673056C5A732}" type="datetimeFigureOut">
               <a:rPr lang="en-US" smtClean="0"/>
-              <a:t>6/6/2025</a:t>
+              <a:t>6/7/2025</a:t>
             </a:fld>
             <a:endParaRPr lang="en-US"/>
           </a:p>
@@ -5876,7 +5876,7 @@
           <a:p>
             <a:fld id="{A043E7FB-59A9-40D8-AE84-673056C5A732}" type="datetimeFigureOut">
               <a:rPr lang="en-US" smtClean="0"/>
-              <a:t>6/6/2025</a:t>
+              <a:t>6/7/2025</a:t>
             </a:fld>
             <a:endParaRPr lang="en-US"/>
           </a:p>
@@ -6164,7 +6164,7 @@
           <a:p>
             <a:fld id="{A043E7FB-59A9-40D8-AE84-673056C5A732}" type="datetimeFigureOut">
               <a:rPr lang="en-US" smtClean="0"/>
-              <a:t>6/6/2025</a:t>
+              <a:t>6/7/2025</a:t>
             </a:fld>
             <a:endParaRPr lang="en-US"/>
           </a:p>
@@ -6405,7 +6405,7 @@
           <a:p>
             <a:fld id="{A043E7FB-59A9-40D8-AE84-673056C5A732}" type="datetimeFigureOut">
               <a:rPr lang="en-US" smtClean="0"/>
-              <a:t>6/6/2025</a:t>
+              <a:t>6/7/2025</a:t>
             </a:fld>
             <a:endParaRPr lang="en-US"/>
           </a:p>

--- a/01-Project-management/presentation/KnowledgeDistillation.pptx
+++ b/01-Project-management/presentation/KnowledgeDistillation.pptx
@@ -8223,7 +8223,27 @@
                 <a:latin typeface="Segoe UI" panose="020B0502040204020203" pitchFamily="34" charset="0"/>
                 <a:cs typeface="Segoe UI" panose="020B0502040204020203" pitchFamily="34" charset="0"/>
               </a:rPr>
-              <a:t>Submission Date 		 </a:t>
+              <a:t>Submission Date 		 13</a:t>
+            </a:r>
+            <a:r>
+              <a:rPr lang="en-US" sz="1200" b="1" baseline="30000" dirty="0">
+                <a:solidFill>
+                  <a:srgbClr val="002060"/>
+                </a:solidFill>
+                <a:latin typeface="Segoe UI" panose="020B0502040204020203" pitchFamily="34" charset="0"/>
+                <a:cs typeface="Segoe UI" panose="020B0502040204020203" pitchFamily="34" charset="0"/>
+              </a:rPr>
+              <a:t>th</a:t>
+            </a:r>
+            <a:r>
+              <a:rPr lang="en-US" sz="1200" b="1" dirty="0">
+                <a:solidFill>
+                  <a:srgbClr val="002060"/>
+                </a:solidFill>
+                <a:latin typeface="Segoe UI" panose="020B0502040204020203" pitchFamily="34" charset="0"/>
+                <a:cs typeface="Segoe UI" panose="020B0502040204020203" pitchFamily="34" charset="0"/>
+              </a:rPr>
+              <a:t> </a:t>
             </a:r>
             <a:r>
               <a:rPr lang="en-US" sz="1200" b="1" kern="100" dirty="0">
@@ -24862,7 +24882,7 @@
         <p:spPr>
           <a:xfrm>
             <a:off x="1085850" y="3957656"/>
-            <a:ext cx="8519968" cy="830997"/>
+            <a:ext cx="8519968" cy="646331"/>
           </a:xfrm>
           <a:prstGeom prst="rect">
             <a:avLst/>
@@ -24920,22 +24940,6 @@
                 <a:cs typeface="Segoe UI" panose="020B0502040204020203" pitchFamily="34" charset="0"/>
               </a:rPr>
               <a:t>One-Size-Fits-All: Same model architecture regardless of deployment constraints</a:t>
-            </a:r>
-          </a:p>
-          <a:p>
-            <a:pPr marL="171450" indent="-171450">
-              <a:buFont typeface="Arial" panose="020B0604020202020204" pitchFamily="34" charset="0"/>
-              <a:buChar char="•"/>
-            </a:pPr>
-            <a:r>
-              <a:rPr lang="en-US" sz="1200" dirty="0">
-                <a:solidFill>
-                  <a:srgbClr val="002060"/>
-                </a:solidFill>
-                <a:latin typeface="Segoe UI" panose="020B0502040204020203" pitchFamily="34" charset="0"/>
-                <a:cs typeface="Segoe UI" panose="020B0502040204020203" pitchFamily="34" charset="0"/>
-              </a:rPr>
-              <a:t>Limited Knowledge Transfer: No mechanism to transfer learned representations from large to small models</a:t>
             </a:r>
           </a:p>
         </p:txBody>
